--- a/demo_session/deck_dyson_3k_edit.pptx
+++ b/demo_session/deck_dyson_3k_edit.pptx
@@ -5124,7 +5124,7 @@
                 </a:solidFill>
                 <a:latin typeface="Arial"/>
               </a:rPr>
-              <a:t>SRF 2.025 px is the two-pixel slit's 2.000 plus 0.45 µm of blur, and in the paper's units it is 36.5 µm against 64.8; the open spectrometer work is tolerances, the aspheric-lens form, and throughput by band</a:t>
+              <a:t>SRF 2.025 px is the two-pixel slit with the pixel and diffraction (2.010–2.023) plus at most 0.03 µm of blur, and in the paper's units it is 36.5 µm against 64.8; the open spectrometer work is tolerances, the aspheric-lens form, and throughput by band</a:t>
             </a:r>
           </a:p>
         </p:txBody>
@@ -5225,7 +5225,7 @@
                 </a:solidFill>
                 <a:latin typeface="Arial"/>
               </a:rPr>
-              <a:t>  The scorer's SRF is slit ⊗ LSF ⊗ pixel ⊗ Airy; with a 2-pixel slit a perfect spectrometer gives exactly 2.000 px.  The Dyson of record gives 2.024 alone and 2.025 behind the telescope: 0.45 µm of blur.  Joe's "1.5–2.0" is met at its floor; 1.5 would need a narrower slit, not a better spectrometer.  In the paper's co-added pixels our SRF is 1.01 against its 1.33 design and 1.8 requirement; our CRF 21 µm against its 50.</a:t>
+              <a:t>  The scorer's SRF is slit ⊗ LSF ⊗ pixel ⊗ Airy; with a 2-pixel slit a perfect spectrometer gives 2.010 px at 380 nm and 2.023 at 2500 nm — the slit, the pixel and diffraction.  The Dyson of record sits 0.0001–0.0015 px above that floor at every wavelength, alone and behind the telescope: at most 0.03 µm of blur.  Joe's "1.5–2.0" is met at its floor; 1.5 would need a narrower slit, not a better spectrometer.  In the paper's co-added pixels our SRF is 1.01 against its 1.33 design and 1.8 requirement; our CRF 21 µm against its 50.</a:t>
             </a:r>
           </a:p>
           <a:p>
@@ -6728,7 +6728,7 @@
                 </a:solidFill>
                 <a:latin typeface="Arial"/>
               </a:rPr>
-              <a:t>  With a 2-pixel slit the SRF floor is 2.0 px (36 µm), where this design sits; the paper's bound is 64.8 µm.  Is the 1.5–2.0 px range read against a 2-pixel slit, or does the project want a narrower slit at the throughput's expense?</a:t>
+              <a:t>  With a 2-pixel slit the SRF floor is 2.01–2.02 px (36 µm) with the pixel and diffraction, where this design sits to 0.03 µm; the paper's bound is 64.8 µm.  Is the 1.5–2.0 px range read against a 2-pixel slit, or does the project want a narrower slit at the throughput's expense?</a:t>
             </a:r>
           </a:p>
           <a:p>
@@ -7529,7 +7529,7 @@
                 </a:solidFill>
                 <a:latin typeface="Arial"/>
               </a:rPr>
-              <a:t> ./run_mmacos_tests.sh tTmaLongslit tSpectrometerRx tTelescopeRx tStopReload and the grating, glass, propagation and root-pick classes, all in the fast suite (559 pass, 0 fail, 2026-10-07).  tTmaLongslit re-scores the deck of record by name.</a:t>
+              <a:t> ./run_mmacos_tests.sh tTmaLongslit tSpectrometerRx tTelescopeRx tStopReload and the grating, glass, propagation and root-pick classes, all in the fast suite (566 pass, 0 fail, 2026-10-07).  tTmaLongslit re-scores the deck of record by name.</a:t>
             </a:r>
           </a:p>
         </p:txBody>
@@ -11276,7 +11276,7 @@
         </p:nvGraphicFramePr>
         <p:xfrm>
           <a:off x="411480" y="1298448"/>
-          <a:ext cx="5806438" cy="3646170"/>
+          <a:ext cx="5806438" cy="4211955"/>
         </p:xfrm>
         <a:graphic>
           <a:graphicData uri="http://schemas.openxmlformats.org/drawingml/2006/table">
@@ -11285,9 +11285,9 @@
                 <a:tableStyleId>{5C22544A-7EE6-4342-B048-85BDC9FD1C3A}</a:tableStyleId>
               </a:tblPr>
               <a:tblGrid>
-                <a:gridCol w="1705065"/>
-                <a:gridCol w="1705065"/>
-                <a:gridCol w="2396308"/>
+                <a:gridCol w="1512945"/>
+                <a:gridCol w="1512945"/>
+                <a:gridCol w="2780548"/>
               </a:tblGrid>
               <a:tr h="280035">
                 <a:tc>
@@ -11425,7 +11425,7 @@
                   </a:tcPr>
                 </a:tc>
               </a:tr>
-              <a:tr h="280035">
+              <a:tr h="468630">
                 <a:tc>
                   <a:txBody>
                     <a:bodyPr wrap="square"/>
@@ -11561,7 +11561,7 @@
                   </a:tcPr>
                 </a:tc>
               </a:tr>
-              <a:tr h="280035">
+              <a:tr h="468630">
                 <a:tc>
                   <a:txBody>
                     <a:bodyPr wrap="square"/>
@@ -11754,7 +11754,7 @@
                           </a:solidFill>
                           <a:latin typeface="Arial"/>
                         </a:rPr>
-                        <a:t>5 % of a co-added px (1.8 µm); 10 % of a px (1.8 µm)</a:t>
+                        <a:t>1.8 µm each (5 % of a co-added px; 10 % of a px) = 0.10 of our pixel</a:t>
                       </a:r>
                     </a:p>
                   </a:txBody>
@@ -11765,7 +11765,7 @@
                   </a:tcPr>
                 </a:tc>
               </a:tr>
-              <a:tr h="280035">
+              <a:tr h="468630">
                 <a:tc>
                   <a:txBody>
                     <a:bodyPr wrap="square"/>
@@ -12145,7 +12145,7 @@
                 </a:solidFill>
                 <a:latin typeface="Arial"/>
               </a:rPr>
-              <a:t> slit ⊗ line-spread function ⊗ pixel ⊗ Airy, FWHM (Mouroulis &amp; Green 2018).  With a 2-pixel slit a perfect spectrometer gives SRF = 2.000 px exactly: the slit's floor.</a:t>
+              <a:t> slit ⊗ line-spread function ⊗ pixel ⊗ Airy, FWHM (Mouroulis &amp; Green 2018).  With a 2-pixel slit a perfect spectrometer gives SRF = 2.010–2.023 px over the band (slit, pixel and diffraction): the floor.</a:t>
             </a:r>
           </a:p>
           <a:p>
@@ -12260,7 +12260,7 @@
         </p:nvSpPr>
         <p:spPr>
           <a:xfrm>
-            <a:off x="6400800" y="4809744"/>
+            <a:off x="6400800" y="5007864"/>
             <a:ext cx="5394960" cy="274320"/>
           </a:xfrm>
           <a:prstGeom prst="rect">
@@ -14624,7 +14624,7 @@
         </p:nvGraphicFramePr>
         <p:xfrm>
           <a:off x="411480" y="1298448"/>
-          <a:ext cx="11368730" cy="4680585"/>
+          <a:ext cx="11368733" cy="4303395"/>
         </p:xfrm>
         <a:graphic>
           <a:graphicData uri="http://schemas.openxmlformats.org/drawingml/2006/table">
@@ -14633,12 +14633,12 @@
                 <a:tableStyleId>{5C22544A-7EE6-4342-B048-85BDC9FD1C3A}</a:tableStyleId>
               </a:tblPr>
               <a:tblGrid>
-                <a:gridCol w="1632743"/>
-                <a:gridCol w="665191"/>
-                <a:gridCol w="1511799"/>
-                <a:gridCol w="2297935"/>
-                <a:gridCol w="1753687"/>
-                <a:gridCol w="3507375"/>
+                <a:gridCol w="2107692"/>
+                <a:gridCol w="945388"/>
+                <a:gridCol w="1962404"/>
+                <a:gridCol w="1815214"/>
+                <a:gridCol w="1767445"/>
+                <a:gridCol w="2770590"/>
               </a:tblGrid>
               <a:tr h="468630">
                 <a:tc>
@@ -14858,7 +14858,7 @@
                           </a:solidFill>
                           <a:latin typeface="Arial"/>
                         </a:rPr>
-                        <a:t>&lt; 1.8 µm</a:t>
+                        <a:t>&lt; 1.8 µm (0.10 px)</a:t>
                       </a:r>
                     </a:p>
                   </a:txBody>
@@ -14992,7 +14992,7 @@
                           </a:solidFill>
                           <a:latin typeface="Arial"/>
                         </a:rPr>
-                        <a:t>&lt; 1.8 µm</a:t>
+                        <a:t>&lt; 1.8 µm (0.10 px)</a:t>
                       </a:r>
                     </a:p>
                   </a:txBody>
@@ -15304,7 +15304,7 @@
                           </a:solidFill>
                           <a:latin typeface="Arial"/>
                         </a:rPr>
-                        <a:t>1.02 px across the slit (ARF)</a:t>
+                        <a:t>1.02 px across the slit (ARF 18.4 µm)</a:t>
                       </a:r>
                     </a:p>
                   </a:txBody>
@@ -15327,6 +15327,542 @@
                           <a:latin typeface="Arial"/>
                         </a:rPr>
                         <a:t>2.025 px (36.5 µm)</a:t>
+                      </a:r>
+                    </a:p>
+                  </a:txBody>
+                  <a:tcPr marL="54864" marR="54864" marT="18288" marB="18288">
+                    <a:solidFill>
+                      <a:srgbClr val="ECF1F6"/>
+                    </a:solidFill>
+                  </a:tcPr>
+                </a:tc>
+              </a:tr>
+              <a:tr h="280035">
+                <a:tc>
+                  <a:txBody>
+                    <a:bodyPr wrap="square"/>
+                    <a:lstStyle/>
+                    <a:p>
+                      <a:r>
+                        <a:rPr sz="1100" b="0">
+                          <a:solidFill>
+                            <a:srgbClr val="282828"/>
+                          </a:solidFill>
+                          <a:latin typeface="Arial"/>
+                        </a:rPr>
+                        <a:t>energy in one 18 µm pixel</a:t>
+                      </a:r>
+                    </a:p>
+                  </a:txBody>
+                  <a:tcPr marL="54864" marR="54864" marT="18288" marB="18288">
+                    <a:solidFill>
+                      <a:srgbClr val="FFFFFF"/>
+                    </a:solidFill>
+                  </a:tcPr>
+                </a:tc>
+                <a:tc>
+                  <a:txBody>
+                    <a:bodyPr wrap="square"/>
+                    <a:lstStyle/>
+                    <a:p>
+                      <a:r>
+                        <a:rPr sz="1100" b="0">
+                          <a:solidFill>
+                            <a:srgbClr val="282828"/>
+                          </a:solidFill>
+                          <a:latin typeface="Arial"/>
+                        </a:rPr>
+                        <a:t>&gt; 0.75</a:t>
+                      </a:r>
+                    </a:p>
+                  </a:txBody>
+                  <a:tcPr marL="54864" marR="54864" marT="18288" marB="18288">
+                    <a:solidFill>
+                      <a:srgbClr val="FFFFFF"/>
+                    </a:solidFill>
+                  </a:tcPr>
+                </a:tc>
+                <a:tc>
+                  <a:txBody>
+                    <a:bodyPr wrap="square"/>
+                    <a:lstStyle/>
+                    <a:p>
+                      <a:r>
+                        <a:rPr sz="1100" b="0">
+                          <a:solidFill>
+                            <a:srgbClr val="282828"/>
+                          </a:solidFill>
+                          <a:latin typeface="Arial"/>
+                        </a:rPr>
+                        <a:t>–</a:t>
+                      </a:r>
+                    </a:p>
+                  </a:txBody>
+                  <a:tcPr marL="54864" marR="54864" marT="18288" marB="18288">
+                    <a:solidFill>
+                      <a:srgbClr val="FFFFFF"/>
+                    </a:solidFill>
+                  </a:tcPr>
+                </a:tc>
+                <a:tc>
+                  <a:txBody>
+                    <a:bodyPr wrap="square"/>
+                    <a:lstStyle/>
+                    <a:p>
+                      <a:r>
+                        <a:rPr sz="1100" b="0">
+                          <a:solidFill>
+                            <a:srgbClr val="282828"/>
+                          </a:solidFill>
+                          <a:latin typeface="Arial"/>
+                        </a:rPr>
+                        <a:t>0.82</a:t>
+                      </a:r>
+                    </a:p>
+                  </a:txBody>
+                  <a:tcPr marL="54864" marR="54864" marT="18288" marB="18288">
+                    <a:solidFill>
+                      <a:srgbClr val="FFFFFF"/>
+                    </a:solidFill>
+                  </a:tcPr>
+                </a:tc>
+                <a:tc>
+                  <a:txBody>
+                    <a:bodyPr wrap="square"/>
+                    <a:lstStyle/>
+                    <a:p>
+                      <a:r>
+                        <a:rPr sz="1100" b="0">
+                          <a:solidFill>
+                            <a:srgbClr val="282828"/>
+                          </a:solidFill>
+                          <a:latin typeface="Arial"/>
+                        </a:rPr>
+                        <a:t>1.00</a:t>
+                      </a:r>
+                    </a:p>
+                  </a:txBody>
+                  <a:tcPr marL="54864" marR="54864" marT="18288" marB="18288">
+                    <a:solidFill>
+                      <a:srgbClr val="FFFFFF"/>
+                    </a:solidFill>
+                  </a:tcPr>
+                </a:tc>
+                <a:tc>
+                  <a:txBody>
+                    <a:bodyPr wrap="square"/>
+                    <a:lstStyle/>
+                    <a:p>
+                      <a:r>
+                        <a:rPr sz="1100" b="0">
+                          <a:solidFill>
+                            <a:srgbClr val="282828"/>
+                          </a:solidFill>
+                          <a:latin typeface="Arial"/>
+                        </a:rPr>
+                        <a:t>0.85 (0.81 at roll 180°)</a:t>
+                      </a:r>
+                    </a:p>
+                  </a:txBody>
+                  <a:tcPr marL="54864" marR="54864" marT="18288" marB="18288">
+                    <a:solidFill>
+                      <a:srgbClr val="FFFFFF"/>
+                    </a:solidFill>
+                  </a:tcPr>
+                </a:tc>
+              </a:tr>
+              <a:tr h="280035">
+                <a:tc>
+                  <a:txBody>
+                    <a:bodyPr wrap="square"/>
+                    <a:lstStyle/>
+                    <a:p>
+                      <a:r>
+                        <a:rPr sz="1100" b="0">
+                          <a:solidFill>
+                            <a:srgbClr val="282828"/>
+                          </a:solidFill>
+                          <a:latin typeface="Arial"/>
+                        </a:rPr>
+                        <a:t>image blur (rms, as placed)</a:t>
+                      </a:r>
+                    </a:p>
+                  </a:txBody>
+                  <a:tcPr marL="54864" marR="54864" marT="18288" marB="18288">
+                    <a:solidFill>
+                      <a:srgbClr val="ECF1F6"/>
+                    </a:solidFill>
+                  </a:tcPr>
+                </a:tc>
+                <a:tc>
+                  <a:txBody>
+                    <a:bodyPr wrap="square"/>
+                    <a:lstStyle/>
+                    <a:p>
+                      <a:r>
+                        <a:rPr sz="1100" b="0">
+                          <a:solidFill>
+                            <a:srgbClr val="282828"/>
+                          </a:solidFill>
+                          <a:latin typeface="Arial"/>
+                        </a:rPr>
+                        <a:t>–</a:t>
+                      </a:r>
+                    </a:p>
+                  </a:txBody>
+                  <a:tcPr marL="54864" marR="54864" marT="18288" marB="18288">
+                    <a:solidFill>
+                      <a:srgbClr val="ECF1F6"/>
+                    </a:solidFill>
+                  </a:tcPr>
+                </a:tc>
+                <a:tc>
+                  <a:txBody>
+                    <a:bodyPr wrap="square"/>
+                    <a:lstStyle/>
+                    <a:p>
+                      <a:r>
+                        <a:rPr sz="1100" b="0">
+                          <a:solidFill>
+                            <a:srgbClr val="282828"/>
+                          </a:solidFill>
+                          <a:latin typeface="Arial"/>
+                        </a:rPr>
+                        <a:t>2–3 µm (paper)</a:t>
+                      </a:r>
+                    </a:p>
+                  </a:txBody>
+                  <a:tcPr marL="54864" marR="54864" marT="18288" marB="18288">
+                    <a:solidFill>
+                      <a:srgbClr val="ECF1F6"/>
+                    </a:solidFill>
+                  </a:tcPr>
+                </a:tc>
+                <a:tc>
+                  <a:txBody>
+                    <a:bodyPr wrap="square"/>
+                    <a:lstStyle/>
+                    <a:p>
+                      <a:r>
+                        <a:rPr sz="1100" b="0">
+                          <a:solidFill>
+                            <a:srgbClr val="282828"/>
+                          </a:solidFill>
+                          <a:latin typeface="Arial"/>
+                        </a:rPr>
+                        <a:t>–</a:t>
+                      </a:r>
+                    </a:p>
+                  </a:txBody>
+                  <a:tcPr marL="54864" marR="54864" marT="18288" marB="18288">
+                    <a:solidFill>
+                      <a:srgbClr val="ECF1F6"/>
+                    </a:solidFill>
+                  </a:tcPr>
+                </a:tc>
+                <a:tc>
+                  <a:txBody>
+                    <a:bodyPr wrap="square"/>
+                    <a:lstStyle/>
+                    <a:p>
+                      <a:r>
+                        <a:rPr sz="1100" b="0">
+                          <a:solidFill>
+                            <a:srgbClr val="282828"/>
+                          </a:solidFill>
+                          <a:latin typeface="Arial"/>
+                        </a:rPr>
+                        <a:t>1.8–2.5 µm</a:t>
+                      </a:r>
+                    </a:p>
+                  </a:txBody>
+                  <a:tcPr marL="54864" marR="54864" marT="18288" marB="18288">
+                    <a:solidFill>
+                      <a:srgbClr val="ECF1F6"/>
+                    </a:solidFill>
+                  </a:tcPr>
+                </a:tc>
+                <a:tc>
+                  <a:txBody>
+                    <a:bodyPr wrap="square"/>
+                    <a:lstStyle/>
+                    <a:p>
+                      <a:r>
+                        <a:rPr sz="1100" b="0">
+                          <a:solidFill>
+                            <a:srgbClr val="282828"/>
+                          </a:solidFill>
+                          <a:latin typeface="Arial"/>
+                        </a:rPr>
+                        <a:t>–</a:t>
+                      </a:r>
+                    </a:p>
+                  </a:txBody>
+                  <a:tcPr marL="54864" marR="54864" marT="18288" marB="18288">
+                    <a:solidFill>
+                      <a:srgbClr val="ECF1F6"/>
+                    </a:solidFill>
+                  </a:tcPr>
+                </a:tc>
+              </a:tr>
+              <a:tr h="280035">
+                <a:tc>
+                  <a:txBody>
+                    <a:bodyPr wrap="square"/>
+                    <a:lstStyle/>
+                    <a:p>
+                      <a:r>
+                        <a:rPr sz="1100" b="0">
+                          <a:solidFill>
+                            <a:srgbClr val="282828"/>
+                          </a:solidFill>
+                          <a:latin typeface="Arial"/>
+                        </a:rPr>
+                        <a:t>plate scale</a:t>
+                      </a:r>
+                    </a:p>
+                  </a:txBody>
+                  <a:tcPr marL="54864" marR="54864" marT="18288" marB="18288">
+                    <a:solidFill>
+                      <a:srgbClr val="FFFFFF"/>
+                    </a:solidFill>
+                  </a:tcPr>
+                </a:tc>
+                <a:tc>
+                  <a:txBody>
+                    <a:bodyPr wrap="square"/>
+                    <a:lstStyle/>
+                    <a:p>
+                      <a:r>
+                        <a:rPr sz="1100" b="0">
+                          <a:solidFill>
+                            <a:srgbClr val="282828"/>
+                          </a:solidFill>
+                          <a:latin typeface="Arial"/>
+                        </a:rPr>
+                        <a:t>330 mm</a:t>
+                      </a:r>
+                    </a:p>
+                  </a:txBody>
+                  <a:tcPr marL="54864" marR="54864" marT="18288" marB="18288">
+                    <a:solidFill>
+                      <a:srgbClr val="FFFFFF"/>
+                    </a:solidFill>
+                  </a:tcPr>
+                </a:tc>
+                <a:tc>
+                  <a:txBody>
+                    <a:bodyPr wrap="square"/>
+                    <a:lstStyle/>
+                    <a:p>
+                      <a:r>
+                        <a:rPr sz="1100" b="0">
+                          <a:solidFill>
+                            <a:srgbClr val="282828"/>
+                          </a:solidFill>
+                          <a:latin typeface="Arial"/>
+                        </a:rPr>
+                        <a:t>345</a:t>
+                      </a:r>
+                    </a:p>
+                  </a:txBody>
+                  <a:tcPr marL="54864" marR="54864" marT="18288" marB="18288">
+                    <a:solidFill>
+                      <a:srgbClr val="FFFFFF"/>
+                    </a:solidFill>
+                  </a:tcPr>
+                </a:tc>
+                <a:tc>
+                  <a:txBody>
+                    <a:bodyPr wrap="square"/>
+                    <a:lstStyle/>
+                    <a:p>
+                      <a:r>
+                        <a:rPr sz="1100" b="0">
+                          <a:solidFill>
+                            <a:srgbClr val="282828"/>
+                          </a:solidFill>
+                          <a:latin typeface="Arial"/>
+                        </a:rPr>
+                        <a:t>–</a:t>
+                      </a:r>
+                    </a:p>
+                  </a:txBody>
+                  <a:tcPr marL="54864" marR="54864" marT="18288" marB="18288">
+                    <a:solidFill>
+                      <a:srgbClr val="FFFFFF"/>
+                    </a:solidFill>
+                  </a:tcPr>
+                </a:tc>
+                <a:tc>
+                  <a:txBody>
+                    <a:bodyPr wrap="square"/>
+                    <a:lstStyle/>
+                    <a:p>
+                      <a:r>
+                        <a:rPr sz="1100" b="0">
+                          <a:solidFill>
+                            <a:srgbClr val="282828"/>
+                          </a:solidFill>
+                          <a:latin typeface="Arial"/>
+                        </a:rPr>
+                        <a:t>329.9 / 330.1 mm</a:t>
+                      </a:r>
+                    </a:p>
+                  </a:txBody>
+                  <a:tcPr marL="54864" marR="54864" marT="18288" marB="18288">
+                    <a:solidFill>
+                      <a:srgbClr val="FFFFFF"/>
+                    </a:solidFill>
+                  </a:tcPr>
+                </a:tc>
+                <a:tc>
+                  <a:txBody>
+                    <a:bodyPr wrap="square"/>
+                    <a:lstStyle/>
+                    <a:p>
+                      <a:r>
+                        <a:rPr sz="1100" b="0">
+                          <a:solidFill>
+                            <a:srgbClr val="282828"/>
+                          </a:solidFill>
+                          <a:latin typeface="Arial"/>
+                        </a:rPr>
+                        <a:t>330.1 mm</a:t>
+                      </a:r>
+                    </a:p>
+                  </a:txBody>
+                  <a:tcPr marL="54864" marR="54864" marT="18288" marB="18288">
+                    <a:solidFill>
+                      <a:srgbClr val="FFFFFF"/>
+                    </a:solidFill>
+                  </a:tcPr>
+                </a:tc>
+              </a:tr>
+              <a:tr h="280035">
+                <a:tc>
+                  <a:txBody>
+                    <a:bodyPr wrap="square"/>
+                    <a:lstStyle/>
+                    <a:p>
+                      <a:r>
+                        <a:rPr sz="1100" b="0">
+                          <a:solidFill>
+                            <a:srgbClr val="282828"/>
+                          </a:solidFill>
+                          <a:latin typeface="Arial"/>
+                        </a:rPr>
+                        <a:t>chief rays at the slit</a:t>
+                      </a:r>
+                    </a:p>
+                  </a:txBody>
+                  <a:tcPr marL="54864" marR="54864" marT="18288" marB="18288">
+                    <a:solidFill>
+                      <a:srgbClr val="ECF1F6"/>
+                    </a:solidFill>
+                  </a:tcPr>
+                </a:tc>
+                <a:tc>
+                  <a:txBody>
+                    <a:bodyPr wrap="square"/>
+                    <a:lstStyle/>
+                    <a:p>
+                      <a:r>
+                        <a:rPr sz="1100" b="0">
+                          <a:solidFill>
+                            <a:srgbClr val="282828"/>
+                          </a:solidFill>
+                          <a:latin typeface="Arial"/>
+                        </a:rPr>
+                        <a:t>telecentric</a:t>
+                      </a:r>
+                    </a:p>
+                  </a:txBody>
+                  <a:tcPr marL="54864" marR="54864" marT="18288" marB="18288">
+                    <a:solidFill>
+                      <a:srgbClr val="ECF1F6"/>
+                    </a:solidFill>
+                  </a:tcPr>
+                </a:tc>
+                <a:tc>
+                  <a:txBody>
+                    <a:bodyPr wrap="square"/>
+                    <a:lstStyle/>
+                    <a:p>
+                      <a:r>
+                        <a:rPr sz="1100" b="0">
+                          <a:solidFill>
+                            <a:srgbClr val="282828"/>
+                          </a:solidFill>
+                          <a:latin typeface="Arial"/>
+                        </a:rPr>
+                        <a:t>telecentric</a:t>
+                      </a:r>
+                    </a:p>
+                  </a:txBody>
+                  <a:tcPr marL="54864" marR="54864" marT="18288" marB="18288">
+                    <a:solidFill>
+                      <a:srgbClr val="ECF1F6"/>
+                    </a:solidFill>
+                  </a:tcPr>
+                </a:tc>
+                <a:tc>
+                  <a:txBody>
+                    <a:bodyPr wrap="square"/>
+                    <a:lstStyle/>
+                    <a:p>
+                      <a:r>
+                        <a:rPr sz="1100" b="0">
+                          <a:solidFill>
+                            <a:srgbClr val="282828"/>
+                          </a:solidFill>
+                          <a:latin typeface="Arial"/>
+                        </a:rPr>
+                        <a:t>–</a:t>
+                      </a:r>
+                    </a:p>
+                  </a:txBody>
+                  <a:tcPr marL="54864" marR="54864" marT="18288" marB="18288">
+                    <a:solidFill>
+                      <a:srgbClr val="ECF1F6"/>
+                    </a:solidFill>
+                  </a:tcPr>
+                </a:tc>
+                <a:tc>
+                  <a:txBody>
+                    <a:bodyPr wrap="square"/>
+                    <a:lstStyle/>
+                    <a:p>
+                      <a:r>
+                        <a:rPr sz="1100" b="0">
+                          <a:solidFill>
+                            <a:srgbClr val="282828"/>
+                          </a:solidFill>
+                          <a:latin typeface="Arial"/>
+                        </a:rPr>
+                        <a:t>within 0.033°</a:t>
+                      </a:r>
+                    </a:p>
+                  </a:txBody>
+                  <a:tcPr marL="54864" marR="54864" marT="18288" marB="18288">
+                    <a:solidFill>
+                      <a:srgbClr val="ECF1F6"/>
+                    </a:solidFill>
+                  </a:tcPr>
+                </a:tc>
+                <a:tc>
+                  <a:txBody>
+                    <a:bodyPr wrap="square"/>
+                    <a:lstStyle/>
+                    <a:p>
+                      <a:r>
+                        <a:rPr sz="1100" b="0">
+                          <a:solidFill>
+                            <a:srgbClr val="282828"/>
+                          </a:solidFill>
+                          <a:latin typeface="Arial"/>
+                        </a:rPr>
+                        <a:t>–</a:t>
                       </a:r>
                     </a:p>
                   </a:txBody>
@@ -15350,7 +15886,7 @@
                           </a:solidFill>
                           <a:latin typeface="Arial"/>
                         </a:rPr>
-                        <a:t>energy in one 18 µm pixel</a:t>
+                        <a:t>marginal rays at the slit</a:t>
                       </a:r>
                     </a:p>
                   </a:txBody>
@@ -15372,7 +15908,7 @@
                           </a:solidFill>
                           <a:latin typeface="Arial"/>
                         </a:rPr>
-                        <a:t>&gt; 0.75</a:t>
+                        <a:t>–</a:t>
                       </a:r>
                     </a:p>
                   </a:txBody>
@@ -15394,6 +15930,28 @@
                           </a:solidFill>
                           <a:latin typeface="Arial"/>
                         </a:rPr>
+                        <a:t>F/# anamorphicity bounded</a:t>
+                      </a:r>
+                    </a:p>
+                  </a:txBody>
+                  <a:tcPr marL="54864" marR="54864" marT="18288" marB="18288">
+                    <a:solidFill>
+                      <a:srgbClr val="FFFFFF"/>
+                    </a:solidFill>
+                  </a:tcPr>
+                </a:tc>
+                <a:tc>
+                  <a:txBody>
+                    <a:bodyPr wrap="square"/>
+                    <a:lstStyle/>
+                    <a:p>
+                      <a:r>
+                        <a:rPr sz="1100" b="0">
+                          <a:solidFill>
+                            <a:srgbClr val="282828"/>
+                          </a:solidFill>
+                          <a:latin typeface="Arial"/>
+                        </a:rPr>
                         <a:t>–</a:t>
                       </a:r>
                     </a:p>
@@ -15416,7 +15974,7 @@
                           </a:solidFill>
                           <a:latin typeface="Arial"/>
                         </a:rPr>
-                        <a:t>0.82</a:t>
+                        <a:t>F/1.80–1.89, none below 1.7</a:t>
                       </a:r>
                     </a:p>
                   </a:txBody>
@@ -15438,29 +15996,7 @@
                           </a:solidFill>
                           <a:latin typeface="Arial"/>
                         </a:rPr>
-                        <a:t>1.00</a:t>
-                      </a:r>
-                    </a:p>
-                  </a:txBody>
-                  <a:tcPr marL="54864" marR="54864" marT="18288" marB="18288">
-                    <a:solidFill>
-                      <a:srgbClr val="FFFFFF"/>
-                    </a:solidFill>
-                  </a:tcPr>
-                </a:tc>
-                <a:tc>
-                  <a:txBody>
-                    <a:bodyPr wrap="square"/>
-                    <a:lstStyle/>
-                    <a:p>
-                      <a:r>
-                        <a:rPr sz="1100" b="0">
-                          <a:solidFill>
-                            <a:srgbClr val="282828"/>
-                          </a:solidFill>
-                          <a:latin typeface="Arial"/>
-                        </a:rPr>
-                        <a:t>0.85 (0.81 at roll 180°)</a:t>
+                        <a:t>grating admits 98.9 %</a:t>
                       </a:r>
                     </a:p>
                   </a:txBody>
@@ -15472,542 +16008,6 @@
                 </a:tc>
               </a:tr>
               <a:tr h="468630">
-                <a:tc>
-                  <a:txBody>
-                    <a:bodyPr wrap="square"/>
-                    <a:lstStyle/>
-                    <a:p>
-                      <a:r>
-                        <a:rPr sz="1100" b="0">
-                          <a:solidFill>
-                            <a:srgbClr val="282828"/>
-                          </a:solidFill>
-                          <a:latin typeface="Arial"/>
-                        </a:rPr>
-                        <a:t>image blur (rms, as placed)</a:t>
-                      </a:r>
-                    </a:p>
-                  </a:txBody>
-                  <a:tcPr marL="54864" marR="54864" marT="18288" marB="18288">
-                    <a:solidFill>
-                      <a:srgbClr val="ECF1F6"/>
-                    </a:solidFill>
-                  </a:tcPr>
-                </a:tc>
-                <a:tc>
-                  <a:txBody>
-                    <a:bodyPr wrap="square"/>
-                    <a:lstStyle/>
-                    <a:p>
-                      <a:r>
-                        <a:rPr sz="1100" b="0">
-                          <a:solidFill>
-                            <a:srgbClr val="282828"/>
-                          </a:solidFill>
-                          <a:latin typeface="Arial"/>
-                        </a:rPr>
-                        <a:t>–</a:t>
-                      </a:r>
-                    </a:p>
-                  </a:txBody>
-                  <a:tcPr marL="54864" marR="54864" marT="18288" marB="18288">
-                    <a:solidFill>
-                      <a:srgbClr val="ECF1F6"/>
-                    </a:solidFill>
-                  </a:tcPr>
-                </a:tc>
-                <a:tc>
-                  <a:txBody>
-                    <a:bodyPr wrap="square"/>
-                    <a:lstStyle/>
-                    <a:p>
-                      <a:r>
-                        <a:rPr sz="1100" b="0">
-                          <a:solidFill>
-                            <a:srgbClr val="282828"/>
-                          </a:solidFill>
-                          <a:latin typeface="Arial"/>
-                        </a:rPr>
-                        <a:t>2–3 µm (paper)</a:t>
-                      </a:r>
-                    </a:p>
-                  </a:txBody>
-                  <a:tcPr marL="54864" marR="54864" marT="18288" marB="18288">
-                    <a:solidFill>
-                      <a:srgbClr val="ECF1F6"/>
-                    </a:solidFill>
-                  </a:tcPr>
-                </a:tc>
-                <a:tc>
-                  <a:txBody>
-                    <a:bodyPr wrap="square"/>
-                    <a:lstStyle/>
-                    <a:p>
-                      <a:r>
-                        <a:rPr sz="1100" b="0">
-                          <a:solidFill>
-                            <a:srgbClr val="282828"/>
-                          </a:solidFill>
-                          <a:latin typeface="Arial"/>
-                        </a:rPr>
-                        <a:t>–</a:t>
-                      </a:r>
-                    </a:p>
-                  </a:txBody>
-                  <a:tcPr marL="54864" marR="54864" marT="18288" marB="18288">
-                    <a:solidFill>
-                      <a:srgbClr val="ECF1F6"/>
-                    </a:solidFill>
-                  </a:tcPr>
-                </a:tc>
-                <a:tc>
-                  <a:txBody>
-                    <a:bodyPr wrap="square"/>
-                    <a:lstStyle/>
-                    <a:p>
-                      <a:r>
-                        <a:rPr sz="1100" b="0">
-                          <a:solidFill>
-                            <a:srgbClr val="282828"/>
-                          </a:solidFill>
-                          <a:latin typeface="Arial"/>
-                        </a:rPr>
-                        <a:t>1.8–2.5 µm</a:t>
-                      </a:r>
-                    </a:p>
-                  </a:txBody>
-                  <a:tcPr marL="54864" marR="54864" marT="18288" marB="18288">
-                    <a:solidFill>
-                      <a:srgbClr val="ECF1F6"/>
-                    </a:solidFill>
-                  </a:tcPr>
-                </a:tc>
-                <a:tc>
-                  <a:txBody>
-                    <a:bodyPr wrap="square"/>
-                    <a:lstStyle/>
-                    <a:p>
-                      <a:r>
-                        <a:rPr sz="1100" b="0">
-                          <a:solidFill>
-                            <a:srgbClr val="282828"/>
-                          </a:solidFill>
-                          <a:latin typeface="Arial"/>
-                        </a:rPr>
-                        <a:t>–</a:t>
-                      </a:r>
-                    </a:p>
-                  </a:txBody>
-                  <a:tcPr marL="54864" marR="54864" marT="18288" marB="18288">
-                    <a:solidFill>
-                      <a:srgbClr val="ECF1F6"/>
-                    </a:solidFill>
-                  </a:tcPr>
-                </a:tc>
-              </a:tr>
-              <a:tr h="280035">
-                <a:tc>
-                  <a:txBody>
-                    <a:bodyPr wrap="square"/>
-                    <a:lstStyle/>
-                    <a:p>
-                      <a:r>
-                        <a:rPr sz="1100" b="0">
-                          <a:solidFill>
-                            <a:srgbClr val="282828"/>
-                          </a:solidFill>
-                          <a:latin typeface="Arial"/>
-                        </a:rPr>
-                        <a:t>plate scale</a:t>
-                      </a:r>
-                    </a:p>
-                  </a:txBody>
-                  <a:tcPr marL="54864" marR="54864" marT="18288" marB="18288">
-                    <a:solidFill>
-                      <a:srgbClr val="FFFFFF"/>
-                    </a:solidFill>
-                  </a:tcPr>
-                </a:tc>
-                <a:tc>
-                  <a:txBody>
-                    <a:bodyPr wrap="square"/>
-                    <a:lstStyle/>
-                    <a:p>
-                      <a:r>
-                        <a:rPr sz="1100" b="0">
-                          <a:solidFill>
-                            <a:srgbClr val="282828"/>
-                          </a:solidFill>
-                          <a:latin typeface="Arial"/>
-                        </a:rPr>
-                        <a:t>330 mm</a:t>
-                      </a:r>
-                    </a:p>
-                  </a:txBody>
-                  <a:tcPr marL="54864" marR="54864" marT="18288" marB="18288">
-                    <a:solidFill>
-                      <a:srgbClr val="FFFFFF"/>
-                    </a:solidFill>
-                  </a:tcPr>
-                </a:tc>
-                <a:tc>
-                  <a:txBody>
-                    <a:bodyPr wrap="square"/>
-                    <a:lstStyle/>
-                    <a:p>
-                      <a:r>
-                        <a:rPr sz="1100" b="0">
-                          <a:solidFill>
-                            <a:srgbClr val="282828"/>
-                          </a:solidFill>
-                          <a:latin typeface="Arial"/>
-                        </a:rPr>
-                        <a:t>345</a:t>
-                      </a:r>
-                    </a:p>
-                  </a:txBody>
-                  <a:tcPr marL="54864" marR="54864" marT="18288" marB="18288">
-                    <a:solidFill>
-                      <a:srgbClr val="FFFFFF"/>
-                    </a:solidFill>
-                  </a:tcPr>
-                </a:tc>
-                <a:tc>
-                  <a:txBody>
-                    <a:bodyPr wrap="square"/>
-                    <a:lstStyle/>
-                    <a:p>
-                      <a:r>
-                        <a:rPr sz="1100" b="0">
-                          <a:solidFill>
-                            <a:srgbClr val="282828"/>
-                          </a:solidFill>
-                          <a:latin typeface="Arial"/>
-                        </a:rPr>
-                        <a:t>–</a:t>
-                      </a:r>
-                    </a:p>
-                  </a:txBody>
-                  <a:tcPr marL="54864" marR="54864" marT="18288" marB="18288">
-                    <a:solidFill>
-                      <a:srgbClr val="FFFFFF"/>
-                    </a:solidFill>
-                  </a:tcPr>
-                </a:tc>
-                <a:tc>
-                  <a:txBody>
-                    <a:bodyPr wrap="square"/>
-                    <a:lstStyle/>
-                    <a:p>
-                      <a:r>
-                        <a:rPr sz="1100" b="0">
-                          <a:solidFill>
-                            <a:srgbClr val="282828"/>
-                          </a:solidFill>
-                          <a:latin typeface="Arial"/>
-                        </a:rPr>
-                        <a:t>329.9 / 330.1 mm</a:t>
-                      </a:r>
-                    </a:p>
-                  </a:txBody>
-                  <a:tcPr marL="54864" marR="54864" marT="18288" marB="18288">
-                    <a:solidFill>
-                      <a:srgbClr val="FFFFFF"/>
-                    </a:solidFill>
-                  </a:tcPr>
-                </a:tc>
-                <a:tc>
-                  <a:txBody>
-                    <a:bodyPr wrap="square"/>
-                    <a:lstStyle/>
-                    <a:p>
-                      <a:r>
-                        <a:rPr sz="1100" b="0">
-                          <a:solidFill>
-                            <a:srgbClr val="282828"/>
-                          </a:solidFill>
-                          <a:latin typeface="Arial"/>
-                        </a:rPr>
-                        <a:t>330.1 mm</a:t>
-                      </a:r>
-                    </a:p>
-                  </a:txBody>
-                  <a:tcPr marL="54864" marR="54864" marT="18288" marB="18288">
-                    <a:solidFill>
-                      <a:srgbClr val="FFFFFF"/>
-                    </a:solidFill>
-                  </a:tcPr>
-                </a:tc>
-              </a:tr>
-              <a:tr h="468630">
-                <a:tc>
-                  <a:txBody>
-                    <a:bodyPr wrap="square"/>
-                    <a:lstStyle/>
-                    <a:p>
-                      <a:r>
-                        <a:rPr sz="1100" b="0">
-                          <a:solidFill>
-                            <a:srgbClr val="282828"/>
-                          </a:solidFill>
-                          <a:latin typeface="Arial"/>
-                        </a:rPr>
-                        <a:t>chief rays at the slit</a:t>
-                      </a:r>
-                    </a:p>
-                  </a:txBody>
-                  <a:tcPr marL="54864" marR="54864" marT="18288" marB="18288">
-                    <a:solidFill>
-                      <a:srgbClr val="ECF1F6"/>
-                    </a:solidFill>
-                  </a:tcPr>
-                </a:tc>
-                <a:tc>
-                  <a:txBody>
-                    <a:bodyPr wrap="square"/>
-                    <a:lstStyle/>
-                    <a:p>
-                      <a:r>
-                        <a:rPr sz="1100" b="0">
-                          <a:solidFill>
-                            <a:srgbClr val="282828"/>
-                          </a:solidFill>
-                          <a:latin typeface="Arial"/>
-                        </a:rPr>
-                        <a:t>telecentric</a:t>
-                      </a:r>
-                    </a:p>
-                  </a:txBody>
-                  <a:tcPr marL="54864" marR="54864" marT="18288" marB="18288">
-                    <a:solidFill>
-                      <a:srgbClr val="ECF1F6"/>
-                    </a:solidFill>
-                  </a:tcPr>
-                </a:tc>
-                <a:tc>
-                  <a:txBody>
-                    <a:bodyPr wrap="square"/>
-                    <a:lstStyle/>
-                    <a:p>
-                      <a:r>
-                        <a:rPr sz="1100" b="0">
-                          <a:solidFill>
-                            <a:srgbClr val="282828"/>
-                          </a:solidFill>
-                          <a:latin typeface="Arial"/>
-                        </a:rPr>
-                        <a:t>telecentric</a:t>
-                      </a:r>
-                    </a:p>
-                  </a:txBody>
-                  <a:tcPr marL="54864" marR="54864" marT="18288" marB="18288">
-                    <a:solidFill>
-                      <a:srgbClr val="ECF1F6"/>
-                    </a:solidFill>
-                  </a:tcPr>
-                </a:tc>
-                <a:tc>
-                  <a:txBody>
-                    <a:bodyPr wrap="square"/>
-                    <a:lstStyle/>
-                    <a:p>
-                      <a:r>
-                        <a:rPr sz="1100" b="0">
-                          <a:solidFill>
-                            <a:srgbClr val="282828"/>
-                          </a:solidFill>
-                          <a:latin typeface="Arial"/>
-                        </a:rPr>
-                        <a:t>–</a:t>
-                      </a:r>
-                    </a:p>
-                  </a:txBody>
-                  <a:tcPr marL="54864" marR="54864" marT="18288" marB="18288">
-                    <a:solidFill>
-                      <a:srgbClr val="ECF1F6"/>
-                    </a:solidFill>
-                  </a:tcPr>
-                </a:tc>
-                <a:tc>
-                  <a:txBody>
-                    <a:bodyPr wrap="square"/>
-                    <a:lstStyle/>
-                    <a:p>
-                      <a:r>
-                        <a:rPr sz="1100" b="0">
-                          <a:solidFill>
-                            <a:srgbClr val="282828"/>
-                          </a:solidFill>
-                          <a:latin typeface="Arial"/>
-                        </a:rPr>
-                        <a:t>within 0.033°</a:t>
-                      </a:r>
-                    </a:p>
-                  </a:txBody>
-                  <a:tcPr marL="54864" marR="54864" marT="18288" marB="18288">
-                    <a:solidFill>
-                      <a:srgbClr val="ECF1F6"/>
-                    </a:solidFill>
-                  </a:tcPr>
-                </a:tc>
-                <a:tc>
-                  <a:txBody>
-                    <a:bodyPr wrap="square"/>
-                    <a:lstStyle/>
-                    <a:p>
-                      <a:r>
-                        <a:rPr sz="1100" b="0">
-                          <a:solidFill>
-                            <a:srgbClr val="282828"/>
-                          </a:solidFill>
-                          <a:latin typeface="Arial"/>
-                        </a:rPr>
-                        <a:t>–</a:t>
-                      </a:r>
-                    </a:p>
-                  </a:txBody>
-                  <a:tcPr marL="54864" marR="54864" marT="18288" marB="18288">
-                    <a:solidFill>
-                      <a:srgbClr val="ECF1F6"/>
-                    </a:solidFill>
-                  </a:tcPr>
-                </a:tc>
-              </a:tr>
-              <a:tr h="468630">
-                <a:tc>
-                  <a:txBody>
-                    <a:bodyPr wrap="square"/>
-                    <a:lstStyle/>
-                    <a:p>
-                      <a:r>
-                        <a:rPr sz="1100" b="0">
-                          <a:solidFill>
-                            <a:srgbClr val="282828"/>
-                          </a:solidFill>
-                          <a:latin typeface="Arial"/>
-                        </a:rPr>
-                        <a:t>marginal rays at the slit</a:t>
-                      </a:r>
-                    </a:p>
-                  </a:txBody>
-                  <a:tcPr marL="54864" marR="54864" marT="18288" marB="18288">
-                    <a:solidFill>
-                      <a:srgbClr val="FFFFFF"/>
-                    </a:solidFill>
-                  </a:tcPr>
-                </a:tc>
-                <a:tc>
-                  <a:txBody>
-                    <a:bodyPr wrap="square"/>
-                    <a:lstStyle/>
-                    <a:p>
-                      <a:r>
-                        <a:rPr sz="1100" b="0">
-                          <a:solidFill>
-                            <a:srgbClr val="282828"/>
-                          </a:solidFill>
-                          <a:latin typeface="Arial"/>
-                        </a:rPr>
-                        <a:t>–</a:t>
-                      </a:r>
-                    </a:p>
-                  </a:txBody>
-                  <a:tcPr marL="54864" marR="54864" marT="18288" marB="18288">
-                    <a:solidFill>
-                      <a:srgbClr val="FFFFFF"/>
-                    </a:solidFill>
-                  </a:tcPr>
-                </a:tc>
-                <a:tc>
-                  <a:txBody>
-                    <a:bodyPr wrap="square"/>
-                    <a:lstStyle/>
-                    <a:p>
-                      <a:r>
-                        <a:rPr sz="1100" b="0">
-                          <a:solidFill>
-                            <a:srgbClr val="282828"/>
-                          </a:solidFill>
-                          <a:latin typeface="Arial"/>
-                        </a:rPr>
-                        <a:t>F/# anamorphicity bounded</a:t>
-                      </a:r>
-                    </a:p>
-                  </a:txBody>
-                  <a:tcPr marL="54864" marR="54864" marT="18288" marB="18288">
-                    <a:solidFill>
-                      <a:srgbClr val="FFFFFF"/>
-                    </a:solidFill>
-                  </a:tcPr>
-                </a:tc>
-                <a:tc>
-                  <a:txBody>
-                    <a:bodyPr wrap="square"/>
-                    <a:lstStyle/>
-                    <a:p>
-                      <a:r>
-                        <a:rPr sz="1100" b="0">
-                          <a:solidFill>
-                            <a:srgbClr val="282828"/>
-                          </a:solidFill>
-                          <a:latin typeface="Arial"/>
-                        </a:rPr>
-                        <a:t>–</a:t>
-                      </a:r>
-                    </a:p>
-                  </a:txBody>
-                  <a:tcPr marL="54864" marR="54864" marT="18288" marB="18288">
-                    <a:solidFill>
-                      <a:srgbClr val="FFFFFF"/>
-                    </a:solidFill>
-                  </a:tcPr>
-                </a:tc>
-                <a:tc>
-                  <a:txBody>
-                    <a:bodyPr wrap="square"/>
-                    <a:lstStyle/>
-                    <a:p>
-                      <a:r>
-                        <a:rPr sz="1100" b="0">
-                          <a:solidFill>
-                            <a:srgbClr val="282828"/>
-                          </a:solidFill>
-                          <a:latin typeface="Arial"/>
-                        </a:rPr>
-                        <a:t>F/1.80–1.89, none below 1.7</a:t>
-                      </a:r>
-                    </a:p>
-                  </a:txBody>
-                  <a:tcPr marL="54864" marR="54864" marT="18288" marB="18288">
-                    <a:solidFill>
-                      <a:srgbClr val="FFFFFF"/>
-                    </a:solidFill>
-                  </a:tcPr>
-                </a:tc>
-                <a:tc>
-                  <a:txBody>
-                    <a:bodyPr wrap="square"/>
-                    <a:lstStyle/>
-                    <a:p>
-                      <a:r>
-                        <a:rPr sz="1100" b="0">
-                          <a:solidFill>
-                            <a:srgbClr val="282828"/>
-                          </a:solidFill>
-                          <a:latin typeface="Arial"/>
-                        </a:rPr>
-                        <a:t>grating admits 98.9 %</a:t>
-                      </a:r>
-                    </a:p>
-                  </a:txBody>
-                  <a:tcPr marL="54864" marR="54864" marT="18288" marB="18288">
-                    <a:solidFill>
-                      <a:srgbClr val="FFFFFF"/>
-                    </a:solidFill>
-                  </a:tcPr>
-                </a:tc>
-              </a:tr>
-              <a:tr h="280035">
                 <a:tc>
                   <a:txBody>
                     <a:bodyPr wrap="square"/>
@@ -16287,7 +16287,7 @@
         </p:nvSpPr>
         <p:spPr>
           <a:xfrm>
-            <a:off x="411480" y="6125337"/>
+            <a:off x="411480" y="5748147"/>
             <a:ext cx="11368735" cy="274320"/>
           </a:xfrm>
           <a:prstGeom prst="rect">
@@ -16313,7 +16313,7 @@
                 </a:solidFill>
                 <a:latin typeface="Arial"/>
               </a:rPr>
-              <a:t>Spectrometer: dyson5_jim_3a.txt (size:F:240); telescope: dyson5_cprime_3k.in, REPORT_dyson5_cprime.md; together: dyson5_t5f_cprime_centroid_roll000.txt / _roll180, _chief_roll000 (the point-source shift), 7 fields × 7 wavelengths.  No coatings, no tolerances in any column.  SRF 2.025 against a 2.000 floor: the Dyson adds 0.45 µm.</a:t>
+              <a:t>Spectrometer: dyson5_jim_3a.txt (size:F:240); telescope: dyson5_cprime_3k.in, REPORT_dyson5_cprime.md; together: dyson5_t5f_cprime_centroid_roll000.txt / _roll180, _chief_roll000 (the point-source shift), 7 fields × 7 wavelengths.  No coatings, no tolerances in any column.  SRF 2.025 against a floor of 2.010–2.023 (slit, pixel, diffraction): the Dyson adds at most 0.0015 px, 0.03 µm.</a:t>
             </a:r>
           </a:p>
         </p:txBody>

--- a/demo_session/deck_dyson_3k_edit.pptx
+++ b/demo_session/deck_dyson_3k_edit.pptx
@@ -27,6 +27,7 @@
     <p:sldId id="275" r:id="rId26"/>
     <p:sldId id="276" r:id="rId27"/>
     <p:sldId id="277" r:id="rId28"/>
+    <p:sldId id="278" r:id="rId29"/>
   </p:sldIdLst>
   <p:sldSz cx="12191695" cy="6858000" type="screen4x3"/>
   <p:notesSz cx="6858000" cy="9144000"/>
@@ -5108,7 +5109,7 @@
                 </a:solidFill>
                 <a:latin typeface="Arial"/>
               </a:rPr>
-              <a:t>The spectrometer: at the slit floor; what is left</a:t>
+              <a:t>The spectrometer: toleranced, and a conic grating for margin</a:t>
             </a:r>
           </a:p>
           <a:p>
@@ -5124,7 +5125,7 @@
                 </a:solidFill>
                 <a:latin typeface="Arial"/>
               </a:rPr>
-              <a:t>SRF 2.025 px is the two-pixel slit with the pixel and diffraction (2.010–2.023) plus at most 0.03 µm of blur, and in the paper's units it is 36.5 µm against 64.8; the open spectrometer work is tolerances, the aspheric-lens form, and throughput by band</a:t>
+              <a:t>SRF sits at the two-pixel slit's floor; every large tolerance is a focus term the detector's focus removes; keystone sets the alignment tolerances at 26 µm and 35 µrad; a conic on the grating takes the energy in a pixel from 0.82 to 0.99</a:t>
             </a:r>
           </a:p>
         </p:txBody>
@@ -5225,7 +5226,7 @@
                 </a:solidFill>
                 <a:latin typeface="Arial"/>
               </a:rPr>
-              <a:t>  The scorer's SRF is slit ⊗ LSF ⊗ pixel ⊗ Airy; with a 2-pixel slit a perfect spectrometer gives 2.010 px at 380 nm and 2.023 at 2500 nm — the slit, the pixel and diffraction.  The Dyson of record sits 0.0001–0.0015 px above that floor at every wavelength, alone and behind the telescope: at most 0.03 µm of blur.  Joe's "1.5–2.0" is met at its floor; 1.5 would need a narrower slit, not a better spectrometer.  In the paper's co-added pixels our SRF is 1.01 against its 1.33 design and 1.8 requirement; our CRF 21 µm against its 50.</a:t>
+              <a:t>  Slit ⊗ LSF ⊗ pixel ⊗ Airy for a perfect spectrometer is 2.010 px at 380 nm and 2.023 at 2500 nm; the Dyson of record sits 0.0001–0.0015 px above that at every wavelength, alone and behind the telescope.  In the paper's units 36.5 µm against 64.8.  Joe's "1.5–2.0" is met at its floor; 1.5 would need a narrower slit.</a:t>
             </a:r>
           </a:p>
           <a:p>
@@ -5250,7 +5251,7 @@
                 </a:solidFill>
                 <a:latin typeface="Arial"/>
               </a:rPr>
-              <a:t>The spectrometer of record for 3k</a:t>
+              <a:t>The Dyson of record is the paper's Option A:</a:t>
             </a:r>
             <a:r>
               <a:rPr sz="1200" b="0">
@@ -5259,7 +5260,7 @@
                 </a:solidFill>
                 <a:latin typeface="Arial"/>
               </a:rPr>
-              <a:t> stands: 240 mm </a:t>
+              <a:t> 240 mm </a:t>
             </a:r>
             <a:r>
               <a:rPr sz="1200" b="0">
@@ -5286,7 +5287,41 @@
                 </a:solidFill>
                 <a:latin typeface="Arial"/>
               </a:rPr>
-              <a:t>, spherical lens face and spherical grating, no meniscus; smile 0.005, keystone 0.006, CRF 1.21, 0.82 of the energy in a pixel; 4.5 L, 14.3 kg; the slit's package clears the block face by 0.54 mm.</a:t>
+              <a:t>, an aspheric lens (K 0.043 with h⁴, h⁶) and a spherical grating, no meniscus; smile 0.005, keystone 0.006, CRF 1.21, 0.82 of the energy in a pixel; 4.5 L, 14.3 kg.</a:t>
+            </a:r>
+          </a:p>
+          <a:p>
+            <a:pPr>
+              <a:spcAft>
+                <a:spcPts val="600"/>
+              </a:spcAft>
+            </a:pPr>
+            <a:r>
+              <a:rPr sz="1200" b="0">
+                <a:solidFill>
+                  <a:srgbClr val="282828"/>
+                </a:solidFill>
+                <a:latin typeface="Arial"/>
+              </a:rPr>
+              <a:t>•  </a:t>
+            </a:r>
+            <a:r>
+              <a:rPr sz="1200" b="1">
+                <a:solidFill>
+                  <a:srgbClr val="282828"/>
+                </a:solidFill>
+                <a:latin typeface="Arial"/>
+              </a:rPr>
+              <a:t>Toleranced, 21 rows, alone and through the join:</a:t>
+            </a:r>
+            <a:r>
+              <a:rPr sz="1200" b="0">
+                <a:solidFill>
+                  <a:srgbClr val="282828"/>
+                </a:solidFill>
+                <a:latin typeface="Arial"/>
+              </a:rPr>
+              <a:t> every large sensitivity is a focus term — lens radius and thickness, the air space, slit and detector defocus, grating radius (the strongest: dR/R 10⁻⁴ costs CRF +1.9 px uncompensated, and a 76 µm detector refocus removes it to 0.006).  One-axis detector focus is the compensator; x/y adds nothing.  Smile is loose (≥ 300 µm or µrad).</a:t>
             </a:r>
           </a:p>
         </p:txBody>
@@ -5334,7 +5369,7 @@
                 </a:solidFill>
                 <a:latin typeface="Arial"/>
               </a:rPr>
-              <a:t>Tolerances, first.</a:t>
+              <a:t>Keystone sets the tolerances, and no compensator helps</a:t>
             </a:r>
             <a:r>
               <a:rPr sz="1200" b="0">
@@ -5343,7 +5378,7 @@
                 </a:solidFill>
                 <a:latin typeface="Arial"/>
               </a:rPr>
-              <a:t>  Nothing on either module is toleranced, and the paper chose both its forms for tolerance insensitivity (its spherical-grating option lost on exactly that: smile 0.3 % designed, 3.5 % as built).  Next: a sensitivity ladder on both Dysons — lens and grating decenter, tilt, radius, index (the thermal soak), grating period and clocking, slit and detector position — scored alone and through the join with R9, each with its compensator, summed to a budget against the paper's as-built margins.</a:t>
+              <a:t> (it is lateral color).  For the paper's as-built keystone (1.03 µm = 0.057 px): lens and grating decenter along the slit 26 µm, grating tilt 35 µrad, clocking 88 µrad; for Joe's 0.1 px: 47 µm, 47 µm, 64 µrad, 162 µrad.  The 1.5k Dyson is twice as sensitive (13 µm).  Linear where it matters (keystone vs decenter 1.10; CRF vs grating radius 1.03).</a:t>
             </a:r>
           </a:p>
           <a:p>
@@ -5368,7 +5403,7 @@
                 </a:solidFill>
                 <a:latin typeface="Arial"/>
               </a:rPr>
-              <a:t>Then the paper's form for margin:</a:t>
+              <a:t>Thermal:</a:t>
             </a:r>
             <a:r>
               <a:rPr sz="1200" b="0">
@@ -5377,7 +5412,7 @@
                 </a:solidFill>
                 <a:latin typeface="Arial"/>
               </a:rPr>
-              <a:t> an aspheric </a:t>
+              <a:t> 1 K of </a:t>
             </a:r>
             <a:r>
               <a:rPr sz="1200" b="0">
@@ -5404,7 +5439,34 @@
                 </a:solidFill>
                 <a:latin typeface="Arial"/>
               </a:rPr>
-              <a:t> lens with a conic grating (their Option B) on our 3k geometry, nominal and its own ladder — the claim to test is insensitivity, not nominal performance.</a:t>
+              <a:t> index is negligible (CRF +0.001); </a:t>
+            </a:r>
+            <a:r>
+              <a:rPr sz="1200" b="0">
+                <a:solidFill>
+                  <a:srgbClr val="282828"/>
+                </a:solidFill>
+                <a:latin typeface="Arial"/>
+              </a:rPr>
+              <a:t>CaF</a:t>
+            </a:r>
+            <a:r>
+              <a:rPr sz="1200" b="0" baseline="-25000">
+                <a:solidFill>
+                  <a:srgbClr val="282828"/>
+                </a:solidFill>
+                <a:latin typeface="Arial"/>
+              </a:rPr>
+              <a:t>2</a:t>
+            </a:r>
+            <a:r>
+              <a:rPr sz="1200" b="0">
+                <a:solidFill>
+                  <a:srgbClr val="282828"/>
+                </a:solidFill>
+                <a:latin typeface="Arial"/>
+              </a:rPr>
+              <a:t>'s radius and thickness terms cancel (+0.050 / −0.051 px per K); the open terms are the aluminum air space (−0.22 px per K) and the N-BK7 grating radius (+0.14) — focus terms, refocus-compensable, which is the paper's "CRF limits the spectrometer's temperature requirements."</a:t>
             </a:r>
           </a:p>
           <a:p>
@@ -5429,7 +5491,7 @@
                 </a:solidFill>
                 <a:latin typeface="Arial"/>
               </a:rPr>
-              <a:t>Throughput by band:</a:t>
+              <a:t>Option B — a conic on the grating (K −0.004) with the lens re-solved:</a:t>
             </a:r>
             <a:r>
               <a:rPr sz="1200" b="0">
@@ -5438,7 +5500,25 @@
                 </a:solidFill>
                 <a:latin typeface="Arial"/>
               </a:rPr>
-              <a:t> six crossings uncoated (0.81), a single- and a two-layer AR optimized for 2.0–2.5 µm, the blaze; per band, both modules.</a:t>
+              <a:t> alone CRF 1.03 (1.21), energy in a pixel 0.99 (0.82), keystone 0.002 (0.006); behind R9: CRF 1.06, energy 0.955, smile 0.012; SRF the floor in both.  Its keystone sensitivities are 6–45 % higher than A's (clocking most): </a:t>
+            </a:r>
+            <a:r>
+              <a:rPr sz="1200" b="1">
+                <a:solidFill>
+                  <a:srgbClr val="282828"/>
+                </a:solidFill>
+                <a:latin typeface="Arial"/>
+              </a:rPr>
+              <a:t>it buys nominal margin, not alignment insensitivity</a:t>
+            </a:r>
+            <a:r>
+              <a:rPr sz="1200" b="0">
+                <a:solidFill>
+                  <a:srgbClr val="282828"/>
+                </a:solidFill>
+                <a:latin typeface="Arial"/>
+              </a:rPr>
+              <a:t> — the paper's preference for B on tolerances is not reproduced by alignment alone (its as-built numbers include fabrication and thermal, not modeled here).  Recommended as the spectrometer candidate for its margin.</a:t>
             </a:r>
           </a:p>
         </p:txBody>
@@ -5451,7 +5531,7 @@
         </p:nvSpPr>
         <p:spPr>
           <a:xfrm>
-            <a:off x="6400800" y="4529328"/>
+            <a:off x="6400800" y="5519928"/>
             <a:ext cx="5394960" cy="274320"/>
           </a:xfrm>
           <a:prstGeom prst="rect">
@@ -5477,7 +5557,7 @@
                 </a:solidFill>
                 <a:latin typeface="Arial"/>
               </a:rPr>
-              <a:t>BRIEF_to_dyson5.md addendum 49 (in progress).  Energy in a pixel 0.82 alone is the one spectrometer number with room; the paper's Option B is where it would come from.</a:t>
+              <a:t>REPORT_dyson5_spec.md (the ladder, 3k and 1.5k, Option B and its ladder); spectrometer_sens, gate tSpectrometerSens.  The compensator residuals are given for detector focus alone and focus + x/y.  A full every-CTE soak is the next row.  Throughput by band follows.</a:t>
             </a:r>
           </a:p>
         </p:txBody>
@@ -6762,34 +6842,7 @@
                 </a:solidFill>
                 <a:latin typeface="Arial"/>
               </a:rPr>
-              <a:t>  The spherical-faced </a:t>
-            </a:r>
-            <a:r>
-              <a:rPr sz="1500" b="0">
-                <a:solidFill>
-                  <a:srgbClr val="282828"/>
-                </a:solidFill>
-                <a:latin typeface="Arial"/>
-              </a:rPr>
-              <a:t>CaF</a:t>
-            </a:r>
-            <a:r>
-              <a:rPr sz="1500" b="0" baseline="-25000">
-                <a:solidFill>
-                  <a:srgbClr val="282828"/>
-                </a:solidFill>
-                <a:latin typeface="Arial"/>
-              </a:rPr>
-              <a:t>2</a:t>
-            </a:r>
-            <a:r>
-              <a:rPr sz="1500" b="0">
-                <a:solidFill>
-                  <a:srgbClr val="282828"/>
-                </a:solidFill>
-                <a:latin typeface="Arial"/>
-              </a:rPr>
-              <a:t> Dyson meets the specification at nominal.  The paper went to an aspheric lens and a conic grating for tolerances; before we build that ladder, what drove it in the build — smile and keystone as built, or energy in a pixel?</a:t>
+              <a:t>  Our Dyson of record is the paper's Option A and meets the specification; its Option B (the conic grating) buys energy in a pixel 0.82 → 0.99 here but not alignment insensitivity.  What drove B in the build — fabrication, thermal, or the margin?</a:t>
             </a:r>
           </a:p>
         </p:txBody>
@@ -6993,7 +7046,7 @@
                 </a:solidFill>
                 <a:latin typeface="Arial"/>
               </a:rPr>
-              <a:t>Spectrometer (in progress):</a:t>
+              <a:t>Spectrometer:</a:t>
             </a:r>
             <a:r>
               <a:rPr sz="1200" b="0">
@@ -7002,7 +7055,7 @@
                 </a:solidFill>
                 <a:latin typeface="Arial"/>
               </a:rPr>
-              <a:t> the sensitivity ladder on both Dysons with compensators, alone and through the join; the aspheric-lens + conic-grating form and its ladder; throughput by band with the blaze.</a:t>
+              <a:t> the every-CTE thermal soak row; fabrication terms (figure, the grating's period and groove errors) in the ladder; throughput by band with the blaze; Option B as the candidate, its keystone tolerances (25 µm, 33 µrad) stated beside its margin.</a:t>
             </a:r>
           </a:p>
           <a:p>
@@ -9862,7 +9915,7 @@
                 </a:solidFill>
                 <a:latin typeface="Arial"/>
               </a:rPr>
-              <a:t> The spectrometer: at the slit floor; what is left</a:t>
+              <a:t> The spectrometer: toleranced, and a conic grating for margin</a:t>
             </a:r>
           </a:p>
           <a:p>
@@ -10032,7 +10085,7 @@
                 </a:solidFill>
                 <a:latin typeface="Arial"/>
               </a:rPr>
-              <a:t> Backup: the first order by the numbers; the rungs per field; the chief-tilt diagnostic; the engine finding; records</a:t>
+              <a:t> Backup: the first order by the numbers; the rungs per field; the chief-tilt diagnostic; the tolerance ladder by the numbers; the engine finding; records</a:t>
             </a:r>
           </a:p>
         </p:txBody>
@@ -10404,7 +10457,7 @@
                 </a:solidFill>
                 <a:latin typeface="Arial"/>
               </a:rPr>
-              <a:t>An engine finding from this round</a:t>
+              <a:t>The tolerance ladder by the numbers</a:t>
             </a:r>
           </a:p>
           <a:p>
@@ -10420,7 +10473,7 @@
                 </a:solidFill>
                 <a:latin typeface="Arial"/>
               </a:rPr>
-              <a:t>The api refused an element stop on the secondary of a four-element telescope</a:t>
+              <a:t>One perturbation at a time on the 3k Dyson of record, scored alone and through the R9 join; the compensator is the detector's focus</a:t>
             </a:r>
           </a:p>
         </p:txBody>
@@ -10469,15 +10522,1200 @@
           </a:p>
         </p:txBody>
       </p:sp>
+      <p:graphicFrame>
+        <p:nvGraphicFramePr>
+          <p:cNvPr id="4" name="Table 3"/>
+          <p:cNvGraphicFramePr>
+            <a:graphicFrameLocks noGrp="1"/>
+          </p:cNvGraphicFramePr>
+          <p:nvPr/>
+        </p:nvGraphicFramePr>
+        <p:xfrm>
+          <a:off x="411480" y="1298448"/>
+          <a:ext cx="11368735" cy="3366135"/>
+        </p:xfrm>
+        <a:graphic>
+          <a:graphicData uri="http://schemas.openxmlformats.org/drawingml/2006/table">
+            <a:tbl>
+              <a:tblPr firstRow="1" bandRow="1">
+                <a:tableStyleId>{5C22544A-7EE6-4342-B048-85BDC9FD1C3A}</a:tableStyleId>
+              </a:tblPr>
+              <a:tblGrid>
+                <a:gridCol w="3104034"/>
+                <a:gridCol w="1817116"/>
+                <a:gridCol w="2035048"/>
+                <a:gridCol w="1090676"/>
+                <a:gridCol w="3321861"/>
+              </a:tblGrid>
+              <a:tr h="468630">
+                <a:tc>
+                  <a:txBody>
+                    <a:bodyPr wrap="square"/>
+                    <a:lstStyle/>
+                    <a:p>
+                      <a:r>
+                        <a:rPr sz="1100" b="1">
+                          <a:solidFill>
+                            <a:srgbClr val="FFFFFF"/>
+                          </a:solidFill>
+                          <a:latin typeface="Arial"/>
+                        </a:rPr>
+                        <a:t>perturbation (unit)</a:t>
+                      </a:r>
+                    </a:p>
+                  </a:txBody>
+                  <a:tcPr marL="54864" marR="54864" marT="18288" marB="18288">
+                    <a:solidFill>
+                      <a:srgbClr val="1F4E79"/>
+                    </a:solidFill>
+                  </a:tcPr>
+                </a:tc>
+                <a:tc>
+                  <a:txBody>
+                    <a:bodyPr wrap="square"/>
+                    <a:lstStyle/>
+                    <a:p>
+                      <a:r>
+                        <a:rPr sz="1100" b="1">
+                          <a:solidFill>
+                            <a:srgbClr val="FFFFFF"/>
+                          </a:solidFill>
+                          <a:latin typeface="Arial"/>
+                        </a:rPr>
+                        <a:t>CRF, uncompensated (px)</a:t>
+                      </a:r>
+                    </a:p>
+                  </a:txBody>
+                  <a:tcPr marL="54864" marR="54864" marT="18288" marB="18288">
+                    <a:solidFill>
+                      <a:srgbClr val="1F4E79"/>
+                    </a:solidFill>
+                  </a:tcPr>
+                </a:tc>
+                <a:tc>
+                  <a:txBody>
+                    <a:bodyPr wrap="square"/>
+                    <a:lstStyle/>
+                    <a:p>
+                      <a:r>
+                        <a:rPr sz="1100" b="1">
+                          <a:solidFill>
+                            <a:srgbClr val="FFFFFF"/>
+                          </a:solidFill>
+                          <a:latin typeface="Arial"/>
+                        </a:rPr>
+                        <a:t>CRF after detector refocus</a:t>
+                      </a:r>
+                    </a:p>
+                  </a:txBody>
+                  <a:tcPr marL="54864" marR="54864" marT="18288" marB="18288">
+                    <a:solidFill>
+                      <a:srgbClr val="1F4E79"/>
+                    </a:solidFill>
+                  </a:tcPr>
+                </a:tc>
+                <a:tc>
+                  <a:txBody>
+                    <a:bodyPr wrap="square"/>
+                    <a:lstStyle/>
+                    <a:p>
+                      <a:r>
+                        <a:rPr sz="1100" b="1">
+                          <a:solidFill>
+                            <a:srgbClr val="FFFFFF"/>
+                          </a:solidFill>
+                          <a:latin typeface="Arial"/>
+                        </a:rPr>
+                        <a:t>keystone (px)</a:t>
+                      </a:r>
+                    </a:p>
+                  </a:txBody>
+                  <a:tcPr marL="54864" marR="54864" marT="18288" marB="18288">
+                    <a:solidFill>
+                      <a:srgbClr val="1F4E79"/>
+                    </a:solidFill>
+                  </a:tcPr>
+                </a:tc>
+                <a:tc>
+                  <a:txBody>
+                    <a:bodyPr wrap="square"/>
+                    <a:lstStyle/>
+                    <a:p>
+                      <a:r>
+                        <a:rPr sz="1100" b="1">
+                          <a:solidFill>
+                            <a:srgbClr val="FFFFFF"/>
+                          </a:solidFill>
+                          <a:latin typeface="Arial"/>
+                        </a:rPr>
+                        <a:t>the tolerance for the paper's keystone CBE / for Joe's 0.1 px</a:t>
+                      </a:r>
+                    </a:p>
+                  </a:txBody>
+                  <a:tcPr marL="54864" marR="54864" marT="18288" marB="18288">
+                    <a:solidFill>
+                      <a:srgbClr val="1F4E79"/>
+                    </a:solidFill>
+                  </a:tcPr>
+                </a:tc>
+              </a:tr>
+              <a:tr h="280035">
+                <a:tc>
+                  <a:txBody>
+                    <a:bodyPr wrap="square"/>
+                    <a:lstStyle/>
+                    <a:p>
+                      <a:r>
+                        <a:rPr sz="1100" b="0">
+                          <a:solidFill>
+                            <a:srgbClr val="282828"/>
+                          </a:solidFill>
+                          <a:latin typeface="Arial"/>
+                        </a:rPr>
+                        <a:t>lens decenter along the slit, 10 µm</a:t>
+                      </a:r>
+                    </a:p>
+                  </a:txBody>
+                  <a:tcPr marL="54864" marR="54864" marT="18288" marB="18288">
+                    <a:solidFill>
+                      <a:srgbClr val="FFFFFF"/>
+                    </a:solidFill>
+                  </a:tcPr>
+                </a:tc>
+                <a:tc>
+                  <a:txBody>
+                    <a:bodyPr wrap="square"/>
+                    <a:lstStyle/>
+                    <a:p>
+                      <a:r>
+                        <a:rPr sz="1100" b="0">
+                          <a:solidFill>
+                            <a:srgbClr val="282828"/>
+                          </a:solidFill>
+                          <a:latin typeface="Arial"/>
+                        </a:rPr>
+                        <a:t>–</a:t>
+                      </a:r>
+                    </a:p>
+                  </a:txBody>
+                  <a:tcPr marL="54864" marR="54864" marT="18288" marB="18288">
+                    <a:solidFill>
+                      <a:srgbClr val="FFFFFF"/>
+                    </a:solidFill>
+                  </a:tcPr>
+                </a:tc>
+                <a:tc>
+                  <a:txBody>
+                    <a:bodyPr wrap="square"/>
+                    <a:lstStyle/>
+                    <a:p>
+                      <a:r>
+                        <a:rPr sz="1100" b="0">
+                          <a:solidFill>
+                            <a:srgbClr val="282828"/>
+                          </a:solidFill>
+                          <a:latin typeface="Arial"/>
+                        </a:rPr>
+                        <a:t>–</a:t>
+                      </a:r>
+                    </a:p>
+                  </a:txBody>
+                  <a:tcPr marL="54864" marR="54864" marT="18288" marB="18288">
+                    <a:solidFill>
+                      <a:srgbClr val="FFFFFF"/>
+                    </a:solidFill>
+                  </a:tcPr>
+                </a:tc>
+                <a:tc>
+                  <a:txBody>
+                    <a:bodyPr wrap="square"/>
+                    <a:lstStyle/>
+                    <a:p>
+                      <a:r>
+                        <a:rPr sz="1100" b="0">
+                          <a:solidFill>
+                            <a:srgbClr val="282828"/>
+                          </a:solidFill>
+                          <a:latin typeface="Arial"/>
+                        </a:rPr>
+                        <a:t>0.0099</a:t>
+                      </a:r>
+                    </a:p>
+                  </a:txBody>
+                  <a:tcPr marL="54864" marR="54864" marT="18288" marB="18288">
+                    <a:solidFill>
+                      <a:srgbClr val="FFFFFF"/>
+                    </a:solidFill>
+                  </a:tcPr>
+                </a:tc>
+                <a:tc>
+                  <a:txBody>
+                    <a:bodyPr wrap="square"/>
+                    <a:lstStyle/>
+                    <a:p>
+                      <a:r>
+                        <a:rPr sz="1100" b="0">
+                          <a:solidFill>
+                            <a:srgbClr val="282828"/>
+                          </a:solidFill>
+                          <a:latin typeface="Arial"/>
+                        </a:rPr>
+                        <a:t>26 µm / 47 µm</a:t>
+                      </a:r>
+                    </a:p>
+                  </a:txBody>
+                  <a:tcPr marL="54864" marR="54864" marT="18288" marB="18288">
+                    <a:solidFill>
+                      <a:srgbClr val="FFFFFF"/>
+                    </a:solidFill>
+                  </a:tcPr>
+                </a:tc>
+              </a:tr>
+              <a:tr h="280035">
+                <a:tc>
+                  <a:txBody>
+                    <a:bodyPr wrap="square"/>
+                    <a:lstStyle/>
+                    <a:p>
+                      <a:r>
+                        <a:rPr sz="1100" b="0">
+                          <a:solidFill>
+                            <a:srgbClr val="282828"/>
+                          </a:solidFill>
+                          <a:latin typeface="Arial"/>
+                        </a:rPr>
+                        <a:t>grating decenter along the slit, 10 µm</a:t>
+                      </a:r>
+                    </a:p>
+                  </a:txBody>
+                  <a:tcPr marL="54864" marR="54864" marT="18288" marB="18288">
+                    <a:solidFill>
+                      <a:srgbClr val="ECF1F6"/>
+                    </a:solidFill>
+                  </a:tcPr>
+                </a:tc>
+                <a:tc>
+                  <a:txBody>
+                    <a:bodyPr wrap="square"/>
+                    <a:lstStyle/>
+                    <a:p>
+                      <a:r>
+                        <a:rPr sz="1100" b="0">
+                          <a:solidFill>
+                            <a:srgbClr val="282828"/>
+                          </a:solidFill>
+                          <a:latin typeface="Arial"/>
+                        </a:rPr>
+                        <a:t>–</a:t>
+                      </a:r>
+                    </a:p>
+                  </a:txBody>
+                  <a:tcPr marL="54864" marR="54864" marT="18288" marB="18288">
+                    <a:solidFill>
+                      <a:srgbClr val="ECF1F6"/>
+                    </a:solidFill>
+                  </a:tcPr>
+                </a:tc>
+                <a:tc>
+                  <a:txBody>
+                    <a:bodyPr wrap="square"/>
+                    <a:lstStyle/>
+                    <a:p>
+                      <a:r>
+                        <a:rPr sz="1100" b="0">
+                          <a:solidFill>
+                            <a:srgbClr val="282828"/>
+                          </a:solidFill>
+                          <a:latin typeface="Arial"/>
+                        </a:rPr>
+                        <a:t>–</a:t>
+                      </a:r>
+                    </a:p>
+                  </a:txBody>
+                  <a:tcPr marL="54864" marR="54864" marT="18288" marB="18288">
+                    <a:solidFill>
+                      <a:srgbClr val="ECF1F6"/>
+                    </a:solidFill>
+                  </a:tcPr>
+                </a:tc>
+                <a:tc>
+                  <a:txBody>
+                    <a:bodyPr wrap="square"/>
+                    <a:lstStyle/>
+                    <a:p>
+                      <a:r>
+                        <a:rPr sz="1100" b="0">
+                          <a:solidFill>
+                            <a:srgbClr val="282828"/>
+                          </a:solidFill>
+                          <a:latin typeface="Arial"/>
+                        </a:rPr>
+                        <a:t>0.0099</a:t>
+                      </a:r>
+                    </a:p>
+                  </a:txBody>
+                  <a:tcPr marL="54864" marR="54864" marT="18288" marB="18288">
+                    <a:solidFill>
+                      <a:srgbClr val="ECF1F6"/>
+                    </a:solidFill>
+                  </a:tcPr>
+                </a:tc>
+                <a:tc>
+                  <a:txBody>
+                    <a:bodyPr wrap="square"/>
+                    <a:lstStyle/>
+                    <a:p>
+                      <a:r>
+                        <a:rPr sz="1100" b="0">
+                          <a:solidFill>
+                            <a:srgbClr val="282828"/>
+                          </a:solidFill>
+                          <a:latin typeface="Arial"/>
+                        </a:rPr>
+                        <a:t>26 µm / 47 µm</a:t>
+                      </a:r>
+                    </a:p>
+                  </a:txBody>
+                  <a:tcPr marL="54864" marR="54864" marT="18288" marB="18288">
+                    <a:solidFill>
+                      <a:srgbClr val="ECF1F6"/>
+                    </a:solidFill>
+                  </a:tcPr>
+                </a:tc>
+              </a:tr>
+              <a:tr h="280035">
+                <a:tc>
+                  <a:txBody>
+                    <a:bodyPr wrap="square"/>
+                    <a:lstStyle/>
+                    <a:p>
+                      <a:r>
+                        <a:rPr sz="1100" b="0">
+                          <a:solidFill>
+                            <a:srgbClr val="282828"/>
+                          </a:solidFill>
+                          <a:latin typeface="Arial"/>
+                        </a:rPr>
+                        <a:t>grating tilt about the slit, 10 µrad</a:t>
+                      </a:r>
+                    </a:p>
+                  </a:txBody>
+                  <a:tcPr marL="54864" marR="54864" marT="18288" marB="18288">
+                    <a:solidFill>
+                      <a:srgbClr val="FFFFFF"/>
+                    </a:solidFill>
+                  </a:tcPr>
+                </a:tc>
+                <a:tc>
+                  <a:txBody>
+                    <a:bodyPr wrap="square"/>
+                    <a:lstStyle/>
+                    <a:p>
+                      <a:r>
+                        <a:rPr sz="1100" b="0">
+                          <a:solidFill>
+                            <a:srgbClr val="282828"/>
+                          </a:solidFill>
+                          <a:latin typeface="Arial"/>
+                        </a:rPr>
+                        <a:t>–</a:t>
+                      </a:r>
+                    </a:p>
+                  </a:txBody>
+                  <a:tcPr marL="54864" marR="54864" marT="18288" marB="18288">
+                    <a:solidFill>
+                      <a:srgbClr val="FFFFFF"/>
+                    </a:solidFill>
+                  </a:tcPr>
+                </a:tc>
+                <a:tc>
+                  <a:txBody>
+                    <a:bodyPr wrap="square"/>
+                    <a:lstStyle/>
+                    <a:p>
+                      <a:r>
+                        <a:rPr sz="1100" b="0">
+                          <a:solidFill>
+                            <a:srgbClr val="282828"/>
+                          </a:solidFill>
+                          <a:latin typeface="Arial"/>
+                        </a:rPr>
+                        <a:t>–</a:t>
+                      </a:r>
+                    </a:p>
+                  </a:txBody>
+                  <a:tcPr marL="54864" marR="54864" marT="18288" marB="18288">
+                    <a:solidFill>
+                      <a:srgbClr val="FFFFFF"/>
+                    </a:solidFill>
+                  </a:tcPr>
+                </a:tc>
+                <a:tc>
+                  <a:txBody>
+                    <a:bodyPr wrap="square"/>
+                    <a:lstStyle/>
+                    <a:p>
+                      <a:r>
+                        <a:rPr sz="1100" b="0">
+                          <a:solidFill>
+                            <a:srgbClr val="282828"/>
+                          </a:solidFill>
+                          <a:latin typeface="Arial"/>
+                        </a:rPr>
+                        <a:t>0.0074</a:t>
+                      </a:r>
+                    </a:p>
+                  </a:txBody>
+                  <a:tcPr marL="54864" marR="54864" marT="18288" marB="18288">
+                    <a:solidFill>
+                      <a:srgbClr val="FFFFFF"/>
+                    </a:solidFill>
+                  </a:tcPr>
+                </a:tc>
+                <a:tc>
+                  <a:txBody>
+                    <a:bodyPr wrap="square"/>
+                    <a:lstStyle/>
+                    <a:p>
+                      <a:r>
+                        <a:rPr sz="1100" b="0">
+                          <a:solidFill>
+                            <a:srgbClr val="282828"/>
+                          </a:solidFill>
+                          <a:latin typeface="Arial"/>
+                        </a:rPr>
+                        <a:t>35 µrad / 64 µrad</a:t>
+                      </a:r>
+                    </a:p>
+                  </a:txBody>
+                  <a:tcPr marL="54864" marR="54864" marT="18288" marB="18288">
+                    <a:solidFill>
+                      <a:srgbClr val="FFFFFF"/>
+                    </a:solidFill>
+                  </a:tcPr>
+                </a:tc>
+              </a:tr>
+              <a:tr h="280035">
+                <a:tc>
+                  <a:txBody>
+                    <a:bodyPr wrap="square"/>
+                    <a:lstStyle/>
+                    <a:p>
+                      <a:r>
+                        <a:rPr sz="1100" b="0">
+                          <a:solidFill>
+                            <a:srgbClr val="282828"/>
+                          </a:solidFill>
+                          <a:latin typeface="Arial"/>
+                        </a:rPr>
+                        <a:t>grating clocking, 10 µrad</a:t>
+                      </a:r>
+                    </a:p>
+                  </a:txBody>
+                  <a:tcPr marL="54864" marR="54864" marT="18288" marB="18288">
+                    <a:solidFill>
+                      <a:srgbClr val="ECF1F6"/>
+                    </a:solidFill>
+                  </a:tcPr>
+                </a:tc>
+                <a:tc>
+                  <a:txBody>
+                    <a:bodyPr wrap="square"/>
+                    <a:lstStyle/>
+                    <a:p>
+                      <a:r>
+                        <a:rPr sz="1100" b="0">
+                          <a:solidFill>
+                            <a:srgbClr val="282828"/>
+                          </a:solidFill>
+                          <a:latin typeface="Arial"/>
+                        </a:rPr>
+                        <a:t>–</a:t>
+                      </a:r>
+                    </a:p>
+                  </a:txBody>
+                  <a:tcPr marL="54864" marR="54864" marT="18288" marB="18288">
+                    <a:solidFill>
+                      <a:srgbClr val="ECF1F6"/>
+                    </a:solidFill>
+                  </a:tcPr>
+                </a:tc>
+                <a:tc>
+                  <a:txBody>
+                    <a:bodyPr wrap="square"/>
+                    <a:lstStyle/>
+                    <a:p>
+                      <a:r>
+                        <a:rPr sz="1100" b="0">
+                          <a:solidFill>
+                            <a:srgbClr val="282828"/>
+                          </a:solidFill>
+                          <a:latin typeface="Arial"/>
+                        </a:rPr>
+                        <a:t>–</a:t>
+                      </a:r>
+                    </a:p>
+                  </a:txBody>
+                  <a:tcPr marL="54864" marR="54864" marT="18288" marB="18288">
+                    <a:solidFill>
+                      <a:srgbClr val="ECF1F6"/>
+                    </a:solidFill>
+                  </a:tcPr>
+                </a:tc>
+                <a:tc>
+                  <a:txBody>
+                    <a:bodyPr wrap="square"/>
+                    <a:lstStyle/>
+                    <a:p>
+                      <a:r>
+                        <a:rPr sz="1100" b="0">
+                          <a:solidFill>
+                            <a:srgbClr val="282828"/>
+                          </a:solidFill>
+                          <a:latin typeface="Arial"/>
+                        </a:rPr>
+                        <a:t>0.0029</a:t>
+                      </a:r>
+                    </a:p>
+                  </a:txBody>
+                  <a:tcPr marL="54864" marR="54864" marT="18288" marB="18288">
+                    <a:solidFill>
+                      <a:srgbClr val="ECF1F6"/>
+                    </a:solidFill>
+                  </a:tcPr>
+                </a:tc>
+                <a:tc>
+                  <a:txBody>
+                    <a:bodyPr wrap="square"/>
+                    <a:lstStyle/>
+                    <a:p>
+                      <a:r>
+                        <a:rPr sz="1100" b="0">
+                          <a:solidFill>
+                            <a:srgbClr val="282828"/>
+                          </a:solidFill>
+                          <a:latin typeface="Arial"/>
+                        </a:rPr>
+                        <a:t>88 µrad / 162 µrad</a:t>
+                      </a:r>
+                    </a:p>
+                  </a:txBody>
+                  <a:tcPr marL="54864" marR="54864" marT="18288" marB="18288">
+                    <a:solidFill>
+                      <a:srgbClr val="ECF1F6"/>
+                    </a:solidFill>
+                  </a:tcPr>
+                </a:tc>
+              </a:tr>
+              <a:tr h="280035">
+                <a:tc>
+                  <a:txBody>
+                    <a:bodyPr wrap="square"/>
+                    <a:lstStyle/>
+                    <a:p>
+                      <a:r>
+                        <a:rPr sz="1100" b="0">
+                          <a:solidFill>
+                            <a:srgbClr val="282828"/>
+                          </a:solidFill>
+                          <a:latin typeface="Arial"/>
+                        </a:rPr>
+                        <a:t>grating radius dR/R 10⁻⁴</a:t>
+                      </a:r>
+                    </a:p>
+                  </a:txBody>
+                  <a:tcPr marL="54864" marR="54864" marT="18288" marB="18288">
+                    <a:solidFill>
+                      <a:srgbClr val="FFFFFF"/>
+                    </a:solidFill>
+                  </a:tcPr>
+                </a:tc>
+                <a:tc>
+                  <a:txBody>
+                    <a:bodyPr wrap="square"/>
+                    <a:lstStyle/>
+                    <a:p>
+                      <a:r>
+                        <a:rPr sz="1100" b="0">
+                          <a:solidFill>
+                            <a:srgbClr val="282828"/>
+                          </a:solidFill>
+                          <a:latin typeface="Arial"/>
+                        </a:rPr>
+                        <a:t>+1.93</a:t>
+                      </a:r>
+                    </a:p>
+                  </a:txBody>
+                  <a:tcPr marL="54864" marR="54864" marT="18288" marB="18288">
+                    <a:solidFill>
+                      <a:srgbClr val="FFFFFF"/>
+                    </a:solidFill>
+                  </a:tcPr>
+                </a:tc>
+                <a:tc>
+                  <a:txBody>
+                    <a:bodyPr wrap="square"/>
+                    <a:lstStyle/>
+                    <a:p>
+                      <a:r>
+                        <a:rPr sz="1100" b="0">
+                          <a:solidFill>
+                            <a:srgbClr val="282828"/>
+                          </a:solidFill>
+                          <a:latin typeface="Arial"/>
+                        </a:rPr>
+                        <a:t>+0.006</a:t>
+                      </a:r>
+                    </a:p>
+                  </a:txBody>
+                  <a:tcPr marL="54864" marR="54864" marT="18288" marB="18288">
+                    <a:solidFill>
+                      <a:srgbClr val="FFFFFF"/>
+                    </a:solidFill>
+                  </a:tcPr>
+                </a:tc>
+                <a:tc>
+                  <a:txBody>
+                    <a:bodyPr wrap="square"/>
+                    <a:lstStyle/>
+                    <a:p>
+                      <a:r>
+                        <a:rPr sz="1100" b="0">
+                          <a:solidFill>
+                            <a:srgbClr val="282828"/>
+                          </a:solidFill>
+                          <a:latin typeface="Arial"/>
+                        </a:rPr>
+                        <a:t>–</a:t>
+                      </a:r>
+                    </a:p>
+                  </a:txBody>
+                  <a:tcPr marL="54864" marR="54864" marT="18288" marB="18288">
+                    <a:solidFill>
+                      <a:srgbClr val="FFFFFF"/>
+                    </a:solidFill>
+                  </a:tcPr>
+                </a:tc>
+                <a:tc>
+                  <a:txBody>
+                    <a:bodyPr wrap="square"/>
+                    <a:lstStyle/>
+                    <a:p>
+                      <a:r>
+                        <a:rPr sz="1100" b="0">
+                          <a:solidFill>
+                            <a:srgbClr val="282828"/>
+                          </a:solidFill>
+                          <a:latin typeface="Arial"/>
+                        </a:rPr>
+                        <a:t>focus-compensated</a:t>
+                      </a:r>
+                    </a:p>
+                  </a:txBody>
+                  <a:tcPr marL="54864" marR="54864" marT="18288" marB="18288">
+                    <a:solidFill>
+                      <a:srgbClr val="FFFFFF"/>
+                    </a:solidFill>
+                  </a:tcPr>
+                </a:tc>
+              </a:tr>
+              <a:tr h="468630">
+                <a:tc>
+                  <a:txBody>
+                    <a:bodyPr wrap="square"/>
+                    <a:lstStyle/>
+                    <a:p>
+                      <a:r>
+                        <a:rPr sz="1100" b="0">
+                          <a:solidFill>
+                            <a:srgbClr val="282828"/>
+                          </a:solidFill>
+                          <a:latin typeface="Arial"/>
+                        </a:rPr>
+                        <a:t>lens radius, thickness; air space; slit, detector defocus</a:t>
+                      </a:r>
+                    </a:p>
+                  </a:txBody>
+                  <a:tcPr marL="54864" marR="54864" marT="18288" marB="18288">
+                    <a:solidFill>
+                      <a:srgbClr val="ECF1F6"/>
+                    </a:solidFill>
+                  </a:tcPr>
+                </a:tc>
+                <a:tc>
+                  <a:txBody>
+                    <a:bodyPr wrap="square"/>
+                    <a:lstStyle/>
+                    <a:p>
+                      <a:r>
+                        <a:rPr sz="1100" b="0">
+                          <a:solidFill>
+                            <a:srgbClr val="282828"/>
+                          </a:solidFill>
+                          <a:latin typeface="Arial"/>
+                        </a:rPr>
+                        <a:t>focus terms</a:t>
+                      </a:r>
+                    </a:p>
+                  </a:txBody>
+                  <a:tcPr marL="54864" marR="54864" marT="18288" marB="18288">
+                    <a:solidFill>
+                      <a:srgbClr val="ECF1F6"/>
+                    </a:solidFill>
+                  </a:tcPr>
+                </a:tc>
+                <a:tc>
+                  <a:txBody>
+                    <a:bodyPr wrap="square"/>
+                    <a:lstStyle/>
+                    <a:p>
+                      <a:r>
+                        <a:rPr sz="1100" b="0">
+                          <a:solidFill>
+                            <a:srgbClr val="282828"/>
+                          </a:solidFill>
+                          <a:latin typeface="Arial"/>
+                        </a:rPr>
+                        <a:t>≤ 0.006</a:t>
+                      </a:r>
+                    </a:p>
+                  </a:txBody>
+                  <a:tcPr marL="54864" marR="54864" marT="18288" marB="18288">
+                    <a:solidFill>
+                      <a:srgbClr val="ECF1F6"/>
+                    </a:solidFill>
+                  </a:tcPr>
+                </a:tc>
+                <a:tc>
+                  <a:txBody>
+                    <a:bodyPr wrap="square"/>
+                    <a:lstStyle/>
+                    <a:p>
+                      <a:r>
+                        <a:rPr sz="1100" b="0">
+                          <a:solidFill>
+                            <a:srgbClr val="282828"/>
+                          </a:solidFill>
+                          <a:latin typeface="Arial"/>
+                        </a:rPr>
+                        <a:t>–</a:t>
+                      </a:r>
+                    </a:p>
+                  </a:txBody>
+                  <a:tcPr marL="54864" marR="54864" marT="18288" marB="18288">
+                    <a:solidFill>
+                      <a:srgbClr val="ECF1F6"/>
+                    </a:solidFill>
+                  </a:tcPr>
+                </a:tc>
+                <a:tc>
+                  <a:txBody>
+                    <a:bodyPr wrap="square"/>
+                    <a:lstStyle/>
+                    <a:p>
+                      <a:r>
+                        <a:rPr sz="1100" b="0">
+                          <a:solidFill>
+                            <a:srgbClr val="282828"/>
+                          </a:solidFill>
+                          <a:latin typeface="Arial"/>
+                        </a:rPr>
+                        <a:t>focus-compensated</a:t>
+                      </a:r>
+                    </a:p>
+                  </a:txBody>
+                  <a:tcPr marL="54864" marR="54864" marT="18288" marB="18288">
+                    <a:solidFill>
+                      <a:srgbClr val="ECF1F6"/>
+                    </a:solidFill>
+                  </a:tcPr>
+                </a:tc>
+              </a:tr>
+              <a:tr h="280035">
+                <a:tc>
+                  <a:txBody>
+                    <a:bodyPr wrap="square"/>
+                    <a:lstStyle/>
+                    <a:p>
+                      <a:r>
+                        <a:rPr sz="1100" b="0">
+                          <a:solidFill>
+                            <a:srgbClr val="282828"/>
+                          </a:solidFill>
+                          <a:latin typeface="Arial"/>
+                        </a:rPr>
+                        <a:t>CaF</a:t>
+                      </a:r>
+                      <a:r>
+                        <a:rPr sz="1100" b="0" baseline="-25000">
+                          <a:solidFill>
+                            <a:srgbClr val="282828"/>
+                          </a:solidFill>
+                          <a:latin typeface="Arial"/>
+                        </a:rPr>
+                        <a:t>2</a:t>
+                      </a:r>
+                      <a:r>
+                        <a:rPr sz="1100" b="0">
+                          <a:solidFill>
+                            <a:srgbClr val="282828"/>
+                          </a:solidFill>
+                          <a:latin typeface="Arial"/>
+                        </a:rPr>
+                        <a:t> index, 10⁻⁵ (1 K)</a:t>
+                      </a:r>
+                    </a:p>
+                  </a:txBody>
+                  <a:tcPr marL="54864" marR="54864" marT="18288" marB="18288">
+                    <a:solidFill>
+                      <a:srgbClr val="FFFFFF"/>
+                    </a:solidFill>
+                  </a:tcPr>
+                </a:tc>
+                <a:tc>
+                  <a:txBody>
+                    <a:bodyPr wrap="square"/>
+                    <a:lstStyle/>
+                    <a:p>
+                      <a:r>
+                        <a:rPr sz="1100" b="0">
+                          <a:solidFill>
+                            <a:srgbClr val="282828"/>
+                          </a:solidFill>
+                          <a:latin typeface="Arial"/>
+                        </a:rPr>
+                        <a:t>+0.0014</a:t>
+                      </a:r>
+                    </a:p>
+                  </a:txBody>
+                  <a:tcPr marL="54864" marR="54864" marT="18288" marB="18288">
+                    <a:solidFill>
+                      <a:srgbClr val="FFFFFF"/>
+                    </a:solidFill>
+                  </a:tcPr>
+                </a:tc>
+                <a:tc>
+                  <a:txBody>
+                    <a:bodyPr wrap="square"/>
+                    <a:lstStyle/>
+                    <a:p>
+                      <a:r>
+                        <a:rPr sz="1100" b="0">
+                          <a:solidFill>
+                            <a:srgbClr val="282828"/>
+                          </a:solidFill>
+                          <a:latin typeface="Arial"/>
+                        </a:rPr>
+                        <a:t>–</a:t>
+                      </a:r>
+                    </a:p>
+                  </a:txBody>
+                  <a:tcPr marL="54864" marR="54864" marT="18288" marB="18288">
+                    <a:solidFill>
+                      <a:srgbClr val="FFFFFF"/>
+                    </a:solidFill>
+                  </a:tcPr>
+                </a:tc>
+                <a:tc>
+                  <a:txBody>
+                    <a:bodyPr wrap="square"/>
+                    <a:lstStyle/>
+                    <a:p>
+                      <a:r>
+                        <a:rPr sz="1100" b="0">
+                          <a:solidFill>
+                            <a:srgbClr val="282828"/>
+                          </a:solidFill>
+                          <a:latin typeface="Arial"/>
+                        </a:rPr>
+                        <a:t>–</a:t>
+                      </a:r>
+                    </a:p>
+                  </a:txBody>
+                  <a:tcPr marL="54864" marR="54864" marT="18288" marB="18288">
+                    <a:solidFill>
+                      <a:srgbClr val="FFFFFF"/>
+                    </a:solidFill>
+                  </a:tcPr>
+                </a:tc>
+                <a:tc>
+                  <a:txBody>
+                    <a:bodyPr wrap="square"/>
+                    <a:lstStyle/>
+                    <a:p>
+                      <a:r>
+                        <a:rPr sz="1100" b="0">
+                          <a:solidFill>
+                            <a:srgbClr val="282828"/>
+                          </a:solidFill>
+                          <a:latin typeface="Arial"/>
+                        </a:rPr>
+                        <a:t>negligible</a:t>
+                      </a:r>
+                    </a:p>
+                  </a:txBody>
+                  <a:tcPr marL="54864" marR="54864" marT="18288" marB="18288">
+                    <a:solidFill>
+                      <a:srgbClr val="FFFFFF"/>
+                    </a:solidFill>
+                  </a:tcPr>
+                </a:tc>
+              </a:tr>
+              <a:tr h="280035">
+                <a:tc>
+                  <a:txBody>
+                    <a:bodyPr wrap="square"/>
+                    <a:lstStyle/>
+                    <a:p>
+                      <a:r>
+                        <a:rPr sz="1100" b="0">
+                          <a:solidFill>
+                            <a:srgbClr val="282828"/>
+                          </a:solidFill>
+                          <a:latin typeface="Arial"/>
+                        </a:rPr>
+                        <a:t>CaF</a:t>
+                      </a:r>
+                      <a:r>
+                        <a:rPr sz="1100" b="0" baseline="-25000">
+                          <a:solidFill>
+                            <a:srgbClr val="282828"/>
+                          </a:solidFill>
+                          <a:latin typeface="Arial"/>
+                        </a:rPr>
+                        <a:t>2</a:t>
+                      </a:r>
+                      <a:r>
+                        <a:rPr sz="1100" b="0">
+                          <a:solidFill>
+                            <a:srgbClr val="282828"/>
+                          </a:solidFill>
+                          <a:latin typeface="Arial"/>
+                        </a:rPr>
+                        <a:t> radius + thickness per K (CTE)</a:t>
+                      </a:r>
+                    </a:p>
+                  </a:txBody>
+                  <a:tcPr marL="54864" marR="54864" marT="18288" marB="18288">
+                    <a:solidFill>
+                      <a:srgbClr val="ECF1F6"/>
+                    </a:solidFill>
+                  </a:tcPr>
+                </a:tc>
+                <a:tc>
+                  <a:txBody>
+                    <a:bodyPr wrap="square"/>
+                    <a:lstStyle/>
+                    <a:p>
+                      <a:r>
+                        <a:rPr sz="1100" b="0">
+                          <a:solidFill>
+                            <a:srgbClr val="282828"/>
+                          </a:solidFill>
+                          <a:latin typeface="Arial"/>
+                        </a:rPr>
+                        <a:t>+0.050 − 0.051</a:t>
+                      </a:r>
+                    </a:p>
+                  </a:txBody>
+                  <a:tcPr marL="54864" marR="54864" marT="18288" marB="18288">
+                    <a:solidFill>
+                      <a:srgbClr val="ECF1F6"/>
+                    </a:solidFill>
+                  </a:tcPr>
+                </a:tc>
+                <a:tc>
+                  <a:txBody>
+                    <a:bodyPr wrap="square"/>
+                    <a:lstStyle/>
+                    <a:p>
+                      <a:r>
+                        <a:rPr sz="1100" b="0">
+                          <a:solidFill>
+                            <a:srgbClr val="282828"/>
+                          </a:solidFill>
+                          <a:latin typeface="Arial"/>
+                        </a:rPr>
+                        <a:t>–</a:t>
+                      </a:r>
+                    </a:p>
+                  </a:txBody>
+                  <a:tcPr marL="54864" marR="54864" marT="18288" marB="18288">
+                    <a:solidFill>
+                      <a:srgbClr val="ECF1F6"/>
+                    </a:solidFill>
+                  </a:tcPr>
+                </a:tc>
+                <a:tc>
+                  <a:txBody>
+                    <a:bodyPr wrap="square"/>
+                    <a:lstStyle/>
+                    <a:p>
+                      <a:r>
+                        <a:rPr sz="1100" b="0">
+                          <a:solidFill>
+                            <a:srgbClr val="282828"/>
+                          </a:solidFill>
+                          <a:latin typeface="Arial"/>
+                        </a:rPr>
+                        <a:t>–</a:t>
+                      </a:r>
+                    </a:p>
+                  </a:txBody>
+                  <a:tcPr marL="54864" marR="54864" marT="18288" marB="18288">
+                    <a:solidFill>
+                      <a:srgbClr val="ECF1F6"/>
+                    </a:solidFill>
+                  </a:tcPr>
+                </a:tc>
+                <a:tc>
+                  <a:txBody>
+                    <a:bodyPr wrap="square"/>
+                    <a:lstStyle/>
+                    <a:p>
+                      <a:r>
+                        <a:rPr sz="1100" b="0">
+                          <a:solidFill>
+                            <a:srgbClr val="282828"/>
+                          </a:solidFill>
+                          <a:latin typeface="Arial"/>
+                        </a:rPr>
+                        <a:t>cancel</a:t>
+                      </a:r>
+                    </a:p>
+                  </a:txBody>
+                  <a:tcPr marL="54864" marR="54864" marT="18288" marB="18288">
+                    <a:solidFill>
+                      <a:srgbClr val="ECF1F6"/>
+                    </a:solidFill>
+                  </a:tcPr>
+                </a:tc>
+              </a:tr>
+              <a:tr h="468630">
+                <a:tc>
+                  <a:txBody>
+                    <a:bodyPr wrap="square"/>
+                    <a:lstStyle/>
+                    <a:p>
+                      <a:r>
+                        <a:rPr sz="1100" b="0">
+                          <a:solidFill>
+                            <a:srgbClr val="282828"/>
+                          </a:solidFill>
+                          <a:latin typeface="Arial"/>
+                        </a:rPr>
+                        <a:t>aluminum air space per K; N-BK7 grating radius per K</a:t>
+                      </a:r>
+                    </a:p>
+                  </a:txBody>
+                  <a:tcPr marL="54864" marR="54864" marT="18288" marB="18288">
+                    <a:solidFill>
+                      <a:srgbClr val="FFFFFF"/>
+                    </a:solidFill>
+                  </a:tcPr>
+                </a:tc>
+                <a:tc>
+                  <a:txBody>
+                    <a:bodyPr wrap="square"/>
+                    <a:lstStyle/>
+                    <a:p>
+                      <a:r>
+                        <a:rPr sz="1100" b="0">
+                          <a:solidFill>
+                            <a:srgbClr val="282828"/>
+                          </a:solidFill>
+                          <a:latin typeface="Arial"/>
+                        </a:rPr>
+                        <a:t>−0.22; +0.14</a:t>
+                      </a:r>
+                    </a:p>
+                  </a:txBody>
+                  <a:tcPr marL="54864" marR="54864" marT="18288" marB="18288">
+                    <a:solidFill>
+                      <a:srgbClr val="FFFFFF"/>
+                    </a:solidFill>
+                  </a:tcPr>
+                </a:tc>
+                <a:tc>
+                  <a:txBody>
+                    <a:bodyPr wrap="square"/>
+                    <a:lstStyle/>
+                    <a:p>
+                      <a:r>
+                        <a:rPr sz="1100" b="0">
+                          <a:solidFill>
+                            <a:srgbClr val="282828"/>
+                          </a:solidFill>
+                          <a:latin typeface="Arial"/>
+                        </a:rPr>
+                        <a:t>focus terms</a:t>
+                      </a:r>
+                    </a:p>
+                  </a:txBody>
+                  <a:tcPr marL="54864" marR="54864" marT="18288" marB="18288">
+                    <a:solidFill>
+                      <a:srgbClr val="FFFFFF"/>
+                    </a:solidFill>
+                  </a:tcPr>
+                </a:tc>
+                <a:tc>
+                  <a:txBody>
+                    <a:bodyPr wrap="square"/>
+                    <a:lstStyle/>
+                    <a:p>
+                      <a:r>
+                        <a:rPr sz="1100" b="0">
+                          <a:solidFill>
+                            <a:srgbClr val="282828"/>
+                          </a:solidFill>
+                          <a:latin typeface="Arial"/>
+                        </a:rPr>
+                        <a:t>–</a:t>
+                      </a:r>
+                    </a:p>
+                  </a:txBody>
+                  <a:tcPr marL="54864" marR="54864" marT="18288" marB="18288">
+                    <a:solidFill>
+                      <a:srgbClr val="FFFFFF"/>
+                    </a:solidFill>
+                  </a:tcPr>
+                </a:tc>
+                <a:tc>
+                  <a:txBody>
+                    <a:bodyPr wrap="square"/>
+                    <a:lstStyle/>
+                    <a:p>
+                      <a:r>
+                        <a:rPr sz="1100" b="0">
+                          <a:solidFill>
+                            <a:srgbClr val="282828"/>
+                          </a:solidFill>
+                          <a:latin typeface="Arial"/>
+                        </a:rPr>
+                        <a:t>refocus-compensated</a:t>
+                      </a:r>
+                    </a:p>
+                  </a:txBody>
+                  <a:tcPr marL="54864" marR="54864" marT="18288" marB="18288">
+                    <a:solidFill>
+                      <a:srgbClr val="FFFFFF"/>
+                    </a:solidFill>
+                  </a:tcPr>
+                </a:tc>
+              </a:tr>
+            </a:tbl>
+          </a:graphicData>
+        </a:graphic>
+      </p:graphicFrame>
       <p:sp>
         <p:nvSpPr>
-          <p:cNvPr id="4" name="TextBox 3"/>
+          <p:cNvPr id="5" name="TextBox 4"/>
           <p:cNvSpPr txBox="1"/>
           <p:nvPr/>
         </p:nvSpPr>
         <p:spPr>
           <a:xfrm>
-            <a:off x="411480" y="1298448"/>
+            <a:off x="411480" y="4810887"/>
             <a:ext cx="11368735" cy="274320"/>
           </a:xfrm>
           <a:prstGeom prst="rect">
@@ -10512,7 +11750,7 @@
                 </a:solidFill>
                 <a:latin typeface="Arial"/>
               </a:rPr>
-              <a:t>stop_info_set refused iElt ≥ nElt−2 and nElt ≤ 3</a:t>
+              <a:t>Keystone is lateral color: no compensator touches it.</a:t>
             </a:r>
             <a:r>
               <a:rPr sz="1500" b="0">
@@ -10521,7 +11759,7 @@
                 </a:solidFill>
                 <a:latin typeface="Arial"/>
               </a:rPr>
-              <a:t> — the original wrapper's range, with no engine reason — so macos.stop(2) failed on every M1-M2-M3-FP deck while the prescription keyword ApStop= and the CLI's STOP (1..nElt) accepted it.  The template worked around it with one deck per field until the fix.  Now the CLI's range; gate tStopReload/test_stop_accepts_the_secondary_of_a_four_element_deck.</a:t>
+              <a:t>  Smile is loose everywhere (≥ 300 µm or µrad).  Linearity at 2×: keystone vs decenter 1.10, CRF vs grating radius 1.03, SRF 2.6 (quadratic, and at the floor).</a:t>
             </a:r>
           </a:p>
           <a:p>
@@ -10546,7 +11784,7 @@
                 </a:solidFill>
                 <a:latin typeface="Arial"/>
               </a:rPr>
-              <a:t>Also from this round, in the tools:</a:t>
+              <a:t>The 1.5k Dyson</a:t>
             </a:r>
             <a:r>
               <a:rPr sz="1500" b="0">
@@ -10555,20 +11793,38 @@
                 </a:solidFill>
                 <a:latin typeface="Arial"/>
               </a:rPr>
-              <a:t> both launch conventions in the join scorer (dyson5_t5f, tel5f_launch), the per-field chief-angle components in every rung table, the spectrometer's chief-tilt diagnostic.</a:t>
+              <a:t> has the same pattern at twice the keystone sensitivity (1.82 × 10⁻³ px per µm: 13 µm for the paper's CBE, 25 µm for Joe).  </a:t>
+            </a:r>
+            <a:r>
+              <a:rPr sz="1500" b="1">
+                <a:solidFill>
+                  <a:srgbClr val="282828"/>
+                </a:solidFill>
+                <a:latin typeface="Arial"/>
+              </a:rPr>
+              <a:t>Option B</a:t>
+            </a:r>
+            <a:r>
+              <a:rPr sz="1500" b="0">
+                <a:solidFill>
+                  <a:srgbClr val="282828"/>
+                </a:solidFill>
+                <a:latin typeface="Arial"/>
+              </a:rPr>
+              <a:t> raises the keystone sensitivities 6–45 % (clocking most): 25 µm, 33 µrad, 64 µrad.</a:t>
             </a:r>
           </a:p>
         </p:txBody>
       </p:sp>
       <p:sp>
         <p:nvSpPr>
-          <p:cNvPr id="5" name="TextBox 4"/>
+          <p:cNvPr id="6" name="TextBox 5"/>
           <p:cNvSpPr txBox="1"/>
           <p:nvPr/>
         </p:nvSpPr>
         <p:spPr>
           <a:xfrm>
-            <a:off x="411480" y="3101339"/>
+            <a:off x="411480" y="6118479"/>
             <a:ext cx="11368735" cy="274320"/>
           </a:xfrm>
           <a:prstGeom prst="rect">
@@ -10594,7 +11850,7 @@
                 </a:solidFill>
                 <a:latin typeface="Arial"/>
               </a:rPr>
-              <a:t>macos a09cd59; resources 9845c2d.</a:t>
+              <a:t>REPORT_dyson5_spec.md; 21 rows; the paper's Option A as-built keystone 5.7 % of a pixel = 1.03 µm (Table 2).  Compensator residuals for focus alone and focus + x/y are both in the report (x/y adds nothing: the metrics are relative).</a:t>
             </a:r>
           </a:p>
         </p:txBody>
@@ -10651,7 +11907,7 @@
                 </a:solidFill>
                 <a:latin typeface="Arial"/>
               </a:rPr>
-              <a:t>Records behind each slide</a:t>
+              <a:t>An engine finding from this round</a:t>
             </a:r>
           </a:p>
           <a:p>
@@ -10667,7 +11923,7 @@
                 </a:solidFill>
                 <a:latin typeface="Arial"/>
               </a:rPr>
-              <a:t>Every number traces to a runner stage and its record file</a:t>
+              <a:t>The api refused an element stop on the secondary of a four-element telescope</a:t>
             </a:r>
           </a:p>
         </p:txBody>
@@ -10716,6 +11972,253 @@
           </a:p>
         </p:txBody>
       </p:sp>
+      <p:sp>
+        <p:nvSpPr>
+          <p:cNvPr id="4" name="TextBox 3"/>
+          <p:cNvSpPr txBox="1"/>
+          <p:nvPr/>
+        </p:nvSpPr>
+        <p:spPr>
+          <a:xfrm>
+            <a:off x="411480" y="1298448"/>
+            <a:ext cx="11368735" cy="274320"/>
+          </a:xfrm>
+          <a:prstGeom prst="rect">
+            <a:avLst/>
+          </a:prstGeom>
+          <a:noFill/>
+        </p:spPr>
+        <p:txBody>
+          <a:bodyPr wrap="square">
+            <a:spAutoFit/>
+          </a:bodyPr>
+          <a:lstStyle/>
+          <a:p>
+            <a:pPr>
+              <a:spcAft>
+                <a:spcPts val="600"/>
+              </a:spcAft>
+            </a:pPr>
+            <a:r>
+              <a:rPr sz="1500" b="0">
+                <a:solidFill>
+                  <a:srgbClr val="282828"/>
+                </a:solidFill>
+                <a:latin typeface="Arial"/>
+              </a:rPr>
+              <a:t>•  </a:t>
+            </a:r>
+            <a:r>
+              <a:rPr sz="1500" b="1">
+                <a:solidFill>
+                  <a:srgbClr val="282828"/>
+                </a:solidFill>
+                <a:latin typeface="Arial"/>
+              </a:rPr>
+              <a:t>stop_info_set refused iElt ≥ nElt−2 and nElt ≤ 3</a:t>
+            </a:r>
+            <a:r>
+              <a:rPr sz="1500" b="0">
+                <a:solidFill>
+                  <a:srgbClr val="282828"/>
+                </a:solidFill>
+                <a:latin typeface="Arial"/>
+              </a:rPr>
+              <a:t> — the original wrapper's range, with no engine reason — so macos.stop(2) failed on every M1-M2-M3-FP deck while the prescription keyword ApStop= and the CLI's STOP (1..nElt) accepted it.  The template worked around it with one deck per field until the fix.  Now the CLI's range; gate tStopReload/test_stop_accepts_the_secondary_of_a_four_element_deck.</a:t>
+            </a:r>
+          </a:p>
+          <a:p>
+            <a:pPr>
+              <a:spcAft>
+                <a:spcPts val="600"/>
+              </a:spcAft>
+            </a:pPr>
+            <a:r>
+              <a:rPr sz="1500" b="0">
+                <a:solidFill>
+                  <a:srgbClr val="282828"/>
+                </a:solidFill>
+                <a:latin typeface="Arial"/>
+              </a:rPr>
+              <a:t>•  </a:t>
+            </a:r>
+            <a:r>
+              <a:rPr sz="1500" b="1">
+                <a:solidFill>
+                  <a:srgbClr val="282828"/>
+                </a:solidFill>
+                <a:latin typeface="Arial"/>
+              </a:rPr>
+              <a:t>Also from this round, in the tools:</a:t>
+            </a:r>
+            <a:r>
+              <a:rPr sz="1500" b="0">
+                <a:solidFill>
+                  <a:srgbClr val="282828"/>
+                </a:solidFill>
+                <a:latin typeface="Arial"/>
+              </a:rPr>
+              <a:t> both launch conventions in the join scorer (dyson5_t5f, tel5f_launch), the per-field chief-angle components in every rung table, the spectrometer's chief-tilt diagnostic.</a:t>
+            </a:r>
+          </a:p>
+        </p:txBody>
+      </p:sp>
+      <p:sp>
+        <p:nvSpPr>
+          <p:cNvPr id="5" name="TextBox 4"/>
+          <p:cNvSpPr txBox="1"/>
+          <p:nvPr/>
+        </p:nvSpPr>
+        <p:spPr>
+          <a:xfrm>
+            <a:off x="411480" y="3101339"/>
+            <a:ext cx="11368735" cy="274320"/>
+          </a:xfrm>
+          <a:prstGeom prst="rect">
+            <a:avLst/>
+          </a:prstGeom>
+          <a:noFill/>
+        </p:spPr>
+        <p:txBody>
+          <a:bodyPr wrap="square">
+            <a:spAutoFit/>
+          </a:bodyPr>
+          <a:lstStyle/>
+          <a:p>
+            <a:pPr>
+              <a:spcAft>
+                <a:spcPts val="600"/>
+              </a:spcAft>
+            </a:pPr>
+            <a:r>
+              <a:rPr sz="1050" b="0">
+                <a:solidFill>
+                  <a:srgbClr val="6E6E6E"/>
+                </a:solidFill>
+                <a:latin typeface="Arial"/>
+              </a:rPr>
+              <a:t>macos a09cd59; resources 9845c2d.</a:t>
+            </a:r>
+          </a:p>
+        </p:txBody>
+      </p:sp>
+    </p:spTree>
+  </p:cSld>
+  <p:clrMapOvr>
+    <a:masterClrMapping/>
+  </p:clrMapOvr>
+</p:sld>
+</file>
+
+<file path=ppt/slides/slide23.xml><?xml version="1.0" encoding="utf-8"?>
+<p:sld xmlns:a="http://schemas.openxmlformats.org/drawingml/2006/main" xmlns:p="http://schemas.openxmlformats.org/presentationml/2006/main" xmlns:r="http://schemas.openxmlformats.org/officeDocument/2006/relationships">
+  <p:cSld>
+    <p:spTree>
+      <p:nvGrpSpPr>
+        <p:cNvPr id="1" name=""/>
+        <p:cNvGrpSpPr/>
+        <p:nvPr/>
+      </p:nvGrpSpPr>
+      <p:grpSpPr/>
+      <p:sp>
+        <p:nvSpPr>
+          <p:cNvPr id="2" name="TextBox 1"/>
+          <p:cNvSpPr txBox="1"/>
+          <p:nvPr/>
+        </p:nvSpPr>
+        <p:spPr>
+          <a:xfrm>
+            <a:off x="411480" y="201168"/>
+            <a:ext cx="11368735" cy="914400"/>
+          </a:xfrm>
+          <a:prstGeom prst="rect">
+            <a:avLst/>
+          </a:prstGeom>
+          <a:noFill/>
+        </p:spPr>
+        <p:txBody>
+          <a:bodyPr wrap="square">
+            <a:spAutoFit/>
+          </a:bodyPr>
+          <a:lstStyle/>
+          <a:p>
+            <a:pPr>
+              <a:spcAft>
+                <a:spcPts val="400"/>
+              </a:spcAft>
+            </a:pPr>
+            <a:r>
+              <a:rPr sz="2400" b="1">
+                <a:solidFill>
+                  <a:srgbClr val="1F4E79"/>
+                </a:solidFill>
+                <a:latin typeface="Arial"/>
+              </a:rPr>
+              <a:t>Records behind each slide</a:t>
+            </a:r>
+          </a:p>
+          <a:p>
+            <a:pPr>
+              <a:spcAft>
+                <a:spcPts val="0"/>
+              </a:spcAft>
+            </a:pPr>
+            <a:r>
+              <a:rPr sz="1250" b="0">
+                <a:solidFill>
+                  <a:srgbClr val="6E6E6E"/>
+                </a:solidFill>
+                <a:latin typeface="Arial"/>
+              </a:rPr>
+              <a:t>Every number traces to a runner stage and its record file</a:t>
+            </a:r>
+          </a:p>
+        </p:txBody>
+      </p:sp>
+      <p:sp>
+        <p:nvSpPr>
+          <p:cNvPr id="3" name="Rectangle 2"/>
+          <p:cNvSpPr/>
+          <p:nvPr/>
+        </p:nvSpPr>
+        <p:spPr>
+          <a:xfrm>
+            <a:off x="411480" y="1133856"/>
+            <a:ext cx="11368735" cy="20320"/>
+          </a:xfrm>
+          <a:prstGeom prst="rect">
+            <a:avLst/>
+          </a:prstGeom>
+          <a:solidFill>
+            <a:srgbClr val="B8C6D4"/>
+          </a:solidFill>
+          <a:ln>
+            <a:noFill/>
+          </a:ln>
+          <a:effectLst/>
+        </p:spPr>
+        <p:style>
+          <a:lnRef idx="1">
+            <a:schemeClr val="accent1"/>
+          </a:lnRef>
+          <a:fillRef idx="3">
+            <a:schemeClr val="accent1"/>
+          </a:fillRef>
+          <a:effectRef idx="2">
+            <a:schemeClr val="accent1"/>
+          </a:effectRef>
+          <a:fontRef idx="minor">
+            <a:schemeClr val="lt1"/>
+          </a:fontRef>
+        </p:style>
+        <p:txBody>
+          <a:bodyPr rtlCol="0" anchor="ctr"/>
+          <a:lstStyle/>
+          <a:p>
+            <a:pPr algn="ctr"/>
+          </a:p>
+        </p:txBody>
+      </p:sp>
       <p:graphicFrame>
         <p:nvGraphicFramePr>
           <p:cNvPr id="4" name="Table 3"/>
@@ -11049,7 +12552,7 @@
                           </a:solidFill>
                           <a:latin typeface="Arial"/>
                         </a:rPr>
-                        <a:t>dyson5_jim_3a.txt; BRIEF_to_dyson5.md addendum 49</a:t>
+                        <a:t>dyson5_jim_3a.txt; REPORT_dyson5_spec.md; spectrometer_sens, tSpectrometerSens; BRIEF_to_dyson5.md addendum 49</a:t>
                       </a:r>
                     </a:p>
                   </a:txBody>

--- a/demo_session/deck_dyson_3k_edit.pptx
+++ b/demo_session/deck_dyson_3k_edit.pptx
@@ -30,6 +30,7 @@
     <p:sldId id="278" r:id="rId29"/>
     <p:sldId id="279" r:id="rId30"/>
     <p:sldId id="280" r:id="rId31"/>
+    <p:sldId id="281" r:id="rId32"/>
   </p:sldIdLst>
   <p:sldSz cx="12191695" cy="6858000" type="screen4x3"/>
   <p:notesSz cx="6858000" cy="9144000"/>
@@ -7356,7 +7357,7 @@
                 </a:solidFill>
                 <a:latin typeface="Arial"/>
               </a:rPr>
-              <a:t>REPORT_dyson5_spec.md (the ladder, 3k and 1.5k, Option B and its ladder); spectrometer_sens, gate tSpectrometerSens.  The compensator residuals are given for detector focus alone and focus + x/y.  A full every-CTE soak is the next row.  Throughput by band follows.</a:t>
+              <a:t>REPORT_dyson5_spec.md (the ladder, 3k and 1.5k, Option B and its ladder); spectrometer_sens, gate tSpectrometerSens.  The compensator residuals are given for detector focus alone and focus + x/y.  A full every-CTE soak is the next row.  Throughput by band: next slide.</a:t>
             </a:r>
           </a:p>
         </p:txBody>
@@ -7413,7 +7414,7 @@
                 </a:solidFill>
                 <a:latin typeface="Arial"/>
               </a:rPr>
-              <a:t>Two of 3k or four of 1.5k, updated</a:t>
+              <a:t>Throughput by band, and the blaze</a:t>
             </a:r>
           </a:p>
           <a:p>
@@ -7429,7 +7430,34 @@
                 </a:solidFill>
                 <a:latin typeface="Arial"/>
               </a:rPr>
-              <a:t>Both modules now image at the pixel end to end; the trade is labor, detectors and integration, not optics or glass — and Jim's and the paper's answer is two</a:t>
+              <a:t>Six air-glass crossings pass 0.82 uncoated in every band; a single quarter-wave </a:t>
+            </a:r>
+            <a:r>
+              <a:rPr sz="1250" b="0">
+                <a:solidFill>
+                  <a:srgbClr val="6E6E6E"/>
+                </a:solidFill>
+                <a:latin typeface="Arial"/>
+              </a:rPr>
+              <a:t>MgF</a:t>
+            </a:r>
+            <a:r>
+              <a:rPr sz="1250" b="0" baseline="-25000">
+                <a:solidFill>
+                  <a:srgbClr val="6E6E6E"/>
+                </a:solidFill>
+                <a:latin typeface="Arial"/>
+              </a:rPr>
+              <a:t>2</a:t>
+            </a:r>
+            <a:r>
+              <a:rPr sz="1250" b="0">
+                <a:solidFill>
+                  <a:srgbClr val="6E6E6E"/>
+                </a:solidFill>
+                <a:latin typeface="Arial"/>
+              </a:rPr>
+              <a:t> centered at 2.2 µm lifts the long band to 0.87 and costs nothing elsewhere, where a two-layer tuned to 1 µm trades the band ends for the middle; the grating's blaze is the lever that moves photons to the long end</a:t>
             </a:r>
           </a:p>
         </p:txBody>
@@ -7488,7 +7516,7 @@
         </p:nvGraphicFramePr>
         <p:xfrm>
           <a:off x="411480" y="1298448"/>
-          <a:ext cx="11368734" cy="4017645"/>
+          <a:ext cx="11368732" cy="1960245"/>
         </p:xfrm>
         <a:graphic>
           <a:graphicData uri="http://schemas.openxmlformats.org/drawingml/2006/table">
@@ -7497,16 +7525,28 @@
                 <a:tableStyleId>{5C22544A-7EE6-4342-B048-85BDC9FD1C3A}</a:tableStyleId>
               </a:tblPr>
               <a:tblGrid>
-                <a:gridCol w="3904414"/>
-                <a:gridCol w="3789578"/>
-                <a:gridCol w="3674742"/>
+                <a:gridCol w="5916371"/>
+                <a:gridCol w="1453895"/>
+                <a:gridCol w="1453895"/>
+                <a:gridCol w="1453895"/>
+                <a:gridCol w="1090676"/>
               </a:tblGrid>
               <a:tr h="280035">
                 <a:tc>
                   <a:txBody>
                     <a:bodyPr wrap="square"/>
                     <a:lstStyle/>
-                    <a:p/>
+                    <a:p>
+                      <a:r>
+                        <a:rPr sz="1100" b="1">
+                          <a:solidFill>
+                            <a:srgbClr val="FFFFFF"/>
+                          </a:solidFill>
+                          <a:latin typeface="Arial"/>
+                        </a:rPr>
+                        <a:t>module, coating on all six crossings</a:t>
+                      </a:r>
+                    </a:p>
                   </a:txBody>
                   <a:tcPr marL="54864" marR="54864" marT="18288" marB="18288">
                     <a:solidFill>
@@ -7526,8 +7566,21 @@
                           </a:solidFill>
                           <a:latin typeface="Arial"/>
                         </a:rPr>
-                        <a:t>2 × </a:t>
-                      </a:r>
+                        <a:t>380–700 nm</a:t>
+                      </a:r>
+                    </a:p>
+                  </a:txBody>
+                  <a:tcPr marL="54864" marR="54864" marT="18288" marB="18288">
+                    <a:solidFill>
+                      <a:srgbClr val="1F4E79"/>
+                    </a:solidFill>
+                  </a:tcPr>
+                </a:tc>
+                <a:tc>
+                  <a:txBody>
+                    <a:bodyPr wrap="square"/>
+                    <a:lstStyle/>
+                    <a:p>
                       <a:r>
                         <a:rPr sz="1100" b="1">
                           <a:solidFill>
@@ -7535,17 +7588,43 @@
                           </a:solidFill>
                           <a:latin typeface="Arial"/>
                         </a:rPr>
-                        <a:t>CaF</a:t>
-                      </a:r>
-                      <a:r>
-                        <a:rPr sz="1100" b="1" baseline="-25000">
+                        <a:t>700–1300 nm</a:t>
+                      </a:r>
+                    </a:p>
+                  </a:txBody>
+                  <a:tcPr marL="54864" marR="54864" marT="18288" marB="18288">
+                    <a:solidFill>
+                      <a:srgbClr val="1F4E79"/>
+                    </a:solidFill>
+                  </a:tcPr>
+                </a:tc>
+                <a:tc>
+                  <a:txBody>
+                    <a:bodyPr wrap="square"/>
+                    <a:lstStyle/>
+                    <a:p>
+                      <a:r>
+                        <a:rPr sz="1100" b="1">
                           <a:solidFill>
                             <a:srgbClr val="FFFFFF"/>
                           </a:solidFill>
                           <a:latin typeface="Arial"/>
                         </a:rPr>
-                        <a:t>2</a:t>
-                      </a:r>
+                        <a:t>1300–2500 nm</a:t>
+                      </a:r>
+                    </a:p>
+                  </a:txBody>
+                  <a:tcPr marL="54864" marR="54864" marT="18288" marB="18288">
+                    <a:solidFill>
+                      <a:srgbClr val="1F4E79"/>
+                    </a:solidFill>
+                  </a:tcPr>
+                </a:tc>
+                <a:tc>
+                  <a:txBody>
+                    <a:bodyPr wrap="square"/>
+                    <a:lstStyle/>
+                    <a:p>
                       <a:r>
                         <a:rPr sz="1100" b="1">
                           <a:solidFill>
@@ -7553,29 +7632,7 @@
                           </a:solidFill>
                           <a:latin typeface="Arial"/>
                         </a:rPr>
-                        <a:t>, 3k, 54 mm slit</a:t>
-                      </a:r>
-                    </a:p>
-                  </a:txBody>
-                  <a:tcPr marL="54864" marR="54864" marT="18288" marB="18288">
-                    <a:solidFill>
-                      <a:srgbClr val="1F4E79"/>
-                    </a:solidFill>
-                  </a:tcPr>
-                </a:tc>
-                <a:tc>
-                  <a:txBody>
-                    <a:bodyPr wrap="square"/>
-                    <a:lstStyle/>
-                    <a:p>
-                      <a:r>
-                        <a:rPr sz="1100" b="1">
-                          <a:solidFill>
-                            <a:srgbClr val="FFFFFF"/>
-                          </a:solidFill>
-                          <a:latin typeface="Arial"/>
-                        </a:rPr>
-                        <a:t>4 × fused silica, 1.5k, 27 mm slit</a:t>
+                        <a:t>380–2500 mean</a:t>
                       </a:r>
                     </a:p>
                   </a:txBody>
@@ -7599,7 +7656,34 @@
                           </a:solidFill>
                           <a:latin typeface="Arial"/>
                         </a:rPr>
-                        <a:t>block radius = thickness</a:t>
+                        <a:t>3k </a:t>
+                      </a:r>
+                      <a:r>
+                        <a:rPr sz="1100" b="0">
+                          <a:solidFill>
+                            <a:srgbClr val="282828"/>
+                          </a:solidFill>
+                          <a:latin typeface="Arial"/>
+                        </a:rPr>
+                        <a:t>CaF</a:t>
+                      </a:r>
+                      <a:r>
+                        <a:rPr sz="1100" b="0" baseline="-25000">
+                          <a:solidFill>
+                            <a:srgbClr val="282828"/>
+                          </a:solidFill>
+                          <a:latin typeface="Arial"/>
+                        </a:rPr>
+                        <a:t>2</a:t>
+                      </a:r>
+                      <a:r>
+                        <a:rPr sz="1100" b="0">
+                          <a:solidFill>
+                            <a:srgbClr val="282828"/>
+                          </a:solidFill>
+                          <a:latin typeface="Arial"/>
+                        </a:rPr>
+                        <a:t>, uncoated</a:t>
                       </a:r>
                     </a:p>
                   </a:txBody>
@@ -7621,7 +7705,7 @@
                           </a:solidFill>
                           <a:latin typeface="Arial"/>
                         </a:rPr>
-                        <a:t>240 mm</a:t>
+                        <a:t>0.817</a:t>
                       </a:r>
                     </a:p>
                   </a:txBody>
@@ -7643,7 +7727,7 @@
                           </a:solidFill>
                           <a:latin typeface="Arial"/>
                         </a:rPr>
-                        <a:t>130 mm</a:t>
+                        <a:t>0.822</a:t>
                       </a:r>
                     </a:p>
                   </a:txBody>
@@ -7653,89 +7737,19 @@
                     </a:solidFill>
                   </a:tcPr>
                 </a:tc>
-              </a:tr>
-              <a:tr h="468630">
-                <a:tc>
-                  <a:txBody>
-                    <a:bodyPr wrap="square"/>
-                    <a:lstStyle/>
-                    <a:p>
-                      <a:r>
-                        <a:rPr sz="1100" b="0">
-                          <a:solidFill>
-                            <a:srgbClr val="282828"/>
-                          </a:solidFill>
-                          <a:latin typeface="Arial"/>
-                        </a:rPr>
-                        <a:t>spectrometer alone: smile / keystone / CRF / SRF / energy in a pixel</a:t>
-                      </a:r>
-                    </a:p>
-                  </a:txBody>
-                  <a:tcPr marL="54864" marR="54864" marT="18288" marB="18288">
-                    <a:solidFill>
-                      <a:srgbClr val="ECF1F6"/>
-                    </a:solidFill>
-                  </a:tcPr>
-                </a:tc>
-                <a:tc>
-                  <a:txBody>
-                    <a:bodyPr wrap="square"/>
-                    <a:lstStyle/>
-                    <a:p>
-                      <a:r>
-                        <a:rPr sz="1100" b="0">
-                          <a:solidFill>
-                            <a:srgbClr val="282828"/>
-                          </a:solidFill>
-                          <a:latin typeface="Arial"/>
-                        </a:rPr>
-                        <a:t>0.005 / 0.006 / 1.21 / 2.02 px / 0.82</a:t>
-                      </a:r>
-                    </a:p>
-                  </a:txBody>
-                  <a:tcPr marL="54864" marR="54864" marT="18288" marB="18288">
-                    <a:solidFill>
-                      <a:srgbClr val="ECF1F6"/>
-                    </a:solidFill>
-                  </a:tcPr>
-                </a:tc>
-                <a:tc>
-                  <a:txBody>
-                    <a:bodyPr wrap="square"/>
-                    <a:lstStyle/>
-                    <a:p>
-                      <a:r>
-                        <a:rPr sz="1100" b="0">
-                          <a:solidFill>
-                            <a:srgbClr val="282828"/>
-                          </a:solidFill>
-                          <a:latin typeface="Arial"/>
-                        </a:rPr>
-                        <a:t>0.007 / 0.009 / 1.03 / 2.02 px / 1.00</a:t>
-                      </a:r>
-                    </a:p>
-                  </a:txBody>
-                  <a:tcPr marL="54864" marR="54864" marT="18288" marB="18288">
-                    <a:solidFill>
-                      <a:srgbClr val="ECF1F6"/>
-                    </a:solidFill>
-                  </a:tcPr>
-                </a:tc>
-              </a:tr>
-              <a:tr h="468630">
-                <a:tc>
-                  <a:txBody>
-                    <a:bodyPr wrap="square"/>
-                    <a:lstStyle/>
-                    <a:p>
-                      <a:r>
-                        <a:rPr sz="1100" b="0">
-                          <a:solidFill>
-                            <a:srgbClr val="282828"/>
-                          </a:solidFill>
-                          <a:latin typeface="Arial"/>
-                        </a:rPr>
-                        <a:t>telescope</a:t>
+                <a:tc>
+                  <a:txBody>
+                    <a:bodyPr wrap="square"/>
+                    <a:lstStyle/>
+                    <a:p>
+                      <a:r>
+                        <a:rPr sz="1100" b="0">
+                          <a:solidFill>
+                            <a:srgbClr val="282828"/>
+                          </a:solidFill>
+                          <a:latin typeface="Arial"/>
+                        </a:rPr>
+                        <a:t>0.827</a:t>
                       </a:r>
                     </a:p>
                   </a:txBody>
@@ -7757,29 +7771,7 @@
                           </a:solidFill>
                           <a:latin typeface="Arial"/>
                         </a:rPr>
-                        <a:t>freeform three-mirror of the SBG form (R9): 1.02 px at every field</a:t>
-                      </a:r>
-                    </a:p>
-                  </a:txBody>
-                  <a:tcPr marL="54864" marR="54864" marT="18288" marB="18288">
-                    <a:solidFill>
-                      <a:srgbClr val="FFFFFF"/>
-                    </a:solidFill>
-                  </a:tcPr>
-                </a:tc>
-                <a:tc>
-                  <a:txBody>
-                    <a:bodyPr wrap="square"/>
-                    <a:lstStyle/>
-                    <a:p>
-                      <a:r>
-                        <a:rPr sz="1100" b="0">
-                          <a:solidFill>
-                            <a:srgbClr val="282828"/>
-                          </a:solidFill>
-                          <a:latin typeface="Arial"/>
-                        </a:rPr>
-                        <a:t>three off-axis aspheres: 0.4 px center, 0.8 px at the strip ends</a:t>
+                        <a:t>0.822</a:t>
                       </a:r>
                     </a:p>
                   </a:txBody>
@@ -7803,7 +7795,61 @@
                           </a:solidFill>
                           <a:latin typeface="Arial"/>
                         </a:rPr>
-                        <a:t>end to end: smile / keystone / CRF / SRF</a:t>
+                        <a:t>3k </a:t>
+                      </a:r>
+                      <a:r>
+                        <a:rPr sz="1100" b="0">
+                          <a:solidFill>
+                            <a:srgbClr val="282828"/>
+                          </a:solidFill>
+                          <a:latin typeface="Arial"/>
+                        </a:rPr>
+                        <a:t>CaF</a:t>
+                      </a:r>
+                      <a:r>
+                        <a:rPr sz="1100" b="0" baseline="-25000">
+                          <a:solidFill>
+                            <a:srgbClr val="282828"/>
+                          </a:solidFill>
+                          <a:latin typeface="Arial"/>
+                        </a:rPr>
+                        <a:t>2</a:t>
+                      </a:r>
+                      <a:r>
+                        <a:rPr sz="1100" b="0">
+                          <a:solidFill>
+                            <a:srgbClr val="282828"/>
+                          </a:solidFill>
+                          <a:latin typeface="Arial"/>
+                        </a:rPr>
+                        <a:t>, </a:t>
+                      </a:r>
+                      <a:r>
+                        <a:rPr sz="1100" b="0">
+                          <a:solidFill>
+                            <a:srgbClr val="282828"/>
+                          </a:solidFill>
+                          <a:latin typeface="Arial"/>
+                        </a:rPr>
+                        <a:t>MgF</a:t>
+                      </a:r>
+                      <a:r>
+                        <a:rPr sz="1100" b="0" baseline="-25000">
+                          <a:solidFill>
+                            <a:srgbClr val="282828"/>
+                          </a:solidFill>
+                          <a:latin typeface="Arial"/>
+                        </a:rPr>
+                        <a:t>2</a:t>
+                      </a:r>
+                      <a:r>
+                        <a:rPr sz="1100" b="0">
+                          <a:solidFill>
+                            <a:srgbClr val="282828"/>
+                          </a:solidFill>
+                          <a:latin typeface="Arial"/>
+                        </a:rPr>
+                        <a:t> quarter wave at 2.2 µm</a:t>
                       </a:r>
                     </a:p>
                   </a:txBody>
@@ -7825,7 +7871,7 @@
                           </a:solidFill>
                           <a:latin typeface="Arial"/>
                         </a:rPr>
-                        <a:t>0.02 / 0.006 / 1.17 / 2.025 px</a:t>
+                        <a:t>0.852</a:t>
                       </a:r>
                     </a:p>
                   </a:txBody>
@@ -7847,7 +7893,51 @@
                           </a:solidFill>
                           <a:latin typeface="Arial"/>
                         </a:rPr>
-                        <a:t>0.50 / 0.01 / 1.22 / 2.20 px</a:t>
+                        <a:t>0.844</a:t>
+                      </a:r>
+                    </a:p>
+                  </a:txBody>
+                  <a:tcPr marL="54864" marR="54864" marT="18288" marB="18288">
+                    <a:solidFill>
+                      <a:srgbClr val="ECF1F6"/>
+                    </a:solidFill>
+                  </a:tcPr>
+                </a:tc>
+                <a:tc>
+                  <a:txBody>
+                    <a:bodyPr wrap="square"/>
+                    <a:lstStyle/>
+                    <a:p>
+                      <a:r>
+                        <a:rPr sz="1100" b="0">
+                          <a:solidFill>
+                            <a:srgbClr val="282828"/>
+                          </a:solidFill>
+                          <a:latin typeface="Arial"/>
+                        </a:rPr>
+                        <a:t>0.869</a:t>
+                      </a:r>
+                    </a:p>
+                  </a:txBody>
+                  <a:tcPr marL="54864" marR="54864" marT="18288" marB="18288">
+                    <a:solidFill>
+                      <a:srgbClr val="ECF1F6"/>
+                    </a:solidFill>
+                  </a:tcPr>
+                </a:tc>
+                <a:tc>
+                  <a:txBody>
+                    <a:bodyPr wrap="square"/>
+                    <a:lstStyle/>
+                    <a:p>
+                      <a:r>
+                        <a:rPr sz="1100" b="0">
+                          <a:solidFill>
+                            <a:srgbClr val="282828"/>
+                          </a:solidFill>
+                          <a:latin typeface="Arial"/>
+                        </a:rPr>
+                        <a:t>0.855</a:t>
                       </a:r>
                     </a:p>
                   </a:txBody>
@@ -7871,7 +7961,61 @@
                           </a:solidFill>
                           <a:latin typeface="Arial"/>
                         </a:rPr>
-                        <a:t>end to end: energy in one pixel</a:t>
+                        <a:t>3k </a:t>
+                      </a:r>
+                      <a:r>
+                        <a:rPr sz="1100" b="0">
+                          <a:solidFill>
+                            <a:srgbClr val="282828"/>
+                          </a:solidFill>
+                          <a:latin typeface="Arial"/>
+                        </a:rPr>
+                        <a:t>CaF</a:t>
+                      </a:r>
+                      <a:r>
+                        <a:rPr sz="1100" b="0" baseline="-25000">
+                          <a:solidFill>
+                            <a:srgbClr val="282828"/>
+                          </a:solidFill>
+                          <a:latin typeface="Arial"/>
+                        </a:rPr>
+                        <a:t>2</a:t>
+                      </a:r>
+                      <a:r>
+                        <a:rPr sz="1100" b="0">
+                          <a:solidFill>
+                            <a:srgbClr val="282828"/>
+                          </a:solidFill>
+                          <a:latin typeface="Arial"/>
+                        </a:rPr>
+                        <a:t>, </a:t>
+                      </a:r>
+                      <a:r>
+                        <a:rPr sz="1100" b="0">
+                          <a:solidFill>
+                            <a:srgbClr val="282828"/>
+                          </a:solidFill>
+                          <a:latin typeface="Arial"/>
+                        </a:rPr>
+                        <a:t>MgF</a:t>
+                      </a:r>
+                      <a:r>
+                        <a:rPr sz="1100" b="0" baseline="-25000">
+                          <a:solidFill>
+                            <a:srgbClr val="282828"/>
+                          </a:solidFill>
+                          <a:latin typeface="Arial"/>
+                        </a:rPr>
+                        <a:t>2</a:t>
+                      </a:r>
+                      <a:r>
+                        <a:rPr sz="1100" b="0">
+                          <a:solidFill>
+                            <a:srgbClr val="282828"/>
+                          </a:solidFill>
+                          <a:latin typeface="Arial"/>
+                        </a:rPr>
+                        <a:t> / Al₂O₃ quarter-quarter at 2.2 µm</a:t>
                       </a:r>
                     </a:p>
                   </a:txBody>
@@ -7893,7 +8037,7 @@
                           </a:solidFill>
                           <a:latin typeface="Arial"/>
                         </a:rPr>
-                        <a:t>0.85 over the strip</a:t>
+                        <a:t>0.797</a:t>
                       </a:r>
                     </a:p>
                   </a:txBody>
@@ -7915,7 +8059,51 @@
                           </a:solidFill>
                           <a:latin typeface="Arial"/>
                         </a:rPr>
-                        <a:t>0.30–0.89 (0.8 over the central third)</a:t>
+                        <a:t>0.801</a:t>
+                      </a:r>
+                    </a:p>
+                  </a:txBody>
+                  <a:tcPr marL="54864" marR="54864" marT="18288" marB="18288">
+                    <a:solidFill>
+                      <a:srgbClr val="FFFFFF"/>
+                    </a:solidFill>
+                  </a:tcPr>
+                </a:tc>
+                <a:tc>
+                  <a:txBody>
+                    <a:bodyPr wrap="square"/>
+                    <a:lstStyle/>
+                    <a:p>
+                      <a:r>
+                        <a:rPr sz="1100" b="0">
+                          <a:solidFill>
+                            <a:srgbClr val="282828"/>
+                          </a:solidFill>
+                          <a:latin typeface="Arial"/>
+                        </a:rPr>
+                        <a:t>0.880</a:t>
+                      </a:r>
+                    </a:p>
+                  </a:txBody>
+                  <a:tcPr marL="54864" marR="54864" marT="18288" marB="18288">
+                    <a:solidFill>
+                      <a:srgbClr val="FFFFFF"/>
+                    </a:solidFill>
+                  </a:tcPr>
+                </a:tc>
+                <a:tc>
+                  <a:txBody>
+                    <a:bodyPr wrap="square"/>
+                    <a:lstStyle/>
+                    <a:p>
+                      <a:r>
+                        <a:rPr sz="1100" b="0">
+                          <a:solidFill>
+                            <a:srgbClr val="282828"/>
+                          </a:solidFill>
+                          <a:latin typeface="Arial"/>
+                        </a:rPr>
+                        <a:t>0.826</a:t>
                       </a:r>
                     </a:p>
                   </a:txBody>
@@ -7939,7 +8127,61 @@
                           </a:solidFill>
                           <a:latin typeface="Arial"/>
                         </a:rPr>
-                        <a:t>light admitted by the grating</a:t>
+                        <a:t>3k </a:t>
+                      </a:r>
+                      <a:r>
+                        <a:rPr sz="1100" b="0">
+                          <a:solidFill>
+                            <a:srgbClr val="282828"/>
+                          </a:solidFill>
+                          <a:latin typeface="Arial"/>
+                        </a:rPr>
+                        <a:t>CaF</a:t>
+                      </a:r>
+                      <a:r>
+                        <a:rPr sz="1100" b="0" baseline="-25000">
+                          <a:solidFill>
+                            <a:srgbClr val="282828"/>
+                          </a:solidFill>
+                          <a:latin typeface="Arial"/>
+                        </a:rPr>
+                        <a:t>2</a:t>
+                      </a:r>
+                      <a:r>
+                        <a:rPr sz="1100" b="0">
+                          <a:solidFill>
+                            <a:srgbClr val="282828"/>
+                          </a:solidFill>
+                          <a:latin typeface="Arial"/>
+                        </a:rPr>
+                        <a:t>, </a:t>
+                      </a:r>
+                      <a:r>
+                        <a:rPr sz="1100" b="0">
+                          <a:solidFill>
+                            <a:srgbClr val="282828"/>
+                          </a:solidFill>
+                          <a:latin typeface="Arial"/>
+                        </a:rPr>
+                        <a:t>MgF</a:t>
+                      </a:r>
+                      <a:r>
+                        <a:rPr sz="1100" b="0" baseline="-25000">
+                          <a:solidFill>
+                            <a:srgbClr val="282828"/>
+                          </a:solidFill>
+                          <a:latin typeface="Arial"/>
+                        </a:rPr>
+                        <a:t>2</a:t>
+                      </a:r>
+                      <a:r>
+                        <a:rPr sz="1100" b="0">
+                          <a:solidFill>
+                            <a:srgbClr val="282828"/>
+                          </a:solidFill>
+                          <a:latin typeface="Arial"/>
+                        </a:rPr>
+                        <a:t> / Al₂O₃ quarter-quarter at 1.0 µm</a:t>
                       </a:r>
                     </a:p>
                   </a:txBody>
@@ -7961,7 +8203,7 @@
                           </a:solidFill>
                           <a:latin typeface="Arial"/>
                         </a:rPr>
-                        <a:t>98.9 % per field</a:t>
+                        <a:t>0.749</a:t>
                       </a:r>
                     </a:p>
                   </a:txBody>
@@ -7983,7 +8225,51 @@
                           </a:solidFill>
                           <a:latin typeface="Arial"/>
                         </a:rPr>
-                        <a:t>99 % per field</a:t>
+                        <a:t>0.920</a:t>
+                      </a:r>
+                    </a:p>
+                  </a:txBody>
+                  <a:tcPr marL="54864" marR="54864" marT="18288" marB="18288">
+                    <a:solidFill>
+                      <a:srgbClr val="ECF1F6"/>
+                    </a:solidFill>
+                  </a:tcPr>
+                </a:tc>
+                <a:tc>
+                  <a:txBody>
+                    <a:bodyPr wrap="square"/>
+                    <a:lstStyle/>
+                    <a:p>
+                      <a:r>
+                        <a:rPr sz="1100" b="0">
+                          <a:solidFill>
+                            <a:srgbClr val="282828"/>
+                          </a:solidFill>
+                          <a:latin typeface="Arial"/>
+                        </a:rPr>
+                        <a:t>0.736</a:t>
+                      </a:r>
+                    </a:p>
+                  </a:txBody>
+                  <a:tcPr marL="54864" marR="54864" marT="18288" marB="18288">
+                    <a:solidFill>
+                      <a:srgbClr val="ECF1F6"/>
+                    </a:solidFill>
+                  </a:tcPr>
+                </a:tc>
+                <a:tc>
+                  <a:txBody>
+                    <a:bodyPr wrap="square"/>
+                    <a:lstStyle/>
+                    <a:p>
+                      <a:r>
+                        <a:rPr sz="1100" b="0">
+                          <a:solidFill>
+                            <a:srgbClr val="282828"/>
+                          </a:solidFill>
+                          <a:latin typeface="Arial"/>
+                        </a:rPr>
+                        <a:t>0.802</a:t>
                       </a:r>
                     </a:p>
                   </a:txBody>
@@ -8007,7 +8293,34 @@
                           </a:solidFill>
                           <a:latin typeface="Arial"/>
                         </a:rPr>
-                        <a:t>clearance, worst pair</a:t>
+                        <a:t>1.5k silica, uncoated / </a:t>
+                      </a:r>
+                      <a:r>
+                        <a:rPr sz="1100" b="0">
+                          <a:solidFill>
+                            <a:srgbClr val="282828"/>
+                          </a:solidFill>
+                          <a:latin typeface="Arial"/>
+                        </a:rPr>
+                        <a:t>MgF</a:t>
+                      </a:r>
+                      <a:r>
+                        <a:rPr sz="1100" b="0" baseline="-25000">
+                          <a:solidFill>
+                            <a:srgbClr val="282828"/>
+                          </a:solidFill>
+                          <a:latin typeface="Arial"/>
+                        </a:rPr>
+                        <a:t>2</a:t>
+                      </a:r>
+                      <a:r>
+                        <a:rPr sz="1100" b="0">
+                          <a:solidFill>
+                            <a:srgbClr val="282828"/>
+                          </a:solidFill>
+                          <a:latin typeface="Arial"/>
+                        </a:rPr>
+                        <a:t> at 2.2 µm</a:t>
                       </a:r>
                     </a:p>
                   </a:txBody>
@@ -8029,7 +8342,7 @@
                           </a:solidFill>
                           <a:latin typeface="Arial"/>
                         </a:rPr>
-                        <a:t>+0.6 mm (slit package vs block face)</a:t>
+                        <a:t>0.807 / 0.851</a:t>
                       </a:r>
                     </a:p>
                   </a:txBody>
@@ -8051,7 +8364,51 @@
                           </a:solidFill>
                           <a:latin typeface="Arial"/>
                         </a:rPr>
-                        <a:t>+0.38 mm (detector package vs block face)</a:t>
+                        <a:t>0.814 / 0.840</a:t>
+                      </a:r>
+                    </a:p>
+                  </a:txBody>
+                  <a:tcPr marL="54864" marR="54864" marT="18288" marB="18288">
+                    <a:solidFill>
+                      <a:srgbClr val="FFFFFF"/>
+                    </a:solidFill>
+                  </a:tcPr>
+                </a:tc>
+                <a:tc>
+                  <a:txBody>
+                    <a:bodyPr wrap="square"/>
+                    <a:lstStyle/>
+                    <a:p>
+                      <a:r>
+                        <a:rPr sz="1100" b="0">
+                          <a:solidFill>
+                            <a:srgbClr val="282828"/>
+                          </a:solidFill>
+                          <a:latin typeface="Arial"/>
+                        </a:rPr>
+                        <a:t>0.821 / 0.872</a:t>
+                      </a:r>
+                    </a:p>
+                  </a:txBody>
+                  <a:tcPr marL="54864" marR="54864" marT="18288" marB="18288">
+                    <a:solidFill>
+                      <a:srgbClr val="FFFFFF"/>
+                    </a:solidFill>
+                  </a:tcPr>
+                </a:tc>
+                <a:tc>
+                  <a:txBody>
+                    <a:bodyPr wrap="square"/>
+                    <a:lstStyle/>
+                    <a:p>
+                      <a:r>
+                        <a:rPr sz="1100" b="0">
+                          <a:solidFill>
+                            <a:srgbClr val="282828"/>
+                          </a:solidFill>
+                          <a:latin typeface="Arial"/>
+                        </a:rPr>
+                        <a:t>0.814 / 0.854</a:t>
                       </a:r>
                     </a:p>
                   </a:txBody>
@@ -8075,7 +8432,7 @@
                           </a:solidFill>
                           <a:latin typeface="Arial"/>
                         </a:rPr>
-                        <a:t>glass for 6000 pixels</a:t>
+                        <a:t>grating, scalar blaze at 1.0 / 1.4 / 1.8 µm</a:t>
                       </a:r>
                     </a:p>
                   </a:txBody>
@@ -8097,34 +8454,7 @@
                           </a:solidFill>
                           <a:latin typeface="Arial"/>
                         </a:rPr>
-                        <a:t>9.0 L, 28.5 kg </a:t>
-                      </a:r>
-                      <a:r>
-                        <a:rPr sz="1100" b="0">
-                          <a:solidFill>
-                            <a:srgbClr val="282828"/>
-                          </a:solidFill>
-                          <a:latin typeface="Arial"/>
-                        </a:rPr>
-                        <a:t>CaF</a:t>
-                      </a:r>
-                      <a:r>
-                        <a:rPr sz="1100" b="0" baseline="-25000">
-                          <a:solidFill>
-                            <a:srgbClr val="282828"/>
-                          </a:solidFill>
-                          <a:latin typeface="Arial"/>
-                        </a:rPr>
-                        <a:t>2</a:t>
-                      </a:r>
-                      <a:r>
-                        <a:rPr sz="1100" b="0">
-                          <a:solidFill>
-                            <a:srgbClr val="282828"/>
-                          </a:solidFill>
-                          <a:latin typeface="Arial"/>
-                        </a:rPr>
-                        <a:t> (12.4 L single crystal to carve)</a:t>
+                        <a:t>0.14 / 0.02 / 0.01</a:t>
                       </a:r>
                     </a:p>
                   </a:txBody>
@@ -8146,7 +8476,7 @@
                           </a:solidFill>
                           <a:latin typeface="Arial"/>
                         </a:rPr>
-                        <a:t>3.0 L, 6.6 kg fused silica</a:t>
+                        <a:t>0.89 / 0.53 / 0.17</a:t>
                       </a:r>
                     </a:p>
                   </a:txBody>
@@ -8156,89 +8486,19 @@
                     </a:solidFill>
                   </a:tcPr>
                 </a:tc>
-              </a:tr>
-              <a:tr h="280035">
-                <a:tc>
-                  <a:txBody>
-                    <a:bodyPr wrap="square"/>
-                    <a:lstStyle/>
-                    <a:p>
-                      <a:r>
-                        <a:rPr sz="1100" b="0">
-                          <a:solidFill>
-                            <a:srgbClr val="282828"/>
-                          </a:solidFill>
-                          <a:latin typeface="Arial"/>
-                        </a:rPr>
-                        <a:t>the block of modules: envelope; optics</a:t>
-                      </a:r>
-                    </a:p>
-                  </a:txBody>
-                  <a:tcPr marL="54864" marR="54864" marT="18288" marB="18288">
-                    <a:solidFill>
-                      <a:srgbClr val="FFFFFF"/>
-                    </a:solidFill>
-                  </a:tcPr>
-                </a:tc>
-                <a:tc>
-                  <a:txBody>
-                    <a:bodyPr wrap="square"/>
-                    <a:lstStyle/>
-                    <a:p>
-                      <a:r>
-                        <a:rPr sz="1100" b="0">
-                          <a:solidFill>
-                            <a:srgbClr val="282828"/>
-                          </a:solidFill>
-                          <a:latin typeface="Arial"/>
-                        </a:rPr>
-                        <a:t>0.75 × 0.60 × 1.36 m, 609 L; 39 kg</a:t>
-                      </a:r>
-                    </a:p>
-                  </a:txBody>
-                  <a:tcPr marL="54864" marR="54864" marT="18288" marB="18288">
-                    <a:solidFill>
-                      <a:srgbClr val="FFFFFF"/>
-                    </a:solidFill>
-                  </a:tcPr>
-                </a:tc>
-                <a:tc>
-                  <a:txBody>
-                    <a:bodyPr wrap="square"/>
-                    <a:lstStyle/>
-                    <a:p>
-                      <a:r>
-                        <a:rPr sz="1100" b="0">
-                          <a:solidFill>
-                            <a:srgbClr val="282828"/>
-                          </a:solidFill>
-                          <a:latin typeface="Arial"/>
-                        </a:rPr>
-                        <a:t>0.97 × 0.41 × 0.76 m, 300 L; 14.6 kg</a:t>
-                      </a:r>
-                    </a:p>
-                  </a:txBody>
-                  <a:tcPr marL="54864" marR="54864" marT="18288" marB="18288">
-                    <a:solidFill>
-                      <a:srgbClr val="FFFFFF"/>
-                    </a:solidFill>
-                  </a:tcPr>
-                </a:tc>
-              </a:tr>
-              <a:tr h="280035">
-                <a:tc>
-                  <a:txBody>
-                    <a:bodyPr wrap="square"/>
-                    <a:lstStyle/>
-                    <a:p>
-                      <a:r>
-                        <a:rPr sz="1100" b="0">
-                          <a:solidFill>
-                            <a:srgbClr val="282828"/>
-                          </a:solidFill>
-                          <a:latin typeface="Arial"/>
-                        </a:rPr>
-                        <a:t>telescopes / spectrometers / detectors</a:t>
+                <a:tc>
+                  <a:txBody>
+                    <a:bodyPr wrap="square"/>
+                    <a:lstStyle/>
+                    <a:p>
+                      <a:r>
+                        <a:rPr sz="1100" b="0">
+                          <a:solidFill>
+                            <a:srgbClr val="282828"/>
+                          </a:solidFill>
+                          <a:latin typeface="Arial"/>
+                        </a:rPr>
+                        <a:t>0.48 / 0.78 / 0.89</a:t>
                       </a:r>
                     </a:p>
                   </a:txBody>
@@ -8260,165 +8520,7 @@
                           </a:solidFill>
                           <a:latin typeface="Arial"/>
                         </a:rPr>
-                        <a:t>2 / 2 / 2 × (3072 × 512, a standard format)</a:t>
-                      </a:r>
-                    </a:p>
-                  </a:txBody>
-                  <a:tcPr marL="54864" marR="54864" marT="18288" marB="18288">
-                    <a:solidFill>
-                      <a:srgbClr val="ECF1F6"/>
-                    </a:solidFill>
-                  </a:tcPr>
-                </a:tc>
-                <a:tc>
-                  <a:txBody>
-                    <a:bodyPr wrap="square"/>
-                    <a:lstStyle/>
-                    <a:p>
-                      <a:r>
-                        <a:rPr sz="1100" b="0">
-                          <a:solidFill>
-                            <a:srgbClr val="282828"/>
-                          </a:solidFill>
-                          <a:latin typeface="Arial"/>
-                        </a:rPr>
-                        <a:t>4 / 4 / 4 × (1.5k × 0.5k, NRE)</a:t>
-                      </a:r>
-                    </a:p>
-                  </a:txBody>
-                  <a:tcPr marL="54864" marR="54864" marT="18288" marB="18288">
-                    <a:solidFill>
-                      <a:srgbClr val="ECF1F6"/>
-                    </a:solidFill>
-                  </a:tcPr>
-                </a:tc>
-              </a:tr>
-              <a:tr h="280035">
-                <a:tc>
-                  <a:txBody>
-                    <a:bodyPr wrap="square"/>
-                    <a:lstStyle/>
-                    <a:p>
-                      <a:r>
-                        <a:rPr sz="1100" b="0">
-                          <a:solidFill>
-                            <a:srgbClr val="282828"/>
-                          </a:solidFill>
-                          <a:latin typeface="Arial"/>
-                        </a:rPr>
-                        <a:t>integration, test, calibration</a:t>
-                      </a:r>
-                    </a:p>
-                  </a:txBody>
-                  <a:tcPr marL="54864" marR="54864" marT="18288" marB="18288">
-                    <a:solidFill>
-                      <a:srgbClr val="FFFFFF"/>
-                    </a:solidFill>
-                  </a:tcPr>
-                </a:tc>
-                <a:tc>
-                  <a:txBody>
-                    <a:bodyPr wrap="square"/>
-                    <a:lstStyle/>
-                    <a:p>
-                      <a:r>
-                        <a:rPr sz="1100" b="0">
-                          <a:solidFill>
-                            <a:srgbClr val="282828"/>
-                          </a:solidFill>
-                          <a:latin typeface="Arial"/>
-                        </a:rPr>
-                        <a:t>two of each</a:t>
-                      </a:r>
-                    </a:p>
-                  </a:txBody>
-                  <a:tcPr marL="54864" marR="54864" marT="18288" marB="18288">
-                    <a:solidFill>
-                      <a:srgbClr val="FFFFFF"/>
-                    </a:solidFill>
-                  </a:tcPr>
-                </a:tc>
-                <a:tc>
-                  <a:txBody>
-                    <a:bodyPr wrap="square"/>
-                    <a:lstStyle/>
-                    <a:p>
-                      <a:r>
-                        <a:rPr sz="1100" b="0">
-                          <a:solidFill>
-                            <a:srgbClr val="282828"/>
-                          </a:solidFill>
-                          <a:latin typeface="Arial"/>
-                        </a:rPr>
-                        <a:t>four of each (Jim: the cost that dominates)</a:t>
-                      </a:r>
-                    </a:p>
-                  </a:txBody>
-                  <a:tcPr marL="54864" marR="54864" marT="18288" marB="18288">
-                    <a:solidFill>
-                      <a:srgbClr val="FFFFFF"/>
-                    </a:solidFill>
-                  </a:tcPr>
-                </a:tc>
-              </a:tr>
-              <a:tr h="280035">
-                <a:tc>
-                  <a:txBody>
-                    <a:bodyPr wrap="square"/>
-                    <a:lstStyle/>
-                    <a:p>
-                      <a:r>
-                        <a:rPr sz="1100" b="0">
-                          <a:solidFill>
-                            <a:srgbClr val="282828"/>
-                          </a:solidFill>
-                          <a:latin typeface="Arial"/>
-                        </a:rPr>
-                        <a:t>materials</a:t>
-                      </a:r>
-                    </a:p>
-                  </a:txBody>
-                  <a:tcPr marL="54864" marR="54864" marT="18288" marB="18288">
-                    <a:solidFill>
-                      <a:srgbClr val="ECF1F6"/>
-                    </a:solidFill>
-                  </a:tcPr>
-                </a:tc>
-                <a:tc>
-                  <a:txBody>
-                    <a:bodyPr wrap="square"/>
-                    <a:lstStyle/>
-                    <a:p>
-                      <a:r>
-                        <a:rPr sz="1100" b="0">
-                          <a:solidFill>
-                            <a:srgbClr val="282828"/>
-                          </a:solidFill>
-                          <a:latin typeface="Arial"/>
-                        </a:rPr>
-                        <a:t>"a tiny fraction of the instrument cost" (Jim)</a:t>
-                      </a:r>
-                    </a:p>
-                  </a:txBody>
-                  <a:tcPr marL="54864" marR="54864" marT="18288" marB="18288">
-                    <a:solidFill>
-                      <a:srgbClr val="ECF1F6"/>
-                    </a:solidFill>
-                  </a:tcPr>
-                </a:tc>
-                <a:tc>
-                  <a:txBody>
-                    <a:bodyPr wrap="square"/>
-                    <a:lstStyle/>
-                    <a:p>
-                      <a:r>
-                        <a:rPr sz="1100" b="0">
-                          <a:solidFill>
-                            <a:srgbClr val="282828"/>
-                          </a:solidFill>
-                          <a:latin typeface="Arial"/>
-                        </a:rPr>
-                        <a:t>the same</a:t>
+                        <a:t>–</a:t>
                       </a:r>
                     </a:p>
                   </a:txBody>
@@ -8441,7 +8543,7 @@
         </p:nvSpPr>
         <p:spPr>
           <a:xfrm>
-            <a:off x="411480" y="5462397"/>
+            <a:off x="411480" y="3404997"/>
             <a:ext cx="11368735" cy="274320"/>
           </a:xfrm>
           <a:prstGeom prst="rect">
@@ -8461,13 +8563,219 @@
               </a:spcAft>
             </a:pPr>
             <a:r>
+              <a:rPr sz="1500" b="0">
+                <a:solidFill>
+                  <a:srgbClr val="282828"/>
+                </a:solidFill>
+                <a:latin typeface="Arial"/>
+              </a:rPr>
+              <a:t>•  </a:t>
+            </a:r>
+            <a:r>
+              <a:rPr sz="1500" b="1">
+                <a:solidFill>
+                  <a:srgbClr val="282828"/>
+                </a:solidFill>
+                <a:latin typeface="Arial"/>
+              </a:rPr>
+              <a:t>The crossings:</a:t>
+            </a:r>
+            <a:r>
+              <a:rPr sz="1500" b="0">
+                <a:solidFill>
+                  <a:srgbClr val="282828"/>
+                </a:solidFill>
+                <a:latin typeface="Arial"/>
+              </a:rPr>
+              <a:t> the slit face in, the block's convex face out to the grating's air gap and back in, the exit face — four on the block — and two on the detector's order-sorting filter, which sits in air (Jim: it cannot be bonded to </a:t>
+            </a:r>
+            <a:r>
+              <a:rPr sz="1500" b="0">
+                <a:solidFill>
+                  <a:srgbClr val="282828"/>
+                </a:solidFill>
+                <a:latin typeface="Arial"/>
+              </a:rPr>
+              <a:t>CaF</a:t>
+            </a:r>
+            <a:r>
+              <a:rPr sz="1500" b="0" baseline="-25000">
+                <a:solidFill>
+                  <a:srgbClr val="282828"/>
+                </a:solidFill>
+                <a:latin typeface="Arial"/>
+              </a:rPr>
+              <a:t>2</a:t>
+            </a:r>
+            <a:r>
+              <a:rPr sz="1500" b="0">
+                <a:solidFill>
+                  <a:srgbClr val="282828"/>
+                </a:solidFill>
+                <a:latin typeface="Arial"/>
+              </a:rPr>
+              <a:t>).  Each entry is the mean over the band of the product of the six transmittances, the block's index from its Sellmeier equation at every wavelength.</a:t>
+            </a:r>
+          </a:p>
+          <a:p>
+            <a:pPr>
+              <a:spcAft>
+                <a:spcPts val="600"/>
+              </a:spcAft>
+            </a:pPr>
+            <a:r>
+              <a:rPr sz="1500" b="0">
+                <a:solidFill>
+                  <a:srgbClr val="282828"/>
+                </a:solidFill>
+                <a:latin typeface="Arial"/>
+              </a:rPr>
+              <a:t>•  </a:t>
+            </a:r>
+            <a:r>
+              <a:rPr sz="1500" b="1">
+                <a:solidFill>
+                  <a:srgbClr val="282828"/>
+                </a:solidFill>
+                <a:latin typeface="Arial"/>
+              </a:rPr>
+              <a:t>Where to spend the coating:</a:t>
+            </a:r>
+            <a:r>
+              <a:rPr sz="1500" b="0">
+                <a:solidFill>
+                  <a:srgbClr val="282828"/>
+                </a:solidFill>
+                <a:latin typeface="Arial"/>
+              </a:rPr>
+              <a:t> on a 1.43–1.45 substrate a single </a:t>
+            </a:r>
+            <a:r>
+              <a:rPr sz="1500" b="0">
+                <a:solidFill>
+                  <a:srgbClr val="282828"/>
+                </a:solidFill>
+                <a:latin typeface="Arial"/>
+              </a:rPr>
+              <a:t>MgF</a:t>
+            </a:r>
+            <a:r>
+              <a:rPr sz="1500" b="0" baseline="-25000">
+                <a:solidFill>
+                  <a:srgbClr val="282828"/>
+                </a:solidFill>
+                <a:latin typeface="Arial"/>
+              </a:rPr>
+              <a:t>2</a:t>
+            </a:r>
+            <a:r>
+              <a:rPr sz="1500" b="0">
+                <a:solidFill>
+                  <a:srgbClr val="282828"/>
+                </a:solidFill>
+                <a:latin typeface="Arial"/>
+              </a:rPr>
+              <a:t> layer is never a good match, but centered at 2.2 µm it helps most where the photons are scarcest (+0.04–0.05 in the long band) and still helps at the short end; the two-layer tuned to 1 µm is the better coating in the middle of the band (0.92) and the worse one at both ends.  Jim's rule, in numbers.</a:t>
+            </a:r>
+          </a:p>
+          <a:p>
+            <a:pPr>
+              <a:spcAft>
+                <a:spcPts val="600"/>
+              </a:spcAft>
+            </a:pPr>
+            <a:r>
+              <a:rPr sz="1500" b="0">
+                <a:solidFill>
+                  <a:srgbClr val="282828"/>
+                </a:solidFill>
+                <a:latin typeface="Arial"/>
+              </a:rPr>
+              <a:t>•  </a:t>
+            </a:r>
+            <a:r>
+              <a:rPr sz="1500" b="1">
+                <a:solidFill>
+                  <a:srgbClr val="282828"/>
+                </a:solidFill>
+                <a:latin typeface="Arial"/>
+              </a:rPr>
+              <a:t>The blaze does the real work at the long end:</a:t>
+            </a:r>
+            <a:r>
+              <a:rPr sz="1500" b="0">
+                <a:solidFill>
+                  <a:srgbClr val="282828"/>
+                </a:solidFill>
+                <a:latin typeface="Arial"/>
+              </a:rPr>
+              <a:t> a 1.8 µm blaze puts 0.89 of first-order efficiency in the long band against 0.48 for a 1 µm blaze, at the price of the short band, where the photons are plentiful.  The scalar estimate says where the light goes, not the absolute efficiency; a vector grating calculation is the next step there.</a:t>
+            </a:r>
+          </a:p>
+        </p:txBody>
+      </p:sp>
+      <p:sp>
+        <p:nvSpPr>
+          <p:cNvPr id="6" name="TextBox 5"/>
+          <p:cNvSpPr txBox="1"/>
+          <p:nvPr/>
+        </p:nvSpPr>
+        <p:spPr>
+          <a:xfrm>
+            <a:off x="411480" y="6586347"/>
+            <a:ext cx="11368735" cy="274320"/>
+          </a:xfrm>
+          <a:prstGeom prst="rect">
+            <a:avLst/>
+          </a:prstGeom>
+          <a:noFill/>
+        </p:spPr>
+        <p:txBody>
+          <a:bodyPr wrap="square">
+            <a:spAutoFit/>
+          </a:bodyPr>
+          <a:lstStyle/>
+          <a:p>
+            <a:pPr>
+              <a:spcAft>
+                <a:spcPts val="600"/>
+              </a:spcAft>
+            </a:pPr>
+            <a:r>
               <a:rPr sz="1050" b="0">
                 <a:solidFill>
                   <a:srgbClr val="6E6E6E"/>
                 </a:solidFill>
                 <a:latin typeface="Arial"/>
               </a:rPr>
-              <a:t>Records dyson5_jim_3a.txt, dyson5_t5f_GM_1k5_bAs_ap.txt, dyson5_t5f_cprime_centroid_roll000.txt.  The four-module block (0.97 × 0.41 × 0.76 m, 14.6 kg of optics) of the last deck stands as the fallback.  The air gap at the window stands on both (six crossings, 0.81 uncoated).</a:t>
+              <a:t>Record dyson5_throughput_band.txt (dyson5_throughput_band.m; macos.design.thinfilm_rt, Abeles, normal incidence; </a:t>
+            </a:r>
+            <a:r>
+              <a:rPr sz="1050" b="0">
+                <a:solidFill>
+                  <a:srgbClr val="6E6E6E"/>
+                </a:solidFill>
+                <a:latin typeface="Arial"/>
+              </a:rPr>
+              <a:t>MgF</a:t>
+            </a:r>
+            <a:r>
+              <a:rPr sz="1050" b="0" baseline="-25000">
+                <a:solidFill>
+                  <a:srgbClr val="6E6E6E"/>
+                </a:solidFill>
+                <a:latin typeface="Arial"/>
+              </a:rPr>
+              <a:t>2</a:t>
+            </a:r>
+            <a:r>
+              <a:rPr sz="1050" b="0">
+                <a:solidFill>
+                  <a:srgbClr val="6E6E6E"/>
+                </a:solidFill>
+                <a:latin typeface="Arial"/>
+              </a:rPr>
+              <a:t> 1.384 and Al₂O₃ 1.63 at their 1 µm indices).  Not included: detector quantum efficiency, the slit's diffraction loss (0.3–1.8 %), mirror reflectivities.  The record's route 2 (dyson5_jim_3b.txt) is the 1.0 µm two-layer row.</a:t>
             </a:r>
           </a:p>
         </p:txBody>
@@ -8524,7 +8832,7 @@
                 </a:solidFill>
                 <a:latin typeface="Arial"/>
               </a:rPr>
-              <a:t>Questions for Jim and Joe</a:t>
+              <a:t>Two of 3k or four of 1.5k, updated</a:t>
             </a:r>
           </a:p>
           <a:p>
@@ -8540,7 +8848,7 @@
                 </a:solidFill>
                 <a:latin typeface="Arial"/>
               </a:rPr>
-              <a:t>Three the ray trace cannot settle</a:t>
+              <a:t>Both modules now image at the pixel end to end; the trade is labor, detectors and integration, not optics or glass — and Jim's and the paper's answer is two</a:t>
             </a:r>
           </a:p>
         </p:txBody>
@@ -8589,15 +8897,970 @@
           </a:p>
         </p:txBody>
       </p:sp>
+      <p:graphicFrame>
+        <p:nvGraphicFramePr>
+          <p:cNvPr id="4" name="Table 3"/>
+          <p:cNvGraphicFramePr>
+            <a:graphicFrameLocks noGrp="1"/>
+          </p:cNvGraphicFramePr>
+          <p:nvPr/>
+        </p:nvGraphicFramePr>
+        <p:xfrm>
+          <a:off x="411480" y="1298448"/>
+          <a:ext cx="11368734" cy="4583430"/>
+        </p:xfrm>
+        <a:graphic>
+          <a:graphicData uri="http://schemas.openxmlformats.org/drawingml/2006/table">
+            <a:tbl>
+              <a:tblPr firstRow="1" bandRow="1">
+                <a:tableStyleId>{5C22544A-7EE6-4342-B048-85BDC9FD1C3A}</a:tableStyleId>
+              </a:tblPr>
+              <a:tblGrid>
+                <a:gridCol w="3268511"/>
+                <a:gridCol w="3126402"/>
+                <a:gridCol w="4973821"/>
+              </a:tblGrid>
+              <a:tr h="280035">
+                <a:tc>
+                  <a:txBody>
+                    <a:bodyPr wrap="square"/>
+                    <a:lstStyle/>
+                    <a:p/>
+                  </a:txBody>
+                  <a:tcPr marL="54864" marR="54864" marT="18288" marB="18288">
+                    <a:solidFill>
+                      <a:srgbClr val="1F4E79"/>
+                    </a:solidFill>
+                  </a:tcPr>
+                </a:tc>
+                <a:tc>
+                  <a:txBody>
+                    <a:bodyPr wrap="square"/>
+                    <a:lstStyle/>
+                    <a:p>
+                      <a:r>
+                        <a:rPr sz="1100" b="1">
+                          <a:solidFill>
+                            <a:srgbClr val="FFFFFF"/>
+                          </a:solidFill>
+                          <a:latin typeface="Arial"/>
+                        </a:rPr>
+                        <a:t>2 × </a:t>
+                      </a:r>
+                      <a:r>
+                        <a:rPr sz="1100" b="1">
+                          <a:solidFill>
+                            <a:srgbClr val="FFFFFF"/>
+                          </a:solidFill>
+                          <a:latin typeface="Arial"/>
+                        </a:rPr>
+                        <a:t>CaF</a:t>
+                      </a:r>
+                      <a:r>
+                        <a:rPr sz="1100" b="1" baseline="-25000">
+                          <a:solidFill>
+                            <a:srgbClr val="FFFFFF"/>
+                          </a:solidFill>
+                          <a:latin typeface="Arial"/>
+                        </a:rPr>
+                        <a:t>2</a:t>
+                      </a:r>
+                      <a:r>
+                        <a:rPr sz="1100" b="1">
+                          <a:solidFill>
+                            <a:srgbClr val="FFFFFF"/>
+                          </a:solidFill>
+                          <a:latin typeface="Arial"/>
+                        </a:rPr>
+                        <a:t>, 3k, 54 mm slit</a:t>
+                      </a:r>
+                    </a:p>
+                  </a:txBody>
+                  <a:tcPr marL="54864" marR="54864" marT="18288" marB="18288">
+                    <a:solidFill>
+                      <a:srgbClr val="1F4E79"/>
+                    </a:solidFill>
+                  </a:tcPr>
+                </a:tc>
+                <a:tc>
+                  <a:txBody>
+                    <a:bodyPr wrap="square"/>
+                    <a:lstStyle/>
+                    <a:p>
+                      <a:r>
+                        <a:rPr sz="1100" b="1">
+                          <a:solidFill>
+                            <a:srgbClr val="FFFFFF"/>
+                          </a:solidFill>
+                          <a:latin typeface="Arial"/>
+                        </a:rPr>
+                        <a:t>4 × fused silica, 1.5k, 27 mm slit</a:t>
+                      </a:r>
+                    </a:p>
+                  </a:txBody>
+                  <a:tcPr marL="54864" marR="54864" marT="18288" marB="18288">
+                    <a:solidFill>
+                      <a:srgbClr val="1F4E79"/>
+                    </a:solidFill>
+                  </a:tcPr>
+                </a:tc>
+              </a:tr>
+              <a:tr h="280035">
+                <a:tc>
+                  <a:txBody>
+                    <a:bodyPr wrap="square"/>
+                    <a:lstStyle/>
+                    <a:p>
+                      <a:r>
+                        <a:rPr sz="1100" b="0">
+                          <a:solidFill>
+                            <a:srgbClr val="282828"/>
+                          </a:solidFill>
+                          <a:latin typeface="Arial"/>
+                        </a:rPr>
+                        <a:t>block radius = thickness</a:t>
+                      </a:r>
+                    </a:p>
+                  </a:txBody>
+                  <a:tcPr marL="54864" marR="54864" marT="18288" marB="18288">
+                    <a:solidFill>
+                      <a:srgbClr val="FFFFFF"/>
+                    </a:solidFill>
+                  </a:tcPr>
+                </a:tc>
+                <a:tc>
+                  <a:txBody>
+                    <a:bodyPr wrap="square"/>
+                    <a:lstStyle/>
+                    <a:p>
+                      <a:r>
+                        <a:rPr sz="1100" b="0">
+                          <a:solidFill>
+                            <a:srgbClr val="282828"/>
+                          </a:solidFill>
+                          <a:latin typeface="Arial"/>
+                        </a:rPr>
+                        <a:t>240 mm</a:t>
+                      </a:r>
+                    </a:p>
+                  </a:txBody>
+                  <a:tcPr marL="54864" marR="54864" marT="18288" marB="18288">
+                    <a:solidFill>
+                      <a:srgbClr val="FFFFFF"/>
+                    </a:solidFill>
+                  </a:tcPr>
+                </a:tc>
+                <a:tc>
+                  <a:txBody>
+                    <a:bodyPr wrap="square"/>
+                    <a:lstStyle/>
+                    <a:p>
+                      <a:r>
+                        <a:rPr sz="1100" b="0">
+                          <a:solidFill>
+                            <a:srgbClr val="282828"/>
+                          </a:solidFill>
+                          <a:latin typeface="Arial"/>
+                        </a:rPr>
+                        <a:t>130 mm</a:t>
+                      </a:r>
+                    </a:p>
+                  </a:txBody>
+                  <a:tcPr marL="54864" marR="54864" marT="18288" marB="18288">
+                    <a:solidFill>
+                      <a:srgbClr val="FFFFFF"/>
+                    </a:solidFill>
+                  </a:tcPr>
+                </a:tc>
+              </a:tr>
+              <a:tr h="468630">
+                <a:tc>
+                  <a:txBody>
+                    <a:bodyPr wrap="square"/>
+                    <a:lstStyle/>
+                    <a:p>
+                      <a:r>
+                        <a:rPr sz="1100" b="0">
+                          <a:solidFill>
+                            <a:srgbClr val="282828"/>
+                          </a:solidFill>
+                          <a:latin typeface="Arial"/>
+                        </a:rPr>
+                        <a:t>spectrometer alone: smile / keystone / CRF / SRF / energy in a pixel</a:t>
+                      </a:r>
+                    </a:p>
+                  </a:txBody>
+                  <a:tcPr marL="54864" marR="54864" marT="18288" marB="18288">
+                    <a:solidFill>
+                      <a:srgbClr val="ECF1F6"/>
+                    </a:solidFill>
+                  </a:tcPr>
+                </a:tc>
+                <a:tc>
+                  <a:txBody>
+                    <a:bodyPr wrap="square"/>
+                    <a:lstStyle/>
+                    <a:p>
+                      <a:r>
+                        <a:rPr sz="1100" b="0">
+                          <a:solidFill>
+                            <a:srgbClr val="282828"/>
+                          </a:solidFill>
+                          <a:latin typeface="Arial"/>
+                        </a:rPr>
+                        <a:t>0.005 / 0.006 / 1.21 / 2.02 px / 0.82</a:t>
+                      </a:r>
+                    </a:p>
+                  </a:txBody>
+                  <a:tcPr marL="54864" marR="54864" marT="18288" marB="18288">
+                    <a:solidFill>
+                      <a:srgbClr val="ECF1F6"/>
+                    </a:solidFill>
+                  </a:tcPr>
+                </a:tc>
+                <a:tc>
+                  <a:txBody>
+                    <a:bodyPr wrap="square"/>
+                    <a:lstStyle/>
+                    <a:p>
+                      <a:r>
+                        <a:rPr sz="1100" b="0">
+                          <a:solidFill>
+                            <a:srgbClr val="282828"/>
+                          </a:solidFill>
+                          <a:latin typeface="Arial"/>
+                        </a:rPr>
+                        <a:t>0.007 / 0.009 / 1.03 / 2.02 px / 1.00</a:t>
+                      </a:r>
+                    </a:p>
+                  </a:txBody>
+                  <a:tcPr marL="54864" marR="54864" marT="18288" marB="18288">
+                    <a:solidFill>
+                      <a:srgbClr val="ECF1F6"/>
+                    </a:solidFill>
+                  </a:tcPr>
+                </a:tc>
+              </a:tr>
+              <a:tr h="468630">
+                <a:tc>
+                  <a:txBody>
+                    <a:bodyPr wrap="square"/>
+                    <a:lstStyle/>
+                    <a:p>
+                      <a:r>
+                        <a:rPr sz="1100" b="0">
+                          <a:solidFill>
+                            <a:srgbClr val="282828"/>
+                          </a:solidFill>
+                          <a:latin typeface="Arial"/>
+                        </a:rPr>
+                        <a:t>telescope</a:t>
+                      </a:r>
+                    </a:p>
+                  </a:txBody>
+                  <a:tcPr marL="54864" marR="54864" marT="18288" marB="18288">
+                    <a:solidFill>
+                      <a:srgbClr val="FFFFFF"/>
+                    </a:solidFill>
+                  </a:tcPr>
+                </a:tc>
+                <a:tc>
+                  <a:txBody>
+                    <a:bodyPr wrap="square"/>
+                    <a:lstStyle/>
+                    <a:p>
+                      <a:r>
+                        <a:rPr sz="1100" b="0">
+                          <a:solidFill>
+                            <a:srgbClr val="282828"/>
+                          </a:solidFill>
+                          <a:latin typeface="Arial"/>
+                        </a:rPr>
+                        <a:t>freeform three-mirror of the SBG form (R9): 1.02 px at every field</a:t>
+                      </a:r>
+                    </a:p>
+                  </a:txBody>
+                  <a:tcPr marL="54864" marR="54864" marT="18288" marB="18288">
+                    <a:solidFill>
+                      <a:srgbClr val="FFFFFF"/>
+                    </a:solidFill>
+                  </a:tcPr>
+                </a:tc>
+                <a:tc>
+                  <a:txBody>
+                    <a:bodyPr wrap="square"/>
+                    <a:lstStyle/>
+                    <a:p>
+                      <a:r>
+                        <a:rPr sz="1100" b="0">
+                          <a:solidFill>
+                            <a:srgbClr val="282828"/>
+                          </a:solidFill>
+                          <a:latin typeface="Arial"/>
+                        </a:rPr>
+                        <a:t>three off-axis aspheres: 0.4 px center, 0.8 px at the strip ends (the template's 1.5k run is in progress)</a:t>
+                      </a:r>
+                    </a:p>
+                  </a:txBody>
+                  <a:tcPr marL="54864" marR="54864" marT="18288" marB="18288">
+                    <a:solidFill>
+                      <a:srgbClr val="FFFFFF"/>
+                    </a:solidFill>
+                  </a:tcPr>
+                </a:tc>
+              </a:tr>
+              <a:tr h="468630">
+                <a:tc>
+                  <a:txBody>
+                    <a:bodyPr wrap="square"/>
+                    <a:lstStyle/>
+                    <a:p>
+                      <a:r>
+                        <a:rPr sz="1100" b="0">
+                          <a:solidFill>
+                            <a:srgbClr val="282828"/>
+                          </a:solidFill>
+                          <a:latin typeface="Arial"/>
+                        </a:rPr>
+                        <a:t>end to end: smile (slit-filled / point-source) / keystone / CRF / SRF</a:t>
+                      </a:r>
+                    </a:p>
+                  </a:txBody>
+                  <a:tcPr marL="54864" marR="54864" marT="18288" marB="18288">
+                    <a:solidFill>
+                      <a:srgbClr val="ECF1F6"/>
+                    </a:solidFill>
+                  </a:tcPr>
+                </a:tc>
+                <a:tc>
+                  <a:txBody>
+                    <a:bodyPr wrap="square"/>
+                    <a:lstStyle/>
+                    <a:p>
+                      <a:r>
+                        <a:rPr sz="1100" b="0">
+                          <a:solidFill>
+                            <a:srgbClr val="282828"/>
+                          </a:solidFill>
+                          <a:latin typeface="Arial"/>
+                        </a:rPr>
+                        <a:t>0.02 / 0.02 / 0.006 / 1.17 / 2.025 px</a:t>
+                      </a:r>
+                    </a:p>
+                  </a:txBody>
+                  <a:tcPr marL="54864" marR="54864" marT="18288" marB="18288">
+                    <a:solidFill>
+                      <a:srgbClr val="ECF1F6"/>
+                    </a:solidFill>
+                  </a:tcPr>
+                </a:tc>
+                <a:tc>
+                  <a:txBody>
+                    <a:bodyPr wrap="square"/>
+                    <a:lstStyle/>
+                    <a:p>
+                      <a:r>
+                        <a:rPr sz="1100" b="0">
+                          <a:solidFill>
+                            <a:srgbClr val="282828"/>
+                          </a:solidFill>
+                          <a:latin typeface="Arial"/>
+                        </a:rPr>
+                        <a:t>0.08 / 0.50 / 0.01 / 1.26 / 2.21 px</a:t>
+                      </a:r>
+                    </a:p>
+                  </a:txBody>
+                  <a:tcPr marL="54864" marR="54864" marT="18288" marB="18288">
+                    <a:solidFill>
+                      <a:srgbClr val="ECF1F6"/>
+                    </a:solidFill>
+                  </a:tcPr>
+                </a:tc>
+              </a:tr>
+              <a:tr h="280035">
+                <a:tc>
+                  <a:txBody>
+                    <a:bodyPr wrap="square"/>
+                    <a:lstStyle/>
+                    <a:p>
+                      <a:r>
+                        <a:rPr sz="1100" b="0">
+                          <a:solidFill>
+                            <a:srgbClr val="282828"/>
+                          </a:solidFill>
+                          <a:latin typeface="Arial"/>
+                        </a:rPr>
+                        <a:t>end to end: energy in one pixel, worst field</a:t>
+                      </a:r>
+                    </a:p>
+                  </a:txBody>
+                  <a:tcPr marL="54864" marR="54864" marT="18288" marB="18288">
+                    <a:solidFill>
+                      <a:srgbClr val="FFFFFF"/>
+                    </a:solidFill>
+                  </a:tcPr>
+                </a:tc>
+                <a:tc>
+                  <a:txBody>
+                    <a:bodyPr wrap="square"/>
+                    <a:lstStyle/>
+                    <a:p>
+                      <a:r>
+                        <a:rPr sz="1100" b="0">
+                          <a:solidFill>
+                            <a:srgbClr val="282828"/>
+                          </a:solidFill>
+                          <a:latin typeface="Arial"/>
+                        </a:rPr>
+                        <a:t>0.85</a:t>
+                      </a:r>
+                    </a:p>
+                  </a:txBody>
+                  <a:tcPr marL="54864" marR="54864" marT="18288" marB="18288">
+                    <a:solidFill>
+                      <a:srgbClr val="FFFFFF"/>
+                    </a:solidFill>
+                  </a:tcPr>
+                </a:tc>
+                <a:tc>
+                  <a:txBody>
+                    <a:bodyPr wrap="square"/>
+                    <a:lstStyle/>
+                    <a:p>
+                      <a:r>
+                        <a:rPr sz="1100" b="0">
+                          <a:solidFill>
+                            <a:srgbClr val="282828"/>
+                          </a:solidFill>
+                          <a:latin typeface="Arial"/>
+                        </a:rPr>
+                        <a:t>0.30–0.39 (0.8 over the central third)</a:t>
+                      </a:r>
+                    </a:p>
+                  </a:txBody>
+                  <a:tcPr marL="54864" marR="54864" marT="18288" marB="18288">
+                    <a:solidFill>
+                      <a:srgbClr val="FFFFFF"/>
+                    </a:solidFill>
+                  </a:tcPr>
+                </a:tc>
+              </a:tr>
+              <a:tr h="280035">
+                <a:tc>
+                  <a:txBody>
+                    <a:bodyPr wrap="square"/>
+                    <a:lstStyle/>
+                    <a:p>
+                      <a:r>
+                        <a:rPr sz="1100" b="0">
+                          <a:solidFill>
+                            <a:srgbClr val="282828"/>
+                          </a:solidFill>
+                          <a:latin typeface="Arial"/>
+                        </a:rPr>
+                        <a:t>light admitted by the grating</a:t>
+                      </a:r>
+                    </a:p>
+                  </a:txBody>
+                  <a:tcPr marL="54864" marR="54864" marT="18288" marB="18288">
+                    <a:solidFill>
+                      <a:srgbClr val="ECF1F6"/>
+                    </a:solidFill>
+                  </a:tcPr>
+                </a:tc>
+                <a:tc>
+                  <a:txBody>
+                    <a:bodyPr wrap="square"/>
+                    <a:lstStyle/>
+                    <a:p>
+                      <a:r>
+                        <a:rPr sz="1100" b="0">
+                          <a:solidFill>
+                            <a:srgbClr val="282828"/>
+                          </a:solidFill>
+                          <a:latin typeface="Arial"/>
+                        </a:rPr>
+                        <a:t>98.9 % per field</a:t>
+                      </a:r>
+                    </a:p>
+                  </a:txBody>
+                  <a:tcPr marL="54864" marR="54864" marT="18288" marB="18288">
+                    <a:solidFill>
+                      <a:srgbClr val="ECF1F6"/>
+                    </a:solidFill>
+                  </a:tcPr>
+                </a:tc>
+                <a:tc>
+                  <a:txBody>
+                    <a:bodyPr wrap="square"/>
+                    <a:lstStyle/>
+                    <a:p>
+                      <a:r>
+                        <a:rPr sz="1100" b="0">
+                          <a:solidFill>
+                            <a:srgbClr val="282828"/>
+                          </a:solidFill>
+                          <a:latin typeface="Arial"/>
+                        </a:rPr>
+                        <a:t>99 % per field</a:t>
+                      </a:r>
+                    </a:p>
+                  </a:txBody>
+                  <a:tcPr marL="54864" marR="54864" marT="18288" marB="18288">
+                    <a:solidFill>
+                      <a:srgbClr val="ECF1F6"/>
+                    </a:solidFill>
+                  </a:tcPr>
+                </a:tc>
+              </a:tr>
+              <a:tr h="280035">
+                <a:tc>
+                  <a:txBody>
+                    <a:bodyPr wrap="square"/>
+                    <a:lstStyle/>
+                    <a:p>
+                      <a:r>
+                        <a:rPr sz="1100" b="0">
+                          <a:solidFill>
+                            <a:srgbClr val="282828"/>
+                          </a:solidFill>
+                          <a:latin typeface="Arial"/>
+                        </a:rPr>
+                        <a:t>clearance, worst pair</a:t>
+                      </a:r>
+                    </a:p>
+                  </a:txBody>
+                  <a:tcPr marL="54864" marR="54864" marT="18288" marB="18288">
+                    <a:solidFill>
+                      <a:srgbClr val="FFFFFF"/>
+                    </a:solidFill>
+                  </a:tcPr>
+                </a:tc>
+                <a:tc>
+                  <a:txBody>
+                    <a:bodyPr wrap="square"/>
+                    <a:lstStyle/>
+                    <a:p>
+                      <a:r>
+                        <a:rPr sz="1100" b="0">
+                          <a:solidFill>
+                            <a:srgbClr val="282828"/>
+                          </a:solidFill>
+                          <a:latin typeface="Arial"/>
+                        </a:rPr>
+                        <a:t>+0.6 mm (slit package vs block face)</a:t>
+                      </a:r>
+                    </a:p>
+                  </a:txBody>
+                  <a:tcPr marL="54864" marR="54864" marT="18288" marB="18288">
+                    <a:solidFill>
+                      <a:srgbClr val="FFFFFF"/>
+                    </a:solidFill>
+                  </a:tcPr>
+                </a:tc>
+                <a:tc>
+                  <a:txBody>
+                    <a:bodyPr wrap="square"/>
+                    <a:lstStyle/>
+                    <a:p>
+                      <a:r>
+                        <a:rPr sz="1100" b="0">
+                          <a:solidFill>
+                            <a:srgbClr val="282828"/>
+                          </a:solidFill>
+                          <a:latin typeface="Arial"/>
+                        </a:rPr>
+                        <a:t>+0.38 mm (detector package vs block face)</a:t>
+                      </a:r>
+                    </a:p>
+                  </a:txBody>
+                  <a:tcPr marL="54864" marR="54864" marT="18288" marB="18288">
+                    <a:solidFill>
+                      <a:srgbClr val="FFFFFF"/>
+                    </a:solidFill>
+                  </a:tcPr>
+                </a:tc>
+              </a:tr>
+              <a:tr h="468630">
+                <a:tc>
+                  <a:txBody>
+                    <a:bodyPr wrap="square"/>
+                    <a:lstStyle/>
+                    <a:p>
+                      <a:r>
+                        <a:rPr sz="1100" b="0">
+                          <a:solidFill>
+                            <a:srgbClr val="282828"/>
+                          </a:solidFill>
+                          <a:latin typeface="Arial"/>
+                        </a:rPr>
+                        <a:t>glass for 6000 pixels</a:t>
+                      </a:r>
+                    </a:p>
+                  </a:txBody>
+                  <a:tcPr marL="54864" marR="54864" marT="18288" marB="18288">
+                    <a:solidFill>
+                      <a:srgbClr val="ECF1F6"/>
+                    </a:solidFill>
+                  </a:tcPr>
+                </a:tc>
+                <a:tc>
+                  <a:txBody>
+                    <a:bodyPr wrap="square"/>
+                    <a:lstStyle/>
+                    <a:p>
+                      <a:r>
+                        <a:rPr sz="1100" b="0">
+                          <a:solidFill>
+                            <a:srgbClr val="282828"/>
+                          </a:solidFill>
+                          <a:latin typeface="Arial"/>
+                        </a:rPr>
+                        <a:t>9.0 L, 28.5 kg </a:t>
+                      </a:r>
+                      <a:r>
+                        <a:rPr sz="1100" b="0">
+                          <a:solidFill>
+                            <a:srgbClr val="282828"/>
+                          </a:solidFill>
+                          <a:latin typeface="Arial"/>
+                        </a:rPr>
+                        <a:t>CaF</a:t>
+                      </a:r>
+                      <a:r>
+                        <a:rPr sz="1100" b="0" baseline="-25000">
+                          <a:solidFill>
+                            <a:srgbClr val="282828"/>
+                          </a:solidFill>
+                          <a:latin typeface="Arial"/>
+                        </a:rPr>
+                        <a:t>2</a:t>
+                      </a:r>
+                      <a:r>
+                        <a:rPr sz="1100" b="0">
+                          <a:solidFill>
+                            <a:srgbClr val="282828"/>
+                          </a:solidFill>
+                          <a:latin typeface="Arial"/>
+                        </a:rPr>
+                        <a:t> (12.4 L single crystal to carve)</a:t>
+                      </a:r>
+                    </a:p>
+                  </a:txBody>
+                  <a:tcPr marL="54864" marR="54864" marT="18288" marB="18288">
+                    <a:solidFill>
+                      <a:srgbClr val="ECF1F6"/>
+                    </a:solidFill>
+                  </a:tcPr>
+                </a:tc>
+                <a:tc>
+                  <a:txBody>
+                    <a:bodyPr wrap="square"/>
+                    <a:lstStyle/>
+                    <a:p>
+                      <a:r>
+                        <a:rPr sz="1100" b="0">
+                          <a:solidFill>
+                            <a:srgbClr val="282828"/>
+                          </a:solidFill>
+                          <a:latin typeface="Arial"/>
+                        </a:rPr>
+                        <a:t>3.0 L, 6.6 kg fused silica</a:t>
+                      </a:r>
+                    </a:p>
+                  </a:txBody>
+                  <a:tcPr marL="54864" marR="54864" marT="18288" marB="18288">
+                    <a:solidFill>
+                      <a:srgbClr val="ECF1F6"/>
+                    </a:solidFill>
+                  </a:tcPr>
+                </a:tc>
+              </a:tr>
+              <a:tr h="280035">
+                <a:tc>
+                  <a:txBody>
+                    <a:bodyPr wrap="square"/>
+                    <a:lstStyle/>
+                    <a:p>
+                      <a:r>
+                        <a:rPr sz="1100" b="0">
+                          <a:solidFill>
+                            <a:srgbClr val="282828"/>
+                          </a:solidFill>
+                          <a:latin typeface="Arial"/>
+                        </a:rPr>
+                        <a:t>the block of modules: envelope; optics</a:t>
+                      </a:r>
+                    </a:p>
+                  </a:txBody>
+                  <a:tcPr marL="54864" marR="54864" marT="18288" marB="18288">
+                    <a:solidFill>
+                      <a:srgbClr val="FFFFFF"/>
+                    </a:solidFill>
+                  </a:tcPr>
+                </a:tc>
+                <a:tc>
+                  <a:txBody>
+                    <a:bodyPr wrap="square"/>
+                    <a:lstStyle/>
+                    <a:p>
+                      <a:r>
+                        <a:rPr sz="1100" b="0">
+                          <a:solidFill>
+                            <a:srgbClr val="282828"/>
+                          </a:solidFill>
+                          <a:latin typeface="Arial"/>
+                        </a:rPr>
+                        <a:t>0.75 × 0.60 × 1.36 m, 609 L; 39 kg</a:t>
+                      </a:r>
+                    </a:p>
+                  </a:txBody>
+                  <a:tcPr marL="54864" marR="54864" marT="18288" marB="18288">
+                    <a:solidFill>
+                      <a:srgbClr val="FFFFFF"/>
+                    </a:solidFill>
+                  </a:tcPr>
+                </a:tc>
+                <a:tc>
+                  <a:txBody>
+                    <a:bodyPr wrap="square"/>
+                    <a:lstStyle/>
+                    <a:p>
+                      <a:r>
+                        <a:rPr sz="1100" b="0">
+                          <a:solidFill>
+                            <a:srgbClr val="282828"/>
+                          </a:solidFill>
+                          <a:latin typeface="Arial"/>
+                        </a:rPr>
+                        <a:t>0.97 × 0.41 × 0.76 m, 300 L; 14.6 kg</a:t>
+                      </a:r>
+                    </a:p>
+                  </a:txBody>
+                  <a:tcPr marL="54864" marR="54864" marT="18288" marB="18288">
+                    <a:solidFill>
+                      <a:srgbClr val="FFFFFF"/>
+                    </a:solidFill>
+                  </a:tcPr>
+                </a:tc>
+              </a:tr>
+              <a:tr h="280035">
+                <a:tc>
+                  <a:txBody>
+                    <a:bodyPr wrap="square"/>
+                    <a:lstStyle/>
+                    <a:p>
+                      <a:r>
+                        <a:rPr sz="1100" b="0">
+                          <a:solidFill>
+                            <a:srgbClr val="282828"/>
+                          </a:solidFill>
+                          <a:latin typeface="Arial"/>
+                        </a:rPr>
+                        <a:t>telescopes / spectrometers / detectors</a:t>
+                      </a:r>
+                    </a:p>
+                  </a:txBody>
+                  <a:tcPr marL="54864" marR="54864" marT="18288" marB="18288">
+                    <a:solidFill>
+                      <a:srgbClr val="ECF1F6"/>
+                    </a:solidFill>
+                  </a:tcPr>
+                </a:tc>
+                <a:tc>
+                  <a:txBody>
+                    <a:bodyPr wrap="square"/>
+                    <a:lstStyle/>
+                    <a:p>
+                      <a:r>
+                        <a:rPr sz="1100" b="0">
+                          <a:solidFill>
+                            <a:srgbClr val="282828"/>
+                          </a:solidFill>
+                          <a:latin typeface="Arial"/>
+                        </a:rPr>
+                        <a:t>2 / 2 / 2 × (3072 × 512, a standard format)</a:t>
+                      </a:r>
+                    </a:p>
+                  </a:txBody>
+                  <a:tcPr marL="54864" marR="54864" marT="18288" marB="18288">
+                    <a:solidFill>
+                      <a:srgbClr val="ECF1F6"/>
+                    </a:solidFill>
+                  </a:tcPr>
+                </a:tc>
+                <a:tc>
+                  <a:txBody>
+                    <a:bodyPr wrap="square"/>
+                    <a:lstStyle/>
+                    <a:p>
+                      <a:r>
+                        <a:rPr sz="1100" b="0">
+                          <a:solidFill>
+                            <a:srgbClr val="282828"/>
+                          </a:solidFill>
+                          <a:latin typeface="Arial"/>
+                        </a:rPr>
+                        <a:t>4 / 4 / 4 × (1.5k × 0.5k, NRE)</a:t>
+                      </a:r>
+                    </a:p>
+                  </a:txBody>
+                  <a:tcPr marL="54864" marR="54864" marT="18288" marB="18288">
+                    <a:solidFill>
+                      <a:srgbClr val="ECF1F6"/>
+                    </a:solidFill>
+                  </a:tcPr>
+                </a:tc>
+              </a:tr>
+              <a:tr h="280035">
+                <a:tc>
+                  <a:txBody>
+                    <a:bodyPr wrap="square"/>
+                    <a:lstStyle/>
+                    <a:p>
+                      <a:r>
+                        <a:rPr sz="1100" b="0">
+                          <a:solidFill>
+                            <a:srgbClr val="282828"/>
+                          </a:solidFill>
+                          <a:latin typeface="Arial"/>
+                        </a:rPr>
+                        <a:t>integration, test, calibration</a:t>
+                      </a:r>
+                    </a:p>
+                  </a:txBody>
+                  <a:tcPr marL="54864" marR="54864" marT="18288" marB="18288">
+                    <a:solidFill>
+                      <a:srgbClr val="FFFFFF"/>
+                    </a:solidFill>
+                  </a:tcPr>
+                </a:tc>
+                <a:tc>
+                  <a:txBody>
+                    <a:bodyPr wrap="square"/>
+                    <a:lstStyle/>
+                    <a:p>
+                      <a:r>
+                        <a:rPr sz="1100" b="0">
+                          <a:solidFill>
+                            <a:srgbClr val="282828"/>
+                          </a:solidFill>
+                          <a:latin typeface="Arial"/>
+                        </a:rPr>
+                        <a:t>two of each</a:t>
+                      </a:r>
+                    </a:p>
+                  </a:txBody>
+                  <a:tcPr marL="54864" marR="54864" marT="18288" marB="18288">
+                    <a:solidFill>
+                      <a:srgbClr val="FFFFFF"/>
+                    </a:solidFill>
+                  </a:tcPr>
+                </a:tc>
+                <a:tc>
+                  <a:txBody>
+                    <a:bodyPr wrap="square"/>
+                    <a:lstStyle/>
+                    <a:p>
+                      <a:r>
+                        <a:rPr sz="1100" b="0">
+                          <a:solidFill>
+                            <a:srgbClr val="282828"/>
+                          </a:solidFill>
+                          <a:latin typeface="Arial"/>
+                        </a:rPr>
+                        <a:t>four of each (Jim: the cost that dominates)</a:t>
+                      </a:r>
+                    </a:p>
+                  </a:txBody>
+                  <a:tcPr marL="54864" marR="54864" marT="18288" marB="18288">
+                    <a:solidFill>
+                      <a:srgbClr val="FFFFFF"/>
+                    </a:solidFill>
+                  </a:tcPr>
+                </a:tc>
+              </a:tr>
+              <a:tr h="468630">
+                <a:tc>
+                  <a:txBody>
+                    <a:bodyPr wrap="square"/>
+                    <a:lstStyle/>
+                    <a:p>
+                      <a:r>
+                        <a:rPr sz="1100" b="0">
+                          <a:solidFill>
+                            <a:srgbClr val="282828"/>
+                          </a:solidFill>
+                          <a:latin typeface="Arial"/>
+                        </a:rPr>
+                        <a:t>materials</a:t>
+                      </a:r>
+                    </a:p>
+                  </a:txBody>
+                  <a:tcPr marL="54864" marR="54864" marT="18288" marB="18288">
+                    <a:solidFill>
+                      <a:srgbClr val="ECF1F6"/>
+                    </a:solidFill>
+                  </a:tcPr>
+                </a:tc>
+                <a:tc>
+                  <a:txBody>
+                    <a:bodyPr wrap="square"/>
+                    <a:lstStyle/>
+                    <a:p>
+                      <a:r>
+                        <a:rPr sz="1100" b="0">
+                          <a:solidFill>
+                            <a:srgbClr val="282828"/>
+                          </a:solidFill>
+                          <a:latin typeface="Arial"/>
+                        </a:rPr>
+                        <a:t>"a tiny fraction of the instrument cost" (Jim)</a:t>
+                      </a:r>
+                    </a:p>
+                  </a:txBody>
+                  <a:tcPr marL="54864" marR="54864" marT="18288" marB="18288">
+                    <a:solidFill>
+                      <a:srgbClr val="ECF1F6"/>
+                    </a:solidFill>
+                  </a:tcPr>
+                </a:tc>
+                <a:tc>
+                  <a:txBody>
+                    <a:bodyPr wrap="square"/>
+                    <a:lstStyle/>
+                    <a:p>
+                      <a:r>
+                        <a:rPr sz="1100" b="0">
+                          <a:solidFill>
+                            <a:srgbClr val="282828"/>
+                          </a:solidFill>
+                          <a:latin typeface="Arial"/>
+                        </a:rPr>
+                        <a:t>the same</a:t>
+                      </a:r>
+                    </a:p>
+                  </a:txBody>
+                  <a:tcPr marL="54864" marR="54864" marT="18288" marB="18288">
+                    <a:solidFill>
+                      <a:srgbClr val="ECF1F6"/>
+                    </a:solidFill>
+                  </a:tcPr>
+                </a:tc>
+              </a:tr>
+            </a:tbl>
+          </a:graphicData>
+        </a:graphic>
+      </p:graphicFrame>
       <p:sp>
         <p:nvSpPr>
-          <p:cNvPr id="4" name="TextBox 3"/>
+          <p:cNvPr id="5" name="TextBox 4"/>
           <p:cNvSpPr txBox="1"/>
           <p:nvPr/>
         </p:nvSpPr>
         <p:spPr>
           <a:xfrm>
-            <a:off x="411480" y="1298448"/>
+            <a:off x="411480" y="6028182"/>
             <a:ext cx="11368735" cy="274320"/>
           </a:xfrm>
           <a:prstGeom prst="rect">
@@ -8617,138 +9880,13 @@
               </a:spcAft>
             </a:pPr>
             <a:r>
-              <a:rPr sz="1500" b="0">
-                <a:solidFill>
-                  <a:srgbClr val="282828"/>
-                </a:solidFill>
-                <a:latin typeface="Arial"/>
-              </a:rPr>
-              <a:t>•  </a:t>
-            </a:r>
-            <a:r>
-              <a:rPr sz="1500" b="1">
-                <a:solidFill>
-                  <a:srgbClr val="282828"/>
-                </a:solidFill>
-                <a:latin typeface="Arial"/>
-              </a:rPr>
-              <a:t>The entrance beam.</a:t>
-            </a:r>
-            <a:r>
-              <a:rPr sz="1500" b="0">
-                <a:solidFill>
-                  <a:srgbClr val="282828"/>
-                </a:solidFill>
-                <a:latin typeface="Arial"/>
-              </a:rPr>
-              <a:t>  Joe's 183 mm at f 330 mm is F/1.803, so the telescope's cone along the slit is F/1.89 and cannot be "a little faster than the spectrometer" without a larger beam; the paper's is 192 mm.  Is the aperture Joe's number or the paper's?</a:t>
-            </a:r>
-          </a:p>
-          <a:p>
-            <a:pPr>
-              <a:spcAft>
-                <a:spcPts val="600"/>
-              </a:spcAft>
-            </a:pPr>
-            <a:r>
-              <a:rPr sz="1500" b="0">
-                <a:solidFill>
-                  <a:srgbClr val="282828"/>
-                </a:solidFill>
-                <a:latin typeface="Arial"/>
-              </a:rPr>
-              <a:t>•  </a:t>
-            </a:r>
-            <a:r>
-              <a:rPr sz="1500" b="1">
-                <a:solidFill>
-                  <a:srgbClr val="282828"/>
-                </a:solidFill>
-                <a:latin typeface="Arial"/>
-              </a:rPr>
-              <a:t>The slit and SRF.</a:t>
-            </a:r>
-            <a:r>
-              <a:rPr sz="1500" b="0">
-                <a:solidFill>
-                  <a:srgbClr val="282828"/>
-                </a:solidFill>
-                <a:latin typeface="Arial"/>
-              </a:rPr>
-              <a:t>  With a 2-pixel slit the SRF floor is 2.01–2.02 px (36 µm) with the pixel and diffraction, where this design sits to 0.03 µm; the paper's bound is 64.8 µm.  Is the 1.5–2.0 px range read against a 2-pixel slit, or does the project want a narrower slit at the throughput's expense?</a:t>
-            </a:r>
-          </a:p>
-          <a:p>
-            <a:pPr>
-              <a:spcAft>
-                <a:spcPts val="600"/>
-              </a:spcAft>
-            </a:pPr>
-            <a:r>
-              <a:rPr sz="1500" b="0">
-                <a:solidFill>
-                  <a:srgbClr val="282828"/>
-                </a:solidFill>
-                <a:latin typeface="Arial"/>
-              </a:rPr>
-              <a:t>•  </a:t>
-            </a:r>
-            <a:r>
-              <a:rPr sz="1500" b="1">
-                <a:solidFill>
-                  <a:srgbClr val="282828"/>
-                </a:solidFill>
-                <a:latin typeface="Arial"/>
-              </a:rPr>
-              <a:t>The spectrometer's form.</a:t>
-            </a:r>
-            <a:r>
-              <a:rPr sz="1500" b="0">
-                <a:solidFill>
-                  <a:srgbClr val="282828"/>
-                </a:solidFill>
-                <a:latin typeface="Arial"/>
-              </a:rPr>
-              <a:t>  Our Dyson of record is the paper's Option A and meets the specification; its Option B (the conic grating) buys energy in a pixel 0.82 → 0.99 here but not alignment insensitivity.  What drove B in the build — fabrication, thermal, or the margin?</a:t>
-            </a:r>
-          </a:p>
-        </p:txBody>
-      </p:sp>
-      <p:sp>
-        <p:nvSpPr>
-          <p:cNvPr id="5" name="TextBox 4"/>
-          <p:cNvSpPr txBox="1"/>
-          <p:nvPr/>
-        </p:nvSpPr>
-        <p:spPr>
-          <a:xfrm>
-            <a:off x="411480" y="3984498"/>
-            <a:ext cx="11368735" cy="274320"/>
-          </a:xfrm>
-          <a:prstGeom prst="rect">
-            <a:avLst/>
-          </a:prstGeom>
-          <a:noFill/>
-        </p:spPr>
-        <p:txBody>
-          <a:bodyPr wrap="square">
-            <a:spAutoFit/>
-          </a:bodyPr>
-          <a:lstStyle/>
-          <a:p>
-            <a:pPr>
-              <a:spcAft>
-                <a:spcPts val="600"/>
-              </a:spcAft>
-            </a:pPr>
-            <a:r>
               <a:rPr sz="1050" b="0">
                 <a:solidFill>
                   <a:srgbClr val="6E6E6E"/>
                 </a:solidFill>
                 <a:latin typeface="Arial"/>
               </a:rPr>
-              <a:t>Still open from the last round: the detector window's gap (now answered: an order-sorting filter, not bonded) and the AR by band.</a:t>
+              <a:t>Records dyson5_jim_3a.txt, dyson5_t5f_cprime_centroid_roll000.txt, dyson5_rescore_1k5_launch.txt (the 1.5k module of record under both launches, 2026-10-08: its slit-filled smile is the older telescope's own 0.08 px, inside Joe's 0.1; its SRF 2.21 and energy 0.30–0.39 are the telescope's spots).  The four-module block (0.97 × 0.41 × 0.76 m, 14.6 kg of optics) of the last deck stands as the fallback.  The air gap at the window stands on both (six crossings, 0.81 uncoated).</a:t>
             </a:r>
           </a:p>
         </p:txBody>
@@ -8805,7 +9943,7 @@
                 </a:solidFill>
                 <a:latin typeface="Arial"/>
               </a:rPr>
-              <a:t>Next steps</a:t>
+              <a:t>Questions for Jim and Joe</a:t>
             </a:r>
           </a:p>
           <a:p>
@@ -8821,7 +9959,7 @@
                 </a:solidFill>
                 <a:latin typeface="Arial"/>
               </a:rPr>
-              <a:t>The spectrometer's tolerances and form; the telescope's tolerances and sizing; the record</a:t>
+              <a:t>Three the ray trace cannot settle</a:t>
             </a:r>
           </a:p>
         </p:txBody>
@@ -8879,6 +10017,287 @@
         <p:spPr>
           <a:xfrm>
             <a:off x="411480" y="1298448"/>
+            <a:ext cx="11368735" cy="274320"/>
+          </a:xfrm>
+          <a:prstGeom prst="rect">
+            <a:avLst/>
+          </a:prstGeom>
+          <a:noFill/>
+        </p:spPr>
+        <p:txBody>
+          <a:bodyPr wrap="square">
+            <a:spAutoFit/>
+          </a:bodyPr>
+          <a:lstStyle/>
+          <a:p>
+            <a:pPr>
+              <a:spcAft>
+                <a:spcPts val="600"/>
+              </a:spcAft>
+            </a:pPr>
+            <a:r>
+              <a:rPr sz="1500" b="0">
+                <a:solidFill>
+                  <a:srgbClr val="282828"/>
+                </a:solidFill>
+                <a:latin typeface="Arial"/>
+              </a:rPr>
+              <a:t>•  </a:t>
+            </a:r>
+            <a:r>
+              <a:rPr sz="1500" b="1">
+                <a:solidFill>
+                  <a:srgbClr val="282828"/>
+                </a:solidFill>
+                <a:latin typeface="Arial"/>
+              </a:rPr>
+              <a:t>The entrance beam.</a:t>
+            </a:r>
+            <a:r>
+              <a:rPr sz="1500" b="0">
+                <a:solidFill>
+                  <a:srgbClr val="282828"/>
+                </a:solidFill>
+                <a:latin typeface="Arial"/>
+              </a:rPr>
+              <a:t>  Joe's 183 mm at f 330 mm is F/1.803, so the telescope's cone along the slit is F/1.89 and cannot be "a little faster than the spectrometer" without a larger beam; the paper's is 192 mm.  Is the aperture Joe's number or the paper's?</a:t>
+            </a:r>
+          </a:p>
+          <a:p>
+            <a:pPr>
+              <a:spcAft>
+                <a:spcPts val="600"/>
+              </a:spcAft>
+            </a:pPr>
+            <a:r>
+              <a:rPr sz="1500" b="0">
+                <a:solidFill>
+                  <a:srgbClr val="282828"/>
+                </a:solidFill>
+                <a:latin typeface="Arial"/>
+              </a:rPr>
+              <a:t>•  </a:t>
+            </a:r>
+            <a:r>
+              <a:rPr sz="1500" b="1">
+                <a:solidFill>
+                  <a:srgbClr val="282828"/>
+                </a:solidFill>
+                <a:latin typeface="Arial"/>
+              </a:rPr>
+              <a:t>The slit and SRF.</a:t>
+            </a:r>
+            <a:r>
+              <a:rPr sz="1500" b="0">
+                <a:solidFill>
+                  <a:srgbClr val="282828"/>
+                </a:solidFill>
+                <a:latin typeface="Arial"/>
+              </a:rPr>
+              <a:t>  With a 2-pixel slit the SRF floor is 2.01–2.02 px (36 µm) with the pixel and diffraction, where this design sits to 0.03 µm; the paper's bound is 64.8 µm.  Is the 1.5–2.0 px range read against a 2-pixel slit, or does the project want a narrower slit at the throughput's expense?</a:t>
+            </a:r>
+          </a:p>
+          <a:p>
+            <a:pPr>
+              <a:spcAft>
+                <a:spcPts val="600"/>
+              </a:spcAft>
+            </a:pPr>
+            <a:r>
+              <a:rPr sz="1500" b="0">
+                <a:solidFill>
+                  <a:srgbClr val="282828"/>
+                </a:solidFill>
+                <a:latin typeface="Arial"/>
+              </a:rPr>
+              <a:t>•  </a:t>
+            </a:r>
+            <a:r>
+              <a:rPr sz="1500" b="1">
+                <a:solidFill>
+                  <a:srgbClr val="282828"/>
+                </a:solidFill>
+                <a:latin typeface="Arial"/>
+              </a:rPr>
+              <a:t>The spectrometer's form.</a:t>
+            </a:r>
+            <a:r>
+              <a:rPr sz="1500" b="0">
+                <a:solidFill>
+                  <a:srgbClr val="282828"/>
+                </a:solidFill>
+                <a:latin typeface="Arial"/>
+              </a:rPr>
+              <a:t>  Our Dyson of record is the paper's Option A and meets the specification; its Option B (the conic grating) buys energy in a pixel 0.82 → 0.99 here but not alignment insensitivity.  What drove B in the build — fabrication, thermal, or the margin?</a:t>
+            </a:r>
+          </a:p>
+        </p:txBody>
+      </p:sp>
+      <p:sp>
+        <p:nvSpPr>
+          <p:cNvPr id="5" name="TextBox 4"/>
+          <p:cNvSpPr txBox="1"/>
+          <p:nvPr/>
+        </p:nvSpPr>
+        <p:spPr>
+          <a:xfrm>
+            <a:off x="411480" y="3984498"/>
+            <a:ext cx="11368735" cy="274320"/>
+          </a:xfrm>
+          <a:prstGeom prst="rect">
+            <a:avLst/>
+          </a:prstGeom>
+          <a:noFill/>
+        </p:spPr>
+        <p:txBody>
+          <a:bodyPr wrap="square">
+            <a:spAutoFit/>
+          </a:bodyPr>
+          <a:lstStyle/>
+          <a:p>
+            <a:pPr>
+              <a:spcAft>
+                <a:spcPts val="600"/>
+              </a:spcAft>
+            </a:pPr>
+            <a:r>
+              <a:rPr sz="1050" b="0">
+                <a:solidFill>
+                  <a:srgbClr val="6E6E6E"/>
+                </a:solidFill>
+                <a:latin typeface="Arial"/>
+              </a:rPr>
+              <a:t>Still open from the last round: the detector window's gap (now answered: an order-sorting filter, not bonded) and the AR by band.</a:t>
+            </a:r>
+          </a:p>
+        </p:txBody>
+      </p:sp>
+    </p:spTree>
+  </p:cSld>
+  <p:clrMapOvr>
+    <a:masterClrMapping/>
+  </p:clrMapOvr>
+</p:sld>
+</file>
+
+<file path=ppt/slides/slide18.xml><?xml version="1.0" encoding="utf-8"?>
+<p:sld xmlns:a="http://schemas.openxmlformats.org/drawingml/2006/main" xmlns:p="http://schemas.openxmlformats.org/presentationml/2006/main" xmlns:r="http://schemas.openxmlformats.org/officeDocument/2006/relationships">
+  <p:cSld>
+    <p:spTree>
+      <p:nvGrpSpPr>
+        <p:cNvPr id="1" name=""/>
+        <p:cNvGrpSpPr/>
+        <p:nvPr/>
+      </p:nvGrpSpPr>
+      <p:grpSpPr/>
+      <p:sp>
+        <p:nvSpPr>
+          <p:cNvPr id="2" name="TextBox 1"/>
+          <p:cNvSpPr txBox="1"/>
+          <p:nvPr/>
+        </p:nvSpPr>
+        <p:spPr>
+          <a:xfrm>
+            <a:off x="411480" y="201168"/>
+            <a:ext cx="11368735" cy="914400"/>
+          </a:xfrm>
+          <a:prstGeom prst="rect">
+            <a:avLst/>
+          </a:prstGeom>
+          <a:noFill/>
+        </p:spPr>
+        <p:txBody>
+          <a:bodyPr wrap="square">
+            <a:spAutoFit/>
+          </a:bodyPr>
+          <a:lstStyle/>
+          <a:p>
+            <a:pPr>
+              <a:spcAft>
+                <a:spcPts val="400"/>
+              </a:spcAft>
+            </a:pPr>
+            <a:r>
+              <a:rPr sz="2400" b="1">
+                <a:solidFill>
+                  <a:srgbClr val="1F4E79"/>
+                </a:solidFill>
+                <a:latin typeface="Arial"/>
+              </a:rPr>
+              <a:t>Next steps</a:t>
+            </a:r>
+          </a:p>
+          <a:p>
+            <a:pPr>
+              <a:spcAft>
+                <a:spcPts val="0"/>
+              </a:spcAft>
+            </a:pPr>
+            <a:r>
+              <a:rPr sz="1250" b="0">
+                <a:solidFill>
+                  <a:srgbClr val="6E6E6E"/>
+                </a:solidFill>
+                <a:latin typeface="Arial"/>
+              </a:rPr>
+              <a:t>The spectrometer's tolerances and form; the telescope's tolerances and sizing; the record</a:t>
+            </a:r>
+          </a:p>
+        </p:txBody>
+      </p:sp>
+      <p:sp>
+        <p:nvSpPr>
+          <p:cNvPr id="3" name="Rectangle 2"/>
+          <p:cNvSpPr/>
+          <p:nvPr/>
+        </p:nvSpPr>
+        <p:spPr>
+          <a:xfrm>
+            <a:off x="411480" y="1133856"/>
+            <a:ext cx="11368735" cy="20320"/>
+          </a:xfrm>
+          <a:prstGeom prst="rect">
+            <a:avLst/>
+          </a:prstGeom>
+          <a:solidFill>
+            <a:srgbClr val="B8C6D4"/>
+          </a:solidFill>
+          <a:ln>
+            <a:noFill/>
+          </a:ln>
+          <a:effectLst/>
+        </p:spPr>
+        <p:style>
+          <a:lnRef idx="1">
+            <a:schemeClr val="accent1"/>
+          </a:lnRef>
+          <a:fillRef idx="3">
+            <a:schemeClr val="accent1"/>
+          </a:fillRef>
+          <a:effectRef idx="2">
+            <a:schemeClr val="accent1"/>
+          </a:effectRef>
+          <a:fontRef idx="minor">
+            <a:schemeClr val="lt1"/>
+          </a:fontRef>
+        </p:style>
+        <p:txBody>
+          <a:bodyPr rtlCol="0" anchor="ctr"/>
+          <a:lstStyle/>
+          <a:p>
+            <a:pPr algn="ctr"/>
+          </a:p>
+        </p:txBody>
+      </p:sp>
+      <p:sp>
+        <p:nvSpPr>
+          <p:cNvPr id="4" name="TextBox 3"/>
+          <p:cNvSpPr txBox="1"/>
+          <p:nvPr/>
+        </p:nvSpPr>
+        <p:spPr>
+          <a:xfrm>
+            <a:off x="411480" y="1298448"/>
             <a:ext cx="5806440" cy="274320"/>
           </a:xfrm>
           <a:prstGeom prst="rect">
@@ -8922,7 +10341,7 @@
                 </a:solidFill>
                 <a:latin typeface="Arial"/>
               </a:rPr>
-              <a:t> the every-CTE thermal soak row; fabrication terms (figure, the grating's period and groove errors) in the ladder; throughput by band with the blaze; Option B as the candidate, its keystone tolerances (25 µm, 33 µrad) stated beside its margin.</a:t>
+              <a:t> the every-CTE thermal soak row; fabrication terms (figure, the grating's period and groove errors) in the ladder; a vector grating efficiency to replace the scalar blaze; Option B as the candidate, its keystone tolerances (25 µm, 33 µrad) stated beside its margin.</a:t>
             </a:r>
           </a:p>
           <a:p>
@@ -9099,7 +10518,7 @@
 </p:sld>
 </file>
 
-<file path=ppt/slides/slide18.xml><?xml version="1.0" encoding="utf-8"?>
+<file path=ppt/slides/slide19.xml><?xml version="1.0" encoding="utf-8"?>
 <p:sld xmlns:a="http://schemas.openxmlformats.org/drawingml/2006/main" xmlns:p="http://schemas.openxmlformats.org/presentationml/2006/main" xmlns:r="http://schemas.openxmlformats.org/officeDocument/2006/relationships">
   <p:cSld>
     <p:spTree>
@@ -9462,7 +10881,782 @@
 </p:sld>
 </file>
 
-<file path=ppt/slides/slide19.xml><?xml version="1.0" encoding="utf-8"?>
+<file path=ppt/slides/slide2.xml><?xml version="1.0" encoding="utf-8"?>
+<p:sld xmlns:a="http://schemas.openxmlformats.org/drawingml/2006/main" xmlns:p="http://schemas.openxmlformats.org/presentationml/2006/main" xmlns:r="http://schemas.openxmlformats.org/officeDocument/2006/relationships">
+  <p:cSld>
+    <p:spTree>
+      <p:nvGrpSpPr>
+        <p:cNvPr id="1" name=""/>
+        <p:cNvGrpSpPr/>
+        <p:nvPr/>
+      </p:nvGrpSpPr>
+      <p:grpSpPr/>
+      <p:sp>
+        <p:nvSpPr>
+          <p:cNvPr id="2" name="TextBox 1"/>
+          <p:cNvSpPr txBox="1"/>
+          <p:nvPr/>
+        </p:nvSpPr>
+        <p:spPr>
+          <a:xfrm>
+            <a:off x="411480" y="201168"/>
+            <a:ext cx="11368735" cy="914400"/>
+          </a:xfrm>
+          <a:prstGeom prst="rect">
+            <a:avLst/>
+          </a:prstGeom>
+          <a:noFill/>
+        </p:spPr>
+        <p:txBody>
+          <a:bodyPr wrap="square">
+            <a:spAutoFit/>
+          </a:bodyPr>
+          <a:lstStyle/>
+          <a:p>
+            <a:pPr>
+              <a:spcAft>
+                <a:spcPts val="400"/>
+              </a:spcAft>
+            </a:pPr>
+            <a:r>
+              <a:rPr sz="2400" b="1">
+                <a:solidFill>
+                  <a:srgbClr val="1F4E79"/>
+                </a:solidFill>
+                <a:latin typeface="Arial"/>
+              </a:rPr>
+              <a:t>Contents</a:t>
+            </a:r>
+          </a:p>
+          <a:p>
+            <a:pPr>
+              <a:spcAft>
+                <a:spcPts val="0"/>
+              </a:spcAft>
+            </a:pPr>
+            <a:r>
+              <a:rPr sz="1250" b="0">
+                <a:solidFill>
+                  <a:srgbClr val="6E6E6E"/>
+                </a:solidFill>
+                <a:latin typeface="Arial"/>
+              </a:rPr>
+              <a:t>What changed, the pair of modules, the seed, the telescope of record, the module scored, how the solve got there, the two smile conventions, the spectrometer, the comparison, the questions</a:t>
+            </a:r>
+          </a:p>
+        </p:txBody>
+      </p:sp>
+      <p:sp>
+        <p:nvSpPr>
+          <p:cNvPr id="3" name="Rectangle 2"/>
+          <p:cNvSpPr/>
+          <p:nvPr/>
+        </p:nvSpPr>
+        <p:spPr>
+          <a:xfrm>
+            <a:off x="411480" y="1133856"/>
+            <a:ext cx="11368735" cy="20320"/>
+          </a:xfrm>
+          <a:prstGeom prst="rect">
+            <a:avLst/>
+          </a:prstGeom>
+          <a:solidFill>
+            <a:srgbClr val="B8C6D4"/>
+          </a:solidFill>
+          <a:ln>
+            <a:noFill/>
+          </a:ln>
+          <a:effectLst/>
+        </p:spPr>
+        <p:style>
+          <a:lnRef idx="1">
+            <a:schemeClr val="accent1"/>
+          </a:lnRef>
+          <a:fillRef idx="3">
+            <a:schemeClr val="accent1"/>
+          </a:fillRef>
+          <a:effectRef idx="2">
+            <a:schemeClr val="accent1"/>
+          </a:effectRef>
+          <a:fontRef idx="minor">
+            <a:schemeClr val="lt1"/>
+          </a:fontRef>
+        </p:style>
+        <p:txBody>
+          <a:bodyPr rtlCol="0" anchor="ctr"/>
+          <a:lstStyle/>
+          <a:p>
+            <a:pPr algn="ctr"/>
+          </a:p>
+        </p:txBody>
+      </p:sp>
+      <p:sp>
+        <p:nvSpPr>
+          <p:cNvPr id="4" name="TextBox 3"/>
+          <p:cNvSpPr txBox="1"/>
+          <p:nvPr/>
+        </p:nvSpPr>
+        <p:spPr>
+          <a:xfrm>
+            <a:off x="411480" y="1298448"/>
+            <a:ext cx="5806440" cy="274320"/>
+          </a:xfrm>
+          <a:prstGeom prst="rect">
+            <a:avLst/>
+          </a:prstGeom>
+          <a:noFill/>
+        </p:spPr>
+        <p:txBody>
+          <a:bodyPr wrap="square">
+            <a:spAutoFit/>
+          </a:bodyPr>
+          <a:lstStyle/>
+          <a:p>
+            <a:pPr>
+              <a:spcAft>
+                <a:spcPts val="600"/>
+              </a:spcAft>
+            </a:pPr>
+            <a:r>
+              <a:rPr sz="1200" b="0">
+                <a:solidFill>
+                  <a:srgbClr val="282828"/>
+                </a:solidFill>
+                <a:latin typeface="Arial"/>
+              </a:rPr>
+              <a:t>•  </a:t>
+            </a:r>
+            <a:r>
+              <a:rPr sz="1200" b="1">
+                <a:solidFill>
+                  <a:srgbClr val="282828"/>
+                </a:solidFill>
+                <a:latin typeface="Arial"/>
+              </a:rPr>
+              <a:t>3</a:t>
+            </a:r>
+            <a:r>
+              <a:rPr sz="1200" b="0">
+                <a:solidFill>
+                  <a:srgbClr val="282828"/>
+                </a:solidFill>
+                <a:latin typeface="Arial"/>
+              </a:rPr>
+              <a:t> The target and how it is scored</a:t>
+            </a:r>
+          </a:p>
+          <a:p>
+            <a:pPr>
+              <a:spcAft>
+                <a:spcPts val="600"/>
+              </a:spcAft>
+            </a:pPr>
+            <a:r>
+              <a:rPr sz="1200" b="0">
+                <a:solidFill>
+                  <a:srgbClr val="282828"/>
+                </a:solidFill>
+                <a:latin typeface="Arial"/>
+              </a:rPr>
+              <a:t>•  </a:t>
+            </a:r>
+            <a:r>
+              <a:rPr sz="1200" b="1">
+                <a:solidFill>
+                  <a:srgbClr val="282828"/>
+                </a:solidFill>
+                <a:latin typeface="Arial"/>
+              </a:rPr>
+              <a:t>4</a:t>
+            </a:r>
+            <a:r>
+              <a:rPr sz="1200" b="0">
+                <a:solidFill>
+                  <a:srgbClr val="282828"/>
+                </a:solidFill>
+                <a:latin typeface="Arial"/>
+              </a:rPr>
+              <a:t> What changed since the last deck: Jim's answers and the paper</a:t>
+            </a:r>
+          </a:p>
+          <a:p>
+            <a:pPr>
+              <a:spcAft>
+                <a:spcPts val="600"/>
+              </a:spcAft>
+            </a:pPr>
+            <a:r>
+              <a:rPr sz="1200" b="0">
+                <a:solidFill>
+                  <a:srgbClr val="282828"/>
+                </a:solidFill>
+                <a:latin typeface="Arial"/>
+              </a:rPr>
+              <a:t>•  </a:t>
+            </a:r>
+            <a:r>
+              <a:rPr sz="1200" b="1">
+                <a:solidFill>
+                  <a:srgbClr val="282828"/>
+                </a:solidFill>
+                <a:latin typeface="Arial"/>
+              </a:rPr>
+              <a:t>5</a:t>
+            </a:r>
+            <a:r>
+              <a:rPr sz="1200" b="0">
+                <a:solidFill>
+                  <a:srgbClr val="282828"/>
+                </a:solidFill>
+                <a:latin typeface="Arial"/>
+              </a:rPr>
+              <a:t> Two 3k modules fill the swath</a:t>
+            </a:r>
+          </a:p>
+          <a:p>
+            <a:pPr>
+              <a:spcAft>
+                <a:spcPts val="600"/>
+              </a:spcAft>
+            </a:pPr>
+            <a:r>
+              <a:rPr sz="1200" b="0">
+                <a:solidFill>
+                  <a:srgbClr val="282828"/>
+                </a:solidFill>
+                <a:latin typeface="Arial"/>
+              </a:rPr>
+              <a:t>•  </a:t>
+            </a:r>
+            <a:r>
+              <a:rPr sz="1200" b="1">
+                <a:solidFill>
+                  <a:srgbClr val="282828"/>
+                </a:solidFill>
+                <a:latin typeface="Arial"/>
+              </a:rPr>
+              <a:t>6</a:t>
+            </a:r>
+            <a:r>
+              <a:rPr sz="1200" b="0">
+                <a:solidFill>
+                  <a:srgbClr val="282828"/>
+                </a:solidFill>
+                <a:latin typeface="Arial"/>
+              </a:rPr>
+              <a:t> The two strips on the ground, and the two focal planes</a:t>
+            </a:r>
+          </a:p>
+          <a:p>
+            <a:pPr>
+              <a:spcAft>
+                <a:spcPts val="600"/>
+              </a:spcAft>
+            </a:pPr>
+            <a:r>
+              <a:rPr sz="1200" b="0">
+                <a:solidFill>
+                  <a:srgbClr val="282828"/>
+                </a:solidFill>
+                <a:latin typeface="Arial"/>
+              </a:rPr>
+              <a:t>•  </a:t>
+            </a:r>
+            <a:r>
+              <a:rPr sz="1200" b="1">
+                <a:solidFill>
+                  <a:srgbClr val="282828"/>
+                </a:solidFill>
+                <a:latin typeface="Arial"/>
+              </a:rPr>
+              <a:t>7</a:t>
+            </a:r>
+            <a:r>
+              <a:rPr sz="1200" b="0">
+                <a:solidFill>
+                  <a:srgbClr val="282828"/>
+                </a:solidFill>
+                <a:latin typeface="Arial"/>
+              </a:rPr>
+              <a:t> The seed: the SBG form, first order</a:t>
+            </a:r>
+          </a:p>
+          <a:p>
+            <a:pPr>
+              <a:spcAft>
+                <a:spcPts val="600"/>
+              </a:spcAft>
+            </a:pPr>
+            <a:r>
+              <a:rPr sz="1200" b="0">
+                <a:solidFill>
+                  <a:srgbClr val="282828"/>
+                </a:solidFill>
+                <a:latin typeface="Arial"/>
+              </a:rPr>
+              <a:t>•  </a:t>
+            </a:r>
+            <a:r>
+              <a:rPr sz="1200" b="1">
+                <a:solidFill>
+                  <a:srgbClr val="282828"/>
+                </a:solidFill>
+                <a:latin typeface="Arial"/>
+              </a:rPr>
+              <a:t>8</a:t>
+            </a:r>
+            <a:r>
+              <a:rPr sz="1200" b="0">
+                <a:solidFill>
+                  <a:srgbClr val="282828"/>
+                </a:solidFill>
+                <a:latin typeface="Arial"/>
+              </a:rPr>
+              <a:t> The telescope of record: freeform three-mirror, R9</a:t>
+            </a:r>
+          </a:p>
+          <a:p>
+            <a:pPr>
+              <a:spcAft>
+                <a:spcPts val="600"/>
+              </a:spcAft>
+            </a:pPr>
+            <a:r>
+              <a:rPr sz="1200" b="0">
+                <a:solidFill>
+                  <a:srgbClr val="282828"/>
+                </a:solidFill>
+                <a:latin typeface="Arial"/>
+              </a:rPr>
+              <a:t>•  </a:t>
+            </a:r>
+            <a:r>
+              <a:rPr sz="1200" b="1">
+                <a:solidFill>
+                  <a:srgbClr val="282828"/>
+                </a:solidFill>
+                <a:latin typeface="Arial"/>
+              </a:rPr>
+              <a:t>9</a:t>
+            </a:r>
+            <a:r>
+              <a:rPr sz="1200" b="0">
+                <a:solidFill>
+                  <a:srgbClr val="282828"/>
+                </a:solidFill>
+                <a:latin typeface="Arial"/>
+              </a:rPr>
+              <a:t> The 3k module, scored: spectrometer, telescope, and the two together</a:t>
+            </a:r>
+          </a:p>
+          <a:p>
+            <a:pPr>
+              <a:spcAft>
+                <a:spcPts val="600"/>
+              </a:spcAft>
+            </a:pPr>
+            <a:r>
+              <a:rPr sz="1200" b="0">
+                <a:solidFill>
+                  <a:srgbClr val="282828"/>
+                </a:solidFill>
+                <a:latin typeface="Arial"/>
+              </a:rPr>
+              <a:t>•  </a:t>
+            </a:r>
+            <a:r>
+              <a:rPr sz="1200" b="1">
+                <a:solidFill>
+                  <a:srgbClr val="282828"/>
+                </a:solidFill>
+                <a:latin typeface="Arial"/>
+              </a:rPr>
+              <a:t>10</a:t>
+            </a:r>
+            <a:r>
+              <a:rPr sz="1200" b="0">
+                <a:solidFill>
+                  <a:srgbClr val="282828"/>
+                </a:solidFill>
+                <a:latin typeface="Arial"/>
+              </a:rPr>
+              <a:t> The 3k module, end to end</a:t>
+            </a:r>
+          </a:p>
+        </p:txBody>
+      </p:sp>
+      <p:sp>
+        <p:nvSpPr>
+          <p:cNvPr id="5" name="TextBox 4"/>
+          <p:cNvSpPr txBox="1"/>
+          <p:nvPr/>
+        </p:nvSpPr>
+        <p:spPr>
+          <a:xfrm>
+            <a:off x="6400800" y="1298448"/>
+            <a:ext cx="5394960" cy="274320"/>
+          </a:xfrm>
+          <a:prstGeom prst="rect">
+            <a:avLst/>
+          </a:prstGeom>
+          <a:noFill/>
+        </p:spPr>
+        <p:txBody>
+          <a:bodyPr wrap="square">
+            <a:spAutoFit/>
+          </a:bodyPr>
+          <a:lstStyle/>
+          <a:p>
+            <a:pPr>
+              <a:spcAft>
+                <a:spcPts val="600"/>
+              </a:spcAft>
+            </a:pPr>
+            <a:r>
+              <a:rPr sz="1200" b="0">
+                <a:solidFill>
+                  <a:srgbClr val="282828"/>
+                </a:solidFill>
+                <a:latin typeface="Arial"/>
+              </a:rPr>
+              <a:t>•  </a:t>
+            </a:r>
+            <a:r>
+              <a:rPr sz="1200" b="1">
+                <a:solidFill>
+                  <a:srgbClr val="282828"/>
+                </a:solidFill>
+                <a:latin typeface="Arial"/>
+              </a:rPr>
+              <a:t>11</a:t>
+            </a:r>
+            <a:r>
+              <a:rPr sz="1200" b="0">
+                <a:solidFill>
+                  <a:srgbClr val="282828"/>
+                </a:solidFill>
+                <a:latin typeface="Arial"/>
+              </a:rPr>
+              <a:t> How the solve got there: six rungs and three lessons</a:t>
+            </a:r>
+          </a:p>
+          <a:p>
+            <a:pPr>
+              <a:spcAft>
+                <a:spcPts val="600"/>
+              </a:spcAft>
+            </a:pPr>
+            <a:r>
+              <a:rPr sz="1200" b="0">
+                <a:solidFill>
+                  <a:srgbClr val="282828"/>
+                </a:solidFill>
+                <a:latin typeface="Arial"/>
+              </a:rPr>
+              <a:t>•  </a:t>
+            </a:r>
+            <a:r>
+              <a:rPr sz="1200" b="1">
+                <a:solidFill>
+                  <a:srgbClr val="282828"/>
+                </a:solidFill>
+                <a:latin typeface="Arial"/>
+              </a:rPr>
+              <a:t>12</a:t>
+            </a:r>
+            <a:r>
+              <a:rPr sz="1200" b="0">
+                <a:solidFill>
+                  <a:srgbClr val="282828"/>
+                </a:solidFill>
+                <a:latin typeface="Arial"/>
+              </a:rPr>
+              <a:t> Smile is a convention: the launch, not the optics</a:t>
+            </a:r>
+          </a:p>
+          <a:p>
+            <a:pPr>
+              <a:spcAft>
+                <a:spcPts val="600"/>
+              </a:spcAft>
+            </a:pPr>
+            <a:r>
+              <a:rPr sz="1200" b="0">
+                <a:solidFill>
+                  <a:srgbClr val="282828"/>
+                </a:solidFill>
+                <a:latin typeface="Arial"/>
+              </a:rPr>
+              <a:t>•  </a:t>
+            </a:r>
+            <a:r>
+              <a:rPr sz="1200" b="1">
+                <a:solidFill>
+                  <a:srgbClr val="282828"/>
+                </a:solidFill>
+                <a:latin typeface="Arial"/>
+              </a:rPr>
+              <a:t>13</a:t>
+            </a:r>
+            <a:r>
+              <a:rPr sz="1200" b="0">
+                <a:solidFill>
+                  <a:srgbClr val="282828"/>
+                </a:solidFill>
+                <a:latin typeface="Arial"/>
+              </a:rPr>
+              <a:t> The cone, the spec and the paper's beam</a:t>
+            </a:r>
+          </a:p>
+          <a:p>
+            <a:pPr>
+              <a:spcAft>
+                <a:spcPts val="600"/>
+              </a:spcAft>
+            </a:pPr>
+            <a:r>
+              <a:rPr sz="1200" b="0">
+                <a:solidFill>
+                  <a:srgbClr val="282828"/>
+                </a:solidFill>
+                <a:latin typeface="Arial"/>
+              </a:rPr>
+              <a:t>•  </a:t>
+            </a:r>
+            <a:r>
+              <a:rPr sz="1200" b="1">
+                <a:solidFill>
+                  <a:srgbClr val="282828"/>
+                </a:solidFill>
+                <a:latin typeface="Arial"/>
+              </a:rPr>
+              <a:t>14</a:t>
+            </a:r>
+            <a:r>
+              <a:rPr sz="1200" b="0">
+                <a:solidFill>
+                  <a:srgbClr val="282828"/>
+                </a:solidFill>
+                <a:latin typeface="Arial"/>
+              </a:rPr>
+              <a:t> The spectrometer: toleranced, and a conic grating for margin</a:t>
+            </a:r>
+          </a:p>
+          <a:p>
+            <a:pPr>
+              <a:spcAft>
+                <a:spcPts val="600"/>
+              </a:spcAft>
+            </a:pPr>
+            <a:r>
+              <a:rPr sz="1200" b="0">
+                <a:solidFill>
+                  <a:srgbClr val="282828"/>
+                </a:solidFill>
+                <a:latin typeface="Arial"/>
+              </a:rPr>
+              <a:t>•  </a:t>
+            </a:r>
+            <a:r>
+              <a:rPr sz="1200" b="1">
+                <a:solidFill>
+                  <a:srgbClr val="282828"/>
+                </a:solidFill>
+                <a:latin typeface="Arial"/>
+              </a:rPr>
+              <a:t>15</a:t>
+            </a:r>
+            <a:r>
+              <a:rPr sz="1200" b="0">
+                <a:solidFill>
+                  <a:srgbClr val="282828"/>
+                </a:solidFill>
+                <a:latin typeface="Arial"/>
+              </a:rPr>
+              <a:t> Throughput by band, and the blaze</a:t>
+            </a:r>
+          </a:p>
+          <a:p>
+            <a:pPr>
+              <a:spcAft>
+                <a:spcPts val="600"/>
+              </a:spcAft>
+            </a:pPr>
+            <a:r>
+              <a:rPr sz="1200" b="0">
+                <a:solidFill>
+                  <a:srgbClr val="282828"/>
+                </a:solidFill>
+                <a:latin typeface="Arial"/>
+              </a:rPr>
+              <a:t>•  </a:t>
+            </a:r>
+            <a:r>
+              <a:rPr sz="1200" b="1">
+                <a:solidFill>
+                  <a:srgbClr val="282828"/>
+                </a:solidFill>
+                <a:latin typeface="Arial"/>
+              </a:rPr>
+              <a:t>16</a:t>
+            </a:r>
+            <a:r>
+              <a:rPr sz="1200" b="0">
+                <a:solidFill>
+                  <a:srgbClr val="282828"/>
+                </a:solidFill>
+                <a:latin typeface="Arial"/>
+              </a:rPr>
+              <a:t> Two of 3k or four of 1.5k, updated</a:t>
+            </a:r>
+          </a:p>
+          <a:p>
+            <a:pPr>
+              <a:spcAft>
+                <a:spcPts val="600"/>
+              </a:spcAft>
+            </a:pPr>
+            <a:r>
+              <a:rPr sz="1200" b="0">
+                <a:solidFill>
+                  <a:srgbClr val="282828"/>
+                </a:solidFill>
+                <a:latin typeface="Arial"/>
+              </a:rPr>
+              <a:t>•  </a:t>
+            </a:r>
+            <a:r>
+              <a:rPr sz="1200" b="1">
+                <a:solidFill>
+                  <a:srgbClr val="282828"/>
+                </a:solidFill>
+                <a:latin typeface="Arial"/>
+              </a:rPr>
+              <a:t>17</a:t>
+            </a:r>
+            <a:r>
+              <a:rPr sz="1200" b="0">
+                <a:solidFill>
+                  <a:srgbClr val="282828"/>
+                </a:solidFill>
+                <a:latin typeface="Arial"/>
+              </a:rPr>
+              <a:t> Questions for Jim and Joe</a:t>
+            </a:r>
+          </a:p>
+          <a:p>
+            <a:pPr>
+              <a:spcAft>
+                <a:spcPts val="600"/>
+              </a:spcAft>
+            </a:pPr>
+            <a:r>
+              <a:rPr sz="1200" b="0">
+                <a:solidFill>
+                  <a:srgbClr val="282828"/>
+                </a:solidFill>
+                <a:latin typeface="Arial"/>
+              </a:rPr>
+              <a:t>•  </a:t>
+            </a:r>
+            <a:r>
+              <a:rPr sz="1200" b="1">
+                <a:solidFill>
+                  <a:srgbClr val="282828"/>
+                </a:solidFill>
+                <a:latin typeface="Arial"/>
+              </a:rPr>
+              <a:t>18</a:t>
+            </a:r>
+            <a:r>
+              <a:rPr sz="1200" b="0">
+                <a:solidFill>
+                  <a:srgbClr val="282828"/>
+                </a:solidFill>
+                <a:latin typeface="Arial"/>
+              </a:rPr>
+              <a:t> Next steps</a:t>
+            </a:r>
+          </a:p>
+          <a:p>
+            <a:pPr>
+              <a:spcAft>
+                <a:spcPts val="600"/>
+              </a:spcAft>
+            </a:pPr>
+            <a:r>
+              <a:rPr sz="1200" b="0">
+                <a:solidFill>
+                  <a:srgbClr val="282828"/>
+                </a:solidFill>
+                <a:latin typeface="Arial"/>
+              </a:rPr>
+              <a:t>•  </a:t>
+            </a:r>
+            <a:r>
+              <a:rPr sz="1200" b="1">
+                <a:solidFill>
+                  <a:srgbClr val="282828"/>
+                </a:solidFill>
+                <a:latin typeface="Arial"/>
+              </a:rPr>
+              <a:t>19</a:t>
+            </a:r>
+            <a:r>
+              <a:rPr sz="1200" b="0">
+                <a:solidFill>
+                  <a:srgbClr val="282828"/>
+                </a:solidFill>
+                <a:latin typeface="Arial"/>
+              </a:rPr>
+              <a:t> Run it yourself</a:t>
+            </a:r>
+          </a:p>
+          <a:p>
+            <a:pPr>
+              <a:spcAft>
+                <a:spcPts val="600"/>
+              </a:spcAft>
+            </a:pPr>
+            <a:r>
+              <a:rPr sz="1200" b="0">
+                <a:solidFill>
+                  <a:srgbClr val="282828"/>
+                </a:solidFill>
+                <a:latin typeface="Arial"/>
+              </a:rPr>
+              <a:t>•  </a:t>
+            </a:r>
+            <a:r>
+              <a:rPr sz="1200" b="1">
+                <a:solidFill>
+                  <a:srgbClr val="282828"/>
+                </a:solidFill>
+                <a:latin typeface="Arial"/>
+              </a:rPr>
+              <a:t>20</a:t>
+            </a:r>
+            <a:r>
+              <a:rPr sz="1200" b="0">
+                <a:solidFill>
+                  <a:srgbClr val="282828"/>
+                </a:solidFill>
+                <a:latin typeface="Arial"/>
+              </a:rPr>
+              <a:t> Backup: the first order by the numbers; the rungs per field; the chief-tilt diagnostic; the tolerance ladder by the numbers; the engine finding; records</a:t>
+            </a:r>
+          </a:p>
+        </p:txBody>
+      </p:sp>
+    </p:spTree>
+  </p:cSld>
+  <p:clrMapOvr>
+    <a:masterClrMapping/>
+  </p:clrMapOvr>
+</p:sld>
+</file>
+
+<file path=ppt/slides/slide20.xml><?xml version="1.0" encoding="utf-8"?>
 <p:sld xmlns:a="http://schemas.openxmlformats.org/drawingml/2006/main" xmlns:p="http://schemas.openxmlformats.org/presentationml/2006/main" xmlns:r="http://schemas.openxmlformats.org/officeDocument/2006/relationships">
   <p:cSld>
     <p:spTree>
@@ -9563,7 +11757,7 @@
 </p:sld>
 </file>
 
-<file path=ppt/slides/slide2.xml><?xml version="1.0" encoding="utf-8"?>
+<file path=ppt/slides/slide21.xml><?xml version="1.0" encoding="utf-8"?>
 <p:sld xmlns:a="http://schemas.openxmlformats.org/drawingml/2006/main" xmlns:p="http://schemas.openxmlformats.org/presentationml/2006/main" xmlns:r="http://schemas.openxmlformats.org/officeDocument/2006/relationships">
   <p:cSld>
     <p:spTree>
@@ -9607,7 +11801,7 @@
                 </a:solidFill>
                 <a:latin typeface="Arial"/>
               </a:rPr>
-              <a:t>Contents</a:t>
+              <a:t>The first order by the numbers</a:t>
             </a:r>
           </a:p>
           <a:p>
@@ -9623,7 +11817,7 @@
                 </a:solidFill>
                 <a:latin typeface="Arial"/>
               </a:rPr>
-              <a:t>What changed, the pair of modules, the seed, the telescope of record, the module scored, how the solve got there, the two smile conventions, the spectrometer, the comparison, the questions</a:t>
+              <a:t>The seed's legs at f 330 mm, the powers the telecentric closure gives, the beams, and where the alternatives fail</a:t>
             </a:r>
           </a:p>
         </p:txBody>
@@ -9672,301 +11866,446 @@
           </a:p>
         </p:txBody>
       </p:sp>
-      <p:sp>
-        <p:nvSpPr>
-          <p:cNvPr id="4" name="TextBox 3"/>
-          <p:cNvSpPr txBox="1"/>
+      <p:graphicFrame>
+        <p:nvGraphicFramePr>
+          <p:cNvPr id="4" name="Table 3"/>
+          <p:cNvGraphicFramePr>
+            <a:graphicFrameLocks noGrp="1"/>
+          </p:cNvGraphicFramePr>
           <p:nvPr/>
-        </p:nvSpPr>
-        <p:spPr>
-          <a:xfrm>
-            <a:off x="411480" y="1298448"/>
-            <a:ext cx="5806440" cy="274320"/>
-          </a:xfrm>
-          <a:prstGeom prst="rect">
-            <a:avLst/>
-          </a:prstGeom>
-          <a:noFill/>
-        </p:spPr>
-        <p:txBody>
-          <a:bodyPr wrap="square">
-            <a:spAutoFit/>
-          </a:bodyPr>
-          <a:lstStyle/>
-          <a:p>
-            <a:pPr>
-              <a:spcAft>
-                <a:spcPts val="600"/>
-              </a:spcAft>
-            </a:pPr>
-            <a:r>
-              <a:rPr sz="1200" b="0">
-                <a:solidFill>
-                  <a:srgbClr val="282828"/>
-                </a:solidFill>
-                <a:latin typeface="Arial"/>
-              </a:rPr>
-              <a:t>•  </a:t>
-            </a:r>
-            <a:r>
-              <a:rPr sz="1200" b="1">
-                <a:solidFill>
-                  <a:srgbClr val="282828"/>
-                </a:solidFill>
-                <a:latin typeface="Arial"/>
-              </a:rPr>
-              <a:t>3</a:t>
-            </a:r>
-            <a:r>
-              <a:rPr sz="1200" b="0">
-                <a:solidFill>
-                  <a:srgbClr val="282828"/>
-                </a:solidFill>
-                <a:latin typeface="Arial"/>
-              </a:rPr>
-              <a:t> The target and how it is scored</a:t>
-            </a:r>
-          </a:p>
-          <a:p>
-            <a:pPr>
-              <a:spcAft>
-                <a:spcPts val="600"/>
-              </a:spcAft>
-            </a:pPr>
-            <a:r>
-              <a:rPr sz="1200" b="0">
-                <a:solidFill>
-                  <a:srgbClr val="282828"/>
-                </a:solidFill>
-                <a:latin typeface="Arial"/>
-              </a:rPr>
-              <a:t>•  </a:t>
-            </a:r>
-            <a:r>
-              <a:rPr sz="1200" b="1">
-                <a:solidFill>
-                  <a:srgbClr val="282828"/>
-                </a:solidFill>
-                <a:latin typeface="Arial"/>
-              </a:rPr>
-              <a:t>4</a:t>
-            </a:r>
-            <a:r>
-              <a:rPr sz="1200" b="0">
-                <a:solidFill>
-                  <a:srgbClr val="282828"/>
-                </a:solidFill>
-                <a:latin typeface="Arial"/>
-              </a:rPr>
-              <a:t> What changed since the last deck: Jim's answers and the paper</a:t>
-            </a:r>
-          </a:p>
-          <a:p>
-            <a:pPr>
-              <a:spcAft>
-                <a:spcPts val="600"/>
-              </a:spcAft>
-            </a:pPr>
-            <a:r>
-              <a:rPr sz="1200" b="0">
-                <a:solidFill>
-                  <a:srgbClr val="282828"/>
-                </a:solidFill>
-                <a:latin typeface="Arial"/>
-              </a:rPr>
-              <a:t>•  </a:t>
-            </a:r>
-            <a:r>
-              <a:rPr sz="1200" b="1">
-                <a:solidFill>
-                  <a:srgbClr val="282828"/>
-                </a:solidFill>
-                <a:latin typeface="Arial"/>
-              </a:rPr>
-              <a:t>5</a:t>
-            </a:r>
-            <a:r>
-              <a:rPr sz="1200" b="0">
-                <a:solidFill>
-                  <a:srgbClr val="282828"/>
-                </a:solidFill>
-                <a:latin typeface="Arial"/>
-              </a:rPr>
-              <a:t> Two 3k modules fill the swath</a:t>
-            </a:r>
-          </a:p>
-          <a:p>
-            <a:pPr>
-              <a:spcAft>
-                <a:spcPts val="600"/>
-              </a:spcAft>
-            </a:pPr>
-            <a:r>
-              <a:rPr sz="1200" b="0">
-                <a:solidFill>
-                  <a:srgbClr val="282828"/>
-                </a:solidFill>
-                <a:latin typeface="Arial"/>
-              </a:rPr>
-              <a:t>•  </a:t>
-            </a:r>
-            <a:r>
-              <a:rPr sz="1200" b="1">
-                <a:solidFill>
-                  <a:srgbClr val="282828"/>
-                </a:solidFill>
-                <a:latin typeface="Arial"/>
-              </a:rPr>
-              <a:t>6</a:t>
-            </a:r>
-            <a:r>
-              <a:rPr sz="1200" b="0">
-                <a:solidFill>
-                  <a:srgbClr val="282828"/>
-                </a:solidFill>
-                <a:latin typeface="Arial"/>
-              </a:rPr>
-              <a:t> The two strips on the ground, and the two focal planes</a:t>
-            </a:r>
-          </a:p>
-          <a:p>
-            <a:pPr>
-              <a:spcAft>
-                <a:spcPts val="600"/>
-              </a:spcAft>
-            </a:pPr>
-            <a:r>
-              <a:rPr sz="1200" b="0">
-                <a:solidFill>
-                  <a:srgbClr val="282828"/>
-                </a:solidFill>
-                <a:latin typeface="Arial"/>
-              </a:rPr>
-              <a:t>•  </a:t>
-            </a:r>
-            <a:r>
-              <a:rPr sz="1200" b="1">
-                <a:solidFill>
-                  <a:srgbClr val="282828"/>
-                </a:solidFill>
-                <a:latin typeface="Arial"/>
-              </a:rPr>
-              <a:t>7</a:t>
-            </a:r>
-            <a:r>
-              <a:rPr sz="1200" b="0">
-                <a:solidFill>
-                  <a:srgbClr val="282828"/>
-                </a:solidFill>
-                <a:latin typeface="Arial"/>
-              </a:rPr>
-              <a:t> The seed: the SBG form, first order</a:t>
-            </a:r>
-          </a:p>
-          <a:p>
-            <a:pPr>
-              <a:spcAft>
-                <a:spcPts val="600"/>
-              </a:spcAft>
-            </a:pPr>
-            <a:r>
-              <a:rPr sz="1200" b="0">
-                <a:solidFill>
-                  <a:srgbClr val="282828"/>
-                </a:solidFill>
-                <a:latin typeface="Arial"/>
-              </a:rPr>
-              <a:t>•  </a:t>
-            </a:r>
-            <a:r>
-              <a:rPr sz="1200" b="1">
-                <a:solidFill>
-                  <a:srgbClr val="282828"/>
-                </a:solidFill>
-                <a:latin typeface="Arial"/>
-              </a:rPr>
-              <a:t>8</a:t>
-            </a:r>
-            <a:r>
-              <a:rPr sz="1200" b="0">
-                <a:solidFill>
-                  <a:srgbClr val="282828"/>
-                </a:solidFill>
-                <a:latin typeface="Arial"/>
-              </a:rPr>
-              <a:t> The telescope of record: freeform three-mirror, R9</a:t>
-            </a:r>
-          </a:p>
-          <a:p>
-            <a:pPr>
-              <a:spcAft>
-                <a:spcPts val="600"/>
-              </a:spcAft>
-            </a:pPr>
-            <a:r>
-              <a:rPr sz="1200" b="0">
-                <a:solidFill>
-                  <a:srgbClr val="282828"/>
-                </a:solidFill>
-                <a:latin typeface="Arial"/>
-              </a:rPr>
-              <a:t>•  </a:t>
-            </a:r>
-            <a:r>
-              <a:rPr sz="1200" b="1">
-                <a:solidFill>
-                  <a:srgbClr val="282828"/>
-                </a:solidFill>
-                <a:latin typeface="Arial"/>
-              </a:rPr>
-              <a:t>9</a:t>
-            </a:r>
-            <a:r>
-              <a:rPr sz="1200" b="0">
-                <a:solidFill>
-                  <a:srgbClr val="282828"/>
-                </a:solidFill>
-                <a:latin typeface="Arial"/>
-              </a:rPr>
-              <a:t> The 3k module, scored: spectrometer, telescope, and the two together</a:t>
-            </a:r>
-          </a:p>
-          <a:p>
-            <a:pPr>
-              <a:spcAft>
-                <a:spcPts val="600"/>
-              </a:spcAft>
-            </a:pPr>
-            <a:r>
-              <a:rPr sz="1200" b="0">
-                <a:solidFill>
-                  <a:srgbClr val="282828"/>
-                </a:solidFill>
-                <a:latin typeface="Arial"/>
-              </a:rPr>
-              <a:t>•  </a:t>
-            </a:r>
-            <a:r>
-              <a:rPr sz="1200" b="1">
-                <a:solidFill>
-                  <a:srgbClr val="282828"/>
-                </a:solidFill>
-                <a:latin typeface="Arial"/>
-              </a:rPr>
-              <a:t>10</a:t>
-            </a:r>
-            <a:r>
-              <a:rPr sz="1200" b="0">
-                <a:solidFill>
-                  <a:srgbClr val="282828"/>
-                </a:solidFill>
-                <a:latin typeface="Arial"/>
-              </a:rPr>
-              <a:t> The 3k module, end to end</a:t>
-            </a:r>
-          </a:p>
-        </p:txBody>
-      </p:sp>
+        </p:nvGraphicFramePr>
+        <p:xfrm>
+          <a:off x="411480" y="1298448"/>
+          <a:ext cx="5806439" cy="3086100"/>
+        </p:xfrm>
+        <a:graphic>
+          <a:graphicData uri="http://schemas.openxmlformats.org/drawingml/2006/table">
+            <a:tbl>
+              <a:tblPr firstRow="1" bandRow="1">
+                <a:tableStyleId>{5C22544A-7EE6-4342-B048-85BDC9FD1C3A}</a:tableStyleId>
+              </a:tblPr>
+              <a:tblGrid>
+                <a:gridCol w="2606973"/>
+                <a:gridCol w="3199466"/>
+              </a:tblGrid>
+              <a:tr h="280035">
+                <a:tc>
+                  <a:txBody>
+                    <a:bodyPr wrap="square"/>
+                    <a:lstStyle/>
+                    <a:p>
+                      <a:r>
+                        <a:rPr sz="1100" b="1">
+                          <a:solidFill>
+                            <a:srgbClr val="FFFFFF"/>
+                          </a:solidFill>
+                          <a:latin typeface="Arial"/>
+                        </a:rPr>
+                        <a:t>item</a:t>
+                      </a:r>
+                    </a:p>
+                  </a:txBody>
+                  <a:tcPr marL="54864" marR="54864" marT="18288" marB="18288">
+                    <a:solidFill>
+                      <a:srgbClr val="1F4E79"/>
+                    </a:solidFill>
+                  </a:tcPr>
+                </a:tc>
+                <a:tc>
+                  <a:txBody>
+                    <a:bodyPr wrap="square"/>
+                    <a:lstStyle/>
+                    <a:p>
+                      <a:r>
+                        <a:rPr sz="1100" b="1">
+                          <a:solidFill>
+                            <a:srgbClr val="FFFFFF"/>
+                          </a:solidFill>
+                          <a:latin typeface="Arial"/>
+                        </a:rPr>
+                        <a:t>value</a:t>
+                      </a:r>
+                    </a:p>
+                  </a:txBody>
+                  <a:tcPr marL="54864" marR="54864" marT="18288" marB="18288">
+                    <a:solidFill>
+                      <a:srgbClr val="1F4E79"/>
+                    </a:solidFill>
+                  </a:tcPr>
+                </a:tc>
+              </a:tr>
+              <a:tr h="468630">
+                <a:tc>
+                  <a:txBody>
+                    <a:bodyPr wrap="square"/>
+                    <a:lstStyle/>
+                    <a:p>
+                      <a:r>
+                        <a:rPr sz="1100" b="0">
+                          <a:solidFill>
+                            <a:srgbClr val="282828"/>
+                          </a:solidFill>
+                          <a:latin typeface="Arial"/>
+                        </a:rPr>
+                        <a:t>legs M1→M2, M2→M3, M3→slit</a:t>
+                      </a:r>
+                    </a:p>
+                  </a:txBody>
+                  <a:tcPr marL="54864" marR="54864" marT="18288" marB="18288">
+                    <a:solidFill>
+                      <a:srgbClr val="FFFFFF"/>
+                    </a:solidFill>
+                  </a:tcPr>
+                </a:tc>
+                <a:tc>
+                  <a:txBody>
+                    <a:bodyPr wrap="square"/>
+                    <a:lstStyle/>
+                    <a:p>
+                      <a:r>
+                        <a:rPr sz="1100" b="0">
+                          <a:solidFill>
+                            <a:srgbClr val="282828"/>
+                          </a:solidFill>
+                          <a:latin typeface="Arial"/>
+                        </a:rPr>
+                        <a:t>258.3, 245.8, 299.4 mm (paper: 270, 257, 313 at f 345)</a:t>
+                      </a:r>
+                    </a:p>
+                  </a:txBody>
+                  <a:tcPr marL="54864" marR="54864" marT="18288" marB="18288">
+                    <a:solidFill>
+                      <a:srgbClr val="FFFFFF"/>
+                    </a:solidFill>
+                  </a:tcPr>
+                </a:tc>
+              </a:tr>
+              <a:tr h="280035">
+                <a:tc>
+                  <a:txBody>
+                    <a:bodyPr wrap="square"/>
+                    <a:lstStyle/>
+                    <a:p>
+                      <a:r>
+                        <a:rPr sz="1100" b="0">
+                          <a:solidFill>
+                            <a:srgbClr val="282828"/>
+                          </a:solidFill>
+                          <a:latin typeface="Arial"/>
+                        </a:rPr>
+                        <a:t>chief incidence M1, M2, M3</a:t>
+                      </a:r>
+                    </a:p>
+                  </a:txBody>
+                  <a:tcPr marL="54864" marR="54864" marT="18288" marB="18288">
+                    <a:solidFill>
+                      <a:srgbClr val="ECF1F6"/>
+                    </a:solidFill>
+                  </a:tcPr>
+                </a:tc>
+                <a:tc>
+                  <a:txBody>
+                    <a:bodyPr wrap="square"/>
+                    <a:lstStyle/>
+                    <a:p>
+                      <a:r>
+                        <a:rPr sz="1100" b="0">
+                          <a:solidFill>
+                            <a:srgbClr val="282828"/>
+                          </a:solidFill>
+                          <a:latin typeface="Arial"/>
+                        </a:rPr>
+                        <a:t>30°, 37°, 15°</a:t>
+                      </a:r>
+                    </a:p>
+                  </a:txBody>
+                  <a:tcPr marL="54864" marR="54864" marT="18288" marB="18288">
+                    <a:solidFill>
+                      <a:srgbClr val="ECF1F6"/>
+                    </a:solidFill>
+                  </a:tcPr>
+                </a:tc>
+              </a:tr>
+              <a:tr h="280035">
+                <a:tc>
+                  <a:txBody>
+                    <a:bodyPr wrap="square"/>
+                    <a:lstStyle/>
+                    <a:p>
+                      <a:r>
+                        <a:rPr sz="1100" b="0">
+                          <a:solidFill>
+                            <a:srgbClr val="282828"/>
+                          </a:solidFill>
+                          <a:latin typeface="Arial"/>
+                        </a:rPr>
+                        <a:t>focal lengths M1, M2, M3</a:t>
+                      </a:r>
+                    </a:p>
+                  </a:txBody>
+                  <a:tcPr marL="54864" marR="54864" marT="18288" marB="18288">
+                    <a:solidFill>
+                      <a:srgbClr val="FFFFFF"/>
+                    </a:solidFill>
+                  </a:tcPr>
+                </a:tc>
+                <a:tc>
+                  <a:txBody>
+                    <a:bodyPr wrap="square"/>
+                    <a:lstStyle/>
+                    <a:p>
+                      <a:r>
+                        <a:rPr sz="1100" b="0">
+                          <a:solidFill>
+                            <a:srgbClr val="282828"/>
+                          </a:solidFill>
+                          <a:latin typeface="Arial"/>
+                        </a:rPr>
+                        <a:t>+1012, −452, +246 mm (M3's = the M2→M3 leg)</a:t>
+                      </a:r>
+                    </a:p>
+                  </a:txBody>
+                  <a:tcPr marL="54864" marR="54864" marT="18288" marB="18288">
+                    <a:solidFill>
+                      <a:srgbClr val="FFFFFF"/>
+                    </a:solidFill>
+                  </a:tcPr>
+                </a:tc>
+              </a:tr>
+              <a:tr h="280035">
+                <a:tc>
+                  <a:txBody>
+                    <a:bodyPr wrap="square"/>
+                    <a:lstStyle/>
+                    <a:p>
+                      <a:r>
+                        <a:rPr sz="1100" b="0">
+                          <a:solidFill>
+                            <a:srgbClr val="282828"/>
+                          </a:solidFill>
+                          <a:latin typeface="Arial"/>
+                        </a:rPr>
+                        <a:t>entrance pupil</a:t>
+                      </a:r>
+                    </a:p>
+                  </a:txBody>
+                  <a:tcPr marL="54864" marR="54864" marT="18288" marB="18288">
+                    <a:solidFill>
+                      <a:srgbClr val="ECF1F6"/>
+                    </a:solidFill>
+                  </a:tcPr>
+                </a:tc>
+                <a:tc>
+                  <a:txBody>
+                    <a:bodyPr wrap="square"/>
+                    <a:lstStyle/>
+                    <a:p>
+                      <a:r>
+                        <a:rPr sz="1100" b="0">
+                          <a:solidFill>
+                            <a:srgbClr val="282828"/>
+                          </a:solidFill>
+                          <a:latin typeface="Arial"/>
+                        </a:rPr>
+                        <a:t>virtual, 347 mm behind M1</a:t>
+                      </a:r>
+                    </a:p>
+                  </a:txBody>
+                  <a:tcPr marL="54864" marR="54864" marT="18288" marB="18288">
+                    <a:solidFill>
+                      <a:srgbClr val="ECF1F6"/>
+                    </a:solidFill>
+                  </a:tcPr>
+                </a:tc>
+              </a:tr>
+              <a:tr h="280035">
+                <a:tc>
+                  <a:txBody>
+                    <a:bodyPr wrap="square"/>
+                    <a:lstStyle/>
+                    <a:p>
+                      <a:r>
+                        <a:rPr sz="1100" b="0">
+                          <a:solidFill>
+                            <a:srgbClr val="282828"/>
+                          </a:solidFill>
+                          <a:latin typeface="Arial"/>
+                        </a:rPr>
+                        <a:t>beams at M1, M2, M3</a:t>
+                      </a:r>
+                    </a:p>
+                  </a:txBody>
+                  <a:tcPr marL="54864" marR="54864" marT="18288" marB="18288">
+                    <a:solidFill>
+                      <a:srgbClr val="FFFFFF"/>
+                    </a:solidFill>
+                  </a:tcPr>
+                </a:tc>
+                <a:tc>
+                  <a:txBody>
+                    <a:bodyPr wrap="square"/>
+                    <a:lstStyle/>
+                    <a:p>
+                      <a:r>
+                        <a:rPr sz="1100" b="0">
+                          <a:solidFill>
+                            <a:srgbClr val="282828"/>
+                          </a:solidFill>
+                          <a:latin typeface="Arial"/>
+                        </a:rPr>
+                        <a:t>183, 136, 166 mm</a:t>
+                      </a:r>
+                    </a:p>
+                  </a:txBody>
+                  <a:tcPr marL="54864" marR="54864" marT="18288" marB="18288">
+                    <a:solidFill>
+                      <a:srgbClr val="FFFFFF"/>
+                    </a:solidFill>
+                  </a:tcPr>
+                </a:tc>
+              </a:tr>
+              <a:tr h="468630">
+                <a:tc>
+                  <a:txBody>
+                    <a:bodyPr wrap="square"/>
+                    <a:lstStyle/>
+                    <a:p>
+                      <a:r>
+                        <a:rPr sz="1100" b="0">
+                          <a:solidFill>
+                            <a:srgbClr val="282828"/>
+                          </a:solidFill>
+                          <a:latin typeface="Arial"/>
+                        </a:rPr>
+                        <a:t>intermediate focus</a:t>
+                      </a:r>
+                    </a:p>
+                  </a:txBody>
+                  <a:tcPr marL="54864" marR="54864" marT="18288" marB="18288">
+                    <a:solidFill>
+                      <a:srgbClr val="ECF1F6"/>
+                    </a:solidFill>
+                  </a:tcPr>
+                </a:tc>
+                <a:tc>
+                  <a:txBody>
+                    <a:bodyPr wrap="square"/>
+                    <a:lstStyle/>
+                    <a:p>
+                      <a:r>
+                        <a:rPr sz="1100" b="0">
+                          <a:solidFill>
+                            <a:srgbClr val="282828"/>
+                          </a:solidFill>
+                          <a:latin typeface="Arial"/>
+                        </a:rPr>
+                        <a:t>none (the marginal ray never crosses the axis)</a:t>
+                      </a:r>
+                    </a:p>
+                  </a:txBody>
+                  <a:tcPr marL="54864" marR="54864" marT="18288" marB="18288">
+                    <a:solidFill>
+                      <a:srgbClr val="ECF1F6"/>
+                    </a:solidFill>
+                  </a:tcPr>
+                </a:tc>
+              </a:tr>
+              <a:tr h="468630">
+                <a:tc>
+                  <a:txBody>
+                    <a:bodyPr wrap="square"/>
+                    <a:lstStyle/>
+                    <a:p>
+                      <a:r>
+                        <a:rPr sz="1100" b="0">
+                          <a:solidFill>
+                            <a:srgbClr val="282828"/>
+                          </a:solidFill>
+                          <a:latin typeface="Arial"/>
+                        </a:rPr>
+                        <a:t>chief to the slit normal, section as emitted</a:t>
+                      </a:r>
+                    </a:p>
+                  </a:txBody>
+                  <a:tcPr marL="54864" marR="54864" marT="18288" marB="18288">
+                    <a:solidFill>
+                      <a:srgbClr val="FFFFFF"/>
+                    </a:solidFill>
+                  </a:tcPr>
+                </a:tc>
+                <a:tc>
+                  <a:txBody>
+                    <a:bodyPr wrap="square"/>
+                    <a:lstStyle/>
+                    <a:p>
+                      <a:r>
+                        <a:rPr sz="1100" b="0">
+                          <a:solidFill>
+                            <a:srgbClr val="282828"/>
+                          </a:solidFill>
+                          <a:latin typeface="Arial"/>
+                        </a:rPr>
+                        <a:t>≤ 0.093° over ±4.7°</a:t>
+                      </a:r>
+                    </a:p>
+                  </a:txBody>
+                  <a:tcPr marL="54864" marR="54864" marT="18288" marB="18288">
+                    <a:solidFill>
+                      <a:srgbClr val="FFFFFF"/>
+                    </a:solidFill>
+                  </a:tcPr>
+                </a:tc>
+              </a:tr>
+              <a:tr h="280035">
+                <a:tc>
+                  <a:txBody>
+                    <a:bodyPr wrap="square"/>
+                    <a:lstStyle/>
+                    <a:p>
+                      <a:r>
+                        <a:rPr sz="1100" b="0">
+                          <a:solidFill>
+                            <a:srgbClr val="282828"/>
+                          </a:solidFill>
+                          <a:latin typeface="Arial"/>
+                        </a:rPr>
+                        <a:t>plate scale as emitted</a:t>
+                      </a:r>
+                    </a:p>
+                  </a:txBody>
+                  <a:tcPr marL="54864" marR="54864" marT="18288" marB="18288">
+                    <a:solidFill>
+                      <a:srgbClr val="ECF1F6"/>
+                    </a:solidFill>
+                  </a:tcPr>
+                </a:tc>
+                <a:tc>
+                  <a:txBody>
+                    <a:bodyPr wrap="square"/>
+                    <a:lstStyle/>
+                    <a:p>
+                      <a:r>
+                        <a:rPr sz="1100" b="0">
+                          <a:solidFill>
+                            <a:srgbClr val="282828"/>
+                          </a:solidFill>
+                          <a:latin typeface="Arial"/>
+                        </a:rPr>
+                        <a:t>329.99 mm local, 329.87 at the edge</a:t>
+                      </a:r>
+                    </a:p>
+                  </a:txBody>
+                  <a:tcPr marL="54864" marR="54864" marT="18288" marB="18288">
+                    <a:solidFill>
+                      <a:srgbClr val="ECF1F6"/>
+                    </a:solidFill>
+                  </a:tcPr>
+                </a:tc>
+              </a:tr>
+            </a:tbl>
+          </a:graphicData>
+        </a:graphic>
+      </p:graphicFrame>
       <p:sp>
         <p:nvSpPr>
           <p:cNvPr id="5" name="TextBox 4"/>
@@ -10010,7 +12349,7 @@
                 </a:solidFill>
                 <a:latin typeface="Arial"/>
               </a:rPr>
-              <a:t>11</a:t>
+              <a:t>Stop at M1, or between M1 and M2:</a:t>
             </a:r>
             <a:r>
               <a:rPr sz="1200" b="0">
@@ -10019,7 +12358,7 @@
                 </a:solidFill>
                 <a:latin typeface="Arial"/>
               </a:rPr>
-              <a:t> How the solve got there: six rungs and three lessons</a:t>
+              <a:t> also telecentric, but it flips the form and M2 grows to 310 / 220–250 mm.</a:t>
             </a:r>
           </a:p>
           <a:p>
@@ -10044,7 +12383,7 @@
                 </a:solidFill>
                 <a:latin typeface="Arial"/>
               </a:rPr>
-              <a:t>12</a:t>
+              <a:t>Tilted spheres:</a:t>
             </a:r>
             <a:r>
               <a:rPr sz="1200" b="0">
@@ -10053,7 +12392,7 @@
                 </a:solidFill>
                 <a:latin typeface="Arial"/>
               </a:rPr>
-              <a:t> Smile is a convention: the launch, not the optics</a:t>
+              <a:t> cannot meet the first order in both sections (R_t / R_s = 1.33, 1.57, 1.07 needed); off-axis conic sections can — paraboloids when the parent axis is at the incidence angle.</a:t>
             </a:r>
           </a:p>
           <a:p>
@@ -10078,7 +12417,7 @@
                 </a:solidFill>
                 <a:latin typeface="Arial"/>
               </a:rPr>
-              <a:t>13</a:t>
+              <a:t>The paper's drawing left one thing open</a:t>
             </a:r>
             <a:r>
               <a:rPr sz="1200" b="0">
@@ -10087,9 +12426,32 @@
                 </a:solidFill>
                 <a:latin typeface="Arial"/>
               </a:rPr>
-              <a:t> The cone, the spec and the paper's beam</a:t>
-            </a:r>
-          </a:p>
+              <a:t> — whether the beam passes through a focus between M2 and M3 — and the numbers settled it: it does not.</a:t>
+            </a:r>
+          </a:p>
+        </p:txBody>
+      </p:sp>
+      <p:sp>
+        <p:nvSpPr>
+          <p:cNvPr id="6" name="TextBox 5"/>
+          <p:cNvSpPr txBox="1"/>
+          <p:nvPr/>
+        </p:nvSpPr>
+        <p:spPr>
+          <a:xfrm>
+            <a:off x="6400800" y="3340608"/>
+            <a:ext cx="5394960" cy="274320"/>
+          </a:xfrm>
+          <a:prstGeom prst="rect">
+            <a:avLst/>
+          </a:prstGeom>
+          <a:noFill/>
+        </p:spPr>
+        <p:txBody>
+          <a:bodyPr wrap="square">
+            <a:spAutoFit/>
+          </a:bodyPr>
+          <a:lstStyle/>
           <a:p>
             <a:pPr>
               <a:spcAft>
@@ -10097,201 +12459,13 @@
               </a:spcAft>
             </a:pPr>
             <a:r>
-              <a:rPr sz="1200" b="0">
-                <a:solidFill>
-                  <a:srgbClr val="282828"/>
-                </a:solidFill>
-                <a:latin typeface="Arial"/>
-              </a:rPr>
-              <a:t>•  </a:t>
-            </a:r>
-            <a:r>
-              <a:rPr sz="1200" b="1">
-                <a:solidFill>
-                  <a:srgbClr val="282828"/>
-                </a:solidFill>
-                <a:latin typeface="Arial"/>
-              </a:rPr>
-              <a:t>14</a:t>
-            </a:r>
-            <a:r>
-              <a:rPr sz="1200" b="0">
-                <a:solidFill>
-                  <a:srgbClr val="282828"/>
-                </a:solidFill>
-                <a:latin typeface="Arial"/>
-              </a:rPr>
-              <a:t> The spectrometer: toleranced, and a conic grating for margin</a:t>
-            </a:r>
-          </a:p>
-          <a:p>
-            <a:pPr>
-              <a:spcAft>
-                <a:spcPts val="600"/>
-              </a:spcAft>
-            </a:pPr>
-            <a:r>
-              <a:rPr sz="1200" b="0">
-                <a:solidFill>
-                  <a:srgbClr val="282828"/>
-                </a:solidFill>
-                <a:latin typeface="Arial"/>
-              </a:rPr>
-              <a:t>•  </a:t>
-            </a:r>
-            <a:r>
-              <a:rPr sz="1200" b="1">
-                <a:solidFill>
-                  <a:srgbClr val="282828"/>
-                </a:solidFill>
-                <a:latin typeface="Arial"/>
-              </a:rPr>
-              <a:t>15</a:t>
-            </a:r>
-            <a:r>
-              <a:rPr sz="1200" b="0">
-                <a:solidFill>
-                  <a:srgbClr val="282828"/>
-                </a:solidFill>
-                <a:latin typeface="Arial"/>
-              </a:rPr>
-              <a:t> Two of 3k or four of 1.5k, updated</a:t>
-            </a:r>
-          </a:p>
-          <a:p>
-            <a:pPr>
-              <a:spcAft>
-                <a:spcPts val="600"/>
-              </a:spcAft>
-            </a:pPr>
-            <a:r>
-              <a:rPr sz="1200" b="0">
-                <a:solidFill>
-                  <a:srgbClr val="282828"/>
-                </a:solidFill>
-                <a:latin typeface="Arial"/>
-              </a:rPr>
-              <a:t>•  </a:t>
-            </a:r>
-            <a:r>
-              <a:rPr sz="1200" b="1">
-                <a:solidFill>
-                  <a:srgbClr val="282828"/>
-                </a:solidFill>
-                <a:latin typeface="Arial"/>
-              </a:rPr>
-              <a:t>16</a:t>
-            </a:r>
-            <a:r>
-              <a:rPr sz="1200" b="0">
-                <a:solidFill>
-                  <a:srgbClr val="282828"/>
-                </a:solidFill>
-                <a:latin typeface="Arial"/>
-              </a:rPr>
-              <a:t> Questions for Jim and Joe</a:t>
-            </a:r>
-          </a:p>
-          <a:p>
-            <a:pPr>
-              <a:spcAft>
-                <a:spcPts val="600"/>
-              </a:spcAft>
-            </a:pPr>
-            <a:r>
-              <a:rPr sz="1200" b="0">
-                <a:solidFill>
-                  <a:srgbClr val="282828"/>
-                </a:solidFill>
-                <a:latin typeface="Arial"/>
-              </a:rPr>
-              <a:t>•  </a:t>
-            </a:r>
-            <a:r>
-              <a:rPr sz="1200" b="1">
-                <a:solidFill>
-                  <a:srgbClr val="282828"/>
-                </a:solidFill>
-                <a:latin typeface="Arial"/>
-              </a:rPr>
-              <a:t>17</a:t>
-            </a:r>
-            <a:r>
-              <a:rPr sz="1200" b="0">
-                <a:solidFill>
-                  <a:srgbClr val="282828"/>
-                </a:solidFill>
-                <a:latin typeface="Arial"/>
-              </a:rPr>
-              <a:t> Next steps</a:t>
-            </a:r>
-          </a:p>
-          <a:p>
-            <a:pPr>
-              <a:spcAft>
-                <a:spcPts val="600"/>
-              </a:spcAft>
-            </a:pPr>
-            <a:r>
-              <a:rPr sz="1200" b="0">
-                <a:solidFill>
-                  <a:srgbClr val="282828"/>
-                </a:solidFill>
-                <a:latin typeface="Arial"/>
-              </a:rPr>
-              <a:t>•  </a:t>
-            </a:r>
-            <a:r>
-              <a:rPr sz="1200" b="1">
-                <a:solidFill>
-                  <a:srgbClr val="282828"/>
-                </a:solidFill>
-                <a:latin typeface="Arial"/>
-              </a:rPr>
-              <a:t>18</a:t>
-            </a:r>
-            <a:r>
-              <a:rPr sz="1200" b="0">
-                <a:solidFill>
-                  <a:srgbClr val="282828"/>
-                </a:solidFill>
-                <a:latin typeface="Arial"/>
-              </a:rPr>
-              <a:t> Run it yourself</a:t>
-            </a:r>
-          </a:p>
-          <a:p>
-            <a:pPr>
-              <a:spcAft>
-                <a:spcPts val="600"/>
-              </a:spcAft>
-            </a:pPr>
-            <a:r>
-              <a:rPr sz="1200" b="0">
-                <a:solidFill>
-                  <a:srgbClr val="282828"/>
-                </a:solidFill>
-                <a:latin typeface="Arial"/>
-              </a:rPr>
-              <a:t>•  </a:t>
-            </a:r>
-            <a:r>
-              <a:rPr sz="1200" b="1">
-                <a:solidFill>
-                  <a:srgbClr val="282828"/>
-                </a:solidFill>
-                <a:latin typeface="Arial"/>
-              </a:rPr>
-              <a:t>19</a:t>
-            </a:r>
-            <a:r>
-              <a:rPr sz="1200" b="0">
-                <a:solidFill>
-                  <a:srgbClr val="282828"/>
-                </a:solidFill>
-                <a:latin typeface="Arial"/>
-              </a:rPr>
-              <a:t> Backup: the first order by the numbers; the rungs per field; the chief-tilt diagnostic; the tolerance ladder by the numbers; the engine finding; records</a:t>
+              <a:rPr sz="1050" b="0">
+                <a:solidFill>
+                  <a:srgbClr val="6E6E6E"/>
+                </a:solidFill>
+                <a:latin typeface="Arial"/>
+              </a:rPr>
+              <a:t>tls_first_order.txt; template README, "The two facts the first order forces."</a:t>
             </a:r>
           </a:p>
         </p:txBody>
@@ -10304,7 +12478,7 @@
 </p:sld>
 </file>
 
-<file path=ppt/slides/slide20.xml><?xml version="1.0" encoding="utf-8"?>
+<file path=ppt/slides/slide22.xml><?xml version="1.0" encoding="utf-8"?>
 <p:sld xmlns:a="http://schemas.openxmlformats.org/drawingml/2006/main" xmlns:p="http://schemas.openxmlformats.org/presentationml/2006/main" xmlns:r="http://schemas.openxmlformats.org/officeDocument/2006/relationships">
   <p:cSld>
     <p:spTree>
@@ -10348,7 +12522,7 @@
                 </a:solidFill>
                 <a:latin typeface="Arial"/>
               </a:rPr>
-              <a:t>The first order by the numbers</a:t>
+              <a:t>The rungs per field</a:t>
             </a:r>
           </a:p>
           <a:p>
@@ -10364,7 +12538,7 @@
                 </a:solidFill>
                 <a:latin typeface="Arial"/>
               </a:rPr>
-              <a:t>The seed's legs at f 330 mm, the powers the telecentric closure gives, the beams, and where the alternatives fail</a:t>
+              <a:t>What each rung's telescope looked like along the slit, and what the join made of it</a:t>
             </a:r>
           </a:p>
         </p:txBody>
@@ -10423,7 +12597,7 @@
         </p:nvGraphicFramePr>
         <p:xfrm>
           <a:off x="411480" y="1298448"/>
-          <a:ext cx="5806439" cy="3086100"/>
+          <a:ext cx="11368733" cy="2526030"/>
         </p:xfrm>
         <a:graphic>
           <a:graphicData uri="http://schemas.openxmlformats.org/drawingml/2006/table">
@@ -10432,9 +12606,124 @@
                 <a:tableStyleId>{5C22544A-7EE6-4342-B048-85BDC9FD1C3A}</a:tableStyleId>
               </a:tblPr>
               <a:tblGrid>
-                <a:gridCol w="2606973"/>
-                <a:gridCol w="3199466"/>
+                <a:gridCol w="436880"/>
+                <a:gridCol w="2804993"/>
+                <a:gridCol w="2932493"/>
+                <a:gridCol w="2868743"/>
+                <a:gridCol w="2325624"/>
               </a:tblGrid>
+              <a:tr h="468630">
+                <a:tc>
+                  <a:txBody>
+                    <a:bodyPr wrap="square"/>
+                    <a:lstStyle/>
+                    <a:p>
+                      <a:r>
+                        <a:rPr sz="1100" b="1">
+                          <a:solidFill>
+                            <a:srgbClr val="FFFFFF"/>
+                          </a:solidFill>
+                          <a:latin typeface="Arial"/>
+                        </a:rPr>
+                        <a:t>rung</a:t>
+                      </a:r>
+                    </a:p>
+                  </a:txBody>
+                  <a:tcPr marL="54864" marR="54864" marT="18288" marB="18288">
+                    <a:solidFill>
+                      <a:srgbClr val="1F4E79"/>
+                    </a:solidFill>
+                  </a:tcPr>
+                </a:tc>
+                <a:tc>
+                  <a:txBody>
+                    <a:bodyPr wrap="square"/>
+                    <a:lstStyle/>
+                    <a:p>
+                      <a:r>
+                        <a:rPr sz="1100" b="1">
+                          <a:solidFill>
+                            <a:srgbClr val="FFFFFF"/>
+                          </a:solidFill>
+                          <a:latin typeface="Arial"/>
+                        </a:rPr>
+                        <a:t>DOFs</a:t>
+                      </a:r>
+                    </a:p>
+                  </a:txBody>
+                  <a:tcPr marL="54864" marR="54864" marT="18288" marB="18288">
+                    <a:solidFill>
+                      <a:srgbClr val="1F4E79"/>
+                    </a:solidFill>
+                  </a:tcPr>
+                </a:tc>
+                <a:tc>
+                  <a:txBody>
+                    <a:bodyPr wrap="square"/>
+                    <a:lstStyle/>
+                    <a:p>
+                      <a:r>
+                        <a:rPr sz="1100" b="1">
+                          <a:solidFill>
+                            <a:srgbClr val="FFFFFF"/>
+                          </a:solidFill>
+                          <a:latin typeface="Arial"/>
+                        </a:rPr>
+                        <a:t>spot FWHM along the slit, fields 0 → 4.7° (px)</a:t>
+                      </a:r>
+                    </a:p>
+                  </a:txBody>
+                  <a:tcPr marL="54864" marR="54864" marT="18288" marB="18288">
+                    <a:solidFill>
+                      <a:srgbClr val="1F4E79"/>
+                    </a:solidFill>
+                  </a:tcPr>
+                </a:tc>
+                <a:tc>
+                  <a:txBody>
+                    <a:bodyPr wrap="square"/>
+                    <a:lstStyle/>
+                    <a:p>
+                      <a:r>
+                        <a:rPr sz="1100" b="1">
+                          <a:solidFill>
+                            <a:srgbClr val="FFFFFF"/>
+                          </a:solidFill>
+                          <a:latin typeface="Arial"/>
+                        </a:rPr>
+                        <a:t>chief − centroid across the slit at 4.7° (µm)</a:t>
+                      </a:r>
+                    </a:p>
+                  </a:txBody>
+                  <a:tcPr marL="54864" marR="54864" marT="18288" marB="18288">
+                    <a:solidFill>
+                      <a:srgbClr val="1F4E79"/>
+                    </a:solidFill>
+                  </a:tcPr>
+                </a:tc>
+                <a:tc>
+                  <a:txBody>
+                    <a:bodyPr wrap="square"/>
+                    <a:lstStyle/>
+                    <a:p>
+                      <a:r>
+                        <a:rPr sz="1100" b="1">
+                          <a:solidFill>
+                            <a:srgbClr val="FFFFFF"/>
+                          </a:solidFill>
+                          <a:latin typeface="Arial"/>
+                        </a:rPr>
+                        <a:t>e2e CRF / smile (point-source)</a:t>
+                      </a:r>
+                    </a:p>
+                  </a:txBody>
+                  <a:tcPr marL="54864" marR="54864" marT="18288" marB="18288">
+                    <a:solidFill>
+                      <a:srgbClr val="1F4E79"/>
+                    </a:solidFill>
+                  </a:tcPr>
+                </a:tc>
+              </a:tr>
               <a:tr h="280035">
                 <a:tc>
                   <a:txBody>
@@ -10442,41 +12731,107 @@
                     <a:lstStyle/>
                     <a:p>
                       <a:r>
-                        <a:rPr sz="1100" b="1">
-                          <a:solidFill>
-                            <a:srgbClr val="FFFFFF"/>
-                          </a:solidFill>
-                          <a:latin typeface="Arial"/>
-                        </a:rPr>
-                        <a:t>item</a:t>
-                      </a:r>
-                    </a:p>
-                  </a:txBody>
-                  <a:tcPr marL="54864" marR="54864" marT="18288" marB="18288">
-                    <a:solidFill>
-                      <a:srgbClr val="1F4E79"/>
-                    </a:solidFill>
-                  </a:tcPr>
-                </a:tc>
-                <a:tc>
-                  <a:txBody>
-                    <a:bodyPr wrap="square"/>
-                    <a:lstStyle/>
-                    <a:p>
-                      <a:r>
-                        <a:rPr sz="1100" b="1">
-                          <a:solidFill>
-                            <a:srgbClr val="FFFFFF"/>
-                          </a:solidFill>
-                          <a:latin typeface="Arial"/>
-                        </a:rPr>
-                        <a:t>value</a:t>
-                      </a:r>
-                    </a:p>
-                  </a:txBody>
-                  <a:tcPr marL="54864" marR="54864" marT="18288" marB="18288">
-                    <a:solidFill>
-                      <a:srgbClr val="1F4E79"/>
+                        <a:rPr sz="1100" b="0">
+                          <a:solidFill>
+                            <a:srgbClr val="282828"/>
+                          </a:solidFill>
+                          <a:latin typeface="Arial"/>
+                        </a:rPr>
+                        <a:t>R4</a:t>
+                      </a:r>
+                    </a:p>
+                  </a:txBody>
+                  <a:tcPr marL="54864" marR="54864" marT="18288" marB="18288">
+                    <a:solidFill>
+                      <a:srgbClr val="FFFFFF"/>
+                    </a:solidFill>
+                  </a:tcPr>
+                </a:tc>
+                <a:tc>
+                  <a:txBody>
+                    <a:bodyPr wrap="square"/>
+                    <a:lstStyle/>
+                    <a:p>
+                      <a:r>
+                        <a:rPr sz="1100" b="0">
+                          <a:solidFill>
+                            <a:srgbClr val="282828"/>
+                          </a:solidFill>
+                          <a:latin typeface="Arial"/>
+                        </a:rPr>
+                        <a:t>conics, θ, focus, h⁴ h⁶</a:t>
+                      </a:r>
+                    </a:p>
+                  </a:txBody>
+                  <a:tcPr marL="54864" marR="54864" marT="18288" marB="18288">
+                    <a:solidFill>
+                      <a:srgbClr val="FFFFFF"/>
+                    </a:solidFill>
+                  </a:tcPr>
+                </a:tc>
+                <a:tc>
+                  <a:txBody>
+                    <a:bodyPr wrap="square"/>
+                    <a:lstStyle/>
+                    <a:p>
+                      <a:r>
+                        <a:rPr sz="1100" b="0">
+                          <a:solidFill>
+                            <a:srgbClr val="282828"/>
+                          </a:solidFill>
+                          <a:latin typeface="Arial"/>
+                        </a:rPr>
+                        <a:t>1–2 center, 5–7 outer</a:t>
+                      </a:r>
+                    </a:p>
+                  </a:txBody>
+                  <a:tcPr marL="54864" marR="54864" marT="18288" marB="18288">
+                    <a:solidFill>
+                      <a:srgbClr val="FFFFFF"/>
+                    </a:solidFill>
+                  </a:tcPr>
+                </a:tc>
+                <a:tc>
+                  <a:txBody>
+                    <a:bodyPr wrap="square"/>
+                    <a:lstStyle/>
+                    <a:p>
+                      <a:r>
+                        <a:rPr sz="1100" b="0">
+                          <a:solidFill>
+                            <a:srgbClr val="282828"/>
+                          </a:solidFill>
+                          <a:latin typeface="Arial"/>
+                        </a:rPr>
+                        <a:t>9.1</a:t>
+                      </a:r>
+                    </a:p>
+                  </a:txBody>
+                  <a:tcPr marL="54864" marR="54864" marT="18288" marB="18288">
+                    <a:solidFill>
+                      <a:srgbClr val="FFFFFF"/>
+                    </a:solidFill>
+                  </a:tcPr>
+                </a:tc>
+                <a:tc>
+                  <a:txBody>
+                    <a:bodyPr wrap="square"/>
+                    <a:lstStyle/>
+                    <a:p>
+                      <a:r>
+                        <a:rPr sz="1100" b="0">
+                          <a:solidFill>
+                            <a:srgbClr val="282828"/>
+                          </a:solidFill>
+                          <a:latin typeface="Arial"/>
+                        </a:rPr>
+                        <a:t>2.5 / 0.73</a:t>
+                      </a:r>
+                    </a:p>
+                  </a:txBody>
+                  <a:tcPr marL="54864" marR="54864" marT="18288" marB="18288">
+                    <a:solidFill>
+                      <a:srgbClr val="FFFFFF"/>
                     </a:solidFill>
                   </a:tcPr>
                 </a:tc>
@@ -10494,35 +12849,101 @@
                           </a:solidFill>
                           <a:latin typeface="Arial"/>
                         </a:rPr>
-                        <a:t>legs M1→M2, M2→M3, M3→slit</a:t>
-                      </a:r>
-                    </a:p>
-                  </a:txBody>
-                  <a:tcPr marL="54864" marR="54864" marT="18288" marB="18288">
-                    <a:solidFill>
-                      <a:srgbClr val="FFFFFF"/>
-                    </a:solidFill>
-                  </a:tcPr>
-                </a:tc>
-                <a:tc>
-                  <a:txBody>
-                    <a:bodyPr wrap="square"/>
-                    <a:lstStyle/>
-                    <a:p>
-                      <a:r>
-                        <a:rPr sz="1100" b="0">
-                          <a:solidFill>
-                            <a:srgbClr val="282828"/>
-                          </a:solidFill>
-                          <a:latin typeface="Arial"/>
-                        </a:rPr>
-                        <a:t>258.3, 245.8, 299.4 mm (paper: 270, 257, 313 at f 345)</a:t>
-                      </a:r>
-                    </a:p>
-                  </a:txBody>
-                  <a:tcPr marL="54864" marR="54864" marT="18288" marB="18288">
-                    <a:solidFill>
-                      <a:srgbClr val="FFFFFF"/>
+                        <a:t>R5</a:t>
+                      </a:r>
+                    </a:p>
+                  </a:txBody>
+                  <a:tcPr marL="54864" marR="54864" marT="18288" marB="18288">
+                    <a:solidFill>
+                      <a:srgbClr val="ECF1F6"/>
+                    </a:solidFill>
+                  </a:tcPr>
+                </a:tc>
+                <a:tc>
+                  <a:txBody>
+                    <a:bodyPr wrap="square"/>
+                    <a:lstStyle/>
+                    <a:p>
+                      <a:r>
+                        <a:rPr sz="1100" b="0">
+                          <a:solidFill>
+                            <a:srgbClr val="282828"/>
+                          </a:solidFill>
+                          <a:latin typeface="Arial"/>
+                        </a:rPr>
+                        <a:t>+ pole-frame freeform 3–6, centroid-bow rows</a:t>
+                      </a:r>
+                    </a:p>
+                  </a:txBody>
+                  <a:tcPr marL="54864" marR="54864" marT="18288" marB="18288">
+                    <a:solidFill>
+                      <a:srgbClr val="ECF1F6"/>
+                    </a:solidFill>
+                  </a:tcPr>
+                </a:tc>
+                <a:tc>
+                  <a:txBody>
+                    <a:bodyPr wrap="square"/>
+                    <a:lstStyle/>
+                    <a:p>
+                      <a:r>
+                        <a:rPr sz="1100" b="0">
+                          <a:solidFill>
+                            <a:srgbClr val="282828"/>
+                          </a:solidFill>
+                          <a:latin typeface="Arial"/>
+                        </a:rPr>
+                        <a:t>1 center, 5–7 outer</a:t>
+                      </a:r>
+                    </a:p>
+                  </a:txBody>
+                  <a:tcPr marL="54864" marR="54864" marT="18288" marB="18288">
+                    <a:solidFill>
+                      <a:srgbClr val="ECF1F6"/>
+                    </a:solidFill>
+                  </a:tcPr>
+                </a:tc>
+                <a:tc>
+                  <a:txBody>
+                    <a:bodyPr wrap="square"/>
+                    <a:lstStyle/>
+                    <a:p>
+                      <a:r>
+                        <a:rPr sz="1100" b="0">
+                          <a:solidFill>
+                            <a:srgbClr val="282828"/>
+                          </a:solidFill>
+                          <a:latin typeface="Arial"/>
+                        </a:rPr>
+                        <a:t>1.1</a:t>
+                      </a:r>
+                    </a:p>
+                  </a:txBody>
+                  <a:tcPr marL="54864" marR="54864" marT="18288" marB="18288">
+                    <a:solidFill>
+                      <a:srgbClr val="ECF1F6"/>
+                    </a:solidFill>
+                  </a:tcPr>
+                </a:tc>
+                <a:tc>
+                  <a:txBody>
+                    <a:bodyPr wrap="square"/>
+                    <a:lstStyle/>
+                    <a:p>
+                      <a:r>
+                        <a:rPr sz="1100" b="0">
+                          <a:solidFill>
+                            <a:srgbClr val="282828"/>
+                          </a:solidFill>
+                          <a:latin typeface="Arial"/>
+                        </a:rPr>
+                        <a:t>7.0 / 0.09</a:t>
+                      </a:r>
+                    </a:p>
+                  </a:txBody>
+                  <a:tcPr marL="54864" marR="54864" marT="18288" marB="18288">
+                    <a:solidFill>
+                      <a:srgbClr val="ECF1F6"/>
                     </a:solidFill>
                   </a:tcPr>
                 </a:tc>
@@ -10540,7 +12961,119 @@
                           </a:solidFill>
                           <a:latin typeface="Arial"/>
                         </a:rPr>
-                        <a:t>chief incidence M1, M2, M3</a:t>
+                        <a:t>R6</a:t>
+                      </a:r>
+                    </a:p>
+                  </a:txBody>
+                  <a:tcPr marL="54864" marR="54864" marT="18288" marB="18288">
+                    <a:solidFill>
+                      <a:srgbClr val="FFFFFF"/>
+                    </a:solidFill>
+                  </a:tcPr>
+                </a:tc>
+                <a:tc>
+                  <a:txBody>
+                    <a:bodyPr wrap="square"/>
+                    <a:lstStyle/>
+                    <a:p>
+                      <a:r>
+                        <a:rPr sz="1100" b="0">
+                          <a:solidFill>
+                            <a:srgbClr val="282828"/>
+                          </a:solidFill>
+                          <a:latin typeface="Arial"/>
+                        </a:rPr>
+                        <a:t>R5, +3000 evaluations</a:t>
+                      </a:r>
+                    </a:p>
+                  </a:txBody>
+                  <a:tcPr marL="54864" marR="54864" marT="18288" marB="18288">
+                    <a:solidFill>
+                      <a:srgbClr val="FFFFFF"/>
+                    </a:solidFill>
+                  </a:tcPr>
+                </a:tc>
+                <a:tc>
+                  <a:txBody>
+                    <a:bodyPr wrap="square"/>
+                    <a:lstStyle/>
+                    <a:p>
+                      <a:r>
+                        <a:rPr sz="1100" b="0">
+                          <a:solidFill>
+                            <a:srgbClr val="282828"/>
+                          </a:solidFill>
+                          <a:latin typeface="Arial"/>
+                        </a:rPr>
+                        <a:t>as R5</a:t>
+                      </a:r>
+                    </a:p>
+                  </a:txBody>
+                  <a:tcPr marL="54864" marR="54864" marT="18288" marB="18288">
+                    <a:solidFill>
+                      <a:srgbClr val="FFFFFF"/>
+                    </a:solidFill>
+                  </a:tcPr>
+                </a:tc>
+                <a:tc>
+                  <a:txBody>
+                    <a:bodyPr wrap="square"/>
+                    <a:lstStyle/>
+                    <a:p>
+                      <a:r>
+                        <a:rPr sz="1100" b="0">
+                          <a:solidFill>
+                            <a:srgbClr val="282828"/>
+                          </a:solidFill>
+                          <a:latin typeface="Arial"/>
+                        </a:rPr>
+                        <a:t>1.5</a:t>
+                      </a:r>
+                    </a:p>
+                  </a:txBody>
+                  <a:tcPr marL="54864" marR="54864" marT="18288" marB="18288">
+                    <a:solidFill>
+                      <a:srgbClr val="FFFFFF"/>
+                    </a:solidFill>
+                  </a:tcPr>
+                </a:tc>
+                <a:tc>
+                  <a:txBody>
+                    <a:bodyPr wrap="square"/>
+                    <a:lstStyle/>
+                    <a:p>
+                      <a:r>
+                        <a:rPr sz="1100" b="0">
+                          <a:solidFill>
+                            <a:srgbClr val="282828"/>
+                          </a:solidFill>
+                          <a:latin typeface="Arial"/>
+                        </a:rPr>
+                        <a:t>7.2 / 0.15</a:t>
+                      </a:r>
+                    </a:p>
+                  </a:txBody>
+                  <a:tcPr marL="54864" marR="54864" marT="18288" marB="18288">
+                    <a:solidFill>
+                      <a:srgbClr val="FFFFFF"/>
+                    </a:solidFill>
+                  </a:tcPr>
+                </a:tc>
+              </a:tr>
+              <a:tr h="468630">
+                <a:tc>
+                  <a:txBody>
+                    <a:bodyPr wrap="square"/>
+                    <a:lstStyle/>
+                    <a:p>
+                      <a:r>
+                        <a:rPr sz="1100" b="0">
+                          <a:solidFill>
+                            <a:srgbClr val="282828"/>
+                          </a:solidFill>
+                          <a:latin typeface="Arial"/>
+                        </a:rPr>
+                        <a:t>R7</a:t>
                       </a:r>
                     </a:p>
                   </a:txBody>
@@ -10562,7 +13095,73 @@
                           </a:solidFill>
                           <a:latin typeface="Arial"/>
                         </a:rPr>
-                        <a:t>30°, 37°, 15°</a:t>
+                        <a:t>from R4: along-slit ×3, outer fields ×2–3</a:t>
+                      </a:r>
+                    </a:p>
+                  </a:txBody>
+                  <a:tcPr marL="54864" marR="54864" marT="18288" marB="18288">
+                    <a:solidFill>
+                      <a:srgbClr val="ECF1F6"/>
+                    </a:solidFill>
+                  </a:tcPr>
+                </a:tc>
+                <a:tc>
+                  <a:txBody>
+                    <a:bodyPr wrap="square"/>
+                    <a:lstStyle/>
+                    <a:p>
+                      <a:r>
+                        <a:rPr sz="1100" b="0">
+                          <a:solidFill>
+                            <a:srgbClr val="282828"/>
+                          </a:solidFill>
+                          <a:latin typeface="Arial"/>
+                        </a:rPr>
+                        <a:t>1.02 everywhere</a:t>
+                      </a:r>
+                    </a:p>
+                  </a:txBody>
+                  <a:tcPr marL="54864" marR="54864" marT="18288" marB="18288">
+                    <a:solidFill>
+                      <a:srgbClr val="ECF1F6"/>
+                    </a:solidFill>
+                  </a:tcPr>
+                </a:tc>
+                <a:tc>
+                  <a:txBody>
+                    <a:bodyPr wrap="square"/>
+                    <a:lstStyle/>
+                    <a:p>
+                      <a:r>
+                        <a:rPr sz="1100" b="0">
+                          <a:solidFill>
+                            <a:srgbClr val="282828"/>
+                          </a:solidFill>
+                          <a:latin typeface="Arial"/>
+                        </a:rPr>
+                        <a:t>2.43</a:t>
+                      </a:r>
+                    </a:p>
+                  </a:txBody>
+                  <a:tcPr marL="54864" marR="54864" marT="18288" marB="18288">
+                    <a:solidFill>
+                      <a:srgbClr val="ECF1F6"/>
+                    </a:solidFill>
+                  </a:tcPr>
+                </a:tc>
+                <a:tc>
+                  <a:txBody>
+                    <a:bodyPr wrap="square"/>
+                    <a:lstStyle/>
+                    <a:p>
+                      <a:r>
+                        <a:rPr sz="1100" b="0">
+                          <a:solidFill>
+                            <a:srgbClr val="282828"/>
+                          </a:solidFill>
+                          <a:latin typeface="Arial"/>
+                        </a:rPr>
+                        <a:t>1.18 / 0.14</a:t>
                       </a:r>
                     </a:p>
                   </a:txBody>
@@ -10586,7 +13185,7 @@
                           </a:solidFill>
                           <a:latin typeface="Arial"/>
                         </a:rPr>
-                        <a:t>focal lengths M1, M2, M3</a:t>
+                        <a:t>R8</a:t>
                       </a:r>
                     </a:p>
                   </a:txBody>
@@ -10608,7 +13207,73 @@
                           </a:solidFill>
                           <a:latin typeface="Arial"/>
                         </a:rPr>
-                        <a:t>+1012, −452, +246 mm (M3's = the M2→M3 leg)</a:t>
+                        <a:t>R7 + telecentric ×30</a:t>
+                      </a:r>
+                    </a:p>
+                  </a:txBody>
+                  <a:tcPr marL="54864" marR="54864" marT="18288" marB="18288">
+                    <a:solidFill>
+                      <a:srgbClr val="FFFFFF"/>
+                    </a:solidFill>
+                  </a:tcPr>
+                </a:tc>
+                <a:tc>
+                  <a:txBody>
+                    <a:bodyPr wrap="square"/>
+                    <a:lstStyle/>
+                    <a:p>
+                      <a:r>
+                        <a:rPr sz="1100" b="0">
+                          <a:solidFill>
+                            <a:srgbClr val="282828"/>
+                          </a:solidFill>
+                          <a:latin typeface="Arial"/>
+                        </a:rPr>
+                        <a:t>1.02</a:t>
+                      </a:r>
+                    </a:p>
+                  </a:txBody>
+                  <a:tcPr marL="54864" marR="54864" marT="18288" marB="18288">
+                    <a:solidFill>
+                      <a:srgbClr val="FFFFFF"/>
+                    </a:solidFill>
+                  </a:tcPr>
+                </a:tc>
+                <a:tc>
+                  <a:txBody>
+                    <a:bodyPr wrap="square"/>
+                    <a:lstStyle/>
+                    <a:p>
+                      <a:r>
+                        <a:rPr sz="1100" b="0">
+                          <a:solidFill>
+                            <a:srgbClr val="282828"/>
+                          </a:solidFill>
+                          <a:latin typeface="Arial"/>
+                        </a:rPr>
+                        <a:t>2.4</a:t>
+                      </a:r>
+                    </a:p>
+                  </a:txBody>
+                  <a:tcPr marL="54864" marR="54864" marT="18288" marB="18288">
+                    <a:solidFill>
+                      <a:srgbClr val="FFFFFF"/>
+                    </a:solidFill>
+                  </a:tcPr>
+                </a:tc>
+                <a:tc>
+                  <a:txBody>
+                    <a:bodyPr wrap="square"/>
+                    <a:lstStyle/>
+                    <a:p>
+                      <a:r>
+                        <a:rPr sz="1100" b="0">
+                          <a:solidFill>
+                            <a:srgbClr val="282828"/>
+                          </a:solidFill>
+                          <a:latin typeface="Arial"/>
+                        </a:rPr>
+                        <a:t>1.18 / 0.14</a:t>
                       </a:r>
                     </a:p>
                   </a:txBody>
@@ -10632,7 +13297,7 @@
                           </a:solidFill>
                           <a:latin typeface="Arial"/>
                         </a:rPr>
-                        <a:t>entrance pupil</a:t>
+                        <a:t>R9</a:t>
                       </a:r>
                     </a:p>
                   </a:txBody>
@@ -10654,7 +13319,7 @@
                           </a:solidFill>
                           <a:latin typeface="Arial"/>
                         </a:rPr>
-                        <a:t>virtual, 347 mm behind M1</a:t>
+                        <a:t>R7 + offset rows ×1000</a:t>
                       </a:r>
                     </a:p>
                   </a:txBody>
@@ -10664,67 +13329,19 @@
                     </a:solidFill>
                   </a:tcPr>
                 </a:tc>
-              </a:tr>
-              <a:tr h="280035">
-                <a:tc>
-                  <a:txBody>
-                    <a:bodyPr wrap="square"/>
-                    <a:lstStyle/>
-                    <a:p>
-                      <a:r>
-                        <a:rPr sz="1100" b="0">
-                          <a:solidFill>
-                            <a:srgbClr val="282828"/>
-                          </a:solidFill>
-                          <a:latin typeface="Arial"/>
-                        </a:rPr>
-                        <a:t>beams at M1, M2, M3</a:t>
-                      </a:r>
-                    </a:p>
-                  </a:txBody>
-                  <a:tcPr marL="54864" marR="54864" marT="18288" marB="18288">
-                    <a:solidFill>
-                      <a:srgbClr val="FFFFFF"/>
-                    </a:solidFill>
-                  </a:tcPr>
-                </a:tc>
-                <a:tc>
-                  <a:txBody>
-                    <a:bodyPr wrap="square"/>
-                    <a:lstStyle/>
-                    <a:p>
-                      <a:r>
-                        <a:rPr sz="1100" b="0">
-                          <a:solidFill>
-                            <a:srgbClr val="282828"/>
-                          </a:solidFill>
-                          <a:latin typeface="Arial"/>
-                        </a:rPr>
-                        <a:t>183, 136, 166 mm</a:t>
-                      </a:r>
-                    </a:p>
-                  </a:txBody>
-                  <a:tcPr marL="54864" marR="54864" marT="18288" marB="18288">
-                    <a:solidFill>
-                      <a:srgbClr val="FFFFFF"/>
-                    </a:solidFill>
-                  </a:tcPr>
-                </a:tc>
-              </a:tr>
-              <a:tr h="468630">
-                <a:tc>
-                  <a:txBody>
-                    <a:bodyPr wrap="square"/>
-                    <a:lstStyle/>
-                    <a:p>
-                      <a:r>
-                        <a:rPr sz="1100" b="0">
-                          <a:solidFill>
-                            <a:srgbClr val="282828"/>
-                          </a:solidFill>
-                          <a:latin typeface="Arial"/>
-                        </a:rPr>
-                        <a:t>intermediate focus</a:t>
+                <a:tc>
+                  <a:txBody>
+                    <a:bodyPr wrap="square"/>
+                    <a:lstStyle/>
+                    <a:p>
+                      <a:r>
+                        <a:rPr sz="1100" b="0">
+                          <a:solidFill>
+                            <a:srgbClr val="282828"/>
+                          </a:solidFill>
+                          <a:latin typeface="Arial"/>
+                        </a:rPr>
+                        <a:t>1.02</a:t>
                       </a:r>
                     </a:p>
                   </a:txBody>
@@ -10746,7 +13363,7 @@
                           </a:solidFill>
                           <a:latin typeface="Arial"/>
                         </a:rPr>
-                        <a:t>none (the marginal ray never crosses the axis)</a:t>
+                        <a:t>0.03</a:t>
                       </a:r>
                     </a:p>
                   </a:txBody>
@@ -10756,89 +13373,19 @@
                     </a:solidFill>
                   </a:tcPr>
                 </a:tc>
-              </a:tr>
-              <a:tr h="468630">
-                <a:tc>
-                  <a:txBody>
-                    <a:bodyPr wrap="square"/>
-                    <a:lstStyle/>
-                    <a:p>
-                      <a:r>
-                        <a:rPr sz="1100" b="0">
-                          <a:solidFill>
-                            <a:srgbClr val="282828"/>
-                          </a:solidFill>
-                          <a:latin typeface="Arial"/>
-                        </a:rPr>
-                        <a:t>chief to the slit normal, section as emitted</a:t>
-                      </a:r>
-                    </a:p>
-                  </a:txBody>
-                  <a:tcPr marL="54864" marR="54864" marT="18288" marB="18288">
-                    <a:solidFill>
-                      <a:srgbClr val="FFFFFF"/>
-                    </a:solidFill>
-                  </a:tcPr>
-                </a:tc>
-                <a:tc>
-                  <a:txBody>
-                    <a:bodyPr wrap="square"/>
-                    <a:lstStyle/>
-                    <a:p>
-                      <a:r>
-                        <a:rPr sz="1100" b="0">
-                          <a:solidFill>
-                            <a:srgbClr val="282828"/>
-                          </a:solidFill>
-                          <a:latin typeface="Arial"/>
-                        </a:rPr>
-                        <a:t>≤ 0.093° over ±4.7°</a:t>
-                      </a:r>
-                    </a:p>
-                  </a:txBody>
-                  <a:tcPr marL="54864" marR="54864" marT="18288" marB="18288">
-                    <a:solidFill>
-                      <a:srgbClr val="FFFFFF"/>
-                    </a:solidFill>
-                  </a:tcPr>
-                </a:tc>
-              </a:tr>
-              <a:tr h="280035">
-                <a:tc>
-                  <a:txBody>
-                    <a:bodyPr wrap="square"/>
-                    <a:lstStyle/>
-                    <a:p>
-                      <a:r>
-                        <a:rPr sz="1100" b="0">
-                          <a:solidFill>
-                            <a:srgbClr val="282828"/>
-                          </a:solidFill>
-                          <a:latin typeface="Arial"/>
-                        </a:rPr>
-                        <a:t>plate scale as emitted</a:t>
-                      </a:r>
-                    </a:p>
-                  </a:txBody>
-                  <a:tcPr marL="54864" marR="54864" marT="18288" marB="18288">
-                    <a:solidFill>
-                      <a:srgbClr val="ECF1F6"/>
-                    </a:solidFill>
-                  </a:tcPr>
-                </a:tc>
-                <a:tc>
-                  <a:txBody>
-                    <a:bodyPr wrap="square"/>
-                    <a:lstStyle/>
-                    <a:p>
-                      <a:r>
-                        <a:rPr sz="1100" b="0">
-                          <a:solidFill>
-                            <a:srgbClr val="282828"/>
-                          </a:solidFill>
-                          <a:latin typeface="Arial"/>
-                        </a:rPr>
-                        <a:t>329.99 mm local, 329.87 at the edge</a:t>
+                <a:tc>
+                  <a:txBody>
+                    <a:bodyPr wrap="square"/>
+                    <a:lstStyle/>
+                    <a:p>
+                      <a:r>
+                        <a:rPr sz="1100" b="0">
+                          <a:solidFill>
+                            <a:srgbClr val="282828"/>
+                          </a:solidFill>
+                          <a:latin typeface="Arial"/>
+                        </a:rPr>
+                        <a:t>1.17 / 0.016</a:t>
                       </a:r>
                     </a:p>
                   </a:txBody>
@@ -10861,8 +13408,8 @@
         </p:nvSpPr>
         <p:spPr>
           <a:xfrm>
-            <a:off x="6400800" y="1298448"/>
-            <a:ext cx="5394960" cy="274320"/>
+            <a:off x="411480" y="3970782"/>
+            <a:ext cx="11368735" cy="274320"/>
           </a:xfrm>
           <a:prstGeom prst="rect">
             <a:avLst/>
@@ -10881,99 +13428,13 @@
               </a:spcAft>
             </a:pPr>
             <a:r>
-              <a:rPr sz="1200" b="0">
-                <a:solidFill>
-                  <a:srgbClr val="282828"/>
-                </a:solidFill>
-                <a:latin typeface="Arial"/>
-              </a:rPr>
-              <a:t>•  </a:t>
-            </a:r>
-            <a:r>
-              <a:rPr sz="1200" b="1">
-                <a:solidFill>
-                  <a:srgbClr val="282828"/>
-                </a:solidFill>
-                <a:latin typeface="Arial"/>
-              </a:rPr>
-              <a:t>Stop at M1, or between M1 and M2:</a:t>
-            </a:r>
-            <a:r>
-              <a:rPr sz="1200" b="0">
-                <a:solidFill>
-                  <a:srgbClr val="282828"/>
-                </a:solidFill>
-                <a:latin typeface="Arial"/>
-              </a:rPr>
-              <a:t> also telecentric, but it flips the form and M2 grows to 310 / 220–250 mm.</a:t>
-            </a:r>
-          </a:p>
-          <a:p>
-            <a:pPr>
-              <a:spcAft>
-                <a:spcPts val="600"/>
-              </a:spcAft>
-            </a:pPr>
-            <a:r>
-              <a:rPr sz="1200" b="0">
-                <a:solidFill>
-                  <a:srgbClr val="282828"/>
-                </a:solidFill>
-                <a:latin typeface="Arial"/>
-              </a:rPr>
-              <a:t>•  </a:t>
-            </a:r>
-            <a:r>
-              <a:rPr sz="1200" b="1">
-                <a:solidFill>
-                  <a:srgbClr val="282828"/>
-                </a:solidFill>
-                <a:latin typeface="Arial"/>
-              </a:rPr>
-              <a:t>Tilted spheres:</a:t>
-            </a:r>
-            <a:r>
-              <a:rPr sz="1200" b="0">
-                <a:solidFill>
-                  <a:srgbClr val="282828"/>
-                </a:solidFill>
-                <a:latin typeface="Arial"/>
-              </a:rPr>
-              <a:t> cannot meet the first order in both sections (R_t / R_s = 1.33, 1.57, 1.07 needed); off-axis conic sections can — paraboloids when the parent axis is at the incidence angle.</a:t>
-            </a:r>
-          </a:p>
-          <a:p>
-            <a:pPr>
-              <a:spcAft>
-                <a:spcPts val="600"/>
-              </a:spcAft>
-            </a:pPr>
-            <a:r>
-              <a:rPr sz="1200" b="0">
-                <a:solidFill>
-                  <a:srgbClr val="282828"/>
-                </a:solidFill>
-                <a:latin typeface="Arial"/>
-              </a:rPr>
-              <a:t>•  </a:t>
-            </a:r>
-            <a:r>
-              <a:rPr sz="1200" b="1">
-                <a:solidFill>
-                  <a:srgbClr val="282828"/>
-                </a:solidFill>
-                <a:latin typeface="Arial"/>
-              </a:rPr>
-              <a:t>The paper's drawing left one thing open</a:t>
-            </a:r>
-            <a:r>
-              <a:rPr sz="1200" b="0">
-                <a:solidFill>
-                  <a:srgbClr val="282828"/>
-                </a:solidFill>
-                <a:latin typeface="Arial"/>
-              </a:rPr>
-              <a:t> — whether the beam passes through a focus between M2 and M3 — and the numbers settled it: it does not.</a:t>
+              <a:rPr sz="1500" b="0">
+                <a:solidFill>
+                  <a:srgbClr val="282828"/>
+                </a:solidFill>
+                <a:latin typeface="Arial"/>
+              </a:rPr>
+              <a:t>•  The four solves thrown out (unbounded layout, free R_t / R_s, closure variants, a resume defect) are in the report; none changed the form.</a:t>
             </a:r>
           </a:p>
         </p:txBody>
@@ -10986,8 +13447,8 @@
         </p:nvSpPr>
         <p:spPr>
           <a:xfrm>
-            <a:off x="6400800" y="3340608"/>
-            <a:ext cx="5394960" cy="274320"/>
+            <a:off x="411480" y="4642866"/>
+            <a:ext cx="11368735" cy="274320"/>
           </a:xfrm>
           <a:prstGeom prst="rect">
             <a:avLst/>
@@ -11012,7 +13473,7 @@
                 </a:solidFill>
                 <a:latin typeface="Arial"/>
               </a:rPr>
-              <a:t>tls_first_order.txt; template README, "The two facts the first order forces."</a:t>
+              <a:t>REPORT_dyson5_cprime.md; tma_longslit/runs_*.log.</a:t>
             </a:r>
           </a:p>
         </p:txBody>
@@ -11025,7 +13486,7 @@
 </p:sld>
 </file>
 
-<file path=ppt/slides/slide21.xml><?xml version="1.0" encoding="utf-8"?>
+<file path=ppt/slides/slide23.xml><?xml version="1.0" encoding="utf-8"?>
 <p:sld xmlns:a="http://schemas.openxmlformats.org/drawingml/2006/main" xmlns:p="http://schemas.openxmlformats.org/presentationml/2006/main" xmlns:r="http://schemas.openxmlformats.org/officeDocument/2006/relationships">
   <p:cSld>
     <p:spTree>
@@ -11069,7 +13530,7 @@
                 </a:solidFill>
                 <a:latin typeface="Arial"/>
               </a:rPr>
-              <a:t>The rungs per field</a:t>
+              <a:t>The chief-tilt diagnostic</a:t>
             </a:r>
           </a:p>
           <a:p>
@@ -11085,7 +13546,7 @@
                 </a:solidFill>
                 <a:latin typeface="Arial"/>
               </a:rPr>
-              <a:t>What each rung's telescope looked like along the slit, and what the join made of it</a:t>
+              <a:t>How the smile's cause was isolated without a solve</a:t>
             </a:r>
           </a:p>
         </p:txBody>
@@ -11134,828 +13595,15 @@
           </a:p>
         </p:txBody>
       </p:sp>
-      <p:graphicFrame>
-        <p:nvGraphicFramePr>
-          <p:cNvPr id="4" name="Table 3"/>
-          <p:cNvGraphicFramePr>
-            <a:graphicFrameLocks noGrp="1"/>
-          </p:cNvGraphicFramePr>
-          <p:nvPr/>
-        </p:nvGraphicFramePr>
-        <p:xfrm>
-          <a:off x="411480" y="1298448"/>
-          <a:ext cx="11368733" cy="2526030"/>
-        </p:xfrm>
-        <a:graphic>
-          <a:graphicData uri="http://schemas.openxmlformats.org/drawingml/2006/table">
-            <a:tbl>
-              <a:tblPr firstRow="1" bandRow="1">
-                <a:tableStyleId>{5C22544A-7EE6-4342-B048-85BDC9FD1C3A}</a:tableStyleId>
-              </a:tblPr>
-              <a:tblGrid>
-                <a:gridCol w="436880"/>
-                <a:gridCol w="2804993"/>
-                <a:gridCol w="2932493"/>
-                <a:gridCol w="2868743"/>
-                <a:gridCol w="2325624"/>
-              </a:tblGrid>
-              <a:tr h="468630">
-                <a:tc>
-                  <a:txBody>
-                    <a:bodyPr wrap="square"/>
-                    <a:lstStyle/>
-                    <a:p>
-                      <a:r>
-                        <a:rPr sz="1100" b="1">
-                          <a:solidFill>
-                            <a:srgbClr val="FFFFFF"/>
-                          </a:solidFill>
-                          <a:latin typeface="Arial"/>
-                        </a:rPr>
-                        <a:t>rung</a:t>
-                      </a:r>
-                    </a:p>
-                  </a:txBody>
-                  <a:tcPr marL="54864" marR="54864" marT="18288" marB="18288">
-                    <a:solidFill>
-                      <a:srgbClr val="1F4E79"/>
-                    </a:solidFill>
-                  </a:tcPr>
-                </a:tc>
-                <a:tc>
-                  <a:txBody>
-                    <a:bodyPr wrap="square"/>
-                    <a:lstStyle/>
-                    <a:p>
-                      <a:r>
-                        <a:rPr sz="1100" b="1">
-                          <a:solidFill>
-                            <a:srgbClr val="FFFFFF"/>
-                          </a:solidFill>
-                          <a:latin typeface="Arial"/>
-                        </a:rPr>
-                        <a:t>DOFs</a:t>
-                      </a:r>
-                    </a:p>
-                  </a:txBody>
-                  <a:tcPr marL="54864" marR="54864" marT="18288" marB="18288">
-                    <a:solidFill>
-                      <a:srgbClr val="1F4E79"/>
-                    </a:solidFill>
-                  </a:tcPr>
-                </a:tc>
-                <a:tc>
-                  <a:txBody>
-                    <a:bodyPr wrap="square"/>
-                    <a:lstStyle/>
-                    <a:p>
-                      <a:r>
-                        <a:rPr sz="1100" b="1">
-                          <a:solidFill>
-                            <a:srgbClr val="FFFFFF"/>
-                          </a:solidFill>
-                          <a:latin typeface="Arial"/>
-                        </a:rPr>
-                        <a:t>spot FWHM along the slit, fields 0 → 4.7° (px)</a:t>
-                      </a:r>
-                    </a:p>
-                  </a:txBody>
-                  <a:tcPr marL="54864" marR="54864" marT="18288" marB="18288">
-                    <a:solidFill>
-                      <a:srgbClr val="1F4E79"/>
-                    </a:solidFill>
-                  </a:tcPr>
-                </a:tc>
-                <a:tc>
-                  <a:txBody>
-                    <a:bodyPr wrap="square"/>
-                    <a:lstStyle/>
-                    <a:p>
-                      <a:r>
-                        <a:rPr sz="1100" b="1">
-                          <a:solidFill>
-                            <a:srgbClr val="FFFFFF"/>
-                          </a:solidFill>
-                          <a:latin typeface="Arial"/>
-                        </a:rPr>
-                        <a:t>chief − centroid across the slit at 4.7° (µm)</a:t>
-                      </a:r>
-                    </a:p>
-                  </a:txBody>
-                  <a:tcPr marL="54864" marR="54864" marT="18288" marB="18288">
-                    <a:solidFill>
-                      <a:srgbClr val="1F4E79"/>
-                    </a:solidFill>
-                  </a:tcPr>
-                </a:tc>
-                <a:tc>
-                  <a:txBody>
-                    <a:bodyPr wrap="square"/>
-                    <a:lstStyle/>
-                    <a:p>
-                      <a:r>
-                        <a:rPr sz="1100" b="1">
-                          <a:solidFill>
-                            <a:srgbClr val="FFFFFF"/>
-                          </a:solidFill>
-                          <a:latin typeface="Arial"/>
-                        </a:rPr>
-                        <a:t>e2e CRF / smile (point-source)</a:t>
-                      </a:r>
-                    </a:p>
-                  </a:txBody>
-                  <a:tcPr marL="54864" marR="54864" marT="18288" marB="18288">
-                    <a:solidFill>
-                      <a:srgbClr val="1F4E79"/>
-                    </a:solidFill>
-                  </a:tcPr>
-                </a:tc>
-              </a:tr>
-              <a:tr h="280035">
-                <a:tc>
-                  <a:txBody>
-                    <a:bodyPr wrap="square"/>
-                    <a:lstStyle/>
-                    <a:p>
-                      <a:r>
-                        <a:rPr sz="1100" b="0">
-                          <a:solidFill>
-                            <a:srgbClr val="282828"/>
-                          </a:solidFill>
-                          <a:latin typeface="Arial"/>
-                        </a:rPr>
-                        <a:t>R4</a:t>
-                      </a:r>
-                    </a:p>
-                  </a:txBody>
-                  <a:tcPr marL="54864" marR="54864" marT="18288" marB="18288">
-                    <a:solidFill>
-                      <a:srgbClr val="FFFFFF"/>
-                    </a:solidFill>
-                  </a:tcPr>
-                </a:tc>
-                <a:tc>
-                  <a:txBody>
-                    <a:bodyPr wrap="square"/>
-                    <a:lstStyle/>
-                    <a:p>
-                      <a:r>
-                        <a:rPr sz="1100" b="0">
-                          <a:solidFill>
-                            <a:srgbClr val="282828"/>
-                          </a:solidFill>
-                          <a:latin typeface="Arial"/>
-                        </a:rPr>
-                        <a:t>conics, θ, focus, h⁴ h⁶</a:t>
-                      </a:r>
-                    </a:p>
-                  </a:txBody>
-                  <a:tcPr marL="54864" marR="54864" marT="18288" marB="18288">
-                    <a:solidFill>
-                      <a:srgbClr val="FFFFFF"/>
-                    </a:solidFill>
-                  </a:tcPr>
-                </a:tc>
-                <a:tc>
-                  <a:txBody>
-                    <a:bodyPr wrap="square"/>
-                    <a:lstStyle/>
-                    <a:p>
-                      <a:r>
-                        <a:rPr sz="1100" b="0">
-                          <a:solidFill>
-                            <a:srgbClr val="282828"/>
-                          </a:solidFill>
-                          <a:latin typeface="Arial"/>
-                        </a:rPr>
-                        <a:t>1–2 center, 5–7 outer</a:t>
-                      </a:r>
-                    </a:p>
-                  </a:txBody>
-                  <a:tcPr marL="54864" marR="54864" marT="18288" marB="18288">
-                    <a:solidFill>
-                      <a:srgbClr val="FFFFFF"/>
-                    </a:solidFill>
-                  </a:tcPr>
-                </a:tc>
-                <a:tc>
-                  <a:txBody>
-                    <a:bodyPr wrap="square"/>
-                    <a:lstStyle/>
-                    <a:p>
-                      <a:r>
-                        <a:rPr sz="1100" b="0">
-                          <a:solidFill>
-                            <a:srgbClr val="282828"/>
-                          </a:solidFill>
-                          <a:latin typeface="Arial"/>
-                        </a:rPr>
-                        <a:t>9.1</a:t>
-                      </a:r>
-                    </a:p>
-                  </a:txBody>
-                  <a:tcPr marL="54864" marR="54864" marT="18288" marB="18288">
-                    <a:solidFill>
-                      <a:srgbClr val="FFFFFF"/>
-                    </a:solidFill>
-                  </a:tcPr>
-                </a:tc>
-                <a:tc>
-                  <a:txBody>
-                    <a:bodyPr wrap="square"/>
-                    <a:lstStyle/>
-                    <a:p>
-                      <a:r>
-                        <a:rPr sz="1100" b="0">
-                          <a:solidFill>
-                            <a:srgbClr val="282828"/>
-                          </a:solidFill>
-                          <a:latin typeface="Arial"/>
-                        </a:rPr>
-                        <a:t>2.5 / 0.73</a:t>
-                      </a:r>
-                    </a:p>
-                  </a:txBody>
-                  <a:tcPr marL="54864" marR="54864" marT="18288" marB="18288">
-                    <a:solidFill>
-                      <a:srgbClr val="FFFFFF"/>
-                    </a:solidFill>
-                  </a:tcPr>
-                </a:tc>
-              </a:tr>
-              <a:tr h="468630">
-                <a:tc>
-                  <a:txBody>
-                    <a:bodyPr wrap="square"/>
-                    <a:lstStyle/>
-                    <a:p>
-                      <a:r>
-                        <a:rPr sz="1100" b="0">
-                          <a:solidFill>
-                            <a:srgbClr val="282828"/>
-                          </a:solidFill>
-                          <a:latin typeface="Arial"/>
-                        </a:rPr>
-                        <a:t>R5</a:t>
-                      </a:r>
-                    </a:p>
-                  </a:txBody>
-                  <a:tcPr marL="54864" marR="54864" marT="18288" marB="18288">
-                    <a:solidFill>
-                      <a:srgbClr val="ECF1F6"/>
-                    </a:solidFill>
-                  </a:tcPr>
-                </a:tc>
-                <a:tc>
-                  <a:txBody>
-                    <a:bodyPr wrap="square"/>
-                    <a:lstStyle/>
-                    <a:p>
-                      <a:r>
-                        <a:rPr sz="1100" b="0">
-                          <a:solidFill>
-                            <a:srgbClr val="282828"/>
-                          </a:solidFill>
-                          <a:latin typeface="Arial"/>
-                        </a:rPr>
-                        <a:t>+ pole-frame freeform 3–6, centroid-bow rows</a:t>
-                      </a:r>
-                    </a:p>
-                  </a:txBody>
-                  <a:tcPr marL="54864" marR="54864" marT="18288" marB="18288">
-                    <a:solidFill>
-                      <a:srgbClr val="ECF1F6"/>
-                    </a:solidFill>
-                  </a:tcPr>
-                </a:tc>
-                <a:tc>
-                  <a:txBody>
-                    <a:bodyPr wrap="square"/>
-                    <a:lstStyle/>
-                    <a:p>
-                      <a:r>
-                        <a:rPr sz="1100" b="0">
-                          <a:solidFill>
-                            <a:srgbClr val="282828"/>
-                          </a:solidFill>
-                          <a:latin typeface="Arial"/>
-                        </a:rPr>
-                        <a:t>1 center, 5–7 outer</a:t>
-                      </a:r>
-                    </a:p>
-                  </a:txBody>
-                  <a:tcPr marL="54864" marR="54864" marT="18288" marB="18288">
-                    <a:solidFill>
-                      <a:srgbClr val="ECF1F6"/>
-                    </a:solidFill>
-                  </a:tcPr>
-                </a:tc>
-                <a:tc>
-                  <a:txBody>
-                    <a:bodyPr wrap="square"/>
-                    <a:lstStyle/>
-                    <a:p>
-                      <a:r>
-                        <a:rPr sz="1100" b="0">
-                          <a:solidFill>
-                            <a:srgbClr val="282828"/>
-                          </a:solidFill>
-                          <a:latin typeface="Arial"/>
-                        </a:rPr>
-                        <a:t>1.1</a:t>
-                      </a:r>
-                    </a:p>
-                  </a:txBody>
-                  <a:tcPr marL="54864" marR="54864" marT="18288" marB="18288">
-                    <a:solidFill>
-                      <a:srgbClr val="ECF1F6"/>
-                    </a:solidFill>
-                  </a:tcPr>
-                </a:tc>
-                <a:tc>
-                  <a:txBody>
-                    <a:bodyPr wrap="square"/>
-                    <a:lstStyle/>
-                    <a:p>
-                      <a:r>
-                        <a:rPr sz="1100" b="0">
-                          <a:solidFill>
-                            <a:srgbClr val="282828"/>
-                          </a:solidFill>
-                          <a:latin typeface="Arial"/>
-                        </a:rPr>
-                        <a:t>7.0 / 0.09</a:t>
-                      </a:r>
-                    </a:p>
-                  </a:txBody>
-                  <a:tcPr marL="54864" marR="54864" marT="18288" marB="18288">
-                    <a:solidFill>
-                      <a:srgbClr val="ECF1F6"/>
-                    </a:solidFill>
-                  </a:tcPr>
-                </a:tc>
-              </a:tr>
-              <a:tr h="280035">
-                <a:tc>
-                  <a:txBody>
-                    <a:bodyPr wrap="square"/>
-                    <a:lstStyle/>
-                    <a:p>
-                      <a:r>
-                        <a:rPr sz="1100" b="0">
-                          <a:solidFill>
-                            <a:srgbClr val="282828"/>
-                          </a:solidFill>
-                          <a:latin typeface="Arial"/>
-                        </a:rPr>
-                        <a:t>R6</a:t>
-                      </a:r>
-                    </a:p>
-                  </a:txBody>
-                  <a:tcPr marL="54864" marR="54864" marT="18288" marB="18288">
-                    <a:solidFill>
-                      <a:srgbClr val="FFFFFF"/>
-                    </a:solidFill>
-                  </a:tcPr>
-                </a:tc>
-                <a:tc>
-                  <a:txBody>
-                    <a:bodyPr wrap="square"/>
-                    <a:lstStyle/>
-                    <a:p>
-                      <a:r>
-                        <a:rPr sz="1100" b="0">
-                          <a:solidFill>
-                            <a:srgbClr val="282828"/>
-                          </a:solidFill>
-                          <a:latin typeface="Arial"/>
-                        </a:rPr>
-                        <a:t>R5, +3000 evaluations</a:t>
-                      </a:r>
-                    </a:p>
-                  </a:txBody>
-                  <a:tcPr marL="54864" marR="54864" marT="18288" marB="18288">
-                    <a:solidFill>
-                      <a:srgbClr val="FFFFFF"/>
-                    </a:solidFill>
-                  </a:tcPr>
-                </a:tc>
-                <a:tc>
-                  <a:txBody>
-                    <a:bodyPr wrap="square"/>
-                    <a:lstStyle/>
-                    <a:p>
-                      <a:r>
-                        <a:rPr sz="1100" b="0">
-                          <a:solidFill>
-                            <a:srgbClr val="282828"/>
-                          </a:solidFill>
-                          <a:latin typeface="Arial"/>
-                        </a:rPr>
-                        <a:t>as R5</a:t>
-                      </a:r>
-                    </a:p>
-                  </a:txBody>
-                  <a:tcPr marL="54864" marR="54864" marT="18288" marB="18288">
-                    <a:solidFill>
-                      <a:srgbClr val="FFFFFF"/>
-                    </a:solidFill>
-                  </a:tcPr>
-                </a:tc>
-                <a:tc>
-                  <a:txBody>
-                    <a:bodyPr wrap="square"/>
-                    <a:lstStyle/>
-                    <a:p>
-                      <a:r>
-                        <a:rPr sz="1100" b="0">
-                          <a:solidFill>
-                            <a:srgbClr val="282828"/>
-                          </a:solidFill>
-                          <a:latin typeface="Arial"/>
-                        </a:rPr>
-                        <a:t>1.5</a:t>
-                      </a:r>
-                    </a:p>
-                  </a:txBody>
-                  <a:tcPr marL="54864" marR="54864" marT="18288" marB="18288">
-                    <a:solidFill>
-                      <a:srgbClr val="FFFFFF"/>
-                    </a:solidFill>
-                  </a:tcPr>
-                </a:tc>
-                <a:tc>
-                  <a:txBody>
-                    <a:bodyPr wrap="square"/>
-                    <a:lstStyle/>
-                    <a:p>
-                      <a:r>
-                        <a:rPr sz="1100" b="0">
-                          <a:solidFill>
-                            <a:srgbClr val="282828"/>
-                          </a:solidFill>
-                          <a:latin typeface="Arial"/>
-                        </a:rPr>
-                        <a:t>7.2 / 0.15</a:t>
-                      </a:r>
-                    </a:p>
-                  </a:txBody>
-                  <a:tcPr marL="54864" marR="54864" marT="18288" marB="18288">
-                    <a:solidFill>
-                      <a:srgbClr val="FFFFFF"/>
-                    </a:solidFill>
-                  </a:tcPr>
-                </a:tc>
-              </a:tr>
-              <a:tr h="468630">
-                <a:tc>
-                  <a:txBody>
-                    <a:bodyPr wrap="square"/>
-                    <a:lstStyle/>
-                    <a:p>
-                      <a:r>
-                        <a:rPr sz="1100" b="0">
-                          <a:solidFill>
-                            <a:srgbClr val="282828"/>
-                          </a:solidFill>
-                          <a:latin typeface="Arial"/>
-                        </a:rPr>
-                        <a:t>R7</a:t>
-                      </a:r>
-                    </a:p>
-                  </a:txBody>
-                  <a:tcPr marL="54864" marR="54864" marT="18288" marB="18288">
-                    <a:solidFill>
-                      <a:srgbClr val="ECF1F6"/>
-                    </a:solidFill>
-                  </a:tcPr>
-                </a:tc>
-                <a:tc>
-                  <a:txBody>
-                    <a:bodyPr wrap="square"/>
-                    <a:lstStyle/>
-                    <a:p>
-                      <a:r>
-                        <a:rPr sz="1100" b="0">
-                          <a:solidFill>
-                            <a:srgbClr val="282828"/>
-                          </a:solidFill>
-                          <a:latin typeface="Arial"/>
-                        </a:rPr>
-                        <a:t>from R4: along-slit ×3, outer fields ×2–3</a:t>
-                      </a:r>
-                    </a:p>
-                  </a:txBody>
-                  <a:tcPr marL="54864" marR="54864" marT="18288" marB="18288">
-                    <a:solidFill>
-                      <a:srgbClr val="ECF1F6"/>
-                    </a:solidFill>
-                  </a:tcPr>
-                </a:tc>
-                <a:tc>
-                  <a:txBody>
-                    <a:bodyPr wrap="square"/>
-                    <a:lstStyle/>
-                    <a:p>
-                      <a:r>
-                        <a:rPr sz="1100" b="0">
-                          <a:solidFill>
-                            <a:srgbClr val="282828"/>
-                          </a:solidFill>
-                          <a:latin typeface="Arial"/>
-                        </a:rPr>
-                        <a:t>1.02 everywhere</a:t>
-                      </a:r>
-                    </a:p>
-                  </a:txBody>
-                  <a:tcPr marL="54864" marR="54864" marT="18288" marB="18288">
-                    <a:solidFill>
-                      <a:srgbClr val="ECF1F6"/>
-                    </a:solidFill>
-                  </a:tcPr>
-                </a:tc>
-                <a:tc>
-                  <a:txBody>
-                    <a:bodyPr wrap="square"/>
-                    <a:lstStyle/>
-                    <a:p>
-                      <a:r>
-                        <a:rPr sz="1100" b="0">
-                          <a:solidFill>
-                            <a:srgbClr val="282828"/>
-                          </a:solidFill>
-                          <a:latin typeface="Arial"/>
-                        </a:rPr>
-                        <a:t>2.43</a:t>
-                      </a:r>
-                    </a:p>
-                  </a:txBody>
-                  <a:tcPr marL="54864" marR="54864" marT="18288" marB="18288">
-                    <a:solidFill>
-                      <a:srgbClr val="ECF1F6"/>
-                    </a:solidFill>
-                  </a:tcPr>
-                </a:tc>
-                <a:tc>
-                  <a:txBody>
-                    <a:bodyPr wrap="square"/>
-                    <a:lstStyle/>
-                    <a:p>
-                      <a:r>
-                        <a:rPr sz="1100" b="0">
-                          <a:solidFill>
-                            <a:srgbClr val="282828"/>
-                          </a:solidFill>
-                          <a:latin typeface="Arial"/>
-                        </a:rPr>
-                        <a:t>1.18 / 0.14</a:t>
-                      </a:r>
-                    </a:p>
-                  </a:txBody>
-                  <a:tcPr marL="54864" marR="54864" marT="18288" marB="18288">
-                    <a:solidFill>
-                      <a:srgbClr val="ECF1F6"/>
-                    </a:solidFill>
-                  </a:tcPr>
-                </a:tc>
-              </a:tr>
-              <a:tr h="280035">
-                <a:tc>
-                  <a:txBody>
-                    <a:bodyPr wrap="square"/>
-                    <a:lstStyle/>
-                    <a:p>
-                      <a:r>
-                        <a:rPr sz="1100" b="0">
-                          <a:solidFill>
-                            <a:srgbClr val="282828"/>
-                          </a:solidFill>
-                          <a:latin typeface="Arial"/>
-                        </a:rPr>
-                        <a:t>R8</a:t>
-                      </a:r>
-                    </a:p>
-                  </a:txBody>
-                  <a:tcPr marL="54864" marR="54864" marT="18288" marB="18288">
-                    <a:solidFill>
-                      <a:srgbClr val="FFFFFF"/>
-                    </a:solidFill>
-                  </a:tcPr>
-                </a:tc>
-                <a:tc>
-                  <a:txBody>
-                    <a:bodyPr wrap="square"/>
-                    <a:lstStyle/>
-                    <a:p>
-                      <a:r>
-                        <a:rPr sz="1100" b="0">
-                          <a:solidFill>
-                            <a:srgbClr val="282828"/>
-                          </a:solidFill>
-                          <a:latin typeface="Arial"/>
-                        </a:rPr>
-                        <a:t>R7 + telecentric ×30</a:t>
-                      </a:r>
-                    </a:p>
-                  </a:txBody>
-                  <a:tcPr marL="54864" marR="54864" marT="18288" marB="18288">
-                    <a:solidFill>
-                      <a:srgbClr val="FFFFFF"/>
-                    </a:solidFill>
-                  </a:tcPr>
-                </a:tc>
-                <a:tc>
-                  <a:txBody>
-                    <a:bodyPr wrap="square"/>
-                    <a:lstStyle/>
-                    <a:p>
-                      <a:r>
-                        <a:rPr sz="1100" b="0">
-                          <a:solidFill>
-                            <a:srgbClr val="282828"/>
-                          </a:solidFill>
-                          <a:latin typeface="Arial"/>
-                        </a:rPr>
-                        <a:t>1.02</a:t>
-                      </a:r>
-                    </a:p>
-                  </a:txBody>
-                  <a:tcPr marL="54864" marR="54864" marT="18288" marB="18288">
-                    <a:solidFill>
-                      <a:srgbClr val="FFFFFF"/>
-                    </a:solidFill>
-                  </a:tcPr>
-                </a:tc>
-                <a:tc>
-                  <a:txBody>
-                    <a:bodyPr wrap="square"/>
-                    <a:lstStyle/>
-                    <a:p>
-                      <a:r>
-                        <a:rPr sz="1100" b="0">
-                          <a:solidFill>
-                            <a:srgbClr val="282828"/>
-                          </a:solidFill>
-                          <a:latin typeface="Arial"/>
-                        </a:rPr>
-                        <a:t>2.4</a:t>
-                      </a:r>
-                    </a:p>
-                  </a:txBody>
-                  <a:tcPr marL="54864" marR="54864" marT="18288" marB="18288">
-                    <a:solidFill>
-                      <a:srgbClr val="FFFFFF"/>
-                    </a:solidFill>
-                  </a:tcPr>
-                </a:tc>
-                <a:tc>
-                  <a:txBody>
-                    <a:bodyPr wrap="square"/>
-                    <a:lstStyle/>
-                    <a:p>
-                      <a:r>
-                        <a:rPr sz="1100" b="0">
-                          <a:solidFill>
-                            <a:srgbClr val="282828"/>
-                          </a:solidFill>
-                          <a:latin typeface="Arial"/>
-                        </a:rPr>
-                        <a:t>1.18 / 0.14</a:t>
-                      </a:r>
-                    </a:p>
-                  </a:txBody>
-                  <a:tcPr marL="54864" marR="54864" marT="18288" marB="18288">
-                    <a:solidFill>
-                      <a:srgbClr val="FFFFFF"/>
-                    </a:solidFill>
-                  </a:tcPr>
-                </a:tc>
-              </a:tr>
-              <a:tr h="280035">
-                <a:tc>
-                  <a:txBody>
-                    <a:bodyPr wrap="square"/>
-                    <a:lstStyle/>
-                    <a:p>
-                      <a:r>
-                        <a:rPr sz="1100" b="0">
-                          <a:solidFill>
-                            <a:srgbClr val="282828"/>
-                          </a:solidFill>
-                          <a:latin typeface="Arial"/>
-                        </a:rPr>
-                        <a:t>R9</a:t>
-                      </a:r>
-                    </a:p>
-                  </a:txBody>
-                  <a:tcPr marL="54864" marR="54864" marT="18288" marB="18288">
-                    <a:solidFill>
-                      <a:srgbClr val="ECF1F6"/>
-                    </a:solidFill>
-                  </a:tcPr>
-                </a:tc>
-                <a:tc>
-                  <a:txBody>
-                    <a:bodyPr wrap="square"/>
-                    <a:lstStyle/>
-                    <a:p>
-                      <a:r>
-                        <a:rPr sz="1100" b="0">
-                          <a:solidFill>
-                            <a:srgbClr val="282828"/>
-                          </a:solidFill>
-                          <a:latin typeface="Arial"/>
-                        </a:rPr>
-                        <a:t>R7 + offset rows ×1000</a:t>
-                      </a:r>
-                    </a:p>
-                  </a:txBody>
-                  <a:tcPr marL="54864" marR="54864" marT="18288" marB="18288">
-                    <a:solidFill>
-                      <a:srgbClr val="ECF1F6"/>
-                    </a:solidFill>
-                  </a:tcPr>
-                </a:tc>
-                <a:tc>
-                  <a:txBody>
-                    <a:bodyPr wrap="square"/>
-                    <a:lstStyle/>
-                    <a:p>
-                      <a:r>
-                        <a:rPr sz="1100" b="0">
-                          <a:solidFill>
-                            <a:srgbClr val="282828"/>
-                          </a:solidFill>
-                          <a:latin typeface="Arial"/>
-                        </a:rPr>
-                        <a:t>1.02</a:t>
-                      </a:r>
-                    </a:p>
-                  </a:txBody>
-                  <a:tcPr marL="54864" marR="54864" marT="18288" marB="18288">
-                    <a:solidFill>
-                      <a:srgbClr val="ECF1F6"/>
-                    </a:solidFill>
-                  </a:tcPr>
-                </a:tc>
-                <a:tc>
-                  <a:txBody>
-                    <a:bodyPr wrap="square"/>
-                    <a:lstStyle/>
-                    <a:p>
-                      <a:r>
-                        <a:rPr sz="1100" b="0">
-                          <a:solidFill>
-                            <a:srgbClr val="282828"/>
-                          </a:solidFill>
-                          <a:latin typeface="Arial"/>
-                        </a:rPr>
-                        <a:t>0.03</a:t>
-                      </a:r>
-                    </a:p>
-                  </a:txBody>
-                  <a:tcPr marL="54864" marR="54864" marT="18288" marB="18288">
-                    <a:solidFill>
-                      <a:srgbClr val="ECF1F6"/>
-                    </a:solidFill>
-                  </a:tcPr>
-                </a:tc>
-                <a:tc>
-                  <a:txBody>
-                    <a:bodyPr wrap="square"/>
-                    <a:lstStyle/>
-                    <a:p>
-                      <a:r>
-                        <a:rPr sz="1100" b="0">
-                          <a:solidFill>
-                            <a:srgbClr val="282828"/>
-                          </a:solidFill>
-                          <a:latin typeface="Arial"/>
-                        </a:rPr>
-                        <a:t>1.17 / 0.016</a:t>
-                      </a:r>
-                    </a:p>
-                  </a:txBody>
-                  <a:tcPr marL="54864" marR="54864" marT="18288" marB="18288">
-                    <a:solidFill>
-                      <a:srgbClr val="ECF1F6"/>
-                    </a:solidFill>
-                  </a:tcPr>
-                </a:tc>
-              </a:tr>
-            </a:tbl>
-          </a:graphicData>
-        </a:graphic>
-      </p:graphicFrame>
       <p:sp>
         <p:nvSpPr>
-          <p:cNvPr id="5" name="TextBox 4"/>
+          <p:cNvPr id="4" name="TextBox 3"/>
           <p:cNvSpPr txBox="1"/>
           <p:nvPr/>
         </p:nvSpPr>
         <p:spPr>
           <a:xfrm>
-            <a:off x="411480" y="3970782"/>
+            <a:off x="411480" y="1298448"/>
             <a:ext cx="11368735" cy="274320"/>
           </a:xfrm>
           <a:prstGeom prst="rect">
@@ -11981,20 +13629,140 @@
                 </a:solidFill>
                 <a:latin typeface="Arial"/>
               </a:rPr>
-              <a:t>•  The four solves thrown out (unbounded layout, free R_t / R_s, closure variants, a resume defect) are in the report; none changed the form.</a:t>
+              <a:t>•  </a:t>
+            </a:r>
+            <a:r>
+              <a:rPr sz="1500" b="1">
+                <a:solidFill>
+                  <a:srgbClr val="282828"/>
+                </a:solidFill>
+                <a:latin typeface="Arial"/>
+              </a:rPr>
+              <a:t>The hypothesis:</a:t>
+            </a:r>
+            <a:r>
+              <a:rPr sz="1500" b="0">
+                <a:solidFill>
+                  <a:srgbClr val="282828"/>
+                </a:solidFill>
+                <a:latin typeface="Arial"/>
+              </a:rPr>
+              <a:t> the telescope's chief rays reach the slit up to 0.51 mrad from its normal in the dispersion direction, even in field and roughly quadratic — smile's shape — and a Dyson's spectral centroid moves with the input chief angle.</a:t>
+            </a:r>
+          </a:p>
+          <a:p>
+            <a:pPr>
+              <a:spcAft>
+                <a:spcPts val="600"/>
+              </a:spcAft>
+            </a:pPr>
+            <a:r>
+              <a:rPr sz="1500" b="0">
+                <a:solidFill>
+                  <a:srgbClr val="282828"/>
+                </a:solidFill>
+                <a:latin typeface="Arial"/>
+              </a:rPr>
+              <a:t>•  </a:t>
+            </a:r>
+            <a:r>
+              <a:rPr sz="1500" b="1">
+                <a:solidFill>
+                  <a:srgbClr val="282828"/>
+                </a:solidFill>
+                <a:latin typeface="Arial"/>
+              </a:rPr>
+              <a:t>Why it could not be tested by hand on the joined deck:</a:t>
+            </a:r>
+            <a:r>
+              <a:rPr sz="1500" b="0">
+                <a:solidFill>
+                  <a:srgbClr val="282828"/>
+                </a:solidFill>
+                <a:latin typeface="Arial"/>
+              </a:rPr>
+              <a:t> each field has two sky angles but needs three conditions (land on the slit line, two chief-angle components), and the join re-aims every launch through the grating, so a telecentric error appears there as a pupil shift.</a:t>
+            </a:r>
+          </a:p>
+          <a:p>
+            <a:pPr>
+              <a:spcAft>
+                <a:spcPts val="600"/>
+              </a:spcAft>
+            </a:pPr>
+            <a:r>
+              <a:rPr sz="1500" b="0">
+                <a:solidFill>
+                  <a:srgbClr val="282828"/>
+                </a:solidFill>
+                <a:latin typeface="Arial"/>
+              </a:rPr>
+              <a:t>•  </a:t>
+            </a:r>
+            <a:r>
+              <a:rPr sz="1500" b="1">
+                <a:solidFill>
+                  <a:srgbClr val="282828"/>
+                </a:solidFill>
+                <a:latin typeface="Arial"/>
+              </a:rPr>
+              <a:t>The test:</a:t>
+            </a:r>
+            <a:r>
+              <a:rPr sz="1500" b="0">
+                <a:solidFill>
+                  <a:srgbClr val="282828"/>
+                </a:solidFill>
+                <a:latin typeface="Arial"/>
+              </a:rPr>
+              <a:t> the spectrometer alone, each slit point's input chief tilted by the telescope's measured angles, scored as the record is (slide 12's left table).  Smile 0.0050 → 0.0049; keystone moves, so the hook is live.  The hypothesis is dead; the chief − centroid offset model (right table) predicts all five rungs.</a:t>
+            </a:r>
+          </a:p>
+          <a:p>
+            <a:pPr>
+              <a:spcAft>
+                <a:spcPts val="600"/>
+              </a:spcAft>
+            </a:pPr>
+            <a:r>
+              <a:rPr sz="1500" b="0">
+                <a:solidFill>
+                  <a:srgbClr val="282828"/>
+                </a:solidFill>
+                <a:latin typeface="Arial"/>
+              </a:rPr>
+              <a:t>•  </a:t>
+            </a:r>
+            <a:r>
+              <a:rPr sz="1500" b="1">
+                <a:solidFill>
+                  <a:srgbClr val="282828"/>
+                </a:solidFill>
+                <a:latin typeface="Arial"/>
+              </a:rPr>
+              <a:t>Why R8 said nothing:</a:t>
+            </a:r>
+            <a:r>
+              <a:rPr sz="1500" b="0">
+                <a:solidFill>
+                  <a:srgbClr val="282828"/>
+                </a:solidFill>
+                <a:latin typeface="Arial"/>
+              </a:rPr>
+              <a:t> its telecentric rows were 0.4 % of the merit.</a:t>
             </a:r>
           </a:p>
         </p:txBody>
       </p:sp>
       <p:sp>
         <p:nvSpPr>
-          <p:cNvPr id="6" name="TextBox 5"/>
+          <p:cNvPr id="5" name="TextBox 4"/>
           <p:cNvSpPr txBox="1"/>
           <p:nvPr/>
         </p:nvSpPr>
         <p:spPr>
           <a:xfrm>
-            <a:off x="411480" y="4642866"/>
+            <a:off x="411480" y="4372356"/>
             <a:ext cx="11368735" cy="274320"/>
           </a:xfrm>
           <a:prstGeom prst="rect">
@@ -12020,7 +13788,7 @@
                 </a:solidFill>
                 <a:latin typeface="Arial"/>
               </a:rPr>
-              <a:t>REPORT_dyson5_cprime.md; tma_longslit/runs_*.log.</a:t>
+              <a:t>tls_dyson_chief_tilt.m (wraps the launch; the library untouched), its .mat; the template README.</a:t>
             </a:r>
           </a:p>
         </p:txBody>
@@ -12033,7 +13801,7 @@
 </p:sld>
 </file>
 
-<file path=ppt/slides/slide22.xml><?xml version="1.0" encoding="utf-8"?>
+<file path=ppt/slides/slide24.xml><?xml version="1.0" encoding="utf-8"?>
 <p:sld xmlns:a="http://schemas.openxmlformats.org/drawingml/2006/main" xmlns:p="http://schemas.openxmlformats.org/presentationml/2006/main" xmlns:r="http://schemas.openxmlformats.org/officeDocument/2006/relationships">
   <p:cSld>
     <p:spTree>
@@ -12077,7 +13845,7 @@
                 </a:solidFill>
                 <a:latin typeface="Arial"/>
               </a:rPr>
-              <a:t>The chief-tilt diagnostic</a:t>
+              <a:t>The tolerance ladder by the numbers</a:t>
             </a:r>
           </a:p>
           <a:p>
@@ -12093,7 +13861,7 @@
                 </a:solidFill>
                 <a:latin typeface="Arial"/>
               </a:rPr>
-              <a:t>How the smile's cause was isolated without a solve</a:t>
+              <a:t>One perturbation at a time on the 3k Dyson of record, scored alone and through the R9 join; the compensator is the detector's focus</a:t>
             </a:r>
           </a:p>
         </p:txBody>
@@ -12142,15 +13910,1200 @@
           </a:p>
         </p:txBody>
       </p:sp>
+      <p:graphicFrame>
+        <p:nvGraphicFramePr>
+          <p:cNvPr id="4" name="Table 3"/>
+          <p:cNvGraphicFramePr>
+            <a:graphicFrameLocks noGrp="1"/>
+          </p:cNvGraphicFramePr>
+          <p:nvPr/>
+        </p:nvGraphicFramePr>
+        <p:xfrm>
+          <a:off x="411480" y="1298448"/>
+          <a:ext cx="11368735" cy="3366135"/>
+        </p:xfrm>
+        <a:graphic>
+          <a:graphicData uri="http://schemas.openxmlformats.org/drawingml/2006/table">
+            <a:tbl>
+              <a:tblPr firstRow="1" bandRow="1">
+                <a:tableStyleId>{5C22544A-7EE6-4342-B048-85BDC9FD1C3A}</a:tableStyleId>
+              </a:tblPr>
+              <a:tblGrid>
+                <a:gridCol w="3104034"/>
+                <a:gridCol w="1817116"/>
+                <a:gridCol w="2035048"/>
+                <a:gridCol w="1090676"/>
+                <a:gridCol w="3321861"/>
+              </a:tblGrid>
+              <a:tr h="468630">
+                <a:tc>
+                  <a:txBody>
+                    <a:bodyPr wrap="square"/>
+                    <a:lstStyle/>
+                    <a:p>
+                      <a:r>
+                        <a:rPr sz="1100" b="1">
+                          <a:solidFill>
+                            <a:srgbClr val="FFFFFF"/>
+                          </a:solidFill>
+                          <a:latin typeface="Arial"/>
+                        </a:rPr>
+                        <a:t>perturbation (unit)</a:t>
+                      </a:r>
+                    </a:p>
+                  </a:txBody>
+                  <a:tcPr marL="54864" marR="54864" marT="18288" marB="18288">
+                    <a:solidFill>
+                      <a:srgbClr val="1F4E79"/>
+                    </a:solidFill>
+                  </a:tcPr>
+                </a:tc>
+                <a:tc>
+                  <a:txBody>
+                    <a:bodyPr wrap="square"/>
+                    <a:lstStyle/>
+                    <a:p>
+                      <a:r>
+                        <a:rPr sz="1100" b="1">
+                          <a:solidFill>
+                            <a:srgbClr val="FFFFFF"/>
+                          </a:solidFill>
+                          <a:latin typeface="Arial"/>
+                        </a:rPr>
+                        <a:t>CRF, uncompensated (px)</a:t>
+                      </a:r>
+                    </a:p>
+                  </a:txBody>
+                  <a:tcPr marL="54864" marR="54864" marT="18288" marB="18288">
+                    <a:solidFill>
+                      <a:srgbClr val="1F4E79"/>
+                    </a:solidFill>
+                  </a:tcPr>
+                </a:tc>
+                <a:tc>
+                  <a:txBody>
+                    <a:bodyPr wrap="square"/>
+                    <a:lstStyle/>
+                    <a:p>
+                      <a:r>
+                        <a:rPr sz="1100" b="1">
+                          <a:solidFill>
+                            <a:srgbClr val="FFFFFF"/>
+                          </a:solidFill>
+                          <a:latin typeface="Arial"/>
+                        </a:rPr>
+                        <a:t>CRF after detector refocus</a:t>
+                      </a:r>
+                    </a:p>
+                  </a:txBody>
+                  <a:tcPr marL="54864" marR="54864" marT="18288" marB="18288">
+                    <a:solidFill>
+                      <a:srgbClr val="1F4E79"/>
+                    </a:solidFill>
+                  </a:tcPr>
+                </a:tc>
+                <a:tc>
+                  <a:txBody>
+                    <a:bodyPr wrap="square"/>
+                    <a:lstStyle/>
+                    <a:p>
+                      <a:r>
+                        <a:rPr sz="1100" b="1">
+                          <a:solidFill>
+                            <a:srgbClr val="FFFFFF"/>
+                          </a:solidFill>
+                          <a:latin typeface="Arial"/>
+                        </a:rPr>
+                        <a:t>keystone (px)</a:t>
+                      </a:r>
+                    </a:p>
+                  </a:txBody>
+                  <a:tcPr marL="54864" marR="54864" marT="18288" marB="18288">
+                    <a:solidFill>
+                      <a:srgbClr val="1F4E79"/>
+                    </a:solidFill>
+                  </a:tcPr>
+                </a:tc>
+                <a:tc>
+                  <a:txBody>
+                    <a:bodyPr wrap="square"/>
+                    <a:lstStyle/>
+                    <a:p>
+                      <a:r>
+                        <a:rPr sz="1100" b="1">
+                          <a:solidFill>
+                            <a:srgbClr val="FFFFFF"/>
+                          </a:solidFill>
+                          <a:latin typeface="Arial"/>
+                        </a:rPr>
+                        <a:t>the tolerance for the paper's keystone CBE / for Joe's 0.1 px</a:t>
+                      </a:r>
+                    </a:p>
+                  </a:txBody>
+                  <a:tcPr marL="54864" marR="54864" marT="18288" marB="18288">
+                    <a:solidFill>
+                      <a:srgbClr val="1F4E79"/>
+                    </a:solidFill>
+                  </a:tcPr>
+                </a:tc>
+              </a:tr>
+              <a:tr h="280035">
+                <a:tc>
+                  <a:txBody>
+                    <a:bodyPr wrap="square"/>
+                    <a:lstStyle/>
+                    <a:p>
+                      <a:r>
+                        <a:rPr sz="1100" b="0">
+                          <a:solidFill>
+                            <a:srgbClr val="282828"/>
+                          </a:solidFill>
+                          <a:latin typeface="Arial"/>
+                        </a:rPr>
+                        <a:t>lens decenter along the slit, 10 µm</a:t>
+                      </a:r>
+                    </a:p>
+                  </a:txBody>
+                  <a:tcPr marL="54864" marR="54864" marT="18288" marB="18288">
+                    <a:solidFill>
+                      <a:srgbClr val="FFFFFF"/>
+                    </a:solidFill>
+                  </a:tcPr>
+                </a:tc>
+                <a:tc>
+                  <a:txBody>
+                    <a:bodyPr wrap="square"/>
+                    <a:lstStyle/>
+                    <a:p>
+                      <a:r>
+                        <a:rPr sz="1100" b="0">
+                          <a:solidFill>
+                            <a:srgbClr val="282828"/>
+                          </a:solidFill>
+                          <a:latin typeface="Arial"/>
+                        </a:rPr>
+                        <a:t>–</a:t>
+                      </a:r>
+                    </a:p>
+                  </a:txBody>
+                  <a:tcPr marL="54864" marR="54864" marT="18288" marB="18288">
+                    <a:solidFill>
+                      <a:srgbClr val="FFFFFF"/>
+                    </a:solidFill>
+                  </a:tcPr>
+                </a:tc>
+                <a:tc>
+                  <a:txBody>
+                    <a:bodyPr wrap="square"/>
+                    <a:lstStyle/>
+                    <a:p>
+                      <a:r>
+                        <a:rPr sz="1100" b="0">
+                          <a:solidFill>
+                            <a:srgbClr val="282828"/>
+                          </a:solidFill>
+                          <a:latin typeface="Arial"/>
+                        </a:rPr>
+                        <a:t>–</a:t>
+                      </a:r>
+                    </a:p>
+                  </a:txBody>
+                  <a:tcPr marL="54864" marR="54864" marT="18288" marB="18288">
+                    <a:solidFill>
+                      <a:srgbClr val="FFFFFF"/>
+                    </a:solidFill>
+                  </a:tcPr>
+                </a:tc>
+                <a:tc>
+                  <a:txBody>
+                    <a:bodyPr wrap="square"/>
+                    <a:lstStyle/>
+                    <a:p>
+                      <a:r>
+                        <a:rPr sz="1100" b="0">
+                          <a:solidFill>
+                            <a:srgbClr val="282828"/>
+                          </a:solidFill>
+                          <a:latin typeface="Arial"/>
+                        </a:rPr>
+                        <a:t>0.0099</a:t>
+                      </a:r>
+                    </a:p>
+                  </a:txBody>
+                  <a:tcPr marL="54864" marR="54864" marT="18288" marB="18288">
+                    <a:solidFill>
+                      <a:srgbClr val="FFFFFF"/>
+                    </a:solidFill>
+                  </a:tcPr>
+                </a:tc>
+                <a:tc>
+                  <a:txBody>
+                    <a:bodyPr wrap="square"/>
+                    <a:lstStyle/>
+                    <a:p>
+                      <a:r>
+                        <a:rPr sz="1100" b="0">
+                          <a:solidFill>
+                            <a:srgbClr val="282828"/>
+                          </a:solidFill>
+                          <a:latin typeface="Arial"/>
+                        </a:rPr>
+                        <a:t>26 µm / 47 µm</a:t>
+                      </a:r>
+                    </a:p>
+                  </a:txBody>
+                  <a:tcPr marL="54864" marR="54864" marT="18288" marB="18288">
+                    <a:solidFill>
+                      <a:srgbClr val="FFFFFF"/>
+                    </a:solidFill>
+                  </a:tcPr>
+                </a:tc>
+              </a:tr>
+              <a:tr h="280035">
+                <a:tc>
+                  <a:txBody>
+                    <a:bodyPr wrap="square"/>
+                    <a:lstStyle/>
+                    <a:p>
+                      <a:r>
+                        <a:rPr sz="1100" b="0">
+                          <a:solidFill>
+                            <a:srgbClr val="282828"/>
+                          </a:solidFill>
+                          <a:latin typeface="Arial"/>
+                        </a:rPr>
+                        <a:t>grating decenter along the slit, 10 µm</a:t>
+                      </a:r>
+                    </a:p>
+                  </a:txBody>
+                  <a:tcPr marL="54864" marR="54864" marT="18288" marB="18288">
+                    <a:solidFill>
+                      <a:srgbClr val="ECF1F6"/>
+                    </a:solidFill>
+                  </a:tcPr>
+                </a:tc>
+                <a:tc>
+                  <a:txBody>
+                    <a:bodyPr wrap="square"/>
+                    <a:lstStyle/>
+                    <a:p>
+                      <a:r>
+                        <a:rPr sz="1100" b="0">
+                          <a:solidFill>
+                            <a:srgbClr val="282828"/>
+                          </a:solidFill>
+                          <a:latin typeface="Arial"/>
+                        </a:rPr>
+                        <a:t>–</a:t>
+                      </a:r>
+                    </a:p>
+                  </a:txBody>
+                  <a:tcPr marL="54864" marR="54864" marT="18288" marB="18288">
+                    <a:solidFill>
+                      <a:srgbClr val="ECF1F6"/>
+                    </a:solidFill>
+                  </a:tcPr>
+                </a:tc>
+                <a:tc>
+                  <a:txBody>
+                    <a:bodyPr wrap="square"/>
+                    <a:lstStyle/>
+                    <a:p>
+                      <a:r>
+                        <a:rPr sz="1100" b="0">
+                          <a:solidFill>
+                            <a:srgbClr val="282828"/>
+                          </a:solidFill>
+                          <a:latin typeface="Arial"/>
+                        </a:rPr>
+                        <a:t>–</a:t>
+                      </a:r>
+                    </a:p>
+                  </a:txBody>
+                  <a:tcPr marL="54864" marR="54864" marT="18288" marB="18288">
+                    <a:solidFill>
+                      <a:srgbClr val="ECF1F6"/>
+                    </a:solidFill>
+                  </a:tcPr>
+                </a:tc>
+                <a:tc>
+                  <a:txBody>
+                    <a:bodyPr wrap="square"/>
+                    <a:lstStyle/>
+                    <a:p>
+                      <a:r>
+                        <a:rPr sz="1100" b="0">
+                          <a:solidFill>
+                            <a:srgbClr val="282828"/>
+                          </a:solidFill>
+                          <a:latin typeface="Arial"/>
+                        </a:rPr>
+                        <a:t>0.0099</a:t>
+                      </a:r>
+                    </a:p>
+                  </a:txBody>
+                  <a:tcPr marL="54864" marR="54864" marT="18288" marB="18288">
+                    <a:solidFill>
+                      <a:srgbClr val="ECF1F6"/>
+                    </a:solidFill>
+                  </a:tcPr>
+                </a:tc>
+                <a:tc>
+                  <a:txBody>
+                    <a:bodyPr wrap="square"/>
+                    <a:lstStyle/>
+                    <a:p>
+                      <a:r>
+                        <a:rPr sz="1100" b="0">
+                          <a:solidFill>
+                            <a:srgbClr val="282828"/>
+                          </a:solidFill>
+                          <a:latin typeface="Arial"/>
+                        </a:rPr>
+                        <a:t>26 µm / 47 µm</a:t>
+                      </a:r>
+                    </a:p>
+                  </a:txBody>
+                  <a:tcPr marL="54864" marR="54864" marT="18288" marB="18288">
+                    <a:solidFill>
+                      <a:srgbClr val="ECF1F6"/>
+                    </a:solidFill>
+                  </a:tcPr>
+                </a:tc>
+              </a:tr>
+              <a:tr h="280035">
+                <a:tc>
+                  <a:txBody>
+                    <a:bodyPr wrap="square"/>
+                    <a:lstStyle/>
+                    <a:p>
+                      <a:r>
+                        <a:rPr sz="1100" b="0">
+                          <a:solidFill>
+                            <a:srgbClr val="282828"/>
+                          </a:solidFill>
+                          <a:latin typeface="Arial"/>
+                        </a:rPr>
+                        <a:t>grating tilt about the slit, 10 µrad</a:t>
+                      </a:r>
+                    </a:p>
+                  </a:txBody>
+                  <a:tcPr marL="54864" marR="54864" marT="18288" marB="18288">
+                    <a:solidFill>
+                      <a:srgbClr val="FFFFFF"/>
+                    </a:solidFill>
+                  </a:tcPr>
+                </a:tc>
+                <a:tc>
+                  <a:txBody>
+                    <a:bodyPr wrap="square"/>
+                    <a:lstStyle/>
+                    <a:p>
+                      <a:r>
+                        <a:rPr sz="1100" b="0">
+                          <a:solidFill>
+                            <a:srgbClr val="282828"/>
+                          </a:solidFill>
+                          <a:latin typeface="Arial"/>
+                        </a:rPr>
+                        <a:t>–</a:t>
+                      </a:r>
+                    </a:p>
+                  </a:txBody>
+                  <a:tcPr marL="54864" marR="54864" marT="18288" marB="18288">
+                    <a:solidFill>
+                      <a:srgbClr val="FFFFFF"/>
+                    </a:solidFill>
+                  </a:tcPr>
+                </a:tc>
+                <a:tc>
+                  <a:txBody>
+                    <a:bodyPr wrap="square"/>
+                    <a:lstStyle/>
+                    <a:p>
+                      <a:r>
+                        <a:rPr sz="1100" b="0">
+                          <a:solidFill>
+                            <a:srgbClr val="282828"/>
+                          </a:solidFill>
+                          <a:latin typeface="Arial"/>
+                        </a:rPr>
+                        <a:t>–</a:t>
+                      </a:r>
+                    </a:p>
+                  </a:txBody>
+                  <a:tcPr marL="54864" marR="54864" marT="18288" marB="18288">
+                    <a:solidFill>
+                      <a:srgbClr val="FFFFFF"/>
+                    </a:solidFill>
+                  </a:tcPr>
+                </a:tc>
+                <a:tc>
+                  <a:txBody>
+                    <a:bodyPr wrap="square"/>
+                    <a:lstStyle/>
+                    <a:p>
+                      <a:r>
+                        <a:rPr sz="1100" b="0">
+                          <a:solidFill>
+                            <a:srgbClr val="282828"/>
+                          </a:solidFill>
+                          <a:latin typeface="Arial"/>
+                        </a:rPr>
+                        <a:t>0.0074</a:t>
+                      </a:r>
+                    </a:p>
+                  </a:txBody>
+                  <a:tcPr marL="54864" marR="54864" marT="18288" marB="18288">
+                    <a:solidFill>
+                      <a:srgbClr val="FFFFFF"/>
+                    </a:solidFill>
+                  </a:tcPr>
+                </a:tc>
+                <a:tc>
+                  <a:txBody>
+                    <a:bodyPr wrap="square"/>
+                    <a:lstStyle/>
+                    <a:p>
+                      <a:r>
+                        <a:rPr sz="1100" b="0">
+                          <a:solidFill>
+                            <a:srgbClr val="282828"/>
+                          </a:solidFill>
+                          <a:latin typeface="Arial"/>
+                        </a:rPr>
+                        <a:t>35 µrad / 64 µrad</a:t>
+                      </a:r>
+                    </a:p>
+                  </a:txBody>
+                  <a:tcPr marL="54864" marR="54864" marT="18288" marB="18288">
+                    <a:solidFill>
+                      <a:srgbClr val="FFFFFF"/>
+                    </a:solidFill>
+                  </a:tcPr>
+                </a:tc>
+              </a:tr>
+              <a:tr h="280035">
+                <a:tc>
+                  <a:txBody>
+                    <a:bodyPr wrap="square"/>
+                    <a:lstStyle/>
+                    <a:p>
+                      <a:r>
+                        <a:rPr sz="1100" b="0">
+                          <a:solidFill>
+                            <a:srgbClr val="282828"/>
+                          </a:solidFill>
+                          <a:latin typeface="Arial"/>
+                        </a:rPr>
+                        <a:t>grating clocking, 10 µrad</a:t>
+                      </a:r>
+                    </a:p>
+                  </a:txBody>
+                  <a:tcPr marL="54864" marR="54864" marT="18288" marB="18288">
+                    <a:solidFill>
+                      <a:srgbClr val="ECF1F6"/>
+                    </a:solidFill>
+                  </a:tcPr>
+                </a:tc>
+                <a:tc>
+                  <a:txBody>
+                    <a:bodyPr wrap="square"/>
+                    <a:lstStyle/>
+                    <a:p>
+                      <a:r>
+                        <a:rPr sz="1100" b="0">
+                          <a:solidFill>
+                            <a:srgbClr val="282828"/>
+                          </a:solidFill>
+                          <a:latin typeface="Arial"/>
+                        </a:rPr>
+                        <a:t>–</a:t>
+                      </a:r>
+                    </a:p>
+                  </a:txBody>
+                  <a:tcPr marL="54864" marR="54864" marT="18288" marB="18288">
+                    <a:solidFill>
+                      <a:srgbClr val="ECF1F6"/>
+                    </a:solidFill>
+                  </a:tcPr>
+                </a:tc>
+                <a:tc>
+                  <a:txBody>
+                    <a:bodyPr wrap="square"/>
+                    <a:lstStyle/>
+                    <a:p>
+                      <a:r>
+                        <a:rPr sz="1100" b="0">
+                          <a:solidFill>
+                            <a:srgbClr val="282828"/>
+                          </a:solidFill>
+                          <a:latin typeface="Arial"/>
+                        </a:rPr>
+                        <a:t>–</a:t>
+                      </a:r>
+                    </a:p>
+                  </a:txBody>
+                  <a:tcPr marL="54864" marR="54864" marT="18288" marB="18288">
+                    <a:solidFill>
+                      <a:srgbClr val="ECF1F6"/>
+                    </a:solidFill>
+                  </a:tcPr>
+                </a:tc>
+                <a:tc>
+                  <a:txBody>
+                    <a:bodyPr wrap="square"/>
+                    <a:lstStyle/>
+                    <a:p>
+                      <a:r>
+                        <a:rPr sz="1100" b="0">
+                          <a:solidFill>
+                            <a:srgbClr val="282828"/>
+                          </a:solidFill>
+                          <a:latin typeface="Arial"/>
+                        </a:rPr>
+                        <a:t>0.0029</a:t>
+                      </a:r>
+                    </a:p>
+                  </a:txBody>
+                  <a:tcPr marL="54864" marR="54864" marT="18288" marB="18288">
+                    <a:solidFill>
+                      <a:srgbClr val="ECF1F6"/>
+                    </a:solidFill>
+                  </a:tcPr>
+                </a:tc>
+                <a:tc>
+                  <a:txBody>
+                    <a:bodyPr wrap="square"/>
+                    <a:lstStyle/>
+                    <a:p>
+                      <a:r>
+                        <a:rPr sz="1100" b="0">
+                          <a:solidFill>
+                            <a:srgbClr val="282828"/>
+                          </a:solidFill>
+                          <a:latin typeface="Arial"/>
+                        </a:rPr>
+                        <a:t>88 µrad / 162 µrad</a:t>
+                      </a:r>
+                    </a:p>
+                  </a:txBody>
+                  <a:tcPr marL="54864" marR="54864" marT="18288" marB="18288">
+                    <a:solidFill>
+                      <a:srgbClr val="ECF1F6"/>
+                    </a:solidFill>
+                  </a:tcPr>
+                </a:tc>
+              </a:tr>
+              <a:tr h="280035">
+                <a:tc>
+                  <a:txBody>
+                    <a:bodyPr wrap="square"/>
+                    <a:lstStyle/>
+                    <a:p>
+                      <a:r>
+                        <a:rPr sz="1100" b="0">
+                          <a:solidFill>
+                            <a:srgbClr val="282828"/>
+                          </a:solidFill>
+                          <a:latin typeface="Arial"/>
+                        </a:rPr>
+                        <a:t>grating radius dR/R 10⁻⁴</a:t>
+                      </a:r>
+                    </a:p>
+                  </a:txBody>
+                  <a:tcPr marL="54864" marR="54864" marT="18288" marB="18288">
+                    <a:solidFill>
+                      <a:srgbClr val="FFFFFF"/>
+                    </a:solidFill>
+                  </a:tcPr>
+                </a:tc>
+                <a:tc>
+                  <a:txBody>
+                    <a:bodyPr wrap="square"/>
+                    <a:lstStyle/>
+                    <a:p>
+                      <a:r>
+                        <a:rPr sz="1100" b="0">
+                          <a:solidFill>
+                            <a:srgbClr val="282828"/>
+                          </a:solidFill>
+                          <a:latin typeface="Arial"/>
+                        </a:rPr>
+                        <a:t>+1.93</a:t>
+                      </a:r>
+                    </a:p>
+                  </a:txBody>
+                  <a:tcPr marL="54864" marR="54864" marT="18288" marB="18288">
+                    <a:solidFill>
+                      <a:srgbClr val="FFFFFF"/>
+                    </a:solidFill>
+                  </a:tcPr>
+                </a:tc>
+                <a:tc>
+                  <a:txBody>
+                    <a:bodyPr wrap="square"/>
+                    <a:lstStyle/>
+                    <a:p>
+                      <a:r>
+                        <a:rPr sz="1100" b="0">
+                          <a:solidFill>
+                            <a:srgbClr val="282828"/>
+                          </a:solidFill>
+                          <a:latin typeface="Arial"/>
+                        </a:rPr>
+                        <a:t>+0.006</a:t>
+                      </a:r>
+                    </a:p>
+                  </a:txBody>
+                  <a:tcPr marL="54864" marR="54864" marT="18288" marB="18288">
+                    <a:solidFill>
+                      <a:srgbClr val="FFFFFF"/>
+                    </a:solidFill>
+                  </a:tcPr>
+                </a:tc>
+                <a:tc>
+                  <a:txBody>
+                    <a:bodyPr wrap="square"/>
+                    <a:lstStyle/>
+                    <a:p>
+                      <a:r>
+                        <a:rPr sz="1100" b="0">
+                          <a:solidFill>
+                            <a:srgbClr val="282828"/>
+                          </a:solidFill>
+                          <a:latin typeface="Arial"/>
+                        </a:rPr>
+                        <a:t>–</a:t>
+                      </a:r>
+                    </a:p>
+                  </a:txBody>
+                  <a:tcPr marL="54864" marR="54864" marT="18288" marB="18288">
+                    <a:solidFill>
+                      <a:srgbClr val="FFFFFF"/>
+                    </a:solidFill>
+                  </a:tcPr>
+                </a:tc>
+                <a:tc>
+                  <a:txBody>
+                    <a:bodyPr wrap="square"/>
+                    <a:lstStyle/>
+                    <a:p>
+                      <a:r>
+                        <a:rPr sz="1100" b="0">
+                          <a:solidFill>
+                            <a:srgbClr val="282828"/>
+                          </a:solidFill>
+                          <a:latin typeface="Arial"/>
+                        </a:rPr>
+                        <a:t>focus-compensated</a:t>
+                      </a:r>
+                    </a:p>
+                  </a:txBody>
+                  <a:tcPr marL="54864" marR="54864" marT="18288" marB="18288">
+                    <a:solidFill>
+                      <a:srgbClr val="FFFFFF"/>
+                    </a:solidFill>
+                  </a:tcPr>
+                </a:tc>
+              </a:tr>
+              <a:tr h="468630">
+                <a:tc>
+                  <a:txBody>
+                    <a:bodyPr wrap="square"/>
+                    <a:lstStyle/>
+                    <a:p>
+                      <a:r>
+                        <a:rPr sz="1100" b="0">
+                          <a:solidFill>
+                            <a:srgbClr val="282828"/>
+                          </a:solidFill>
+                          <a:latin typeface="Arial"/>
+                        </a:rPr>
+                        <a:t>lens radius, thickness; air space; slit, detector defocus</a:t>
+                      </a:r>
+                    </a:p>
+                  </a:txBody>
+                  <a:tcPr marL="54864" marR="54864" marT="18288" marB="18288">
+                    <a:solidFill>
+                      <a:srgbClr val="ECF1F6"/>
+                    </a:solidFill>
+                  </a:tcPr>
+                </a:tc>
+                <a:tc>
+                  <a:txBody>
+                    <a:bodyPr wrap="square"/>
+                    <a:lstStyle/>
+                    <a:p>
+                      <a:r>
+                        <a:rPr sz="1100" b="0">
+                          <a:solidFill>
+                            <a:srgbClr val="282828"/>
+                          </a:solidFill>
+                          <a:latin typeface="Arial"/>
+                        </a:rPr>
+                        <a:t>focus terms</a:t>
+                      </a:r>
+                    </a:p>
+                  </a:txBody>
+                  <a:tcPr marL="54864" marR="54864" marT="18288" marB="18288">
+                    <a:solidFill>
+                      <a:srgbClr val="ECF1F6"/>
+                    </a:solidFill>
+                  </a:tcPr>
+                </a:tc>
+                <a:tc>
+                  <a:txBody>
+                    <a:bodyPr wrap="square"/>
+                    <a:lstStyle/>
+                    <a:p>
+                      <a:r>
+                        <a:rPr sz="1100" b="0">
+                          <a:solidFill>
+                            <a:srgbClr val="282828"/>
+                          </a:solidFill>
+                          <a:latin typeface="Arial"/>
+                        </a:rPr>
+                        <a:t>≤ 0.006</a:t>
+                      </a:r>
+                    </a:p>
+                  </a:txBody>
+                  <a:tcPr marL="54864" marR="54864" marT="18288" marB="18288">
+                    <a:solidFill>
+                      <a:srgbClr val="ECF1F6"/>
+                    </a:solidFill>
+                  </a:tcPr>
+                </a:tc>
+                <a:tc>
+                  <a:txBody>
+                    <a:bodyPr wrap="square"/>
+                    <a:lstStyle/>
+                    <a:p>
+                      <a:r>
+                        <a:rPr sz="1100" b="0">
+                          <a:solidFill>
+                            <a:srgbClr val="282828"/>
+                          </a:solidFill>
+                          <a:latin typeface="Arial"/>
+                        </a:rPr>
+                        <a:t>–</a:t>
+                      </a:r>
+                    </a:p>
+                  </a:txBody>
+                  <a:tcPr marL="54864" marR="54864" marT="18288" marB="18288">
+                    <a:solidFill>
+                      <a:srgbClr val="ECF1F6"/>
+                    </a:solidFill>
+                  </a:tcPr>
+                </a:tc>
+                <a:tc>
+                  <a:txBody>
+                    <a:bodyPr wrap="square"/>
+                    <a:lstStyle/>
+                    <a:p>
+                      <a:r>
+                        <a:rPr sz="1100" b="0">
+                          <a:solidFill>
+                            <a:srgbClr val="282828"/>
+                          </a:solidFill>
+                          <a:latin typeface="Arial"/>
+                        </a:rPr>
+                        <a:t>focus-compensated</a:t>
+                      </a:r>
+                    </a:p>
+                  </a:txBody>
+                  <a:tcPr marL="54864" marR="54864" marT="18288" marB="18288">
+                    <a:solidFill>
+                      <a:srgbClr val="ECF1F6"/>
+                    </a:solidFill>
+                  </a:tcPr>
+                </a:tc>
+              </a:tr>
+              <a:tr h="280035">
+                <a:tc>
+                  <a:txBody>
+                    <a:bodyPr wrap="square"/>
+                    <a:lstStyle/>
+                    <a:p>
+                      <a:r>
+                        <a:rPr sz="1100" b="0">
+                          <a:solidFill>
+                            <a:srgbClr val="282828"/>
+                          </a:solidFill>
+                          <a:latin typeface="Arial"/>
+                        </a:rPr>
+                        <a:t>CaF</a:t>
+                      </a:r>
+                      <a:r>
+                        <a:rPr sz="1100" b="0" baseline="-25000">
+                          <a:solidFill>
+                            <a:srgbClr val="282828"/>
+                          </a:solidFill>
+                          <a:latin typeface="Arial"/>
+                        </a:rPr>
+                        <a:t>2</a:t>
+                      </a:r>
+                      <a:r>
+                        <a:rPr sz="1100" b="0">
+                          <a:solidFill>
+                            <a:srgbClr val="282828"/>
+                          </a:solidFill>
+                          <a:latin typeface="Arial"/>
+                        </a:rPr>
+                        <a:t> index, 10⁻⁵ (1 K)</a:t>
+                      </a:r>
+                    </a:p>
+                  </a:txBody>
+                  <a:tcPr marL="54864" marR="54864" marT="18288" marB="18288">
+                    <a:solidFill>
+                      <a:srgbClr val="FFFFFF"/>
+                    </a:solidFill>
+                  </a:tcPr>
+                </a:tc>
+                <a:tc>
+                  <a:txBody>
+                    <a:bodyPr wrap="square"/>
+                    <a:lstStyle/>
+                    <a:p>
+                      <a:r>
+                        <a:rPr sz="1100" b="0">
+                          <a:solidFill>
+                            <a:srgbClr val="282828"/>
+                          </a:solidFill>
+                          <a:latin typeface="Arial"/>
+                        </a:rPr>
+                        <a:t>+0.0014</a:t>
+                      </a:r>
+                    </a:p>
+                  </a:txBody>
+                  <a:tcPr marL="54864" marR="54864" marT="18288" marB="18288">
+                    <a:solidFill>
+                      <a:srgbClr val="FFFFFF"/>
+                    </a:solidFill>
+                  </a:tcPr>
+                </a:tc>
+                <a:tc>
+                  <a:txBody>
+                    <a:bodyPr wrap="square"/>
+                    <a:lstStyle/>
+                    <a:p>
+                      <a:r>
+                        <a:rPr sz="1100" b="0">
+                          <a:solidFill>
+                            <a:srgbClr val="282828"/>
+                          </a:solidFill>
+                          <a:latin typeface="Arial"/>
+                        </a:rPr>
+                        <a:t>–</a:t>
+                      </a:r>
+                    </a:p>
+                  </a:txBody>
+                  <a:tcPr marL="54864" marR="54864" marT="18288" marB="18288">
+                    <a:solidFill>
+                      <a:srgbClr val="FFFFFF"/>
+                    </a:solidFill>
+                  </a:tcPr>
+                </a:tc>
+                <a:tc>
+                  <a:txBody>
+                    <a:bodyPr wrap="square"/>
+                    <a:lstStyle/>
+                    <a:p>
+                      <a:r>
+                        <a:rPr sz="1100" b="0">
+                          <a:solidFill>
+                            <a:srgbClr val="282828"/>
+                          </a:solidFill>
+                          <a:latin typeface="Arial"/>
+                        </a:rPr>
+                        <a:t>–</a:t>
+                      </a:r>
+                    </a:p>
+                  </a:txBody>
+                  <a:tcPr marL="54864" marR="54864" marT="18288" marB="18288">
+                    <a:solidFill>
+                      <a:srgbClr val="FFFFFF"/>
+                    </a:solidFill>
+                  </a:tcPr>
+                </a:tc>
+                <a:tc>
+                  <a:txBody>
+                    <a:bodyPr wrap="square"/>
+                    <a:lstStyle/>
+                    <a:p>
+                      <a:r>
+                        <a:rPr sz="1100" b="0">
+                          <a:solidFill>
+                            <a:srgbClr val="282828"/>
+                          </a:solidFill>
+                          <a:latin typeface="Arial"/>
+                        </a:rPr>
+                        <a:t>negligible</a:t>
+                      </a:r>
+                    </a:p>
+                  </a:txBody>
+                  <a:tcPr marL="54864" marR="54864" marT="18288" marB="18288">
+                    <a:solidFill>
+                      <a:srgbClr val="FFFFFF"/>
+                    </a:solidFill>
+                  </a:tcPr>
+                </a:tc>
+              </a:tr>
+              <a:tr h="280035">
+                <a:tc>
+                  <a:txBody>
+                    <a:bodyPr wrap="square"/>
+                    <a:lstStyle/>
+                    <a:p>
+                      <a:r>
+                        <a:rPr sz="1100" b="0">
+                          <a:solidFill>
+                            <a:srgbClr val="282828"/>
+                          </a:solidFill>
+                          <a:latin typeface="Arial"/>
+                        </a:rPr>
+                        <a:t>CaF</a:t>
+                      </a:r>
+                      <a:r>
+                        <a:rPr sz="1100" b="0" baseline="-25000">
+                          <a:solidFill>
+                            <a:srgbClr val="282828"/>
+                          </a:solidFill>
+                          <a:latin typeface="Arial"/>
+                        </a:rPr>
+                        <a:t>2</a:t>
+                      </a:r>
+                      <a:r>
+                        <a:rPr sz="1100" b="0">
+                          <a:solidFill>
+                            <a:srgbClr val="282828"/>
+                          </a:solidFill>
+                          <a:latin typeface="Arial"/>
+                        </a:rPr>
+                        <a:t> radius + thickness per K (CTE)</a:t>
+                      </a:r>
+                    </a:p>
+                  </a:txBody>
+                  <a:tcPr marL="54864" marR="54864" marT="18288" marB="18288">
+                    <a:solidFill>
+                      <a:srgbClr val="ECF1F6"/>
+                    </a:solidFill>
+                  </a:tcPr>
+                </a:tc>
+                <a:tc>
+                  <a:txBody>
+                    <a:bodyPr wrap="square"/>
+                    <a:lstStyle/>
+                    <a:p>
+                      <a:r>
+                        <a:rPr sz="1100" b="0">
+                          <a:solidFill>
+                            <a:srgbClr val="282828"/>
+                          </a:solidFill>
+                          <a:latin typeface="Arial"/>
+                        </a:rPr>
+                        <a:t>+0.050 − 0.051</a:t>
+                      </a:r>
+                    </a:p>
+                  </a:txBody>
+                  <a:tcPr marL="54864" marR="54864" marT="18288" marB="18288">
+                    <a:solidFill>
+                      <a:srgbClr val="ECF1F6"/>
+                    </a:solidFill>
+                  </a:tcPr>
+                </a:tc>
+                <a:tc>
+                  <a:txBody>
+                    <a:bodyPr wrap="square"/>
+                    <a:lstStyle/>
+                    <a:p>
+                      <a:r>
+                        <a:rPr sz="1100" b="0">
+                          <a:solidFill>
+                            <a:srgbClr val="282828"/>
+                          </a:solidFill>
+                          <a:latin typeface="Arial"/>
+                        </a:rPr>
+                        <a:t>–</a:t>
+                      </a:r>
+                    </a:p>
+                  </a:txBody>
+                  <a:tcPr marL="54864" marR="54864" marT="18288" marB="18288">
+                    <a:solidFill>
+                      <a:srgbClr val="ECF1F6"/>
+                    </a:solidFill>
+                  </a:tcPr>
+                </a:tc>
+                <a:tc>
+                  <a:txBody>
+                    <a:bodyPr wrap="square"/>
+                    <a:lstStyle/>
+                    <a:p>
+                      <a:r>
+                        <a:rPr sz="1100" b="0">
+                          <a:solidFill>
+                            <a:srgbClr val="282828"/>
+                          </a:solidFill>
+                          <a:latin typeface="Arial"/>
+                        </a:rPr>
+                        <a:t>–</a:t>
+                      </a:r>
+                    </a:p>
+                  </a:txBody>
+                  <a:tcPr marL="54864" marR="54864" marT="18288" marB="18288">
+                    <a:solidFill>
+                      <a:srgbClr val="ECF1F6"/>
+                    </a:solidFill>
+                  </a:tcPr>
+                </a:tc>
+                <a:tc>
+                  <a:txBody>
+                    <a:bodyPr wrap="square"/>
+                    <a:lstStyle/>
+                    <a:p>
+                      <a:r>
+                        <a:rPr sz="1100" b="0">
+                          <a:solidFill>
+                            <a:srgbClr val="282828"/>
+                          </a:solidFill>
+                          <a:latin typeface="Arial"/>
+                        </a:rPr>
+                        <a:t>cancel</a:t>
+                      </a:r>
+                    </a:p>
+                  </a:txBody>
+                  <a:tcPr marL="54864" marR="54864" marT="18288" marB="18288">
+                    <a:solidFill>
+                      <a:srgbClr val="ECF1F6"/>
+                    </a:solidFill>
+                  </a:tcPr>
+                </a:tc>
+              </a:tr>
+              <a:tr h="468630">
+                <a:tc>
+                  <a:txBody>
+                    <a:bodyPr wrap="square"/>
+                    <a:lstStyle/>
+                    <a:p>
+                      <a:r>
+                        <a:rPr sz="1100" b="0">
+                          <a:solidFill>
+                            <a:srgbClr val="282828"/>
+                          </a:solidFill>
+                          <a:latin typeface="Arial"/>
+                        </a:rPr>
+                        <a:t>aluminum air space per K; N-BK7 grating radius per K</a:t>
+                      </a:r>
+                    </a:p>
+                  </a:txBody>
+                  <a:tcPr marL="54864" marR="54864" marT="18288" marB="18288">
+                    <a:solidFill>
+                      <a:srgbClr val="FFFFFF"/>
+                    </a:solidFill>
+                  </a:tcPr>
+                </a:tc>
+                <a:tc>
+                  <a:txBody>
+                    <a:bodyPr wrap="square"/>
+                    <a:lstStyle/>
+                    <a:p>
+                      <a:r>
+                        <a:rPr sz="1100" b="0">
+                          <a:solidFill>
+                            <a:srgbClr val="282828"/>
+                          </a:solidFill>
+                          <a:latin typeface="Arial"/>
+                        </a:rPr>
+                        <a:t>−0.22; +0.14</a:t>
+                      </a:r>
+                    </a:p>
+                  </a:txBody>
+                  <a:tcPr marL="54864" marR="54864" marT="18288" marB="18288">
+                    <a:solidFill>
+                      <a:srgbClr val="FFFFFF"/>
+                    </a:solidFill>
+                  </a:tcPr>
+                </a:tc>
+                <a:tc>
+                  <a:txBody>
+                    <a:bodyPr wrap="square"/>
+                    <a:lstStyle/>
+                    <a:p>
+                      <a:r>
+                        <a:rPr sz="1100" b="0">
+                          <a:solidFill>
+                            <a:srgbClr val="282828"/>
+                          </a:solidFill>
+                          <a:latin typeface="Arial"/>
+                        </a:rPr>
+                        <a:t>focus terms</a:t>
+                      </a:r>
+                    </a:p>
+                  </a:txBody>
+                  <a:tcPr marL="54864" marR="54864" marT="18288" marB="18288">
+                    <a:solidFill>
+                      <a:srgbClr val="FFFFFF"/>
+                    </a:solidFill>
+                  </a:tcPr>
+                </a:tc>
+                <a:tc>
+                  <a:txBody>
+                    <a:bodyPr wrap="square"/>
+                    <a:lstStyle/>
+                    <a:p>
+                      <a:r>
+                        <a:rPr sz="1100" b="0">
+                          <a:solidFill>
+                            <a:srgbClr val="282828"/>
+                          </a:solidFill>
+                          <a:latin typeface="Arial"/>
+                        </a:rPr>
+                        <a:t>–</a:t>
+                      </a:r>
+                    </a:p>
+                  </a:txBody>
+                  <a:tcPr marL="54864" marR="54864" marT="18288" marB="18288">
+                    <a:solidFill>
+                      <a:srgbClr val="FFFFFF"/>
+                    </a:solidFill>
+                  </a:tcPr>
+                </a:tc>
+                <a:tc>
+                  <a:txBody>
+                    <a:bodyPr wrap="square"/>
+                    <a:lstStyle/>
+                    <a:p>
+                      <a:r>
+                        <a:rPr sz="1100" b="0">
+                          <a:solidFill>
+                            <a:srgbClr val="282828"/>
+                          </a:solidFill>
+                          <a:latin typeface="Arial"/>
+                        </a:rPr>
+                        <a:t>refocus-compensated</a:t>
+                      </a:r>
+                    </a:p>
+                  </a:txBody>
+                  <a:tcPr marL="54864" marR="54864" marT="18288" marB="18288">
+                    <a:solidFill>
+                      <a:srgbClr val="FFFFFF"/>
+                    </a:solidFill>
+                  </a:tcPr>
+                </a:tc>
+              </a:tr>
+            </a:tbl>
+          </a:graphicData>
+        </a:graphic>
+      </p:graphicFrame>
       <p:sp>
         <p:nvSpPr>
-          <p:cNvPr id="4" name="TextBox 3"/>
+          <p:cNvPr id="5" name="TextBox 4"/>
           <p:cNvSpPr txBox="1"/>
           <p:nvPr/>
         </p:nvSpPr>
         <p:spPr>
           <a:xfrm>
-            <a:off x="411480" y="1298448"/>
+            <a:off x="411480" y="4810887"/>
             <a:ext cx="11368735" cy="274320"/>
           </a:xfrm>
           <a:prstGeom prst="rect">
@@ -12185,7 +15138,7 @@
                 </a:solidFill>
                 <a:latin typeface="Arial"/>
               </a:rPr>
-              <a:t>The hypothesis:</a:t>
+              <a:t>Keystone is lateral color: no compensator touches it.</a:t>
             </a:r>
             <a:r>
               <a:rPr sz="1500" b="0">
@@ -12194,7 +15147,7 @@
                 </a:solidFill>
                 <a:latin typeface="Arial"/>
               </a:rPr>
-              <a:t> the telescope's chief rays reach the slit up to 0.51 mrad from its normal in the dispersion direction, even in field and roughly quadratic — smile's shape — and a Dyson's spectral centroid moves with the input chief angle.</a:t>
+              <a:t>  Smile is loose everywhere (≥ 300 µm or µrad).  Linearity at 2×: keystone vs decenter 1.10, CRF vs grating radius 1.03, SRF 2.6 (quadratic, and at the floor).</a:t>
             </a:r>
           </a:p>
           <a:p>
@@ -12219,7 +15172,7 @@
                 </a:solidFill>
                 <a:latin typeface="Arial"/>
               </a:rPr>
-              <a:t>Why it could not be tested by hand on the joined deck:</a:t>
+              <a:t>The 1.5k Dyson</a:t>
             </a:r>
             <a:r>
               <a:rPr sz="1500" b="0">
@@ -12228,15 +15181,17 @@
                 </a:solidFill>
                 <a:latin typeface="Arial"/>
               </a:rPr>
-              <a:t> each field has two sky angles but needs three conditions (land on the slit line, two chief-angle components), and the join re-aims every launch through the grating, so a telecentric error appears there as a pupil shift.</a:t>
-            </a:r>
-          </a:p>
-          <a:p>
-            <a:pPr>
-              <a:spcAft>
-                <a:spcPts val="600"/>
-              </a:spcAft>
-            </a:pPr>
+              <a:t> has the same pattern at twice the keystone sensitivity (1.82 × 10⁻³ px per µm: 13 µm for the paper's CBE, 25 µm for Joe).  </a:t>
+            </a:r>
+            <a:r>
+              <a:rPr sz="1500" b="1">
+                <a:solidFill>
+                  <a:srgbClr val="282828"/>
+                </a:solidFill>
+                <a:latin typeface="Arial"/>
+              </a:rPr>
+              <a:t>Option B</a:t>
+            </a:r>
             <a:r>
               <a:rPr sz="1500" b="0">
                 <a:solidFill>
@@ -12244,72 +15199,20 @@
                 </a:solidFill>
                 <a:latin typeface="Arial"/>
               </a:rPr>
-              <a:t>•  </a:t>
-            </a:r>
-            <a:r>
-              <a:rPr sz="1500" b="1">
-                <a:solidFill>
-                  <a:srgbClr val="282828"/>
-                </a:solidFill>
-                <a:latin typeface="Arial"/>
-              </a:rPr>
-              <a:t>The test:</a:t>
-            </a:r>
-            <a:r>
-              <a:rPr sz="1500" b="0">
-                <a:solidFill>
-                  <a:srgbClr val="282828"/>
-                </a:solidFill>
-                <a:latin typeface="Arial"/>
-              </a:rPr>
-              <a:t> the spectrometer alone, each slit point's input chief tilted by the telescope's measured angles, scored as the record is (slide 12's left table).  Smile 0.0050 → 0.0049; keystone moves, so the hook is live.  The hypothesis is dead; the chief − centroid offset model (right table) predicts all five rungs.</a:t>
-            </a:r>
-          </a:p>
-          <a:p>
-            <a:pPr>
-              <a:spcAft>
-                <a:spcPts val="600"/>
-              </a:spcAft>
-            </a:pPr>
-            <a:r>
-              <a:rPr sz="1500" b="0">
-                <a:solidFill>
-                  <a:srgbClr val="282828"/>
-                </a:solidFill>
-                <a:latin typeface="Arial"/>
-              </a:rPr>
-              <a:t>•  </a:t>
-            </a:r>
-            <a:r>
-              <a:rPr sz="1500" b="1">
-                <a:solidFill>
-                  <a:srgbClr val="282828"/>
-                </a:solidFill>
-                <a:latin typeface="Arial"/>
-              </a:rPr>
-              <a:t>Why R8 said nothing:</a:t>
-            </a:r>
-            <a:r>
-              <a:rPr sz="1500" b="0">
-                <a:solidFill>
-                  <a:srgbClr val="282828"/>
-                </a:solidFill>
-                <a:latin typeface="Arial"/>
-              </a:rPr>
-              <a:t> its telecentric rows were 0.4 % of the merit.</a:t>
+              <a:t> raises the keystone sensitivities 6–45 % (clocking most): 25 µm, 33 µrad, 64 µrad.</a:t>
             </a:r>
           </a:p>
         </p:txBody>
       </p:sp>
       <p:sp>
         <p:nvSpPr>
-          <p:cNvPr id="5" name="TextBox 4"/>
+          <p:cNvPr id="6" name="TextBox 5"/>
           <p:cNvSpPr txBox="1"/>
           <p:nvPr/>
         </p:nvSpPr>
         <p:spPr>
           <a:xfrm>
-            <a:off x="411480" y="4372356"/>
+            <a:off x="411480" y="6118479"/>
             <a:ext cx="11368735" cy="274320"/>
           </a:xfrm>
           <a:prstGeom prst="rect">
@@ -12335,7 +15238,7 @@
                 </a:solidFill>
                 <a:latin typeface="Arial"/>
               </a:rPr>
-              <a:t>tls_dyson_chief_tilt.m (wraps the launch; the library untouched), its .mat; the template README.</a:t>
+              <a:t>REPORT_dyson5_spec.md; 21 rows; the paper's Option A as-built keystone 5.7 % of a pixel = 1.03 µm (Table 2).  Compensator residuals for focus alone and focus + x/y are both in the report (x/y adds nothing: the metrics are relative).</a:t>
             </a:r>
           </a:p>
         </p:txBody>
@@ -12348,7 +15251,7 @@
 </p:sld>
 </file>
 
-<file path=ppt/slides/slide23.xml><?xml version="1.0" encoding="utf-8"?>
+<file path=ppt/slides/slide25.xml><?xml version="1.0" encoding="utf-8"?>
 <p:sld xmlns:a="http://schemas.openxmlformats.org/drawingml/2006/main" xmlns:p="http://schemas.openxmlformats.org/presentationml/2006/main" xmlns:r="http://schemas.openxmlformats.org/officeDocument/2006/relationships">
   <p:cSld>
     <p:spTree>
@@ -12392,7 +15295,7 @@
                 </a:solidFill>
                 <a:latin typeface="Arial"/>
               </a:rPr>
-              <a:t>The tolerance ladder by the numbers</a:t>
+              <a:t>An engine finding from this round</a:t>
             </a:r>
           </a:p>
           <a:p>
@@ -12408,7 +15311,7 @@
                 </a:solidFill>
                 <a:latin typeface="Arial"/>
               </a:rPr>
-              <a:t>One perturbation at a time on the 3k Dyson of record, scored alone and through the R9 join; the compensator is the detector's focus</a:t>
+              <a:t>The api refused an element stop on the secondary of a four-element telescope</a:t>
             </a:r>
           </a:p>
         </p:txBody>
@@ -12457,1200 +15360,15 @@
           </a:p>
         </p:txBody>
       </p:sp>
-      <p:graphicFrame>
-        <p:nvGraphicFramePr>
-          <p:cNvPr id="4" name="Table 3"/>
-          <p:cNvGraphicFramePr>
-            <a:graphicFrameLocks noGrp="1"/>
-          </p:cNvGraphicFramePr>
-          <p:nvPr/>
-        </p:nvGraphicFramePr>
-        <p:xfrm>
-          <a:off x="411480" y="1298448"/>
-          <a:ext cx="11368735" cy="3366135"/>
-        </p:xfrm>
-        <a:graphic>
-          <a:graphicData uri="http://schemas.openxmlformats.org/drawingml/2006/table">
-            <a:tbl>
-              <a:tblPr firstRow="1" bandRow="1">
-                <a:tableStyleId>{5C22544A-7EE6-4342-B048-85BDC9FD1C3A}</a:tableStyleId>
-              </a:tblPr>
-              <a:tblGrid>
-                <a:gridCol w="3104034"/>
-                <a:gridCol w="1817116"/>
-                <a:gridCol w="2035048"/>
-                <a:gridCol w="1090676"/>
-                <a:gridCol w="3321861"/>
-              </a:tblGrid>
-              <a:tr h="468630">
-                <a:tc>
-                  <a:txBody>
-                    <a:bodyPr wrap="square"/>
-                    <a:lstStyle/>
-                    <a:p>
-                      <a:r>
-                        <a:rPr sz="1100" b="1">
-                          <a:solidFill>
-                            <a:srgbClr val="FFFFFF"/>
-                          </a:solidFill>
-                          <a:latin typeface="Arial"/>
-                        </a:rPr>
-                        <a:t>perturbation (unit)</a:t>
-                      </a:r>
-                    </a:p>
-                  </a:txBody>
-                  <a:tcPr marL="54864" marR="54864" marT="18288" marB="18288">
-                    <a:solidFill>
-                      <a:srgbClr val="1F4E79"/>
-                    </a:solidFill>
-                  </a:tcPr>
-                </a:tc>
-                <a:tc>
-                  <a:txBody>
-                    <a:bodyPr wrap="square"/>
-                    <a:lstStyle/>
-                    <a:p>
-                      <a:r>
-                        <a:rPr sz="1100" b="1">
-                          <a:solidFill>
-                            <a:srgbClr val="FFFFFF"/>
-                          </a:solidFill>
-                          <a:latin typeface="Arial"/>
-                        </a:rPr>
-                        <a:t>CRF, uncompensated (px)</a:t>
-                      </a:r>
-                    </a:p>
-                  </a:txBody>
-                  <a:tcPr marL="54864" marR="54864" marT="18288" marB="18288">
-                    <a:solidFill>
-                      <a:srgbClr val="1F4E79"/>
-                    </a:solidFill>
-                  </a:tcPr>
-                </a:tc>
-                <a:tc>
-                  <a:txBody>
-                    <a:bodyPr wrap="square"/>
-                    <a:lstStyle/>
-                    <a:p>
-                      <a:r>
-                        <a:rPr sz="1100" b="1">
-                          <a:solidFill>
-                            <a:srgbClr val="FFFFFF"/>
-                          </a:solidFill>
-                          <a:latin typeface="Arial"/>
-                        </a:rPr>
-                        <a:t>CRF after detector refocus</a:t>
-                      </a:r>
-                    </a:p>
-                  </a:txBody>
-                  <a:tcPr marL="54864" marR="54864" marT="18288" marB="18288">
-                    <a:solidFill>
-                      <a:srgbClr val="1F4E79"/>
-                    </a:solidFill>
-                  </a:tcPr>
-                </a:tc>
-                <a:tc>
-                  <a:txBody>
-                    <a:bodyPr wrap="square"/>
-                    <a:lstStyle/>
-                    <a:p>
-                      <a:r>
-                        <a:rPr sz="1100" b="1">
-                          <a:solidFill>
-                            <a:srgbClr val="FFFFFF"/>
-                          </a:solidFill>
-                          <a:latin typeface="Arial"/>
-                        </a:rPr>
-                        <a:t>keystone (px)</a:t>
-                      </a:r>
-                    </a:p>
-                  </a:txBody>
-                  <a:tcPr marL="54864" marR="54864" marT="18288" marB="18288">
-                    <a:solidFill>
-                      <a:srgbClr val="1F4E79"/>
-                    </a:solidFill>
-                  </a:tcPr>
-                </a:tc>
-                <a:tc>
-                  <a:txBody>
-                    <a:bodyPr wrap="square"/>
-                    <a:lstStyle/>
-                    <a:p>
-                      <a:r>
-                        <a:rPr sz="1100" b="1">
-                          <a:solidFill>
-                            <a:srgbClr val="FFFFFF"/>
-                          </a:solidFill>
-                          <a:latin typeface="Arial"/>
-                        </a:rPr>
-                        <a:t>the tolerance for the paper's keystone CBE / for Joe's 0.1 px</a:t>
-                      </a:r>
-                    </a:p>
-                  </a:txBody>
-                  <a:tcPr marL="54864" marR="54864" marT="18288" marB="18288">
-                    <a:solidFill>
-                      <a:srgbClr val="1F4E79"/>
-                    </a:solidFill>
-                  </a:tcPr>
-                </a:tc>
-              </a:tr>
-              <a:tr h="280035">
-                <a:tc>
-                  <a:txBody>
-                    <a:bodyPr wrap="square"/>
-                    <a:lstStyle/>
-                    <a:p>
-                      <a:r>
-                        <a:rPr sz="1100" b="0">
-                          <a:solidFill>
-                            <a:srgbClr val="282828"/>
-                          </a:solidFill>
-                          <a:latin typeface="Arial"/>
-                        </a:rPr>
-                        <a:t>lens decenter along the slit, 10 µm</a:t>
-                      </a:r>
-                    </a:p>
-                  </a:txBody>
-                  <a:tcPr marL="54864" marR="54864" marT="18288" marB="18288">
-                    <a:solidFill>
-                      <a:srgbClr val="FFFFFF"/>
-                    </a:solidFill>
-                  </a:tcPr>
-                </a:tc>
-                <a:tc>
-                  <a:txBody>
-                    <a:bodyPr wrap="square"/>
-                    <a:lstStyle/>
-                    <a:p>
-                      <a:r>
-                        <a:rPr sz="1100" b="0">
-                          <a:solidFill>
-                            <a:srgbClr val="282828"/>
-                          </a:solidFill>
-                          <a:latin typeface="Arial"/>
-                        </a:rPr>
-                        <a:t>–</a:t>
-                      </a:r>
-                    </a:p>
-                  </a:txBody>
-                  <a:tcPr marL="54864" marR="54864" marT="18288" marB="18288">
-                    <a:solidFill>
-                      <a:srgbClr val="FFFFFF"/>
-                    </a:solidFill>
-                  </a:tcPr>
-                </a:tc>
-                <a:tc>
-                  <a:txBody>
-                    <a:bodyPr wrap="square"/>
-                    <a:lstStyle/>
-                    <a:p>
-                      <a:r>
-                        <a:rPr sz="1100" b="0">
-                          <a:solidFill>
-                            <a:srgbClr val="282828"/>
-                          </a:solidFill>
-                          <a:latin typeface="Arial"/>
-                        </a:rPr>
-                        <a:t>–</a:t>
-                      </a:r>
-                    </a:p>
-                  </a:txBody>
-                  <a:tcPr marL="54864" marR="54864" marT="18288" marB="18288">
-                    <a:solidFill>
-                      <a:srgbClr val="FFFFFF"/>
-                    </a:solidFill>
-                  </a:tcPr>
-                </a:tc>
-                <a:tc>
-                  <a:txBody>
-                    <a:bodyPr wrap="square"/>
-                    <a:lstStyle/>
-                    <a:p>
-                      <a:r>
-                        <a:rPr sz="1100" b="0">
-                          <a:solidFill>
-                            <a:srgbClr val="282828"/>
-                          </a:solidFill>
-                          <a:latin typeface="Arial"/>
-                        </a:rPr>
-                        <a:t>0.0099</a:t>
-                      </a:r>
-                    </a:p>
-                  </a:txBody>
-                  <a:tcPr marL="54864" marR="54864" marT="18288" marB="18288">
-                    <a:solidFill>
-                      <a:srgbClr val="FFFFFF"/>
-                    </a:solidFill>
-                  </a:tcPr>
-                </a:tc>
-                <a:tc>
-                  <a:txBody>
-                    <a:bodyPr wrap="square"/>
-                    <a:lstStyle/>
-                    <a:p>
-                      <a:r>
-                        <a:rPr sz="1100" b="0">
-                          <a:solidFill>
-                            <a:srgbClr val="282828"/>
-                          </a:solidFill>
-                          <a:latin typeface="Arial"/>
-                        </a:rPr>
-                        <a:t>26 µm / 47 µm</a:t>
-                      </a:r>
-                    </a:p>
-                  </a:txBody>
-                  <a:tcPr marL="54864" marR="54864" marT="18288" marB="18288">
-                    <a:solidFill>
-                      <a:srgbClr val="FFFFFF"/>
-                    </a:solidFill>
-                  </a:tcPr>
-                </a:tc>
-              </a:tr>
-              <a:tr h="280035">
-                <a:tc>
-                  <a:txBody>
-                    <a:bodyPr wrap="square"/>
-                    <a:lstStyle/>
-                    <a:p>
-                      <a:r>
-                        <a:rPr sz="1100" b="0">
-                          <a:solidFill>
-                            <a:srgbClr val="282828"/>
-                          </a:solidFill>
-                          <a:latin typeface="Arial"/>
-                        </a:rPr>
-                        <a:t>grating decenter along the slit, 10 µm</a:t>
-                      </a:r>
-                    </a:p>
-                  </a:txBody>
-                  <a:tcPr marL="54864" marR="54864" marT="18288" marB="18288">
-                    <a:solidFill>
-                      <a:srgbClr val="ECF1F6"/>
-                    </a:solidFill>
-                  </a:tcPr>
-                </a:tc>
-                <a:tc>
-                  <a:txBody>
-                    <a:bodyPr wrap="square"/>
-                    <a:lstStyle/>
-                    <a:p>
-                      <a:r>
-                        <a:rPr sz="1100" b="0">
-                          <a:solidFill>
-                            <a:srgbClr val="282828"/>
-                          </a:solidFill>
-                          <a:latin typeface="Arial"/>
-                        </a:rPr>
-                        <a:t>–</a:t>
-                      </a:r>
-                    </a:p>
-                  </a:txBody>
-                  <a:tcPr marL="54864" marR="54864" marT="18288" marB="18288">
-                    <a:solidFill>
-                      <a:srgbClr val="ECF1F6"/>
-                    </a:solidFill>
-                  </a:tcPr>
-                </a:tc>
-                <a:tc>
-                  <a:txBody>
-                    <a:bodyPr wrap="square"/>
-                    <a:lstStyle/>
-                    <a:p>
-                      <a:r>
-                        <a:rPr sz="1100" b="0">
-                          <a:solidFill>
-                            <a:srgbClr val="282828"/>
-                          </a:solidFill>
-                          <a:latin typeface="Arial"/>
-                        </a:rPr>
-                        <a:t>–</a:t>
-                      </a:r>
-                    </a:p>
-                  </a:txBody>
-                  <a:tcPr marL="54864" marR="54864" marT="18288" marB="18288">
-                    <a:solidFill>
-                      <a:srgbClr val="ECF1F6"/>
-                    </a:solidFill>
-                  </a:tcPr>
-                </a:tc>
-                <a:tc>
-                  <a:txBody>
-                    <a:bodyPr wrap="square"/>
-                    <a:lstStyle/>
-                    <a:p>
-                      <a:r>
-                        <a:rPr sz="1100" b="0">
-                          <a:solidFill>
-                            <a:srgbClr val="282828"/>
-                          </a:solidFill>
-                          <a:latin typeface="Arial"/>
-                        </a:rPr>
-                        <a:t>0.0099</a:t>
-                      </a:r>
-                    </a:p>
-                  </a:txBody>
-                  <a:tcPr marL="54864" marR="54864" marT="18288" marB="18288">
-                    <a:solidFill>
-                      <a:srgbClr val="ECF1F6"/>
-                    </a:solidFill>
-                  </a:tcPr>
-                </a:tc>
-                <a:tc>
-                  <a:txBody>
-                    <a:bodyPr wrap="square"/>
-                    <a:lstStyle/>
-                    <a:p>
-                      <a:r>
-                        <a:rPr sz="1100" b="0">
-                          <a:solidFill>
-                            <a:srgbClr val="282828"/>
-                          </a:solidFill>
-                          <a:latin typeface="Arial"/>
-                        </a:rPr>
-                        <a:t>26 µm / 47 µm</a:t>
-                      </a:r>
-                    </a:p>
-                  </a:txBody>
-                  <a:tcPr marL="54864" marR="54864" marT="18288" marB="18288">
-                    <a:solidFill>
-                      <a:srgbClr val="ECF1F6"/>
-                    </a:solidFill>
-                  </a:tcPr>
-                </a:tc>
-              </a:tr>
-              <a:tr h="280035">
-                <a:tc>
-                  <a:txBody>
-                    <a:bodyPr wrap="square"/>
-                    <a:lstStyle/>
-                    <a:p>
-                      <a:r>
-                        <a:rPr sz="1100" b="0">
-                          <a:solidFill>
-                            <a:srgbClr val="282828"/>
-                          </a:solidFill>
-                          <a:latin typeface="Arial"/>
-                        </a:rPr>
-                        <a:t>grating tilt about the slit, 10 µrad</a:t>
-                      </a:r>
-                    </a:p>
-                  </a:txBody>
-                  <a:tcPr marL="54864" marR="54864" marT="18288" marB="18288">
-                    <a:solidFill>
-                      <a:srgbClr val="FFFFFF"/>
-                    </a:solidFill>
-                  </a:tcPr>
-                </a:tc>
-                <a:tc>
-                  <a:txBody>
-                    <a:bodyPr wrap="square"/>
-                    <a:lstStyle/>
-                    <a:p>
-                      <a:r>
-                        <a:rPr sz="1100" b="0">
-                          <a:solidFill>
-                            <a:srgbClr val="282828"/>
-                          </a:solidFill>
-                          <a:latin typeface="Arial"/>
-                        </a:rPr>
-                        <a:t>–</a:t>
-                      </a:r>
-                    </a:p>
-                  </a:txBody>
-                  <a:tcPr marL="54864" marR="54864" marT="18288" marB="18288">
-                    <a:solidFill>
-                      <a:srgbClr val="FFFFFF"/>
-                    </a:solidFill>
-                  </a:tcPr>
-                </a:tc>
-                <a:tc>
-                  <a:txBody>
-                    <a:bodyPr wrap="square"/>
-                    <a:lstStyle/>
-                    <a:p>
-                      <a:r>
-                        <a:rPr sz="1100" b="0">
-                          <a:solidFill>
-                            <a:srgbClr val="282828"/>
-                          </a:solidFill>
-                          <a:latin typeface="Arial"/>
-                        </a:rPr>
-                        <a:t>–</a:t>
-                      </a:r>
-                    </a:p>
-                  </a:txBody>
-                  <a:tcPr marL="54864" marR="54864" marT="18288" marB="18288">
-                    <a:solidFill>
-                      <a:srgbClr val="FFFFFF"/>
-                    </a:solidFill>
-                  </a:tcPr>
-                </a:tc>
-                <a:tc>
-                  <a:txBody>
-                    <a:bodyPr wrap="square"/>
-                    <a:lstStyle/>
-                    <a:p>
-                      <a:r>
-                        <a:rPr sz="1100" b="0">
-                          <a:solidFill>
-                            <a:srgbClr val="282828"/>
-                          </a:solidFill>
-                          <a:latin typeface="Arial"/>
-                        </a:rPr>
-                        <a:t>0.0074</a:t>
-                      </a:r>
-                    </a:p>
-                  </a:txBody>
-                  <a:tcPr marL="54864" marR="54864" marT="18288" marB="18288">
-                    <a:solidFill>
-                      <a:srgbClr val="FFFFFF"/>
-                    </a:solidFill>
-                  </a:tcPr>
-                </a:tc>
-                <a:tc>
-                  <a:txBody>
-                    <a:bodyPr wrap="square"/>
-                    <a:lstStyle/>
-                    <a:p>
-                      <a:r>
-                        <a:rPr sz="1100" b="0">
-                          <a:solidFill>
-                            <a:srgbClr val="282828"/>
-                          </a:solidFill>
-                          <a:latin typeface="Arial"/>
-                        </a:rPr>
-                        <a:t>35 µrad / 64 µrad</a:t>
-                      </a:r>
-                    </a:p>
-                  </a:txBody>
-                  <a:tcPr marL="54864" marR="54864" marT="18288" marB="18288">
-                    <a:solidFill>
-                      <a:srgbClr val="FFFFFF"/>
-                    </a:solidFill>
-                  </a:tcPr>
-                </a:tc>
-              </a:tr>
-              <a:tr h="280035">
-                <a:tc>
-                  <a:txBody>
-                    <a:bodyPr wrap="square"/>
-                    <a:lstStyle/>
-                    <a:p>
-                      <a:r>
-                        <a:rPr sz="1100" b="0">
-                          <a:solidFill>
-                            <a:srgbClr val="282828"/>
-                          </a:solidFill>
-                          <a:latin typeface="Arial"/>
-                        </a:rPr>
-                        <a:t>grating clocking, 10 µrad</a:t>
-                      </a:r>
-                    </a:p>
-                  </a:txBody>
-                  <a:tcPr marL="54864" marR="54864" marT="18288" marB="18288">
-                    <a:solidFill>
-                      <a:srgbClr val="ECF1F6"/>
-                    </a:solidFill>
-                  </a:tcPr>
-                </a:tc>
-                <a:tc>
-                  <a:txBody>
-                    <a:bodyPr wrap="square"/>
-                    <a:lstStyle/>
-                    <a:p>
-                      <a:r>
-                        <a:rPr sz="1100" b="0">
-                          <a:solidFill>
-                            <a:srgbClr val="282828"/>
-                          </a:solidFill>
-                          <a:latin typeface="Arial"/>
-                        </a:rPr>
-                        <a:t>–</a:t>
-                      </a:r>
-                    </a:p>
-                  </a:txBody>
-                  <a:tcPr marL="54864" marR="54864" marT="18288" marB="18288">
-                    <a:solidFill>
-                      <a:srgbClr val="ECF1F6"/>
-                    </a:solidFill>
-                  </a:tcPr>
-                </a:tc>
-                <a:tc>
-                  <a:txBody>
-                    <a:bodyPr wrap="square"/>
-                    <a:lstStyle/>
-                    <a:p>
-                      <a:r>
-                        <a:rPr sz="1100" b="0">
-                          <a:solidFill>
-                            <a:srgbClr val="282828"/>
-                          </a:solidFill>
-                          <a:latin typeface="Arial"/>
-                        </a:rPr>
-                        <a:t>–</a:t>
-                      </a:r>
-                    </a:p>
-                  </a:txBody>
-                  <a:tcPr marL="54864" marR="54864" marT="18288" marB="18288">
-                    <a:solidFill>
-                      <a:srgbClr val="ECF1F6"/>
-                    </a:solidFill>
-                  </a:tcPr>
-                </a:tc>
-                <a:tc>
-                  <a:txBody>
-                    <a:bodyPr wrap="square"/>
-                    <a:lstStyle/>
-                    <a:p>
-                      <a:r>
-                        <a:rPr sz="1100" b="0">
-                          <a:solidFill>
-                            <a:srgbClr val="282828"/>
-                          </a:solidFill>
-                          <a:latin typeface="Arial"/>
-                        </a:rPr>
-                        <a:t>0.0029</a:t>
-                      </a:r>
-                    </a:p>
-                  </a:txBody>
-                  <a:tcPr marL="54864" marR="54864" marT="18288" marB="18288">
-                    <a:solidFill>
-                      <a:srgbClr val="ECF1F6"/>
-                    </a:solidFill>
-                  </a:tcPr>
-                </a:tc>
-                <a:tc>
-                  <a:txBody>
-                    <a:bodyPr wrap="square"/>
-                    <a:lstStyle/>
-                    <a:p>
-                      <a:r>
-                        <a:rPr sz="1100" b="0">
-                          <a:solidFill>
-                            <a:srgbClr val="282828"/>
-                          </a:solidFill>
-                          <a:latin typeface="Arial"/>
-                        </a:rPr>
-                        <a:t>88 µrad / 162 µrad</a:t>
-                      </a:r>
-                    </a:p>
-                  </a:txBody>
-                  <a:tcPr marL="54864" marR="54864" marT="18288" marB="18288">
-                    <a:solidFill>
-                      <a:srgbClr val="ECF1F6"/>
-                    </a:solidFill>
-                  </a:tcPr>
-                </a:tc>
-              </a:tr>
-              <a:tr h="280035">
-                <a:tc>
-                  <a:txBody>
-                    <a:bodyPr wrap="square"/>
-                    <a:lstStyle/>
-                    <a:p>
-                      <a:r>
-                        <a:rPr sz="1100" b="0">
-                          <a:solidFill>
-                            <a:srgbClr val="282828"/>
-                          </a:solidFill>
-                          <a:latin typeface="Arial"/>
-                        </a:rPr>
-                        <a:t>grating radius dR/R 10⁻⁴</a:t>
-                      </a:r>
-                    </a:p>
-                  </a:txBody>
-                  <a:tcPr marL="54864" marR="54864" marT="18288" marB="18288">
-                    <a:solidFill>
-                      <a:srgbClr val="FFFFFF"/>
-                    </a:solidFill>
-                  </a:tcPr>
-                </a:tc>
-                <a:tc>
-                  <a:txBody>
-                    <a:bodyPr wrap="square"/>
-                    <a:lstStyle/>
-                    <a:p>
-                      <a:r>
-                        <a:rPr sz="1100" b="0">
-                          <a:solidFill>
-                            <a:srgbClr val="282828"/>
-                          </a:solidFill>
-                          <a:latin typeface="Arial"/>
-                        </a:rPr>
-                        <a:t>+1.93</a:t>
-                      </a:r>
-                    </a:p>
-                  </a:txBody>
-                  <a:tcPr marL="54864" marR="54864" marT="18288" marB="18288">
-                    <a:solidFill>
-                      <a:srgbClr val="FFFFFF"/>
-                    </a:solidFill>
-                  </a:tcPr>
-                </a:tc>
-                <a:tc>
-                  <a:txBody>
-                    <a:bodyPr wrap="square"/>
-                    <a:lstStyle/>
-                    <a:p>
-                      <a:r>
-                        <a:rPr sz="1100" b="0">
-                          <a:solidFill>
-                            <a:srgbClr val="282828"/>
-                          </a:solidFill>
-                          <a:latin typeface="Arial"/>
-                        </a:rPr>
-                        <a:t>+0.006</a:t>
-                      </a:r>
-                    </a:p>
-                  </a:txBody>
-                  <a:tcPr marL="54864" marR="54864" marT="18288" marB="18288">
-                    <a:solidFill>
-                      <a:srgbClr val="FFFFFF"/>
-                    </a:solidFill>
-                  </a:tcPr>
-                </a:tc>
-                <a:tc>
-                  <a:txBody>
-                    <a:bodyPr wrap="square"/>
-                    <a:lstStyle/>
-                    <a:p>
-                      <a:r>
-                        <a:rPr sz="1100" b="0">
-                          <a:solidFill>
-                            <a:srgbClr val="282828"/>
-                          </a:solidFill>
-                          <a:latin typeface="Arial"/>
-                        </a:rPr>
-                        <a:t>–</a:t>
-                      </a:r>
-                    </a:p>
-                  </a:txBody>
-                  <a:tcPr marL="54864" marR="54864" marT="18288" marB="18288">
-                    <a:solidFill>
-                      <a:srgbClr val="FFFFFF"/>
-                    </a:solidFill>
-                  </a:tcPr>
-                </a:tc>
-                <a:tc>
-                  <a:txBody>
-                    <a:bodyPr wrap="square"/>
-                    <a:lstStyle/>
-                    <a:p>
-                      <a:r>
-                        <a:rPr sz="1100" b="0">
-                          <a:solidFill>
-                            <a:srgbClr val="282828"/>
-                          </a:solidFill>
-                          <a:latin typeface="Arial"/>
-                        </a:rPr>
-                        <a:t>focus-compensated</a:t>
-                      </a:r>
-                    </a:p>
-                  </a:txBody>
-                  <a:tcPr marL="54864" marR="54864" marT="18288" marB="18288">
-                    <a:solidFill>
-                      <a:srgbClr val="FFFFFF"/>
-                    </a:solidFill>
-                  </a:tcPr>
-                </a:tc>
-              </a:tr>
-              <a:tr h="468630">
-                <a:tc>
-                  <a:txBody>
-                    <a:bodyPr wrap="square"/>
-                    <a:lstStyle/>
-                    <a:p>
-                      <a:r>
-                        <a:rPr sz="1100" b="0">
-                          <a:solidFill>
-                            <a:srgbClr val="282828"/>
-                          </a:solidFill>
-                          <a:latin typeface="Arial"/>
-                        </a:rPr>
-                        <a:t>lens radius, thickness; air space; slit, detector defocus</a:t>
-                      </a:r>
-                    </a:p>
-                  </a:txBody>
-                  <a:tcPr marL="54864" marR="54864" marT="18288" marB="18288">
-                    <a:solidFill>
-                      <a:srgbClr val="ECF1F6"/>
-                    </a:solidFill>
-                  </a:tcPr>
-                </a:tc>
-                <a:tc>
-                  <a:txBody>
-                    <a:bodyPr wrap="square"/>
-                    <a:lstStyle/>
-                    <a:p>
-                      <a:r>
-                        <a:rPr sz="1100" b="0">
-                          <a:solidFill>
-                            <a:srgbClr val="282828"/>
-                          </a:solidFill>
-                          <a:latin typeface="Arial"/>
-                        </a:rPr>
-                        <a:t>focus terms</a:t>
-                      </a:r>
-                    </a:p>
-                  </a:txBody>
-                  <a:tcPr marL="54864" marR="54864" marT="18288" marB="18288">
-                    <a:solidFill>
-                      <a:srgbClr val="ECF1F6"/>
-                    </a:solidFill>
-                  </a:tcPr>
-                </a:tc>
-                <a:tc>
-                  <a:txBody>
-                    <a:bodyPr wrap="square"/>
-                    <a:lstStyle/>
-                    <a:p>
-                      <a:r>
-                        <a:rPr sz="1100" b="0">
-                          <a:solidFill>
-                            <a:srgbClr val="282828"/>
-                          </a:solidFill>
-                          <a:latin typeface="Arial"/>
-                        </a:rPr>
-                        <a:t>≤ 0.006</a:t>
-                      </a:r>
-                    </a:p>
-                  </a:txBody>
-                  <a:tcPr marL="54864" marR="54864" marT="18288" marB="18288">
-                    <a:solidFill>
-                      <a:srgbClr val="ECF1F6"/>
-                    </a:solidFill>
-                  </a:tcPr>
-                </a:tc>
-                <a:tc>
-                  <a:txBody>
-                    <a:bodyPr wrap="square"/>
-                    <a:lstStyle/>
-                    <a:p>
-                      <a:r>
-                        <a:rPr sz="1100" b="0">
-                          <a:solidFill>
-                            <a:srgbClr val="282828"/>
-                          </a:solidFill>
-                          <a:latin typeface="Arial"/>
-                        </a:rPr>
-                        <a:t>–</a:t>
-                      </a:r>
-                    </a:p>
-                  </a:txBody>
-                  <a:tcPr marL="54864" marR="54864" marT="18288" marB="18288">
-                    <a:solidFill>
-                      <a:srgbClr val="ECF1F6"/>
-                    </a:solidFill>
-                  </a:tcPr>
-                </a:tc>
-                <a:tc>
-                  <a:txBody>
-                    <a:bodyPr wrap="square"/>
-                    <a:lstStyle/>
-                    <a:p>
-                      <a:r>
-                        <a:rPr sz="1100" b="0">
-                          <a:solidFill>
-                            <a:srgbClr val="282828"/>
-                          </a:solidFill>
-                          <a:latin typeface="Arial"/>
-                        </a:rPr>
-                        <a:t>focus-compensated</a:t>
-                      </a:r>
-                    </a:p>
-                  </a:txBody>
-                  <a:tcPr marL="54864" marR="54864" marT="18288" marB="18288">
-                    <a:solidFill>
-                      <a:srgbClr val="ECF1F6"/>
-                    </a:solidFill>
-                  </a:tcPr>
-                </a:tc>
-              </a:tr>
-              <a:tr h="280035">
-                <a:tc>
-                  <a:txBody>
-                    <a:bodyPr wrap="square"/>
-                    <a:lstStyle/>
-                    <a:p>
-                      <a:r>
-                        <a:rPr sz="1100" b="0">
-                          <a:solidFill>
-                            <a:srgbClr val="282828"/>
-                          </a:solidFill>
-                          <a:latin typeface="Arial"/>
-                        </a:rPr>
-                        <a:t>CaF</a:t>
-                      </a:r>
-                      <a:r>
-                        <a:rPr sz="1100" b="0" baseline="-25000">
-                          <a:solidFill>
-                            <a:srgbClr val="282828"/>
-                          </a:solidFill>
-                          <a:latin typeface="Arial"/>
-                        </a:rPr>
-                        <a:t>2</a:t>
-                      </a:r>
-                      <a:r>
-                        <a:rPr sz="1100" b="0">
-                          <a:solidFill>
-                            <a:srgbClr val="282828"/>
-                          </a:solidFill>
-                          <a:latin typeface="Arial"/>
-                        </a:rPr>
-                        <a:t> index, 10⁻⁵ (1 K)</a:t>
-                      </a:r>
-                    </a:p>
-                  </a:txBody>
-                  <a:tcPr marL="54864" marR="54864" marT="18288" marB="18288">
-                    <a:solidFill>
-                      <a:srgbClr val="FFFFFF"/>
-                    </a:solidFill>
-                  </a:tcPr>
-                </a:tc>
-                <a:tc>
-                  <a:txBody>
-                    <a:bodyPr wrap="square"/>
-                    <a:lstStyle/>
-                    <a:p>
-                      <a:r>
-                        <a:rPr sz="1100" b="0">
-                          <a:solidFill>
-                            <a:srgbClr val="282828"/>
-                          </a:solidFill>
-                          <a:latin typeface="Arial"/>
-                        </a:rPr>
-                        <a:t>+0.0014</a:t>
-                      </a:r>
-                    </a:p>
-                  </a:txBody>
-                  <a:tcPr marL="54864" marR="54864" marT="18288" marB="18288">
-                    <a:solidFill>
-                      <a:srgbClr val="FFFFFF"/>
-                    </a:solidFill>
-                  </a:tcPr>
-                </a:tc>
-                <a:tc>
-                  <a:txBody>
-                    <a:bodyPr wrap="square"/>
-                    <a:lstStyle/>
-                    <a:p>
-                      <a:r>
-                        <a:rPr sz="1100" b="0">
-                          <a:solidFill>
-                            <a:srgbClr val="282828"/>
-                          </a:solidFill>
-                          <a:latin typeface="Arial"/>
-                        </a:rPr>
-                        <a:t>–</a:t>
-                      </a:r>
-                    </a:p>
-                  </a:txBody>
-                  <a:tcPr marL="54864" marR="54864" marT="18288" marB="18288">
-                    <a:solidFill>
-                      <a:srgbClr val="FFFFFF"/>
-                    </a:solidFill>
-                  </a:tcPr>
-                </a:tc>
-                <a:tc>
-                  <a:txBody>
-                    <a:bodyPr wrap="square"/>
-                    <a:lstStyle/>
-                    <a:p>
-                      <a:r>
-                        <a:rPr sz="1100" b="0">
-                          <a:solidFill>
-                            <a:srgbClr val="282828"/>
-                          </a:solidFill>
-                          <a:latin typeface="Arial"/>
-                        </a:rPr>
-                        <a:t>–</a:t>
-                      </a:r>
-                    </a:p>
-                  </a:txBody>
-                  <a:tcPr marL="54864" marR="54864" marT="18288" marB="18288">
-                    <a:solidFill>
-                      <a:srgbClr val="FFFFFF"/>
-                    </a:solidFill>
-                  </a:tcPr>
-                </a:tc>
-                <a:tc>
-                  <a:txBody>
-                    <a:bodyPr wrap="square"/>
-                    <a:lstStyle/>
-                    <a:p>
-                      <a:r>
-                        <a:rPr sz="1100" b="0">
-                          <a:solidFill>
-                            <a:srgbClr val="282828"/>
-                          </a:solidFill>
-                          <a:latin typeface="Arial"/>
-                        </a:rPr>
-                        <a:t>negligible</a:t>
-                      </a:r>
-                    </a:p>
-                  </a:txBody>
-                  <a:tcPr marL="54864" marR="54864" marT="18288" marB="18288">
-                    <a:solidFill>
-                      <a:srgbClr val="FFFFFF"/>
-                    </a:solidFill>
-                  </a:tcPr>
-                </a:tc>
-              </a:tr>
-              <a:tr h="280035">
-                <a:tc>
-                  <a:txBody>
-                    <a:bodyPr wrap="square"/>
-                    <a:lstStyle/>
-                    <a:p>
-                      <a:r>
-                        <a:rPr sz="1100" b="0">
-                          <a:solidFill>
-                            <a:srgbClr val="282828"/>
-                          </a:solidFill>
-                          <a:latin typeface="Arial"/>
-                        </a:rPr>
-                        <a:t>CaF</a:t>
-                      </a:r>
-                      <a:r>
-                        <a:rPr sz="1100" b="0" baseline="-25000">
-                          <a:solidFill>
-                            <a:srgbClr val="282828"/>
-                          </a:solidFill>
-                          <a:latin typeface="Arial"/>
-                        </a:rPr>
-                        <a:t>2</a:t>
-                      </a:r>
-                      <a:r>
-                        <a:rPr sz="1100" b="0">
-                          <a:solidFill>
-                            <a:srgbClr val="282828"/>
-                          </a:solidFill>
-                          <a:latin typeface="Arial"/>
-                        </a:rPr>
-                        <a:t> radius + thickness per K (CTE)</a:t>
-                      </a:r>
-                    </a:p>
-                  </a:txBody>
-                  <a:tcPr marL="54864" marR="54864" marT="18288" marB="18288">
-                    <a:solidFill>
-                      <a:srgbClr val="ECF1F6"/>
-                    </a:solidFill>
-                  </a:tcPr>
-                </a:tc>
-                <a:tc>
-                  <a:txBody>
-                    <a:bodyPr wrap="square"/>
-                    <a:lstStyle/>
-                    <a:p>
-                      <a:r>
-                        <a:rPr sz="1100" b="0">
-                          <a:solidFill>
-                            <a:srgbClr val="282828"/>
-                          </a:solidFill>
-                          <a:latin typeface="Arial"/>
-                        </a:rPr>
-                        <a:t>+0.050 − 0.051</a:t>
-                      </a:r>
-                    </a:p>
-                  </a:txBody>
-                  <a:tcPr marL="54864" marR="54864" marT="18288" marB="18288">
-                    <a:solidFill>
-                      <a:srgbClr val="ECF1F6"/>
-                    </a:solidFill>
-                  </a:tcPr>
-                </a:tc>
-                <a:tc>
-                  <a:txBody>
-                    <a:bodyPr wrap="square"/>
-                    <a:lstStyle/>
-                    <a:p>
-                      <a:r>
-                        <a:rPr sz="1100" b="0">
-                          <a:solidFill>
-                            <a:srgbClr val="282828"/>
-                          </a:solidFill>
-                          <a:latin typeface="Arial"/>
-                        </a:rPr>
-                        <a:t>–</a:t>
-                      </a:r>
-                    </a:p>
-                  </a:txBody>
-                  <a:tcPr marL="54864" marR="54864" marT="18288" marB="18288">
-                    <a:solidFill>
-                      <a:srgbClr val="ECF1F6"/>
-                    </a:solidFill>
-                  </a:tcPr>
-                </a:tc>
-                <a:tc>
-                  <a:txBody>
-                    <a:bodyPr wrap="square"/>
-                    <a:lstStyle/>
-                    <a:p>
-                      <a:r>
-                        <a:rPr sz="1100" b="0">
-                          <a:solidFill>
-                            <a:srgbClr val="282828"/>
-                          </a:solidFill>
-                          <a:latin typeface="Arial"/>
-                        </a:rPr>
-                        <a:t>–</a:t>
-                      </a:r>
-                    </a:p>
-                  </a:txBody>
-                  <a:tcPr marL="54864" marR="54864" marT="18288" marB="18288">
-                    <a:solidFill>
-                      <a:srgbClr val="ECF1F6"/>
-                    </a:solidFill>
-                  </a:tcPr>
-                </a:tc>
-                <a:tc>
-                  <a:txBody>
-                    <a:bodyPr wrap="square"/>
-                    <a:lstStyle/>
-                    <a:p>
-                      <a:r>
-                        <a:rPr sz="1100" b="0">
-                          <a:solidFill>
-                            <a:srgbClr val="282828"/>
-                          </a:solidFill>
-                          <a:latin typeface="Arial"/>
-                        </a:rPr>
-                        <a:t>cancel</a:t>
-                      </a:r>
-                    </a:p>
-                  </a:txBody>
-                  <a:tcPr marL="54864" marR="54864" marT="18288" marB="18288">
-                    <a:solidFill>
-                      <a:srgbClr val="ECF1F6"/>
-                    </a:solidFill>
-                  </a:tcPr>
-                </a:tc>
-              </a:tr>
-              <a:tr h="468630">
-                <a:tc>
-                  <a:txBody>
-                    <a:bodyPr wrap="square"/>
-                    <a:lstStyle/>
-                    <a:p>
-                      <a:r>
-                        <a:rPr sz="1100" b="0">
-                          <a:solidFill>
-                            <a:srgbClr val="282828"/>
-                          </a:solidFill>
-                          <a:latin typeface="Arial"/>
-                        </a:rPr>
-                        <a:t>aluminum air space per K; N-BK7 grating radius per K</a:t>
-                      </a:r>
-                    </a:p>
-                  </a:txBody>
-                  <a:tcPr marL="54864" marR="54864" marT="18288" marB="18288">
-                    <a:solidFill>
-                      <a:srgbClr val="FFFFFF"/>
-                    </a:solidFill>
-                  </a:tcPr>
-                </a:tc>
-                <a:tc>
-                  <a:txBody>
-                    <a:bodyPr wrap="square"/>
-                    <a:lstStyle/>
-                    <a:p>
-                      <a:r>
-                        <a:rPr sz="1100" b="0">
-                          <a:solidFill>
-                            <a:srgbClr val="282828"/>
-                          </a:solidFill>
-                          <a:latin typeface="Arial"/>
-                        </a:rPr>
-                        <a:t>−0.22; +0.14</a:t>
-                      </a:r>
-                    </a:p>
-                  </a:txBody>
-                  <a:tcPr marL="54864" marR="54864" marT="18288" marB="18288">
-                    <a:solidFill>
-                      <a:srgbClr val="FFFFFF"/>
-                    </a:solidFill>
-                  </a:tcPr>
-                </a:tc>
-                <a:tc>
-                  <a:txBody>
-                    <a:bodyPr wrap="square"/>
-                    <a:lstStyle/>
-                    <a:p>
-                      <a:r>
-                        <a:rPr sz="1100" b="0">
-                          <a:solidFill>
-                            <a:srgbClr val="282828"/>
-                          </a:solidFill>
-                          <a:latin typeface="Arial"/>
-                        </a:rPr>
-                        <a:t>focus terms</a:t>
-                      </a:r>
-                    </a:p>
-                  </a:txBody>
-                  <a:tcPr marL="54864" marR="54864" marT="18288" marB="18288">
-                    <a:solidFill>
-                      <a:srgbClr val="FFFFFF"/>
-                    </a:solidFill>
-                  </a:tcPr>
-                </a:tc>
-                <a:tc>
-                  <a:txBody>
-                    <a:bodyPr wrap="square"/>
-                    <a:lstStyle/>
-                    <a:p>
-                      <a:r>
-                        <a:rPr sz="1100" b="0">
-                          <a:solidFill>
-                            <a:srgbClr val="282828"/>
-                          </a:solidFill>
-                          <a:latin typeface="Arial"/>
-                        </a:rPr>
-                        <a:t>–</a:t>
-                      </a:r>
-                    </a:p>
-                  </a:txBody>
-                  <a:tcPr marL="54864" marR="54864" marT="18288" marB="18288">
-                    <a:solidFill>
-                      <a:srgbClr val="FFFFFF"/>
-                    </a:solidFill>
-                  </a:tcPr>
-                </a:tc>
-                <a:tc>
-                  <a:txBody>
-                    <a:bodyPr wrap="square"/>
-                    <a:lstStyle/>
-                    <a:p>
-                      <a:r>
-                        <a:rPr sz="1100" b="0">
-                          <a:solidFill>
-                            <a:srgbClr val="282828"/>
-                          </a:solidFill>
-                          <a:latin typeface="Arial"/>
-                        </a:rPr>
-                        <a:t>refocus-compensated</a:t>
-                      </a:r>
-                    </a:p>
-                  </a:txBody>
-                  <a:tcPr marL="54864" marR="54864" marT="18288" marB="18288">
-                    <a:solidFill>
-                      <a:srgbClr val="FFFFFF"/>
-                    </a:solidFill>
-                  </a:tcPr>
-                </a:tc>
-              </a:tr>
-            </a:tbl>
-          </a:graphicData>
-        </a:graphic>
-      </p:graphicFrame>
       <p:sp>
         <p:nvSpPr>
-          <p:cNvPr id="5" name="TextBox 4"/>
+          <p:cNvPr id="4" name="TextBox 3"/>
           <p:cNvSpPr txBox="1"/>
           <p:nvPr/>
         </p:nvSpPr>
         <p:spPr>
           <a:xfrm>
-            <a:off x="411480" y="4810887"/>
+            <a:off x="411480" y="1298448"/>
             <a:ext cx="11368735" cy="274320"/>
           </a:xfrm>
           <a:prstGeom prst="rect">
@@ -13685,7 +15403,7 @@
                 </a:solidFill>
                 <a:latin typeface="Arial"/>
               </a:rPr>
-              <a:t>Keystone is lateral color: no compensator touches it.</a:t>
+              <a:t>stop_info_set refused iElt ≥ nElt−2 and nElt ≤ 3</a:t>
             </a:r>
             <a:r>
               <a:rPr sz="1500" b="0">
@@ -13694,7 +15412,7 @@
                 </a:solidFill>
                 <a:latin typeface="Arial"/>
               </a:rPr>
-              <a:t>  Smile is loose everywhere (≥ 300 µm or µrad).  Linearity at 2×: keystone vs decenter 1.10, CRF vs grating radius 1.03, SRF 2.6 (quadratic, and at the floor).</a:t>
+              <a:t> — the original wrapper's range, with no engine reason — so macos.stop(2) failed on every M1-M2-M3-FP deck while the prescription keyword ApStop= and the CLI's STOP (1..nElt) accepted it.  The template worked around it with one deck per field until the fix.  Now the CLI's range; gate tStopReload/test_stop_accepts_the_secondary_of_a_four_element_deck.</a:t>
             </a:r>
           </a:p>
           <a:p>
@@ -13719,7 +15437,7 @@
                 </a:solidFill>
                 <a:latin typeface="Arial"/>
               </a:rPr>
-              <a:t>The 1.5k Dyson</a:t>
+              <a:t>Also from this round, in the tools:</a:t>
             </a:r>
             <a:r>
               <a:rPr sz="1500" b="0">
@@ -13728,38 +15446,20 @@
                 </a:solidFill>
                 <a:latin typeface="Arial"/>
               </a:rPr>
-              <a:t> has the same pattern at twice the keystone sensitivity (1.82 × 10⁻³ px per µm: 13 µm for the paper's CBE, 25 µm for Joe).  </a:t>
-            </a:r>
-            <a:r>
-              <a:rPr sz="1500" b="1">
-                <a:solidFill>
-                  <a:srgbClr val="282828"/>
-                </a:solidFill>
-                <a:latin typeface="Arial"/>
-              </a:rPr>
-              <a:t>Option B</a:t>
-            </a:r>
-            <a:r>
-              <a:rPr sz="1500" b="0">
-                <a:solidFill>
-                  <a:srgbClr val="282828"/>
-                </a:solidFill>
-                <a:latin typeface="Arial"/>
-              </a:rPr>
-              <a:t> raises the keystone sensitivities 6–45 % (clocking most): 25 µm, 33 µrad, 64 µrad.</a:t>
+              <a:t> both launch conventions in the join scorer (dyson5_t5f, tel5f_launch), the per-field chief-angle components in every rung table, the spectrometer's chief-tilt diagnostic.</a:t>
             </a:r>
           </a:p>
         </p:txBody>
       </p:sp>
       <p:sp>
         <p:nvSpPr>
-          <p:cNvPr id="6" name="TextBox 5"/>
+          <p:cNvPr id="5" name="TextBox 4"/>
           <p:cNvSpPr txBox="1"/>
           <p:nvPr/>
         </p:nvSpPr>
         <p:spPr>
           <a:xfrm>
-            <a:off x="411480" y="6118479"/>
+            <a:off x="411480" y="3101339"/>
             <a:ext cx="11368735" cy="274320"/>
           </a:xfrm>
           <a:prstGeom prst="rect">
@@ -13785,7 +15485,7 @@
                 </a:solidFill>
                 <a:latin typeface="Arial"/>
               </a:rPr>
-              <a:t>REPORT_dyson5_spec.md; 21 rows; the paper's Option A as-built keystone 5.7 % of a pixel = 1.03 µm (Table 2).  Compensator residuals for focus alone and focus + x/y are both in the report (x/y adds nothing: the metrics are relative).</a:t>
+              <a:t>macos a09cd59; resources 9845c2d.</a:t>
             </a:r>
           </a:p>
         </p:txBody>
@@ -13798,7 +15498,7 @@
 </p:sld>
 </file>
 
-<file path=ppt/slides/slide24.xml><?xml version="1.0" encoding="utf-8"?>
+<file path=ppt/slides/slide26.xml><?xml version="1.0" encoding="utf-8"?>
 <p:sld xmlns:a="http://schemas.openxmlformats.org/drawingml/2006/main" xmlns:p="http://schemas.openxmlformats.org/presentationml/2006/main" xmlns:r="http://schemas.openxmlformats.org/officeDocument/2006/relationships">
   <p:cSld>
     <p:spTree>
@@ -13842,7 +15542,7 @@
                 </a:solidFill>
                 <a:latin typeface="Arial"/>
               </a:rPr>
-              <a:t>An engine finding from this round</a:t>
+              <a:t>Records behind each slide</a:t>
             </a:r>
           </a:p>
           <a:p>
@@ -13858,7 +15558,7 @@
                 </a:solidFill>
                 <a:latin typeface="Arial"/>
               </a:rPr>
-              <a:t>The api refused an element stop on the secondary of a four-element telescope</a:t>
+              <a:t>Every number traces to a runner stage and its record file</a:t>
             </a:r>
           </a:p>
         </p:txBody>
@@ -13907,253 +15607,6 @@
           </a:p>
         </p:txBody>
       </p:sp>
-      <p:sp>
-        <p:nvSpPr>
-          <p:cNvPr id="4" name="TextBox 3"/>
-          <p:cNvSpPr txBox="1"/>
-          <p:nvPr/>
-        </p:nvSpPr>
-        <p:spPr>
-          <a:xfrm>
-            <a:off x="411480" y="1298448"/>
-            <a:ext cx="11368735" cy="274320"/>
-          </a:xfrm>
-          <a:prstGeom prst="rect">
-            <a:avLst/>
-          </a:prstGeom>
-          <a:noFill/>
-        </p:spPr>
-        <p:txBody>
-          <a:bodyPr wrap="square">
-            <a:spAutoFit/>
-          </a:bodyPr>
-          <a:lstStyle/>
-          <a:p>
-            <a:pPr>
-              <a:spcAft>
-                <a:spcPts val="600"/>
-              </a:spcAft>
-            </a:pPr>
-            <a:r>
-              <a:rPr sz="1500" b="0">
-                <a:solidFill>
-                  <a:srgbClr val="282828"/>
-                </a:solidFill>
-                <a:latin typeface="Arial"/>
-              </a:rPr>
-              <a:t>•  </a:t>
-            </a:r>
-            <a:r>
-              <a:rPr sz="1500" b="1">
-                <a:solidFill>
-                  <a:srgbClr val="282828"/>
-                </a:solidFill>
-                <a:latin typeface="Arial"/>
-              </a:rPr>
-              <a:t>stop_info_set refused iElt ≥ nElt−2 and nElt ≤ 3</a:t>
-            </a:r>
-            <a:r>
-              <a:rPr sz="1500" b="0">
-                <a:solidFill>
-                  <a:srgbClr val="282828"/>
-                </a:solidFill>
-                <a:latin typeface="Arial"/>
-              </a:rPr>
-              <a:t> — the original wrapper's range, with no engine reason — so macos.stop(2) failed on every M1-M2-M3-FP deck while the prescription keyword ApStop= and the CLI's STOP (1..nElt) accepted it.  The template worked around it with one deck per field until the fix.  Now the CLI's range; gate tStopReload/test_stop_accepts_the_secondary_of_a_four_element_deck.</a:t>
-            </a:r>
-          </a:p>
-          <a:p>
-            <a:pPr>
-              <a:spcAft>
-                <a:spcPts val="600"/>
-              </a:spcAft>
-            </a:pPr>
-            <a:r>
-              <a:rPr sz="1500" b="0">
-                <a:solidFill>
-                  <a:srgbClr val="282828"/>
-                </a:solidFill>
-                <a:latin typeface="Arial"/>
-              </a:rPr>
-              <a:t>•  </a:t>
-            </a:r>
-            <a:r>
-              <a:rPr sz="1500" b="1">
-                <a:solidFill>
-                  <a:srgbClr val="282828"/>
-                </a:solidFill>
-                <a:latin typeface="Arial"/>
-              </a:rPr>
-              <a:t>Also from this round, in the tools:</a:t>
-            </a:r>
-            <a:r>
-              <a:rPr sz="1500" b="0">
-                <a:solidFill>
-                  <a:srgbClr val="282828"/>
-                </a:solidFill>
-                <a:latin typeface="Arial"/>
-              </a:rPr>
-              <a:t> both launch conventions in the join scorer (dyson5_t5f, tel5f_launch), the per-field chief-angle components in every rung table, the spectrometer's chief-tilt diagnostic.</a:t>
-            </a:r>
-          </a:p>
-        </p:txBody>
-      </p:sp>
-      <p:sp>
-        <p:nvSpPr>
-          <p:cNvPr id="5" name="TextBox 4"/>
-          <p:cNvSpPr txBox="1"/>
-          <p:nvPr/>
-        </p:nvSpPr>
-        <p:spPr>
-          <a:xfrm>
-            <a:off x="411480" y="3101339"/>
-            <a:ext cx="11368735" cy="274320"/>
-          </a:xfrm>
-          <a:prstGeom prst="rect">
-            <a:avLst/>
-          </a:prstGeom>
-          <a:noFill/>
-        </p:spPr>
-        <p:txBody>
-          <a:bodyPr wrap="square">
-            <a:spAutoFit/>
-          </a:bodyPr>
-          <a:lstStyle/>
-          <a:p>
-            <a:pPr>
-              <a:spcAft>
-                <a:spcPts val="600"/>
-              </a:spcAft>
-            </a:pPr>
-            <a:r>
-              <a:rPr sz="1050" b="0">
-                <a:solidFill>
-                  <a:srgbClr val="6E6E6E"/>
-                </a:solidFill>
-                <a:latin typeface="Arial"/>
-              </a:rPr>
-              <a:t>macos a09cd59; resources 9845c2d.</a:t>
-            </a:r>
-          </a:p>
-        </p:txBody>
-      </p:sp>
-    </p:spTree>
-  </p:cSld>
-  <p:clrMapOvr>
-    <a:masterClrMapping/>
-  </p:clrMapOvr>
-</p:sld>
-</file>
-
-<file path=ppt/slides/slide25.xml><?xml version="1.0" encoding="utf-8"?>
-<p:sld xmlns:a="http://schemas.openxmlformats.org/drawingml/2006/main" xmlns:p="http://schemas.openxmlformats.org/presentationml/2006/main" xmlns:r="http://schemas.openxmlformats.org/officeDocument/2006/relationships">
-  <p:cSld>
-    <p:spTree>
-      <p:nvGrpSpPr>
-        <p:cNvPr id="1" name=""/>
-        <p:cNvGrpSpPr/>
-        <p:nvPr/>
-      </p:nvGrpSpPr>
-      <p:grpSpPr/>
-      <p:sp>
-        <p:nvSpPr>
-          <p:cNvPr id="2" name="TextBox 1"/>
-          <p:cNvSpPr txBox="1"/>
-          <p:nvPr/>
-        </p:nvSpPr>
-        <p:spPr>
-          <a:xfrm>
-            <a:off x="411480" y="201168"/>
-            <a:ext cx="11368735" cy="914400"/>
-          </a:xfrm>
-          <a:prstGeom prst="rect">
-            <a:avLst/>
-          </a:prstGeom>
-          <a:noFill/>
-        </p:spPr>
-        <p:txBody>
-          <a:bodyPr wrap="square">
-            <a:spAutoFit/>
-          </a:bodyPr>
-          <a:lstStyle/>
-          <a:p>
-            <a:pPr>
-              <a:spcAft>
-                <a:spcPts val="400"/>
-              </a:spcAft>
-            </a:pPr>
-            <a:r>
-              <a:rPr sz="2400" b="1">
-                <a:solidFill>
-                  <a:srgbClr val="1F4E79"/>
-                </a:solidFill>
-                <a:latin typeface="Arial"/>
-              </a:rPr>
-              <a:t>Records behind each slide</a:t>
-            </a:r>
-          </a:p>
-          <a:p>
-            <a:pPr>
-              <a:spcAft>
-                <a:spcPts val="0"/>
-              </a:spcAft>
-            </a:pPr>
-            <a:r>
-              <a:rPr sz="1250" b="0">
-                <a:solidFill>
-                  <a:srgbClr val="6E6E6E"/>
-                </a:solidFill>
-                <a:latin typeface="Arial"/>
-              </a:rPr>
-              <a:t>Every number traces to a runner stage and its record file</a:t>
-            </a:r>
-          </a:p>
-        </p:txBody>
-      </p:sp>
-      <p:sp>
-        <p:nvSpPr>
-          <p:cNvPr id="3" name="Rectangle 2"/>
-          <p:cNvSpPr/>
-          <p:nvPr/>
-        </p:nvSpPr>
-        <p:spPr>
-          <a:xfrm>
-            <a:off x="411480" y="1133856"/>
-            <a:ext cx="11368735" cy="20320"/>
-          </a:xfrm>
-          <a:prstGeom prst="rect">
-            <a:avLst/>
-          </a:prstGeom>
-          <a:solidFill>
-            <a:srgbClr val="B8C6D4"/>
-          </a:solidFill>
-          <a:ln>
-            <a:noFill/>
-          </a:ln>
-          <a:effectLst/>
-        </p:spPr>
-        <p:style>
-          <a:lnRef idx="1">
-            <a:schemeClr val="accent1"/>
-          </a:lnRef>
-          <a:fillRef idx="3">
-            <a:schemeClr val="accent1"/>
-          </a:fillRef>
-          <a:effectRef idx="2">
-            <a:schemeClr val="accent1"/>
-          </a:effectRef>
-          <a:fontRef idx="minor">
-            <a:schemeClr val="lt1"/>
-          </a:fontRef>
-        </p:style>
-        <p:txBody>
-          <a:bodyPr rtlCol="0" anchor="ctr"/>
-          <a:lstStyle/>
-          <a:p>
-            <a:pPr algn="ctr"/>
-          </a:p>
-        </p:txBody>
-      </p:sp>
       <p:graphicFrame>
         <p:nvGraphicFramePr>
           <p:cNvPr id="4" name="Table 3"/>
@@ -14164,7 +15617,7 @@
         </p:nvGraphicFramePr>
         <p:xfrm>
           <a:off x="411480" y="1298448"/>
-          <a:ext cx="11368735" cy="2520315"/>
+          <a:ext cx="11368735" cy="2800350"/>
         </p:xfrm>
         <a:graphic>
           <a:graphicData uri="http://schemas.openxmlformats.org/drawingml/2006/table">
@@ -14579,13 +16032,59 @@
                           </a:solidFill>
                           <a:latin typeface="Arial"/>
                         </a:rPr>
-                        <a:t>dyson5_jim_3a.txt, dyson5_t5f_GM_1k5_bAs_ap.txt, dyson5_block4.txt, dyson5_block2_3k.txt</a:t>
+                        <a:t>dyson5_throughput_band.txt (tool dyson5_throughput_band.m); dyson5_jim_3b.txt route 2</a:t>
                       </a:r>
                     </a:p>
                   </a:txBody>
                   <a:tcPr marL="54864" marR="54864" marT="18288" marB="18288">
                     <a:solidFill>
                       <a:srgbClr val="ECF1F6"/>
+                    </a:solidFill>
+                  </a:tcPr>
+                </a:tc>
+              </a:tr>
+              <a:tr h="280035">
+                <a:tc>
+                  <a:txBody>
+                    <a:bodyPr wrap="square"/>
+                    <a:lstStyle/>
+                    <a:p>
+                      <a:r>
+                        <a:rPr sz="1100" b="0">
+                          <a:solidFill>
+                            <a:srgbClr val="282828"/>
+                          </a:solidFill>
+                          <a:latin typeface="Arial"/>
+                        </a:rPr>
+                        <a:t>16</a:t>
+                      </a:r>
+                    </a:p>
+                  </a:txBody>
+                  <a:tcPr marL="54864" marR="54864" marT="18288" marB="18288">
+                    <a:solidFill>
+                      <a:srgbClr val="FFFFFF"/>
+                    </a:solidFill>
+                  </a:tcPr>
+                </a:tc>
+                <a:tc>
+                  <a:txBody>
+                    <a:bodyPr wrap="square"/>
+                    <a:lstStyle/>
+                    <a:p>
+                      <a:r>
+                        <a:rPr sz="1100" b="0">
+                          <a:solidFill>
+                            <a:srgbClr val="282828"/>
+                          </a:solidFill>
+                          <a:latin typeface="Arial"/>
+                        </a:rPr>
+                        <a:t>dyson5_jim_3a.txt, dyson5_rescore_1k5_launch.txt, dyson5_block4.txt, dyson5_block2_3k.txt</a:t>
+                      </a:r>
+                    </a:p>
+                  </a:txBody>
+                  <a:tcPr marL="54864" marR="54864" marT="18288" marB="18288">
+                    <a:solidFill>
+                      <a:srgbClr val="FFFFFF"/>
                     </a:solidFill>
                   </a:tcPr>
                 </a:tc>
@@ -14602,7 +16101,7 @@
         </p:nvSpPr>
         <p:spPr>
           <a:xfrm>
-            <a:off x="411480" y="3965066"/>
+            <a:off x="411480" y="4245102"/>
             <a:ext cx="11368735" cy="274320"/>
           </a:xfrm>
           <a:prstGeom prst="rect">

--- a/demo_session/deck_dyson_3k_edit.pptx
+++ b/demo_session/deck_dyson_3k_edit.pptx
@@ -8907,7 +8907,7 @@
         </p:nvGraphicFramePr>
         <p:xfrm>
           <a:off x="411480" y="1298448"/>
-          <a:ext cx="11368734" cy="4583430"/>
+          <a:ext cx="11368733" cy="5149215"/>
         </p:xfrm>
         <a:graphic>
           <a:graphicData uri="http://schemas.openxmlformats.org/drawingml/2006/table">
@@ -8916,9 +8916,9 @@
                 <a:tableStyleId>{5C22544A-7EE6-4342-B048-85BDC9FD1C3A}</a:tableStyleId>
               </a:tblPr>
               <a:tblGrid>
-                <a:gridCol w="3268511"/>
-                <a:gridCol w="3126402"/>
-                <a:gridCol w="4973821"/>
+                <a:gridCol w="2949032"/>
+                <a:gridCol w="2820813"/>
+                <a:gridCol w="5598888"/>
               </a:tblGrid>
               <a:tr h="280035">
                 <a:tc>
@@ -9198,7 +9198,7 @@
                           </a:solidFill>
                           <a:latin typeface="Arial"/>
                         </a:rPr>
-                        <a:t>three off-axis aspheres: 0.4 px center, 0.8 px at the strip ends (the template's 1.5k run is in progress)</a:t>
+                        <a:t>the same form through the same template (R5 ffc): 1.02 px at every field; aspheres alone did not reach the floor</a:t>
                       </a:r>
                     </a:p>
                   </a:txBody>
@@ -9266,13 +9266,81 @@
                           </a:solidFill>
                           <a:latin typeface="Arial"/>
                         </a:rPr>
-                        <a:t>0.08 / 0.50 / 0.01 / 1.26 / 2.21 px</a:t>
+                        <a:t>0.009 / 0.009 / 0.009 / 1.03 / 2.024 px</a:t>
                       </a:r>
                     </a:p>
                   </a:txBody>
                   <a:tcPr marL="54864" marR="54864" marT="18288" marB="18288">
                     <a:solidFill>
                       <a:srgbClr val="ECF1F6"/>
+                    </a:solidFill>
+                  </a:tcPr>
+                </a:tc>
+              </a:tr>
+              <a:tr h="468630">
+                <a:tc>
+                  <a:txBody>
+                    <a:bodyPr wrap="square"/>
+                    <a:lstStyle/>
+                    <a:p>
+                      <a:r>
+                        <a:rPr sz="1100" b="0">
+                          <a:solidFill>
+                            <a:srgbClr val="282828"/>
+                          </a:solidFill>
+                          <a:latin typeface="Arial"/>
+                        </a:rPr>
+                        <a:t>end to end: energy in one pixel, worst field</a:t>
+                      </a:r>
+                    </a:p>
+                  </a:txBody>
+                  <a:tcPr marL="54864" marR="54864" marT="18288" marB="18288">
+                    <a:solidFill>
+                      <a:srgbClr val="FFFFFF"/>
+                    </a:solidFill>
+                  </a:tcPr>
+                </a:tc>
+                <a:tc>
+                  <a:txBody>
+                    <a:bodyPr wrap="square"/>
+                    <a:lstStyle/>
+                    <a:p>
+                      <a:r>
+                        <a:rPr sz="1100" b="0">
+                          <a:solidFill>
+                            <a:srgbClr val="282828"/>
+                          </a:solidFill>
+                          <a:latin typeface="Arial"/>
+                        </a:rPr>
+                        <a:t>0.85</a:t>
+                      </a:r>
+                    </a:p>
+                  </a:txBody>
+                  <a:tcPr marL="54864" marR="54864" marT="18288" marB="18288">
+                    <a:solidFill>
+                      <a:srgbClr val="FFFFFF"/>
+                    </a:solidFill>
+                  </a:tcPr>
+                </a:tc>
+                <a:tc>
+                  <a:txBody>
+                    <a:bodyPr wrap="square"/>
+                    <a:lstStyle/>
+                    <a:p>
+                      <a:r>
+                        <a:rPr sz="1100" b="0">
+                          <a:solidFill>
+                            <a:srgbClr val="282828"/>
+                          </a:solidFill>
+                          <a:latin typeface="Arial"/>
+                        </a:rPr>
+                        <a:t>0.97</a:t>
+                      </a:r>
+                    </a:p>
+                  </a:txBody>
+                  <a:tcPr marL="54864" marR="54864" marT="18288" marB="18288">
+                    <a:solidFill>
+                      <a:srgbClr val="FFFFFF"/>
                     </a:solidFill>
                   </a:tcPr>
                 </a:tc>
@@ -9290,57 +9358,57 @@
                           </a:solidFill>
                           <a:latin typeface="Arial"/>
                         </a:rPr>
-                        <a:t>end to end: energy in one pixel, worst field</a:t>
-                      </a:r>
-                    </a:p>
-                  </a:txBody>
-                  <a:tcPr marL="54864" marR="54864" marT="18288" marB="18288">
-                    <a:solidFill>
-                      <a:srgbClr val="FFFFFF"/>
-                    </a:solidFill>
-                  </a:tcPr>
-                </a:tc>
-                <a:tc>
-                  <a:txBody>
-                    <a:bodyPr wrap="square"/>
-                    <a:lstStyle/>
-                    <a:p>
-                      <a:r>
-                        <a:rPr sz="1100" b="0">
-                          <a:solidFill>
-                            <a:srgbClr val="282828"/>
-                          </a:solidFill>
-                          <a:latin typeface="Arial"/>
-                        </a:rPr>
-                        <a:t>0.85</a:t>
-                      </a:r>
-                    </a:p>
-                  </a:txBody>
-                  <a:tcPr marL="54864" marR="54864" marT="18288" marB="18288">
-                    <a:solidFill>
-                      <a:srgbClr val="FFFFFF"/>
-                    </a:solidFill>
-                  </a:tcPr>
-                </a:tc>
-                <a:tc>
-                  <a:txBody>
-                    <a:bodyPr wrap="square"/>
-                    <a:lstStyle/>
-                    <a:p>
-                      <a:r>
-                        <a:rPr sz="1100" b="0">
-                          <a:solidFill>
-                            <a:srgbClr val="282828"/>
-                          </a:solidFill>
-                          <a:latin typeface="Arial"/>
-                        </a:rPr>
-                        <a:t>0.30–0.39 (0.8 over the central third)</a:t>
-                      </a:r>
-                    </a:p>
-                  </a:txBody>
-                  <a:tcPr marL="54864" marR="54864" marT="18288" marB="18288">
-                    <a:solidFill>
-                      <a:srgbClr val="FFFFFF"/>
+                        <a:t>light admitted by the grating</a:t>
+                      </a:r>
+                    </a:p>
+                  </a:txBody>
+                  <a:tcPr marL="54864" marR="54864" marT="18288" marB="18288">
+                    <a:solidFill>
+                      <a:srgbClr val="ECF1F6"/>
+                    </a:solidFill>
+                  </a:tcPr>
+                </a:tc>
+                <a:tc>
+                  <a:txBody>
+                    <a:bodyPr wrap="square"/>
+                    <a:lstStyle/>
+                    <a:p>
+                      <a:r>
+                        <a:rPr sz="1100" b="0">
+                          <a:solidFill>
+                            <a:srgbClr val="282828"/>
+                          </a:solidFill>
+                          <a:latin typeface="Arial"/>
+                        </a:rPr>
+                        <a:t>98.9 % per field</a:t>
+                      </a:r>
+                    </a:p>
+                  </a:txBody>
+                  <a:tcPr marL="54864" marR="54864" marT="18288" marB="18288">
+                    <a:solidFill>
+                      <a:srgbClr val="ECF1F6"/>
+                    </a:solidFill>
+                  </a:tcPr>
+                </a:tc>
+                <a:tc>
+                  <a:txBody>
+                    <a:bodyPr wrap="square"/>
+                    <a:lstStyle/>
+                    <a:p>
+                      <a:r>
+                        <a:rPr sz="1100" b="0">
+                          <a:solidFill>
+                            <a:srgbClr val="282828"/>
+                          </a:solidFill>
+                          <a:latin typeface="Arial"/>
+                        </a:rPr>
+                        <a:t>98.7 % per field</a:t>
+                      </a:r>
+                    </a:p>
+                  </a:txBody>
+                  <a:tcPr marL="54864" marR="54864" marT="18288" marB="18288">
+                    <a:solidFill>
+                      <a:srgbClr val="ECF1F6"/>
                     </a:solidFill>
                   </a:tcPr>
                 </a:tc>
@@ -9358,74 +9426,6 @@
                           </a:solidFill>
                           <a:latin typeface="Arial"/>
                         </a:rPr>
-                        <a:t>light admitted by the grating</a:t>
-                      </a:r>
-                    </a:p>
-                  </a:txBody>
-                  <a:tcPr marL="54864" marR="54864" marT="18288" marB="18288">
-                    <a:solidFill>
-                      <a:srgbClr val="ECF1F6"/>
-                    </a:solidFill>
-                  </a:tcPr>
-                </a:tc>
-                <a:tc>
-                  <a:txBody>
-                    <a:bodyPr wrap="square"/>
-                    <a:lstStyle/>
-                    <a:p>
-                      <a:r>
-                        <a:rPr sz="1100" b="0">
-                          <a:solidFill>
-                            <a:srgbClr val="282828"/>
-                          </a:solidFill>
-                          <a:latin typeface="Arial"/>
-                        </a:rPr>
-                        <a:t>98.9 % per field</a:t>
-                      </a:r>
-                    </a:p>
-                  </a:txBody>
-                  <a:tcPr marL="54864" marR="54864" marT="18288" marB="18288">
-                    <a:solidFill>
-                      <a:srgbClr val="ECF1F6"/>
-                    </a:solidFill>
-                  </a:tcPr>
-                </a:tc>
-                <a:tc>
-                  <a:txBody>
-                    <a:bodyPr wrap="square"/>
-                    <a:lstStyle/>
-                    <a:p>
-                      <a:r>
-                        <a:rPr sz="1100" b="0">
-                          <a:solidFill>
-                            <a:srgbClr val="282828"/>
-                          </a:solidFill>
-                          <a:latin typeface="Arial"/>
-                        </a:rPr>
-                        <a:t>99 % per field</a:t>
-                      </a:r>
-                    </a:p>
-                  </a:txBody>
-                  <a:tcPr marL="54864" marR="54864" marT="18288" marB="18288">
-                    <a:solidFill>
-                      <a:srgbClr val="ECF1F6"/>
-                    </a:solidFill>
-                  </a:tcPr>
-                </a:tc>
-              </a:tr>
-              <a:tr h="280035">
-                <a:tc>
-                  <a:txBody>
-                    <a:bodyPr wrap="square"/>
-                    <a:lstStyle/>
-                    <a:p>
-                      <a:r>
-                        <a:rPr sz="1100" b="0">
-                          <a:solidFill>
-                            <a:srgbClr val="282828"/>
-                          </a:solidFill>
-                          <a:latin typeface="Arial"/>
-                        </a:rPr>
                         <a:t>clearance, worst pair</a:t>
                       </a:r>
                     </a:p>
@@ -9576,7 +9576,7 @@
                   </a:tcPr>
                 </a:tc>
               </a:tr>
-              <a:tr h="280035">
+              <a:tr h="468630">
                 <a:tc>
                   <a:txBody>
                     <a:bodyPr wrap="square"/>
@@ -9633,7 +9633,7 @@
                           </a:solidFill>
                           <a:latin typeface="Arial"/>
                         </a:rPr>
-                        <a:t>0.97 × 0.41 × 0.76 m, 300 L; 14.6 kg</a:t>
+                        <a:t>1.01 × 0.53 × 0.92 m, 494 L; 21.4 kg (the three-asphere record's block: 300 L, 14.6 kg — the zig-zag's M2 and M3 are full aperture)</a:t>
                       </a:r>
                     </a:p>
                   </a:txBody>
@@ -9644,7 +9644,7 @@
                   </a:tcPr>
                 </a:tc>
               </a:tr>
-              <a:tr h="280035">
+              <a:tr h="468630">
                 <a:tc>
                   <a:txBody>
                     <a:bodyPr wrap="square"/>
@@ -9860,7 +9860,7 @@
         </p:nvSpPr>
         <p:spPr>
           <a:xfrm>
-            <a:off x="411480" y="6028182"/>
+            <a:off x="411480" y="6593967"/>
             <a:ext cx="11368735" cy="274320"/>
           </a:xfrm>
           <a:prstGeom prst="rect">
@@ -9886,7 +9886,7 @@
                 </a:solidFill>
                 <a:latin typeface="Arial"/>
               </a:rPr>
-              <a:t>Records dyson5_jim_3a.txt, dyson5_t5f_cprime_centroid_roll000.txt, dyson5_rescore_1k5_launch.txt (the 1.5k module of record under both launches, 2026-10-08: its slit-filled smile is the older telescope's own 0.08 px, inside Joe's 0.1; its SRF 2.21 and energy 0.30–0.39 are the telescope's spots).  The four-module block (0.97 × 0.41 × 0.76 m, 14.6 kg of optics) of the last deck stands as the fallback.  The air gap at the window stands on both (six crossings, 0.81 uncoated).</a:t>
+              <a:t>Records dyson5_jim_3a.txt, dyson5_t5f_cprime_centroid_roll000.txt, tls1k5_e2e.txt and dyson5_cprime_1k5.in (the 1.5k module through the template, 2026-10-08: R5 ffc, a clearance wall row added after R4 touched M2 by 0.3 mm), dyson5_block4_cprime1k5.txt.  The earlier three-asphere 1.5k telescope re-scored under both launches: slit-filled smile 0.08, point-source 0.50, SRF 2.21, energy 0.30–0.39 (dyson5_rescore_1k5_launch.txt) — superseded.  The four-module block (0.97 × 0.41 × 0.76 m, 14.6 kg of optics) of the last deck stands as the fallback.  The air gap at the window stands on both (six crossings, 0.81 uncoated).</a:t>
             </a:r>
           </a:p>
         </p:txBody>
